--- a/ICCPROFILE.pptx
+++ b/ICCPROFILE.pptx
@@ -1660,14 +1660,6 @@
           <a:lstStyle/>
           <a:p>
             <a:pPr algn="l"/>
-            <a:r>
-              <a:rPr lang="zh-TW" altLang="en-US" dirty="0"/>
-              <a:t>目標：</a:t>
-            </a:r>
-            <a:r>
-              <a:rPr lang="zh-TW" altLang="zh-TW" dirty="0"/>
-              <a:t>研究如何利用 i1 顯示器量測資料，在無法使用顯示器硬體 LUT 校正的條件下，建立軟體顯示校正資料，並將其封裝關聯至 ICC Profile，使 Windows 顯示色彩管理管線能夠將修正後的 RGB 訊號送至顯示器。</a:t>
-            </a:r>
             <a:endParaRPr lang="zh-TW" altLang="en-US" dirty="0"/>
           </a:p>
         </p:txBody>
@@ -6742,6 +6734,18 @@
               <a:rPr lang="en-US" altLang="zh-TW" sz="2000" dirty="0">
                 <a:cs typeface="Times New Roman" panose="02020603050405020304" pitchFamily="18" charset="0"/>
               </a:rPr>
+              <a:t>BO-CHENG</a:t>
+            </a:r>
+            <a:r>
+              <a:rPr lang="zh-TW" altLang="en-US" sz="2000" dirty="0">
+                <a:cs typeface="Times New Roman" panose="02020603050405020304" pitchFamily="18" charset="0"/>
+              </a:rPr>
+              <a:t>、</a:t>
+            </a:r>
+            <a:r>
+              <a:rPr lang="en-US" altLang="zh-TW" sz="2000" dirty="0">
+                <a:cs typeface="Times New Roman" panose="02020603050405020304" pitchFamily="18" charset="0"/>
+              </a:rPr>
               <a:t>Cheng-Yuan</a:t>
             </a:r>
             <a:r>
@@ -6985,37 +6989,8 @@
                 <a:ea typeface="標楷體" panose="03000509000000000000" pitchFamily="65" charset="-120"/>
                 <a:cs typeface="Times New Roman" panose="02020603050405020304" pitchFamily="18" charset="0"/>
               </a:rPr>
-              <a:t> </a:t>
+              <a:t>研究背景與目標</a:t>
             </a:r>
-            <a:r>
-              <a:rPr lang="en-US" altLang="zh-TW" dirty="0">
-                <a:latin typeface="Times New Roman" panose="02020603050405020304" pitchFamily="18" charset="0"/>
-                <a:ea typeface="標楷體" panose="03000509000000000000" pitchFamily="65" charset="-120"/>
-                <a:cs typeface="Times New Roman" panose="02020603050405020304" pitchFamily="18" charset="0"/>
-              </a:rPr>
-              <a:t>ICC</a:t>
-            </a:r>
-            <a:r>
-              <a:rPr lang="zh-TW" altLang="en-US" dirty="0">
-                <a:latin typeface="Times New Roman" panose="02020603050405020304" pitchFamily="18" charset="0"/>
-                <a:ea typeface="標楷體" panose="03000509000000000000" pitchFamily="65" charset="-120"/>
-                <a:cs typeface="Times New Roman" panose="02020603050405020304" pitchFamily="18" charset="0"/>
-              </a:rPr>
-              <a:t> </a:t>
-            </a:r>
-            <a:r>
-              <a:rPr lang="en-US" altLang="zh-TW" dirty="0">
-                <a:latin typeface="Times New Roman" panose="02020603050405020304" pitchFamily="18" charset="0"/>
-                <a:ea typeface="標楷體" panose="03000509000000000000" pitchFamily="65" charset="-120"/>
-                <a:cs typeface="Times New Roman" panose="02020603050405020304" pitchFamily="18" charset="0"/>
-              </a:rPr>
-              <a:t>Profile</a:t>
-            </a:r>
-            <a:endParaRPr lang="zh-TW" altLang="en-US" dirty="0">
-              <a:latin typeface="Times New Roman" panose="02020603050405020304" pitchFamily="18" charset="0"/>
-              <a:ea typeface="標楷體" panose="03000509000000000000" pitchFamily="65" charset="-120"/>
-              <a:cs typeface="Times New Roman" panose="02020603050405020304" pitchFamily="18" charset="0"/>
-            </a:endParaRPr>
           </a:p>
         </p:txBody>
       </p:sp>
@@ -7033,8 +7008,8 @@
         </p:nvSpPr>
         <p:spPr>
           <a:xfrm>
-            <a:off x="520699" y="1369489"/>
-            <a:ext cx="7669813" cy="1046440"/>
+            <a:off x="524501" y="1141596"/>
+            <a:ext cx="8928101" cy="1972463"/>
           </a:xfrm>
           <a:prstGeom prst="rect">
             <a:avLst/>
@@ -7047,9 +7022,9 @@
           </a:bodyPr>
           <a:lstStyle/>
           <a:p>
-            <a:pPr marL="457200" lvl="1" indent="-406400">
+            <a:pPr marL="457200" lvl="1" indent="-406400" algn="just">
               <a:lnSpc>
-                <a:spcPts val="3000"/>
+                <a:spcPct val="150000"/>
               </a:lnSpc>
               <a:spcBef>
                 <a:spcPts val="560"/>
@@ -7062,12 +7037,36 @@
               <a:buChar char="❖"/>
             </a:pPr>
             <a:r>
+              <a:rPr lang="en-US" altLang="zh-TW" sz="1600" b="1" dirty="0">
+                <a:latin typeface="Times New Roman" panose="02020603050405020304" pitchFamily="18" charset="0"/>
+                <a:ea typeface="標楷體" panose="03000509000000000000" pitchFamily="65" charset="-120"/>
+                <a:cs typeface="Times New Roman" panose="02020603050405020304" pitchFamily="18" charset="0"/>
+              </a:rPr>
+              <a:t>ICC Profile</a:t>
+            </a:r>
+            <a:r>
+              <a:rPr lang="zh-TW" altLang="en-US" sz="1600" b="1" dirty="0">
+                <a:latin typeface="Times New Roman" panose="02020603050405020304" pitchFamily="18" charset="0"/>
+                <a:ea typeface="標楷體" panose="03000509000000000000" pitchFamily="65" charset="-120"/>
+                <a:cs typeface="Times New Roman" panose="02020603050405020304" pitchFamily="18" charset="0"/>
+              </a:rPr>
+              <a:t>的目的</a:t>
+            </a:r>
+            <a:r>
               <a:rPr lang="zh-TW" altLang="en-US" sz="1600" dirty="0">
                 <a:latin typeface="Times New Roman" panose="02020603050405020304" pitchFamily="18" charset="0"/>
                 <a:ea typeface="標楷體" panose="03000509000000000000" pitchFamily="65" charset="-120"/>
                 <a:cs typeface="Times New Roman" panose="02020603050405020304" pitchFamily="18" charset="0"/>
               </a:rPr>
-              <a:t>目標：</a:t>
+              <a:t>：</a:t>
+            </a:r>
+            <a:r>
+              <a:rPr lang="zh-TW" altLang="zh-TW" sz="1600" dirty="0">
+                <a:latin typeface="Times New Roman" panose="02020603050405020304" pitchFamily="18" charset="0"/>
+                <a:ea typeface="標楷體" panose="03000509000000000000" pitchFamily="65" charset="-120"/>
+                <a:cs typeface="Times New Roman" panose="02020603050405020304" pitchFamily="18" charset="0"/>
+              </a:rPr>
+              <a:t>是建立開放、廠商中立、跨平台的色彩管理系統架構與元件標準，是提供跨平台的 Device Profile 格式，使不同裝置之間的色彩資料可以進行轉換。</a:t>
             </a:r>
             <a:endParaRPr lang="en-US" altLang="zh-TW" sz="1600" dirty="0">
               <a:latin typeface="Times New Roman" panose="02020603050405020304" pitchFamily="18" charset="0"/>
@@ -7076,7 +7075,10 @@
             </a:endParaRPr>
           </a:p>
           <a:p>
-            <a:pPr marL="457200" lvl="1" indent="-406400">
+            <a:pPr marL="457200" lvl="1" indent="-406400" algn="just">
+              <a:lnSpc>
+                <a:spcPct val="150000"/>
+              </a:lnSpc>
               <a:spcBef>
                 <a:spcPts val="560"/>
               </a:spcBef>
@@ -7088,16 +7090,44 @@
               <a:buChar char="❖"/>
             </a:pPr>
             <a:r>
+              <a:rPr lang="zh-TW" altLang="en-US" sz="1600" b="1" dirty="0">
+                <a:latin typeface="Times New Roman" panose="02020603050405020304" pitchFamily="18" charset="0"/>
+                <a:ea typeface="標楷體" panose="03000509000000000000" pitchFamily="65" charset="-120"/>
+                <a:cs typeface="Times New Roman" panose="02020603050405020304" pitchFamily="18" charset="0"/>
+              </a:rPr>
+              <a:t>研究目標</a:t>
+            </a:r>
+            <a:r>
               <a:rPr lang="zh-TW" altLang="en-US" sz="1600" dirty="0">
                 <a:latin typeface="Times New Roman" panose="02020603050405020304" pitchFamily="18" charset="0"/>
                 <a:ea typeface="標楷體" panose="03000509000000000000" pitchFamily="65" charset="-120"/>
                 <a:cs typeface="Times New Roman" panose="02020603050405020304" pitchFamily="18" charset="0"/>
               </a:rPr>
-              <a:t>目的：</a:t>
+              <a:t>：利用 </a:t>
             </a:r>
             <a:r>
-              <a:rPr lang="zh-TW" altLang="zh-TW" sz="1600" dirty="0"/>
-              <a:t>是建立開放、廠商中立、跨平台的色彩管理系統架構與元件標準，是提供跨平台的 Device Profile 格式，使不同裝置之間的色彩資料可以進行轉換。</a:t>
+              <a:rPr lang="en-US" altLang="zh-TW" sz="1600" dirty="0">
+                <a:latin typeface="Times New Roman" panose="02020603050405020304" pitchFamily="18" charset="0"/>
+                <a:ea typeface="標楷體" panose="03000509000000000000" pitchFamily="65" charset="-120"/>
+                <a:cs typeface="Times New Roman" panose="02020603050405020304" pitchFamily="18" charset="0"/>
+              </a:rPr>
+              <a:t>i1 </a:t>
+            </a:r>
+            <a:r>
+              <a:rPr lang="zh-TW" altLang="en-US" sz="1600" dirty="0">
+                <a:latin typeface="Times New Roman" panose="02020603050405020304" pitchFamily="18" charset="0"/>
+                <a:ea typeface="標楷體" panose="03000509000000000000" pitchFamily="65" charset="-120"/>
+                <a:cs typeface="Times New Roman" panose="02020603050405020304" pitchFamily="18" charset="0"/>
+              </a:rPr>
+              <a:t>顯示器量測資料</a:t>
+            </a:r>
+            <a:r>
+              <a:rPr lang="zh-TW" altLang="zh-TW" sz="1600" dirty="0">
+                <a:latin typeface="Times New Roman" panose="02020603050405020304" pitchFamily="18" charset="0"/>
+                <a:ea typeface="標楷體" panose="03000509000000000000" pitchFamily="65" charset="-120"/>
+                <a:cs typeface="Times New Roman" panose="02020603050405020304" pitchFamily="18" charset="0"/>
+              </a:rPr>
+              <a:t>，在無法使用顯示器硬體 LUT 校正的條件下，建立軟體顯示校正資料，並將其封裝關聯至 ICC Profile，使 Windows 顯示色彩管理管線能夠將修正後的 RGB 訊號送至顯示器。</a:t>
             </a:r>
             <a:endParaRPr lang="en-US" altLang="zh-TW" sz="1600" dirty="0">
               <a:latin typeface="Times New Roman" panose="02020603050405020304" pitchFamily="18" charset="0"/>
@@ -7136,35 +7166,91 @@
           <a:lstStyle/>
           <a:p>
             <a:r>
-              <a:rPr lang="zh-TW" altLang="zh-TW" b="1" dirty="0"/>
+              <a:rPr lang="zh-TW" altLang="zh-TW" b="1" dirty="0">
+                <a:latin typeface="Times New Roman" panose="02020603050405020304" pitchFamily="18" charset="0"/>
+                <a:ea typeface="標楷體" panose="03000509000000000000" pitchFamily="65" charset="-120"/>
+                <a:cs typeface="Times New Roman" panose="02020603050405020304" pitchFamily="18" charset="0"/>
+              </a:rPr>
               <a:t>[1]</a:t>
             </a:r>
             <a:r>
-              <a:rPr lang="zh-TW" altLang="zh-TW" dirty="0"/>
+              <a:rPr lang="zh-TW" altLang="zh-TW" dirty="0">
+                <a:latin typeface="Times New Roman" panose="02020603050405020304" pitchFamily="18" charset="0"/>
+                <a:ea typeface="標楷體" panose="03000509000000000000" pitchFamily="65" charset="-120"/>
+                <a:cs typeface="Times New Roman" panose="02020603050405020304" pitchFamily="18" charset="0"/>
+              </a:rPr>
               <a:t> International Color Consortium, “International Color Consortium,” </a:t>
             </a:r>
             <a:r>
-              <a:rPr lang="zh-TW" altLang="zh-TW" i="1" dirty="0"/>
+              <a:rPr lang="zh-TW" altLang="zh-TW" i="1" dirty="0">
+                <a:latin typeface="Times New Roman" panose="02020603050405020304" pitchFamily="18" charset="0"/>
+                <a:ea typeface="標楷體" panose="03000509000000000000" pitchFamily="65" charset="-120"/>
+                <a:cs typeface="Times New Roman" panose="02020603050405020304" pitchFamily="18" charset="0"/>
+              </a:rPr>
               <a:t>ICC</a:t>
             </a:r>
             <a:r>
-              <a:rPr lang="zh-TW" altLang="zh-TW" dirty="0"/>
+              <a:rPr lang="zh-TW" altLang="zh-TW" dirty="0">
+                <a:latin typeface="Times New Roman" panose="02020603050405020304" pitchFamily="18" charset="0"/>
+                <a:ea typeface="標楷體" panose="03000509000000000000" pitchFamily="65" charset="-120"/>
+                <a:cs typeface="Times New Roman" panose="02020603050405020304" pitchFamily="18" charset="0"/>
+              </a:rPr>
               <a:t>, [Online]. Available: </a:t>
             </a:r>
             <a:r>
               <a:rPr lang="zh-TW" altLang="zh-TW" dirty="0">
+                <a:latin typeface="Times New Roman" panose="02020603050405020304" pitchFamily="18" charset="0"/>
+                <a:ea typeface="標楷體" panose="03000509000000000000" pitchFamily="65" charset="-120"/>
+                <a:cs typeface="Times New Roman" panose="02020603050405020304" pitchFamily="18" charset="0"/>
                 <a:hlinkClick r:id="rId3"/>
               </a:rPr>
               <a:t>https://www.color.org/</a:t>
             </a:r>
             <a:r>
-              <a:rPr lang="zh-TW" altLang="zh-TW" dirty="0"/>
+              <a:rPr lang="zh-TW" altLang="zh-TW" dirty="0">
+                <a:latin typeface="Times New Roman" panose="02020603050405020304" pitchFamily="18" charset="0"/>
+                <a:ea typeface="標楷體" panose="03000509000000000000" pitchFamily="65" charset="-120"/>
+                <a:cs typeface="Times New Roman" panose="02020603050405020304" pitchFamily="18" charset="0"/>
+              </a:rPr>
               <a:t>. [Accessed: Sep. 17, 2026].</a:t>
             </a:r>
-            <a:endParaRPr lang="zh-TW" altLang="en-US" dirty="0"/>
+            <a:endParaRPr lang="zh-TW" altLang="en-US" dirty="0">
+              <a:latin typeface="Times New Roman" panose="02020603050405020304" pitchFamily="18" charset="0"/>
+              <a:ea typeface="標楷體" panose="03000509000000000000" pitchFamily="65" charset="-120"/>
+              <a:cs typeface="Times New Roman" panose="02020603050405020304" pitchFamily="18" charset="0"/>
+            </a:endParaRPr>
           </a:p>
         </p:txBody>
       </p:sp>
+      <p:pic>
+        <p:nvPicPr>
+          <p:cNvPr id="6" name="圖片 5">
+            <a:extLst>
+              <a:ext uri="{FF2B5EF4-FFF2-40B4-BE49-F238E27FC236}">
+                <a16:creationId xmlns:a16="http://schemas.microsoft.com/office/drawing/2014/main" id="{A23ED9A6-53D9-66E6-C549-15AEF10145A3}"/>
+              </a:ext>
+            </a:extLst>
+          </p:cNvPr>
+          <p:cNvPicPr>
+            <a:picLocks noChangeAspect="1"/>
+          </p:cNvPicPr>
+          <p:nvPr/>
+        </p:nvPicPr>
+        <p:blipFill>
+          <a:blip r:embed="rId4"/>
+          <a:srcRect t="12198" b="9185"/>
+          <a:stretch/>
+        </p:blipFill>
+        <p:spPr>
+          <a:xfrm>
+            <a:off x="2163723" y="3114059"/>
+            <a:ext cx="5652073" cy="3289521"/>
+          </a:xfrm>
+          <a:prstGeom prst="rect">
+            <a:avLst/>
+          </a:prstGeom>
+        </p:spPr>
+      </p:pic>
     </p:spTree>
     <p:extLst>
       <p:ext uri="{BB962C8B-B14F-4D97-AF65-F5344CB8AC3E}">

--- a/ICCPROFILE.pptx
+++ b/ICCPROFILE.pptx
@@ -5,13 +5,17 @@
     <p:sldMasterId id="2147483658" r:id="rId1"/>
   </p:sldMasterIdLst>
   <p:notesMasterIdLst>
-    <p:notesMasterId r:id="rId6"/>
+    <p:notesMasterId r:id="rId10"/>
   </p:notesMasterIdLst>
   <p:sldIdLst>
     <p:sldId id="277" r:id="rId2"/>
-    <p:sldId id="1936" r:id="rId3"/>
+    <p:sldId id="1994" r:id="rId3"/>
     <p:sldId id="1937" r:id="rId4"/>
-    <p:sldId id="286" r:id="rId5"/>
+    <p:sldId id="1938" r:id="rId5"/>
+    <p:sldId id="1997" r:id="rId6"/>
+    <p:sldId id="1995" r:id="rId7"/>
+    <p:sldId id="1996" r:id="rId8"/>
+    <p:sldId id="286" r:id="rId9"/>
   </p:sldIdLst>
   <p:sldSz cx="9906000" cy="6858000" type="A4"/>
   <p:notesSz cx="7315200" cy="9601200"/>
@@ -254,8 +258,12 @@
         </p14:section>
         <p14:section name="ICC Profile" id="{7925A652-D02A-4F07-B4BA-109FEF573EC6}">
           <p14:sldIdLst>
-            <p14:sldId id="1936"/>
+            <p14:sldId id="1994"/>
             <p14:sldId id="1937"/>
+            <p14:sldId id="1938"/>
+            <p14:sldId id="1997"/>
+            <p14:sldId id="1995"/>
+            <p14:sldId id="1996"/>
           </p14:sldIdLst>
         </p14:section>
         <p14:section name="End" id="{33EEDC85-A799-4CB3-BF13-F4955B8630BE}">
@@ -1605,7 +1613,7 @@
         <p:cNvPr id="1" name="">
           <a:extLst>
             <a:ext uri="{FF2B5EF4-FFF2-40B4-BE49-F238E27FC236}">
-              <a16:creationId xmlns:a16="http://schemas.microsoft.com/office/drawing/2014/main" id="{94FB8052-553F-DC52-5D97-20BD22157A7C}"/>
+              <a16:creationId xmlns:a16="http://schemas.microsoft.com/office/drawing/2014/main" id="{7EE110AC-F4A0-7D78-93B0-AF6E23C1C86B}"/>
             </a:ext>
           </a:extLst>
         </p:cNvPr>
@@ -1625,7 +1633,7 @@
           <p:cNvPr id="2" name="投影片影像版面配置區 1">
             <a:extLst>
               <a:ext uri="{FF2B5EF4-FFF2-40B4-BE49-F238E27FC236}">
-                <a16:creationId xmlns:a16="http://schemas.microsoft.com/office/drawing/2014/main" id="{F8DA0D87-C7FA-7F54-314E-D4295614EEDC}"/>
+                <a16:creationId xmlns:a16="http://schemas.microsoft.com/office/drawing/2014/main" id="{AD5172F1-B577-25A9-AA74-C6AF67661642}"/>
               </a:ext>
             </a:extLst>
           </p:cNvPr>
@@ -1643,7 +1651,7 @@
           <p:cNvPr id="3" name="備忘稿版面配置區 2">
             <a:extLst>
               <a:ext uri="{FF2B5EF4-FFF2-40B4-BE49-F238E27FC236}">
-                <a16:creationId xmlns:a16="http://schemas.microsoft.com/office/drawing/2014/main" id="{39204A75-DF32-18E0-4B4A-BB411D3A9047}"/>
+                <a16:creationId xmlns:a16="http://schemas.microsoft.com/office/drawing/2014/main" id="{E9BD86B3-8EAB-902A-DCF6-698ADFDE9E8A}"/>
               </a:ext>
             </a:extLst>
           </p:cNvPr>
@@ -1659,8 +1667,28 @@
           <a:bodyPr/>
           <a:lstStyle/>
           <a:p>
-            <a:pPr algn="l"/>
-            <a:endParaRPr lang="zh-TW" altLang="en-US" dirty="0"/>
+            <a:pPr marL="171450" marR="0" lvl="0" indent="-171450" algn="l" defTabSz="914400" rtl="0" eaLnBrk="0" fontAlgn="base" latinLnBrk="0" hangingPunct="0">
+              <a:lnSpc>
+                <a:spcPct val="100000"/>
+              </a:lnSpc>
+              <a:spcBef>
+                <a:spcPct val="30000"/>
+              </a:spcBef>
+              <a:spcAft>
+                <a:spcPct val="0"/>
+              </a:spcAft>
+              <a:buClrTx/>
+              <a:buSzTx/>
+              <a:buFont typeface="Arial" panose="020B0604020202020204" pitchFamily="34" charset="0"/>
+              <a:buChar char="•"/>
+              <a:tabLst/>
+              <a:defRPr/>
+            </a:pPr>
+            <a:endParaRPr lang="en-US" altLang="zh-TW" sz="1200" b="0" dirty="0">
+              <a:latin typeface="Arial" panose="020B0604020202020204" pitchFamily="34" charset="0"/>
+              <a:ea typeface="標楷體" panose="03000509000000000000" pitchFamily="65" charset="-120"/>
+              <a:cs typeface="Arial" panose="020B0604020202020204" pitchFamily="34" charset="0"/>
+            </a:endParaRPr>
           </a:p>
         </p:txBody>
       </p:sp>
@@ -1669,7 +1697,7 @@
           <p:cNvPr id="4" name="投影片編號版面配置區 3">
             <a:extLst>
               <a:ext uri="{FF2B5EF4-FFF2-40B4-BE49-F238E27FC236}">
-                <a16:creationId xmlns:a16="http://schemas.microsoft.com/office/drawing/2014/main" id="{A90C941E-3884-1379-C460-BF93668359DD}"/>
+                <a16:creationId xmlns:a16="http://schemas.microsoft.com/office/drawing/2014/main" id="{69A9F744-724B-AE5D-EE31-BDB2E094083C}"/>
               </a:ext>
             </a:extLst>
           </p:cNvPr>
@@ -1721,7 +1749,7 @@
     </p:spTree>
     <p:extLst>
       <p:ext uri="{BB962C8B-B14F-4D97-AF65-F5344CB8AC3E}">
-        <p14:creationId xmlns:p14="http://schemas.microsoft.com/office/powerpoint/2010/main" val="169296395"/>
+        <p14:creationId xmlns:p14="http://schemas.microsoft.com/office/powerpoint/2010/main" val="4011216321"/>
       </p:ext>
     </p:extLst>
   </p:cSld>
@@ -1732,6 +1760,177 @@
 </file>
 
 <file path=ppt/notesSlides/notesSlide3.xml><?xml version="1.0" encoding="utf-8"?>
+<p:notes xmlns:a="http://schemas.openxmlformats.org/drawingml/2006/main" xmlns:r="http://schemas.openxmlformats.org/officeDocument/2006/relationships" xmlns:p="http://schemas.openxmlformats.org/presentationml/2006/main">
+  <p:cSld>
+    <p:spTree>
+      <p:nvGrpSpPr>
+        <p:cNvPr id="1" name="">
+          <a:extLst>
+            <a:ext uri="{FF2B5EF4-FFF2-40B4-BE49-F238E27FC236}">
+              <a16:creationId xmlns:a16="http://schemas.microsoft.com/office/drawing/2014/main" id="{A1F37CC5-12D8-16D3-9253-45D955F69194}"/>
+            </a:ext>
+          </a:extLst>
+        </p:cNvPr>
+        <p:cNvGrpSpPr/>
+        <p:nvPr/>
+      </p:nvGrpSpPr>
+      <p:grpSpPr>
+        <a:xfrm>
+          <a:off x="0" y="0"/>
+          <a:ext cx="0" cy="0"/>
+          <a:chOff x="0" y="0"/>
+          <a:chExt cx="0" cy="0"/>
+        </a:xfrm>
+      </p:grpSpPr>
+      <p:sp>
+        <p:nvSpPr>
+          <p:cNvPr id="2" name="投影片影像版面配置區 1">
+            <a:extLst>
+              <a:ext uri="{FF2B5EF4-FFF2-40B4-BE49-F238E27FC236}">
+                <a16:creationId xmlns:a16="http://schemas.microsoft.com/office/drawing/2014/main" id="{34823088-0DD2-55CA-4BEE-63925050B074}"/>
+              </a:ext>
+            </a:extLst>
+          </p:cNvPr>
+          <p:cNvSpPr>
+            <a:spLocks noGrp="1" noRot="1" noChangeAspect="1"/>
+          </p:cNvSpPr>
+          <p:nvPr>
+            <p:ph type="sldImg"/>
+          </p:nvPr>
+        </p:nvSpPr>
+        <p:spPr/>
+      </p:sp>
+      <p:sp>
+        <p:nvSpPr>
+          <p:cNvPr id="3" name="備忘稿版面配置區 2">
+            <a:extLst>
+              <a:ext uri="{FF2B5EF4-FFF2-40B4-BE49-F238E27FC236}">
+                <a16:creationId xmlns:a16="http://schemas.microsoft.com/office/drawing/2014/main" id="{ABECB207-5F1A-F34F-8FA9-CF58582A5670}"/>
+              </a:ext>
+            </a:extLst>
+          </p:cNvPr>
+          <p:cNvSpPr>
+            <a:spLocks noGrp="1"/>
+          </p:cNvSpPr>
+          <p:nvPr>
+            <p:ph type="body" idx="1"/>
+          </p:nvPr>
+        </p:nvSpPr>
+        <p:spPr/>
+        <p:txBody>
+          <a:bodyPr/>
+          <a:lstStyle/>
+          <a:p>
+            <a:r>
+              <a:rPr lang="zh-TW" altLang="en-US" dirty="0"/>
+              <a:t>不同裝置使用不同的方式表示色彩。因此，</a:t>
+            </a:r>
+            <a:r>
+              <a:rPr lang="en-US" altLang="zh-TW" dirty="0"/>
+              <a:t>RGB </a:t>
+            </a:r>
+            <a:r>
+              <a:rPr lang="zh-TW" altLang="en-US" dirty="0"/>
+              <a:t>數值本身只是「裝置值（</a:t>
+            </a:r>
+            <a:r>
+              <a:rPr lang="en-US" altLang="zh-TW" dirty="0"/>
+              <a:t>device values</a:t>
+            </a:r>
+            <a:r>
+              <a:rPr lang="zh-TW" altLang="en-US" dirty="0"/>
+              <a:t>）」，並不直接等同於一個跨裝置通用的顏色。</a:t>
+            </a:r>
+            <a:endParaRPr lang="en-US" altLang="zh-TW" dirty="0"/>
+          </a:p>
+          <a:p>
+            <a:r>
+              <a:rPr lang="en-US" altLang="zh-TW" dirty="0"/>
+              <a:t>ICC </a:t>
+            </a:r>
+            <a:r>
+              <a:rPr lang="zh-TW" altLang="en-US" dirty="0"/>
+              <a:t>將這類裝置原生使用的色彩表示方式稱為 </a:t>
+            </a:r>
+            <a:r>
+              <a:rPr lang="en-US" altLang="zh-TW" b="1" dirty="0"/>
+              <a:t>device color space</a:t>
+            </a:r>
+            <a:r>
+              <a:rPr lang="zh-TW" altLang="en-US" dirty="0"/>
+              <a:t>。</a:t>
+            </a:r>
+          </a:p>
+        </p:txBody>
+      </p:sp>
+      <p:sp>
+        <p:nvSpPr>
+          <p:cNvPr id="4" name="投影片編號版面配置區 3">
+            <a:extLst>
+              <a:ext uri="{FF2B5EF4-FFF2-40B4-BE49-F238E27FC236}">
+                <a16:creationId xmlns:a16="http://schemas.microsoft.com/office/drawing/2014/main" id="{25F3CA63-2998-B736-F517-4B82A1C74C4E}"/>
+              </a:ext>
+            </a:extLst>
+          </p:cNvPr>
+          <p:cNvSpPr>
+            <a:spLocks noGrp="1"/>
+          </p:cNvSpPr>
+          <p:nvPr>
+            <p:ph type="sldNum" idx="12"/>
+          </p:nvPr>
+        </p:nvSpPr>
+        <p:spPr/>
+        <p:txBody>
+          <a:bodyPr/>
+          <a:lstStyle/>
+          <a:p>
+            <a:pPr marL="0" marR="0" lvl="0" indent="0" algn="r" rtl="0">
+              <a:spcBef>
+                <a:spcPts val="0"/>
+              </a:spcBef>
+              <a:spcAft>
+                <a:spcPts val="0"/>
+              </a:spcAft>
+              <a:buNone/>
+            </a:pPr>
+            <a:fld id="{00000000-1234-1234-1234-123412341234}" type="slidenum">
+              <a:rPr lang="en-US" sz="2000" b="0" i="0" u="none" strike="noStrike" cap="none" smtClean="0">
+                <a:solidFill>
+                  <a:schemeClr val="dk1"/>
+                </a:solidFill>
+                <a:latin typeface="Times New Roman"/>
+                <a:ea typeface="Times New Roman"/>
+                <a:cs typeface="Times New Roman"/>
+                <a:sym typeface="Times New Roman"/>
+              </a:rPr>
+              <a:t>3</a:t>
+            </a:fld>
+            <a:endParaRPr lang="en-US" sz="2000" b="0" i="0" u="none" strike="noStrike" cap="none" dirty="0">
+              <a:solidFill>
+                <a:schemeClr val="dk1"/>
+              </a:solidFill>
+              <a:latin typeface="Times New Roman"/>
+              <a:ea typeface="Times New Roman"/>
+              <a:cs typeface="Times New Roman"/>
+              <a:sym typeface="Times New Roman"/>
+            </a:endParaRPr>
+          </a:p>
+        </p:txBody>
+      </p:sp>
+    </p:spTree>
+    <p:extLst>
+      <p:ext uri="{BB962C8B-B14F-4D97-AF65-F5344CB8AC3E}">
+        <p14:creationId xmlns:p14="http://schemas.microsoft.com/office/powerpoint/2010/main" val="3669707240"/>
+      </p:ext>
+    </p:extLst>
+  </p:cSld>
+  <p:clrMapOvr>
+    <a:masterClrMapping/>
+  </p:clrMapOvr>
+</p:notes>
+</file>
+
+<file path=ppt/notesSlides/notesSlide4.xml><?xml version="1.0" encoding="utf-8"?>
 <p:notes xmlns:a="http://schemas.openxmlformats.org/drawingml/2006/main" xmlns:r="http://schemas.openxmlformats.org/officeDocument/2006/relationships" xmlns:p="http://schemas.openxmlformats.org/presentationml/2006/main">
   <p:cSld>
     <p:spTree>
@@ -1837,7 +2036,7 @@
                 <a:cs typeface="Times New Roman"/>
                 <a:sym typeface="Times New Roman"/>
               </a:rPr>
-              <a:t>3</a:t>
+              <a:t>4</a:t>
             </a:fld>
             <a:endParaRPr lang="en-US" sz="2000" b="0" i="0" u="none" strike="noStrike" cap="none" dirty="0">
               <a:solidFill>
@@ -1854,7 +2053,7 @@
     </p:spTree>
     <p:extLst>
       <p:ext uri="{BB962C8B-B14F-4D97-AF65-F5344CB8AC3E}">
-        <p14:creationId xmlns:p14="http://schemas.microsoft.com/office/powerpoint/2010/main" val="3669707240"/>
+        <p14:creationId xmlns:p14="http://schemas.microsoft.com/office/powerpoint/2010/main" val="1650789758"/>
       </p:ext>
     </p:extLst>
   </p:cSld>
@@ -1864,7 +2063,140 @@
 </p:notes>
 </file>
 
-<file path=ppt/notesSlides/notesSlide4.xml><?xml version="1.0" encoding="utf-8"?>
+<file path=ppt/notesSlides/notesSlide5.xml><?xml version="1.0" encoding="utf-8"?>
+<p:notes xmlns:a="http://schemas.openxmlformats.org/drawingml/2006/main" xmlns:r="http://schemas.openxmlformats.org/officeDocument/2006/relationships" xmlns:p="http://schemas.openxmlformats.org/presentationml/2006/main">
+  <p:cSld>
+    <p:spTree>
+      <p:nvGrpSpPr>
+        <p:cNvPr id="1" name="">
+          <a:extLst>
+            <a:ext uri="{FF2B5EF4-FFF2-40B4-BE49-F238E27FC236}">
+              <a16:creationId xmlns:a16="http://schemas.microsoft.com/office/drawing/2014/main" id="{A1F37CC5-12D8-16D3-9253-45D955F69194}"/>
+            </a:ext>
+          </a:extLst>
+        </p:cNvPr>
+        <p:cNvGrpSpPr/>
+        <p:nvPr/>
+      </p:nvGrpSpPr>
+      <p:grpSpPr>
+        <a:xfrm>
+          <a:off x="0" y="0"/>
+          <a:ext cx="0" cy="0"/>
+          <a:chOff x="0" y="0"/>
+          <a:chExt cx="0" cy="0"/>
+        </a:xfrm>
+      </p:grpSpPr>
+      <p:sp>
+        <p:nvSpPr>
+          <p:cNvPr id="2" name="投影片影像版面配置區 1">
+            <a:extLst>
+              <a:ext uri="{FF2B5EF4-FFF2-40B4-BE49-F238E27FC236}">
+                <a16:creationId xmlns:a16="http://schemas.microsoft.com/office/drawing/2014/main" id="{34823088-0DD2-55CA-4BEE-63925050B074}"/>
+              </a:ext>
+            </a:extLst>
+          </p:cNvPr>
+          <p:cNvSpPr>
+            <a:spLocks noGrp="1" noRot="1" noChangeAspect="1"/>
+          </p:cNvSpPr>
+          <p:nvPr>
+            <p:ph type="sldImg"/>
+          </p:nvPr>
+        </p:nvSpPr>
+        <p:spPr/>
+      </p:sp>
+      <p:sp>
+        <p:nvSpPr>
+          <p:cNvPr id="3" name="備忘稿版面配置區 2">
+            <a:extLst>
+              <a:ext uri="{FF2B5EF4-FFF2-40B4-BE49-F238E27FC236}">
+                <a16:creationId xmlns:a16="http://schemas.microsoft.com/office/drawing/2014/main" id="{ABECB207-5F1A-F34F-8FA9-CF58582A5670}"/>
+              </a:ext>
+            </a:extLst>
+          </p:cNvPr>
+          <p:cNvSpPr>
+            <a:spLocks noGrp="1"/>
+          </p:cNvSpPr>
+          <p:nvPr>
+            <p:ph type="body" idx="1"/>
+          </p:nvPr>
+        </p:nvSpPr>
+        <p:spPr/>
+        <p:txBody>
+          <a:bodyPr/>
+          <a:lstStyle/>
+          <a:p>
+            <a:endParaRPr lang="zh-TW" altLang="en-US" dirty="0"/>
+          </a:p>
+        </p:txBody>
+      </p:sp>
+      <p:sp>
+        <p:nvSpPr>
+          <p:cNvPr id="4" name="投影片編號版面配置區 3">
+            <a:extLst>
+              <a:ext uri="{FF2B5EF4-FFF2-40B4-BE49-F238E27FC236}">
+                <a16:creationId xmlns:a16="http://schemas.microsoft.com/office/drawing/2014/main" id="{25F3CA63-2998-B736-F517-4B82A1C74C4E}"/>
+              </a:ext>
+            </a:extLst>
+          </p:cNvPr>
+          <p:cNvSpPr>
+            <a:spLocks noGrp="1"/>
+          </p:cNvSpPr>
+          <p:nvPr>
+            <p:ph type="sldNum" idx="12"/>
+          </p:nvPr>
+        </p:nvSpPr>
+        <p:spPr/>
+        <p:txBody>
+          <a:bodyPr/>
+          <a:lstStyle/>
+          <a:p>
+            <a:pPr marL="0" marR="0" lvl="0" indent="0" algn="r" rtl="0">
+              <a:spcBef>
+                <a:spcPts val="0"/>
+              </a:spcBef>
+              <a:spcAft>
+                <a:spcPts val="0"/>
+              </a:spcAft>
+              <a:buNone/>
+            </a:pPr>
+            <a:fld id="{00000000-1234-1234-1234-123412341234}" type="slidenum">
+              <a:rPr lang="en-US" sz="2000" b="0" i="0" u="none" strike="noStrike" cap="none" smtClean="0">
+                <a:solidFill>
+                  <a:schemeClr val="dk1"/>
+                </a:solidFill>
+                <a:latin typeface="Times New Roman"/>
+                <a:ea typeface="Times New Roman"/>
+                <a:cs typeface="Times New Roman"/>
+                <a:sym typeface="Times New Roman"/>
+              </a:rPr>
+              <a:t>5</a:t>
+            </a:fld>
+            <a:endParaRPr lang="en-US" sz="2000" b="0" i="0" u="none" strike="noStrike" cap="none" dirty="0">
+              <a:solidFill>
+                <a:schemeClr val="dk1"/>
+              </a:solidFill>
+              <a:latin typeface="Times New Roman"/>
+              <a:ea typeface="Times New Roman"/>
+              <a:cs typeface="Times New Roman"/>
+              <a:sym typeface="Times New Roman"/>
+            </a:endParaRPr>
+          </a:p>
+        </p:txBody>
+      </p:sp>
+    </p:spTree>
+    <p:extLst>
+      <p:ext uri="{BB962C8B-B14F-4D97-AF65-F5344CB8AC3E}">
+        <p14:creationId xmlns:p14="http://schemas.microsoft.com/office/powerpoint/2010/main" val="1776664668"/>
+      </p:ext>
+    </p:extLst>
+  </p:cSld>
+  <p:clrMapOvr>
+    <a:masterClrMapping/>
+  </p:clrMapOvr>
+</p:notes>
+</file>
+
+<file path=ppt/notesSlides/notesSlide6.xml><?xml version="1.0" encoding="utf-8"?>
 <p:notes xmlns:a="http://schemas.openxmlformats.org/drawingml/2006/main" xmlns:r="http://schemas.openxmlformats.org/officeDocument/2006/relationships" xmlns:p="http://schemas.openxmlformats.org/presentationml/2006/main">
   <p:cSld>
     <p:spTree>
@@ -1932,7 +2264,7 @@
           <a:p>
             <a:fld id="{F5753A29-9D77-4C26-8BEC-432FE5D4B0A4}" type="slidenum">
               <a:rPr lang="en-US" altLang="zh-TW" smtClean="0"/>
-              <a:t>4</a:t>
+              <a:t>8</a:t>
             </a:fld>
             <a:endParaRPr lang="en-US" altLang="zh-TW" dirty="0"/>
           </a:p>
@@ -6931,7 +7263,7 @@
         <p:cNvPr id="1" name="">
           <a:extLst>
             <a:ext uri="{FF2B5EF4-FFF2-40B4-BE49-F238E27FC236}">
-              <a16:creationId xmlns:a16="http://schemas.microsoft.com/office/drawing/2014/main" id="{ECFBC418-93FB-B85E-3E6C-30CE8CC225FA}"/>
+              <a16:creationId xmlns:a16="http://schemas.microsoft.com/office/drawing/2014/main" id="{9F0396C1-EA64-DABF-AB1E-DAC8812CEAFA}"/>
             </a:ext>
           </a:extLst>
         </p:cNvPr>
@@ -6948,58 +7280,10 @@
       </p:grpSpPr>
       <p:sp>
         <p:nvSpPr>
-          <p:cNvPr id="2" name="標題 1">
+          <p:cNvPr id="7" name="文字版面配置區 6">
             <a:extLst>
               <a:ext uri="{FF2B5EF4-FFF2-40B4-BE49-F238E27FC236}">
-                <a16:creationId xmlns:a16="http://schemas.microsoft.com/office/drawing/2014/main" id="{07C5B78B-4B53-60CF-F0D2-7AB0EB61FB21}"/>
-              </a:ext>
-            </a:extLst>
-          </p:cNvPr>
-          <p:cNvSpPr>
-            <a:spLocks noGrp="1"/>
-          </p:cNvSpPr>
-          <p:nvPr>
-            <p:ph type="title"/>
-          </p:nvPr>
-        </p:nvSpPr>
-        <p:spPr/>
-        <p:txBody>
-          <a:bodyPr/>
-          <a:lstStyle/>
-          <a:p>
-            <a:r>
-              <a:rPr lang="zh-TW" altLang="en-US" dirty="0">
-                <a:latin typeface="Times New Roman" panose="02020603050405020304" pitchFamily="18" charset="0"/>
-                <a:ea typeface="標楷體" panose="03000509000000000000" pitchFamily="65" charset="-120"/>
-                <a:cs typeface="Times New Roman" panose="02020603050405020304" pitchFamily="18" charset="0"/>
-              </a:rPr>
-              <a:t>本次進度</a:t>
-            </a:r>
-            <a:r>
-              <a:rPr lang="en-US" altLang="zh-TW" dirty="0">
-                <a:latin typeface="Times New Roman" panose="02020603050405020304" pitchFamily="18" charset="0"/>
-                <a:ea typeface="標楷體" panose="03000509000000000000" pitchFamily="65" charset="-120"/>
-                <a:cs typeface="Times New Roman" panose="02020603050405020304" pitchFamily="18" charset="0"/>
-              </a:rPr>
-              <a:t>:</a:t>
-            </a:r>
-            <a:r>
-              <a:rPr lang="zh-TW" altLang="en-US" dirty="0">
-                <a:latin typeface="Times New Roman" panose="02020603050405020304" pitchFamily="18" charset="0"/>
-                <a:ea typeface="標楷體" panose="03000509000000000000" pitchFamily="65" charset="-120"/>
-                <a:cs typeface="Times New Roman" panose="02020603050405020304" pitchFamily="18" charset="0"/>
-              </a:rPr>
-              <a:t>研究背景與目標</a:t>
-            </a:r>
-          </a:p>
-        </p:txBody>
-      </p:sp>
-      <p:sp>
-        <p:nvSpPr>
-          <p:cNvPr id="5" name="文字方塊 4">
-            <a:extLst>
-              <a:ext uri="{FF2B5EF4-FFF2-40B4-BE49-F238E27FC236}">
-                <a16:creationId xmlns:a16="http://schemas.microsoft.com/office/drawing/2014/main" id="{4A0E973E-B5E1-BA62-48A3-DFE218619D9F}"/>
+                <a16:creationId xmlns:a16="http://schemas.microsoft.com/office/drawing/2014/main" id="{CA232325-2F30-826A-0F33-B3038ABB7C4A}"/>
               </a:ext>
             </a:extLst>
           </p:cNvPr>
@@ -7008,49 +7292,309 @@
         </p:nvSpPr>
         <p:spPr>
           <a:xfrm>
-            <a:off x="524501" y="1141596"/>
-            <a:ext cx="8928101" cy="1972463"/>
+            <a:off x="609602" y="1007523"/>
+            <a:ext cx="8402051" cy="4700685"/>
           </a:xfrm>
           <a:prstGeom prst="rect">
             <a:avLst/>
           </a:prstGeom>
           <a:noFill/>
+          <a:ln>
+            <a:noFill/>
+          </a:ln>
         </p:spPr>
         <p:txBody>
-          <a:bodyPr wrap="square">
-            <a:spAutoFit/>
+          <a:bodyPr spcFirstLastPara="1" wrap="square" lIns="91425" tIns="45700" rIns="91425" bIns="45700" anchor="t" anchorCtr="0">
+            <a:noAutofit/>
           </a:bodyPr>
-          <a:lstStyle/>
-          <a:p>
-            <a:pPr marL="457200" lvl="1" indent="-406400" algn="just">
+          <a:lstStyle>
+            <a:defPPr marR="0" lvl="0" algn="l" rtl="0">
               <a:lnSpc>
-                <a:spcPct val="150000"/>
+                <a:spcPct val="100000"/>
               </a:lnSpc>
               <a:spcBef>
+                <a:spcPts val="0"/>
+              </a:spcBef>
+              <a:spcAft>
+                <a:spcPts val="0"/>
+              </a:spcAft>
+            </a:defPPr>
+            <a:lvl1pPr marL="457200" marR="0" lvl="0" indent="-406400" algn="l" rtl="0">
+              <a:lnSpc>
+                <a:spcPct val="100000"/>
+              </a:lnSpc>
+              <a:spcBef>
                 <a:spcPts val="560"/>
               </a:spcBef>
+              <a:spcAft>
+                <a:spcPts val="0"/>
+              </a:spcAft>
               <a:buClr>
                 <a:schemeClr val="accent2"/>
               </a:buClr>
               <a:buSzPts val="2800"/>
               <a:buFont typeface="Noto Sans Symbols"/>
               <a:buChar char="❖"/>
+              <a:defRPr sz="2800" b="0" i="0" u="none" strike="noStrike" cap="none">
+                <a:solidFill>
+                  <a:schemeClr val="dk1"/>
+                </a:solidFill>
+                <a:latin typeface="Times New Roman"/>
+                <a:ea typeface="Times New Roman"/>
+                <a:cs typeface="Times New Roman"/>
+                <a:sym typeface="Times New Roman"/>
+              </a:defRPr>
+            </a:lvl1pPr>
+            <a:lvl2pPr marL="914400" marR="0" lvl="1" indent="-381000" algn="l" rtl="0">
+              <a:lnSpc>
+                <a:spcPct val="100000"/>
+              </a:lnSpc>
+              <a:spcBef>
+                <a:spcPts val="480"/>
+              </a:spcBef>
+              <a:spcAft>
+                <a:spcPts val="0"/>
+              </a:spcAft>
+              <a:buClr>
+                <a:srgbClr val="FF5050"/>
+              </a:buClr>
+              <a:buSzPts val="2400"/>
+              <a:buFont typeface="Noto Sans Symbols"/>
+              <a:buChar char="▪"/>
+              <a:defRPr sz="2400" b="0" i="0" u="none" strike="noStrike" cap="none">
+                <a:solidFill>
+                  <a:schemeClr val="dk1"/>
+                </a:solidFill>
+                <a:latin typeface="Times New Roman"/>
+                <a:ea typeface="Times New Roman"/>
+                <a:cs typeface="Times New Roman"/>
+                <a:sym typeface="Times New Roman"/>
+              </a:defRPr>
+            </a:lvl2pPr>
+            <a:lvl3pPr marL="1371600" marR="0" lvl="2" indent="-355600" algn="l" rtl="0">
+              <a:lnSpc>
+                <a:spcPct val="100000"/>
+              </a:lnSpc>
+              <a:spcBef>
+                <a:spcPts val="400"/>
+              </a:spcBef>
+              <a:spcAft>
+                <a:spcPts val="0"/>
+              </a:spcAft>
+              <a:buClr>
+                <a:srgbClr val="6699FF"/>
+              </a:buClr>
+              <a:buSzPts val="2000"/>
+              <a:buFont typeface="Times New Roman"/>
+              <a:buChar char="•"/>
+              <a:defRPr sz="2000" b="0" i="0" u="none" strike="noStrike" cap="none">
+                <a:solidFill>
+                  <a:schemeClr val="dk1"/>
+                </a:solidFill>
+                <a:latin typeface="Times New Roman"/>
+                <a:ea typeface="Times New Roman"/>
+                <a:cs typeface="Times New Roman"/>
+                <a:sym typeface="Times New Roman"/>
+              </a:defRPr>
+            </a:lvl3pPr>
+            <a:lvl4pPr marL="1828800" marR="0" lvl="3" indent="-355600" algn="l" rtl="0">
+              <a:lnSpc>
+                <a:spcPct val="100000"/>
+              </a:lnSpc>
+              <a:spcBef>
+                <a:spcPts val="400"/>
+              </a:spcBef>
+              <a:spcAft>
+                <a:spcPts val="0"/>
+              </a:spcAft>
+              <a:buClr>
+                <a:srgbClr val="FF5050"/>
+              </a:buClr>
+              <a:buSzPts val="2000"/>
+              <a:buFont typeface="Times New Roman"/>
+              <a:buChar char="o"/>
+              <a:defRPr sz="2000" b="0" i="0" u="none" strike="noStrike" cap="none">
+                <a:solidFill>
+                  <a:schemeClr val="dk1"/>
+                </a:solidFill>
+                <a:latin typeface="Times New Roman"/>
+                <a:ea typeface="Times New Roman"/>
+                <a:cs typeface="Times New Roman"/>
+                <a:sym typeface="Times New Roman"/>
+              </a:defRPr>
+            </a:lvl4pPr>
+            <a:lvl5pPr marL="2286000" marR="0" lvl="4" indent="-355600" algn="l" rtl="0">
+              <a:lnSpc>
+                <a:spcPct val="100000"/>
+              </a:lnSpc>
+              <a:spcBef>
+                <a:spcPts val="400"/>
+              </a:spcBef>
+              <a:spcAft>
+                <a:spcPts val="0"/>
+              </a:spcAft>
+              <a:buClr>
+                <a:srgbClr val="FF5050"/>
+              </a:buClr>
+              <a:buSzPts val="2000"/>
+              <a:buFont typeface="Times New Roman"/>
+              <a:buChar char="o"/>
+              <a:defRPr sz="2000" b="0" i="0" u="none" strike="noStrike" cap="none">
+                <a:solidFill>
+                  <a:schemeClr val="dk1"/>
+                </a:solidFill>
+                <a:latin typeface="Times New Roman"/>
+                <a:ea typeface="Times New Roman"/>
+                <a:cs typeface="Times New Roman"/>
+                <a:sym typeface="Times New Roman"/>
+              </a:defRPr>
+            </a:lvl5pPr>
+            <a:lvl6pPr marL="2743200" marR="0" lvl="5" indent="-355600" algn="l" rtl="0">
+              <a:lnSpc>
+                <a:spcPct val="100000"/>
+              </a:lnSpc>
+              <a:spcBef>
+                <a:spcPts val="400"/>
+              </a:spcBef>
+              <a:spcAft>
+                <a:spcPts val="0"/>
+              </a:spcAft>
+              <a:buClr>
+                <a:srgbClr val="FF5050"/>
+              </a:buClr>
+              <a:buSzPts val="2000"/>
+              <a:buFont typeface="Times New Roman"/>
+              <a:buChar char="o"/>
+              <a:defRPr sz="2000" b="0" i="0" u="none" strike="noStrike" cap="none">
+                <a:solidFill>
+                  <a:schemeClr val="dk1"/>
+                </a:solidFill>
+                <a:latin typeface="Times New Roman"/>
+                <a:ea typeface="Times New Roman"/>
+                <a:cs typeface="Times New Roman"/>
+                <a:sym typeface="Times New Roman"/>
+              </a:defRPr>
+            </a:lvl6pPr>
+            <a:lvl7pPr marL="3200400" marR="0" lvl="6" indent="-355600" algn="l" rtl="0">
+              <a:lnSpc>
+                <a:spcPct val="100000"/>
+              </a:lnSpc>
+              <a:spcBef>
+                <a:spcPts val="400"/>
+              </a:spcBef>
+              <a:spcAft>
+                <a:spcPts val="0"/>
+              </a:spcAft>
+              <a:buClr>
+                <a:srgbClr val="FF5050"/>
+              </a:buClr>
+              <a:buSzPts val="2000"/>
+              <a:buFont typeface="Times New Roman"/>
+              <a:buChar char="o"/>
+              <a:defRPr sz="2000" b="0" i="0" u="none" strike="noStrike" cap="none">
+                <a:solidFill>
+                  <a:schemeClr val="dk1"/>
+                </a:solidFill>
+                <a:latin typeface="Times New Roman"/>
+                <a:ea typeface="Times New Roman"/>
+                <a:cs typeface="Times New Roman"/>
+                <a:sym typeface="Times New Roman"/>
+              </a:defRPr>
+            </a:lvl7pPr>
+            <a:lvl8pPr marL="3657600" marR="0" lvl="7" indent="-355600" algn="l" rtl="0">
+              <a:lnSpc>
+                <a:spcPct val="100000"/>
+              </a:lnSpc>
+              <a:spcBef>
+                <a:spcPts val="400"/>
+              </a:spcBef>
+              <a:spcAft>
+                <a:spcPts val="0"/>
+              </a:spcAft>
+              <a:buClr>
+                <a:srgbClr val="FF5050"/>
+              </a:buClr>
+              <a:buSzPts val="2000"/>
+              <a:buFont typeface="Times New Roman"/>
+              <a:buChar char="o"/>
+              <a:defRPr sz="2000" b="0" i="0" u="none" strike="noStrike" cap="none">
+                <a:solidFill>
+                  <a:schemeClr val="dk1"/>
+                </a:solidFill>
+                <a:latin typeface="Times New Roman"/>
+                <a:ea typeface="Times New Roman"/>
+                <a:cs typeface="Times New Roman"/>
+                <a:sym typeface="Times New Roman"/>
+              </a:defRPr>
+            </a:lvl8pPr>
+            <a:lvl9pPr marL="4114800" marR="0" lvl="8" indent="-355600" algn="l" rtl="0">
+              <a:lnSpc>
+                <a:spcPct val="100000"/>
+              </a:lnSpc>
+              <a:spcBef>
+                <a:spcPts val="400"/>
+              </a:spcBef>
+              <a:spcAft>
+                <a:spcPts val="0"/>
+              </a:spcAft>
+              <a:buClr>
+                <a:srgbClr val="FF5050"/>
+              </a:buClr>
+              <a:buSzPts val="2000"/>
+              <a:buFont typeface="Times New Roman"/>
+              <a:buChar char="o"/>
+              <a:defRPr sz="2000" b="0" i="0" u="none" strike="noStrike" cap="none">
+                <a:solidFill>
+                  <a:schemeClr val="dk1"/>
+                </a:solidFill>
+                <a:latin typeface="Times New Roman"/>
+                <a:ea typeface="Times New Roman"/>
+                <a:cs typeface="Times New Roman"/>
+                <a:sym typeface="Times New Roman"/>
+              </a:defRPr>
+            </a:lvl9pPr>
+          </a:lstStyle>
+          <a:p>
+            <a:pPr>
+              <a:lnSpc>
+                <a:spcPts val="3000"/>
+              </a:lnSpc>
             </a:pPr>
             <a:r>
-              <a:rPr lang="en-US" altLang="zh-TW" sz="1600" b="1" dirty="0">
+              <a:rPr lang="en-US" altLang="zh-TW" sz="2000" b="1" dirty="0">
                 <a:latin typeface="Times New Roman" panose="02020603050405020304" pitchFamily="18" charset="0"/>
                 <a:ea typeface="標楷體" panose="03000509000000000000" pitchFamily="65" charset="-120"/>
                 <a:cs typeface="Times New Roman" panose="02020603050405020304" pitchFamily="18" charset="0"/>
               </a:rPr>
-              <a:t>ICC Profile</a:t>
+              <a:t> ICC Profile</a:t>
             </a:r>
             <a:r>
-              <a:rPr lang="zh-TW" altLang="en-US" sz="1600" b="1" dirty="0">
+              <a:rPr lang="zh-TW" altLang="en-US" sz="2000" b="1" dirty="0">
                 <a:latin typeface="Times New Roman" panose="02020603050405020304" pitchFamily="18" charset="0"/>
                 <a:ea typeface="標楷體" panose="03000509000000000000" pitchFamily="65" charset="-120"/>
                 <a:cs typeface="Times New Roman" panose="02020603050405020304" pitchFamily="18" charset="0"/>
               </a:rPr>
               <a:t>的目的</a:t>
+            </a:r>
+            <a:endParaRPr lang="en-US" altLang="zh-TW" sz="2000" b="1" dirty="0">
+              <a:latin typeface="Times New Roman" panose="02020603050405020304" pitchFamily="18" charset="0"/>
+              <a:ea typeface="標楷體" panose="03000509000000000000" pitchFamily="65" charset="-120"/>
+              <a:cs typeface="Times New Roman" panose="02020603050405020304" pitchFamily="18" charset="0"/>
+            </a:endParaRPr>
+          </a:p>
+          <a:p>
+            <a:pPr lvl="1">
+              <a:lnSpc>
+                <a:spcPts val="3000"/>
+              </a:lnSpc>
+            </a:pPr>
+            <a:r>
+              <a:rPr lang="zh-TW" altLang="zh-TW" sz="1600" dirty="0">
+                <a:latin typeface="Times New Roman" panose="02020603050405020304" pitchFamily="18" charset="0"/>
+                <a:ea typeface="標楷體" panose="03000509000000000000" pitchFamily="65" charset="-120"/>
+                <a:cs typeface="Times New Roman" panose="02020603050405020304" pitchFamily="18" charset="0"/>
+              </a:rPr>
+              <a:t>是建立開放、廠商中立、跨平台的色彩管理系統架構與元件標準，是提供跨平台的 Device Profile 格式，使不同裝置之間的色彩資料可以進行轉換</a:t>
             </a:r>
             <a:r>
               <a:rPr lang="zh-TW" altLang="en-US" sz="1600" dirty="0">
@@ -7058,15 +7602,7 @@
                 <a:ea typeface="標楷體" panose="03000509000000000000" pitchFamily="65" charset="-120"/>
                 <a:cs typeface="Times New Roman" panose="02020603050405020304" pitchFamily="18" charset="0"/>
               </a:rPr>
-              <a:t>：</a:t>
-            </a:r>
-            <a:r>
-              <a:rPr lang="zh-TW" altLang="zh-TW" sz="1600" dirty="0">
-                <a:latin typeface="Times New Roman" panose="02020603050405020304" pitchFamily="18" charset="0"/>
-                <a:ea typeface="標楷體" panose="03000509000000000000" pitchFamily="65" charset="-120"/>
-                <a:cs typeface="Times New Roman" panose="02020603050405020304" pitchFamily="18" charset="0"/>
-              </a:rPr>
-              <a:t>是建立開放、廠商中立、跨平台的色彩管理系統架構與元件標準，是提供跨平台的 Device Profile 格式，使不同裝置之間的色彩資料可以進行轉換。</a:t>
+              <a:t>。</a:t>
             </a:r>
             <a:endParaRPr lang="en-US" altLang="zh-TW" sz="1600" dirty="0">
               <a:latin typeface="Times New Roman" panose="02020603050405020304" pitchFamily="18" charset="0"/>
@@ -7075,35 +7611,38 @@
             </a:endParaRPr>
           </a:p>
           <a:p>
-            <a:pPr marL="457200" lvl="1" indent="-406400" algn="just">
+            <a:pPr>
               <a:lnSpc>
-                <a:spcPct val="150000"/>
+                <a:spcPts val="3000"/>
               </a:lnSpc>
-              <a:spcBef>
-                <a:spcPts val="560"/>
-              </a:spcBef>
-              <a:buClr>
-                <a:schemeClr val="accent2"/>
-              </a:buClr>
-              <a:buSzPts val="2800"/>
-              <a:buFont typeface="Noto Sans Symbols"/>
-              <a:buChar char="❖"/>
             </a:pPr>
             <a:r>
-              <a:rPr lang="zh-TW" altLang="en-US" sz="1600" b="1" dirty="0">
+              <a:rPr lang="zh-TW" altLang="en-US" sz="2000" b="1" dirty="0">
                 <a:latin typeface="Times New Roman" panose="02020603050405020304" pitchFamily="18" charset="0"/>
                 <a:ea typeface="標楷體" panose="03000509000000000000" pitchFamily="65" charset="-120"/>
                 <a:cs typeface="Times New Roman" panose="02020603050405020304" pitchFamily="18" charset="0"/>
               </a:rPr>
               <a:t>研究目標</a:t>
             </a:r>
+            <a:endParaRPr lang="en-US" altLang="zh-TW" sz="2000" b="1" dirty="0">
+              <a:latin typeface="Times New Roman" panose="02020603050405020304" pitchFamily="18" charset="0"/>
+              <a:ea typeface="標楷體" panose="03000509000000000000" pitchFamily="65" charset="-120"/>
+              <a:cs typeface="Times New Roman" panose="02020603050405020304" pitchFamily="18" charset="0"/>
+            </a:endParaRPr>
+          </a:p>
+          <a:p>
+            <a:pPr lvl="1">
+              <a:lnSpc>
+                <a:spcPts val="3000"/>
+              </a:lnSpc>
+            </a:pPr>
             <a:r>
               <a:rPr lang="zh-TW" altLang="en-US" sz="1600" dirty="0">
                 <a:latin typeface="Times New Roman" panose="02020603050405020304" pitchFamily="18" charset="0"/>
                 <a:ea typeface="標楷體" panose="03000509000000000000" pitchFamily="65" charset="-120"/>
                 <a:cs typeface="Times New Roman" panose="02020603050405020304" pitchFamily="18" charset="0"/>
               </a:rPr>
-              <a:t>：利用 </a:t>
+              <a:t>利用 </a:t>
             </a:r>
             <a:r>
               <a:rPr lang="en-US" altLang="zh-TW" sz="1600" dirty="0">
@@ -7127,9 +7666,52 @@
                 <a:ea typeface="標楷體" panose="03000509000000000000" pitchFamily="65" charset="-120"/>
                 <a:cs typeface="Times New Roman" panose="02020603050405020304" pitchFamily="18" charset="0"/>
               </a:rPr>
-              <a:t>，在無法使用顯示器硬體 LUT 校正的條件下，建立軟體顯示校正資料，並將其封裝關聯至 ICC Profile，使 Windows 顯示色彩管理管線能夠將修正後的 RGB 訊號送至顯示器。</a:t>
+              <a:t>，在無法使用顯示器硬體 LUT 校正的條件下，建立軟體顯示校正資料，並將其封裝關聯至 ICC Profile，使</a:t>
             </a:r>
-            <a:endParaRPr lang="en-US" altLang="zh-TW" sz="1600" dirty="0">
+            <a:r>
+              <a:rPr lang="zh-TW" altLang="en-US" sz="1600" dirty="0">
+                <a:latin typeface="Times New Roman" panose="02020603050405020304" pitchFamily="18" charset="0"/>
+                <a:ea typeface="標楷體" panose="03000509000000000000" pitchFamily="65" charset="-120"/>
+                <a:cs typeface="Times New Roman" panose="02020603050405020304" pitchFamily="18" charset="0"/>
+              </a:rPr>
+              <a:t>作業系統</a:t>
+            </a:r>
+            <a:r>
+              <a:rPr lang="zh-TW" altLang="zh-TW" sz="1600" dirty="0">
+                <a:latin typeface="Times New Roman" panose="02020603050405020304" pitchFamily="18" charset="0"/>
+                <a:ea typeface="標楷體" panose="03000509000000000000" pitchFamily="65" charset="-120"/>
+                <a:cs typeface="Times New Roman" panose="02020603050405020304" pitchFamily="18" charset="0"/>
+              </a:rPr>
+              <a:t>顯示色彩管理管線能夠將修正後的 RGB 訊號送至顯示器。</a:t>
+            </a:r>
+            <a:endParaRPr lang="en-US" altLang="zh-TW" sz="1600" b="1" dirty="0">
+              <a:latin typeface="Times New Roman" panose="02020603050405020304" pitchFamily="18" charset="0"/>
+              <a:ea typeface="標楷體" panose="03000509000000000000" pitchFamily="65" charset="-120"/>
+              <a:cs typeface="Times New Roman" panose="02020603050405020304" pitchFamily="18" charset="0"/>
+            </a:endParaRPr>
+          </a:p>
+          <a:p>
+            <a:pPr>
+              <a:lnSpc>
+                <a:spcPts val="3000"/>
+              </a:lnSpc>
+            </a:pPr>
+            <a:endParaRPr lang="en-US" altLang="zh-TW" sz="2000" dirty="0">
+              <a:latin typeface="Times New Roman" panose="02020603050405020304" pitchFamily="18" charset="0"/>
+              <a:ea typeface="標楷體" panose="03000509000000000000" pitchFamily="65" charset="-120"/>
+              <a:cs typeface="Times New Roman" panose="02020603050405020304" pitchFamily="18" charset="0"/>
+            </a:endParaRPr>
+          </a:p>
+          <a:p>
+            <a:pPr>
+              <a:lnSpc>
+                <a:spcPts val="3000"/>
+              </a:lnSpc>
+            </a:pPr>
+            <a:endParaRPr lang="en-US" altLang="zh-TW" sz="2000" dirty="0">
+              <a:solidFill>
+                <a:srgbClr val="333333"/>
+              </a:solidFill>
               <a:latin typeface="Times New Roman" panose="02020603050405020304" pitchFamily="18" charset="0"/>
               <a:ea typeface="標楷體" panose="03000509000000000000" pitchFamily="65" charset="-120"/>
               <a:cs typeface="Times New Roman" panose="02020603050405020304" pitchFamily="18" charset="0"/>
@@ -7139,10 +7721,10 @@
       </p:sp>
       <p:sp>
         <p:nvSpPr>
-          <p:cNvPr id="3" name="文字方塊 2">
+          <p:cNvPr id="5" name="文字方塊 4">
             <a:extLst>
               <a:ext uri="{FF2B5EF4-FFF2-40B4-BE49-F238E27FC236}">
-                <a16:creationId xmlns:a16="http://schemas.microsoft.com/office/drawing/2014/main" id="{7C77FC4B-A0F4-B540-B5A4-FD43A1D163D2}"/>
+                <a16:creationId xmlns:a16="http://schemas.microsoft.com/office/drawing/2014/main" id="{DB74C124-A957-366F-6E34-2775A49BE3DE}"/>
               </a:ext>
             </a:extLst>
           </p:cNvPr>
@@ -7222,39 +7804,59 @@
           </a:p>
         </p:txBody>
       </p:sp>
-      <p:pic>
-        <p:nvPicPr>
-          <p:cNvPr id="6" name="圖片 5">
+      <p:sp>
+        <p:nvSpPr>
+          <p:cNvPr id="8" name="標題 7">
             <a:extLst>
               <a:ext uri="{FF2B5EF4-FFF2-40B4-BE49-F238E27FC236}">
-                <a16:creationId xmlns:a16="http://schemas.microsoft.com/office/drawing/2014/main" id="{A23ED9A6-53D9-66E6-C549-15AEF10145A3}"/>
+                <a16:creationId xmlns:a16="http://schemas.microsoft.com/office/drawing/2014/main" id="{2ECA5CFA-64BC-E5E3-8FED-52AADBD2AC01}"/>
               </a:ext>
             </a:extLst>
           </p:cNvPr>
-          <p:cNvPicPr>
-            <a:picLocks noChangeAspect="1"/>
-          </p:cNvPicPr>
-          <p:nvPr/>
-        </p:nvPicPr>
-        <p:blipFill>
-          <a:blip r:embed="rId4"/>
-          <a:srcRect t="12198" b="9185"/>
-          <a:stretch/>
-        </p:blipFill>
-        <p:spPr>
-          <a:xfrm>
-            <a:off x="2163723" y="3114059"/>
-            <a:ext cx="5652073" cy="3289521"/>
-          </a:xfrm>
-          <a:prstGeom prst="rect">
-            <a:avLst/>
-          </a:prstGeom>
-        </p:spPr>
-      </p:pic>
+          <p:cNvSpPr>
+            <a:spLocks noGrp="1"/>
+          </p:cNvSpPr>
+          <p:nvPr>
+            <p:ph type="title"/>
+          </p:nvPr>
+        </p:nvSpPr>
+        <p:spPr/>
+        <p:txBody>
+          <a:bodyPr/>
+          <a:lstStyle/>
+          <a:p>
+            <a:r>
+              <a:rPr lang="zh-TW" altLang="en-US" dirty="0">
+                <a:latin typeface="Times New Roman" panose="02020603050405020304" pitchFamily="18" charset="0"/>
+                <a:ea typeface="標楷體" panose="03000509000000000000" pitchFamily="65" charset="-120"/>
+                <a:cs typeface="Times New Roman" panose="02020603050405020304" pitchFamily="18" charset="0"/>
+              </a:rPr>
+              <a:t>本次進度</a:t>
+            </a:r>
+            <a:r>
+              <a:rPr lang="en-US" altLang="zh-TW" dirty="0">
+                <a:latin typeface="Times New Roman" panose="02020603050405020304" pitchFamily="18" charset="0"/>
+                <a:ea typeface="標楷體" panose="03000509000000000000" pitchFamily="65" charset="-120"/>
+                <a:cs typeface="Times New Roman" panose="02020603050405020304" pitchFamily="18" charset="0"/>
+              </a:rPr>
+              <a:t>:</a:t>
+            </a:r>
+            <a:r>
+              <a:rPr lang="zh-TW" altLang="en-US" dirty="0">
+                <a:latin typeface="Times New Roman" panose="02020603050405020304" pitchFamily="18" charset="0"/>
+                <a:ea typeface="標楷體" panose="03000509000000000000" pitchFamily="65" charset="-120"/>
+                <a:cs typeface="Times New Roman" panose="02020603050405020304" pitchFamily="18" charset="0"/>
+              </a:rPr>
+              <a:t>研究背景與目標</a:t>
+            </a:r>
+            <a:endParaRPr lang="zh-TW" altLang="en-US" dirty="0"/>
+          </a:p>
+        </p:txBody>
+      </p:sp>
     </p:spTree>
     <p:extLst>
       <p:ext uri="{BB962C8B-B14F-4D97-AF65-F5344CB8AC3E}">
-        <p14:creationId xmlns:p14="http://schemas.microsoft.com/office/powerpoint/2010/main" val="3146217055"/>
+        <p14:creationId xmlns:p14="http://schemas.microsoft.com/office/powerpoint/2010/main" val="3193920313"/>
       </p:ext>
     </p:extLst>
   </p:cSld>
@@ -7325,36 +7927,8 @@
               <a:t>:</a:t>
             </a:r>
             <a:r>
-              <a:rPr lang="zh-TW" altLang="en-US" dirty="0">
-                <a:latin typeface="Times New Roman" panose="02020603050405020304" pitchFamily="18" charset="0"/>
-                <a:ea typeface="標楷體" panose="03000509000000000000" pitchFamily="65" charset="-120"/>
-                <a:cs typeface="Times New Roman" panose="02020603050405020304" pitchFamily="18" charset="0"/>
-              </a:rPr>
-              <a:t> </a:t>
-            </a:r>
-            <a:r>
-              <a:rPr lang="en-US" altLang="zh-TW" dirty="0">
-                <a:latin typeface="Times New Roman" panose="02020603050405020304" pitchFamily="18" charset="0"/>
-                <a:ea typeface="標楷體" panose="03000509000000000000" pitchFamily="65" charset="-120"/>
-                <a:cs typeface="Times New Roman" panose="02020603050405020304" pitchFamily="18" charset="0"/>
-              </a:rPr>
-              <a:t>ICC</a:t>
-            </a:r>
-            <a:r>
-              <a:rPr lang="zh-TW" altLang="en-US" dirty="0">
-                <a:latin typeface="Times New Roman" panose="02020603050405020304" pitchFamily="18" charset="0"/>
-                <a:ea typeface="標楷體" panose="03000509000000000000" pitchFamily="65" charset="-120"/>
-                <a:cs typeface="Times New Roman" panose="02020603050405020304" pitchFamily="18" charset="0"/>
-              </a:rPr>
-              <a:t> </a:t>
-            </a:r>
-            <a:r>
-              <a:rPr lang="en-US" altLang="zh-TW" dirty="0">
-                <a:latin typeface="Times New Roman" panose="02020603050405020304" pitchFamily="18" charset="0"/>
-                <a:ea typeface="標楷體" panose="03000509000000000000" pitchFamily="65" charset="-120"/>
-                <a:cs typeface="Times New Roman" panose="02020603050405020304" pitchFamily="18" charset="0"/>
-              </a:rPr>
-              <a:t>Profile</a:t>
+              <a:rPr lang="en-US" altLang="zh-TW" dirty="0"/>
+              <a:t>PCS(Profile Connection Space)</a:t>
             </a:r>
             <a:endParaRPr lang="zh-TW" altLang="en-US" dirty="0">
               <a:latin typeface="Times New Roman" panose="02020603050405020304" pitchFamily="18" charset="0"/>
@@ -7379,7 +7953,7 @@
         <p:spPr>
           <a:xfrm>
             <a:off x="520699" y="1369489"/>
-            <a:ext cx="7669813" cy="429733"/>
+            <a:ext cx="7669813" cy="440633"/>
           </a:xfrm>
           <a:prstGeom prst="rect">
             <a:avLst/>
@@ -7407,16 +7981,67 @@
               <a:buChar char="❖"/>
             </a:pPr>
             <a:r>
-              <a:rPr lang="en-US" altLang="zh-TW" sz="1600" dirty="0">
+              <a:rPr lang="zh-TW" altLang="en-US" sz="2000" dirty="0">
                 <a:latin typeface="Times New Roman" panose="02020603050405020304" pitchFamily="18" charset="0"/>
                 <a:ea typeface="標楷體" panose="03000509000000000000" pitchFamily="65" charset="-120"/>
                 <a:cs typeface="Times New Roman" panose="02020603050405020304" pitchFamily="18" charset="0"/>
               </a:rPr>
-              <a:t>0</a:t>
+              <a:t>什麼是 </a:t>
             </a:r>
+            <a:r>
+              <a:rPr lang="en-US" altLang="zh-TW" sz="2000" dirty="0">
+                <a:latin typeface="Times New Roman" panose="02020603050405020304" pitchFamily="18" charset="0"/>
+                <a:ea typeface="標楷體" panose="03000509000000000000" pitchFamily="65" charset="-120"/>
+                <a:cs typeface="Times New Roman" panose="02020603050405020304" pitchFamily="18" charset="0"/>
+              </a:rPr>
+              <a:t>Device Color Space</a:t>
+            </a:r>
+            <a:r>
+              <a:rPr lang="zh-TW" altLang="en-US" sz="2000" dirty="0">
+                <a:latin typeface="Times New Roman" panose="02020603050405020304" pitchFamily="18" charset="0"/>
+                <a:ea typeface="標楷體" panose="03000509000000000000" pitchFamily="65" charset="-120"/>
+                <a:cs typeface="Times New Roman" panose="02020603050405020304" pitchFamily="18" charset="0"/>
+              </a:rPr>
+              <a:t>？</a:t>
+            </a:r>
+            <a:endParaRPr lang="en-US" altLang="zh-TW" sz="2000" dirty="0">
+              <a:latin typeface="Times New Roman" panose="02020603050405020304" pitchFamily="18" charset="0"/>
+              <a:ea typeface="標楷體" panose="03000509000000000000" pitchFamily="65" charset="-120"/>
+              <a:cs typeface="Times New Roman" panose="02020603050405020304" pitchFamily="18" charset="0"/>
+            </a:endParaRPr>
           </a:p>
         </p:txBody>
       </p:sp>
+      <p:pic>
+        <p:nvPicPr>
+          <p:cNvPr id="15" name="圖片 14">
+            <a:extLst>
+              <a:ext uri="{FF2B5EF4-FFF2-40B4-BE49-F238E27FC236}">
+                <a16:creationId xmlns:a16="http://schemas.microsoft.com/office/drawing/2014/main" id="{0C1BDABE-FEA0-3ED5-4398-9390AE5CB23C}"/>
+              </a:ext>
+            </a:extLst>
+          </p:cNvPr>
+          <p:cNvPicPr>
+            <a:picLocks noChangeAspect="1"/>
+          </p:cNvPicPr>
+          <p:nvPr/>
+        </p:nvPicPr>
+        <p:blipFill>
+          <a:blip r:embed="rId3"/>
+          <a:stretch>
+            <a:fillRect/>
+          </a:stretch>
+        </p:blipFill>
+        <p:spPr>
+          <a:xfrm>
+            <a:off x="1214582" y="1799222"/>
+            <a:ext cx="7476836" cy="4409681"/>
+          </a:xfrm>
+          <a:prstGeom prst="rect">
+            <a:avLst/>
+          </a:prstGeom>
+        </p:spPr>
+      </p:pic>
     </p:spTree>
     <p:extLst>
       <p:ext uri="{BB962C8B-B14F-4D97-AF65-F5344CB8AC3E}">
@@ -7431,6 +8056,542 @@
 </file>
 
 <file path=ppt/slides/slide4.xml><?xml version="1.0" encoding="utf-8"?>
+<p:sld xmlns:a="http://schemas.openxmlformats.org/drawingml/2006/main" xmlns:r="http://schemas.openxmlformats.org/officeDocument/2006/relationships" xmlns:p="http://schemas.openxmlformats.org/presentationml/2006/main">
+  <p:cSld>
+    <p:spTree>
+      <p:nvGrpSpPr>
+        <p:cNvPr id="1" name="">
+          <a:extLst>
+            <a:ext uri="{FF2B5EF4-FFF2-40B4-BE49-F238E27FC236}">
+              <a16:creationId xmlns:a16="http://schemas.microsoft.com/office/drawing/2014/main" id="{DD8453AC-EB70-4A67-F417-8BC6D8250DCE}"/>
+            </a:ext>
+          </a:extLst>
+        </p:cNvPr>
+        <p:cNvGrpSpPr/>
+        <p:nvPr/>
+      </p:nvGrpSpPr>
+      <p:grpSpPr>
+        <a:xfrm>
+          <a:off x="0" y="0"/>
+          <a:ext cx="0" cy="0"/>
+          <a:chOff x="0" y="0"/>
+          <a:chExt cx="0" cy="0"/>
+        </a:xfrm>
+      </p:grpSpPr>
+      <p:pic>
+        <p:nvPicPr>
+          <p:cNvPr id="14" name="圖片 13">
+            <a:extLst>
+              <a:ext uri="{FF2B5EF4-FFF2-40B4-BE49-F238E27FC236}">
+                <a16:creationId xmlns:a16="http://schemas.microsoft.com/office/drawing/2014/main" id="{646051B0-D8D4-340A-55DE-B64A86894E7E}"/>
+              </a:ext>
+            </a:extLst>
+          </p:cNvPr>
+          <p:cNvPicPr>
+            <a:picLocks noChangeAspect="1"/>
+          </p:cNvPicPr>
+          <p:nvPr/>
+        </p:nvPicPr>
+        <p:blipFill>
+          <a:blip r:embed="rId3"/>
+          <a:stretch>
+            <a:fillRect/>
+          </a:stretch>
+        </p:blipFill>
+        <p:spPr>
+          <a:xfrm>
+            <a:off x="1268497" y="1799222"/>
+            <a:ext cx="7369006" cy="4401214"/>
+          </a:xfrm>
+          <a:prstGeom prst="rect">
+            <a:avLst/>
+          </a:prstGeom>
+        </p:spPr>
+      </p:pic>
+      <p:sp>
+        <p:nvSpPr>
+          <p:cNvPr id="4" name="文字方塊 3">
+            <a:extLst>
+              <a:ext uri="{FF2B5EF4-FFF2-40B4-BE49-F238E27FC236}">
+                <a16:creationId xmlns:a16="http://schemas.microsoft.com/office/drawing/2014/main" id="{2E62D90A-238F-15C1-A17C-8D898584815F}"/>
+              </a:ext>
+            </a:extLst>
+          </p:cNvPr>
+          <p:cNvSpPr txBox="1"/>
+          <p:nvPr/>
+        </p:nvSpPr>
+        <p:spPr>
+          <a:xfrm>
+            <a:off x="520699" y="1369489"/>
+            <a:ext cx="7669813" cy="440633"/>
+          </a:xfrm>
+          <a:prstGeom prst="rect">
+            <a:avLst/>
+          </a:prstGeom>
+          <a:noFill/>
+        </p:spPr>
+        <p:txBody>
+          <a:bodyPr wrap="square">
+            <a:spAutoFit/>
+          </a:bodyPr>
+          <a:lstStyle/>
+          <a:p>
+            <a:pPr marL="457200" lvl="1" indent="-406400">
+              <a:lnSpc>
+                <a:spcPts val="3000"/>
+              </a:lnSpc>
+              <a:spcBef>
+                <a:spcPts val="560"/>
+              </a:spcBef>
+              <a:buClr>
+                <a:schemeClr val="accent2"/>
+              </a:buClr>
+              <a:buSzPts val="2800"/>
+              <a:buFont typeface="Noto Sans Symbols"/>
+              <a:buChar char="❖"/>
+            </a:pPr>
+            <a:r>
+              <a:rPr lang="zh-TW" altLang="en-US" sz="2000" dirty="0">
+                <a:latin typeface="Times New Roman" panose="02020603050405020304" pitchFamily="18" charset="0"/>
+                <a:ea typeface="標楷體" panose="03000509000000000000" pitchFamily="65" charset="-120"/>
+                <a:cs typeface="Times New Roman" panose="02020603050405020304" pitchFamily="18" charset="0"/>
+              </a:rPr>
+              <a:t>什麼是 </a:t>
+            </a:r>
+            <a:r>
+              <a:rPr lang="en-US" altLang="zh-TW" sz="2000" dirty="0">
+                <a:latin typeface="Times New Roman" panose="02020603050405020304" pitchFamily="18" charset="0"/>
+                <a:ea typeface="標楷體" panose="03000509000000000000" pitchFamily="65" charset="-120"/>
+                <a:cs typeface="Times New Roman" panose="02020603050405020304" pitchFamily="18" charset="0"/>
+              </a:rPr>
+              <a:t>Device Color Space</a:t>
+            </a:r>
+            <a:r>
+              <a:rPr lang="zh-TW" altLang="en-US" sz="2000" dirty="0">
+                <a:latin typeface="Times New Roman" panose="02020603050405020304" pitchFamily="18" charset="0"/>
+                <a:ea typeface="標楷體" panose="03000509000000000000" pitchFamily="65" charset="-120"/>
+                <a:cs typeface="Times New Roman" panose="02020603050405020304" pitchFamily="18" charset="0"/>
+              </a:rPr>
+              <a:t>？</a:t>
+            </a:r>
+            <a:endParaRPr lang="en-US" altLang="zh-TW" sz="2000" dirty="0">
+              <a:latin typeface="Times New Roman" panose="02020603050405020304" pitchFamily="18" charset="0"/>
+              <a:ea typeface="標楷體" panose="03000509000000000000" pitchFamily="65" charset="-120"/>
+              <a:cs typeface="Times New Roman" panose="02020603050405020304" pitchFamily="18" charset="0"/>
+            </a:endParaRPr>
+          </a:p>
+        </p:txBody>
+      </p:sp>
+      <p:sp>
+        <p:nvSpPr>
+          <p:cNvPr id="8" name="標題 1">
+            <a:extLst>
+              <a:ext uri="{FF2B5EF4-FFF2-40B4-BE49-F238E27FC236}">
+                <a16:creationId xmlns:a16="http://schemas.microsoft.com/office/drawing/2014/main" id="{A46802AE-6441-4C36-D719-6F0C7C8257B9}"/>
+              </a:ext>
+            </a:extLst>
+          </p:cNvPr>
+          <p:cNvSpPr>
+            <a:spLocks noGrp="1"/>
+          </p:cNvSpPr>
+          <p:nvPr>
+            <p:ph type="title"/>
+          </p:nvPr>
+        </p:nvSpPr>
+        <p:spPr>
+          <a:xfrm>
+            <a:off x="609602" y="609600"/>
+            <a:ext cx="8077200" cy="533400"/>
+          </a:xfrm>
+        </p:spPr>
+        <p:txBody>
+          <a:bodyPr/>
+          <a:lstStyle/>
+          <a:p>
+            <a:r>
+              <a:rPr lang="zh-TW" altLang="en-US" dirty="0">
+                <a:latin typeface="Times New Roman" panose="02020603050405020304" pitchFamily="18" charset="0"/>
+                <a:ea typeface="標楷體" panose="03000509000000000000" pitchFamily="65" charset="-120"/>
+                <a:cs typeface="Times New Roman" panose="02020603050405020304" pitchFamily="18" charset="0"/>
+              </a:rPr>
+              <a:t>本次進度</a:t>
+            </a:r>
+            <a:r>
+              <a:rPr lang="en-US" altLang="zh-TW" dirty="0">
+                <a:latin typeface="Times New Roman" panose="02020603050405020304" pitchFamily="18" charset="0"/>
+                <a:ea typeface="標楷體" panose="03000509000000000000" pitchFamily="65" charset="-120"/>
+                <a:cs typeface="Times New Roman" panose="02020603050405020304" pitchFamily="18" charset="0"/>
+              </a:rPr>
+              <a:t>:</a:t>
+            </a:r>
+            <a:r>
+              <a:rPr lang="en-US" altLang="zh-TW" dirty="0"/>
+              <a:t>PCS(Profile Connection Space)</a:t>
+            </a:r>
+            <a:endParaRPr lang="zh-TW" altLang="en-US" dirty="0">
+              <a:latin typeface="Times New Roman" panose="02020603050405020304" pitchFamily="18" charset="0"/>
+              <a:ea typeface="標楷體" panose="03000509000000000000" pitchFamily="65" charset="-120"/>
+              <a:cs typeface="Times New Roman" panose="02020603050405020304" pitchFamily="18" charset="0"/>
+            </a:endParaRPr>
+          </a:p>
+        </p:txBody>
+      </p:sp>
+    </p:spTree>
+    <p:extLst>
+      <p:ext uri="{BB962C8B-B14F-4D97-AF65-F5344CB8AC3E}">
+        <p14:creationId xmlns:p14="http://schemas.microsoft.com/office/powerpoint/2010/main" val="1134039738"/>
+      </p:ext>
+    </p:extLst>
+  </p:cSld>
+  <p:clrMapOvr>
+    <a:masterClrMapping/>
+  </p:clrMapOvr>
+</p:sld>
+</file>
+
+<file path=ppt/slides/slide5.xml><?xml version="1.0" encoding="utf-8"?>
+<p:sld xmlns:a="http://schemas.openxmlformats.org/drawingml/2006/main" xmlns:r="http://schemas.openxmlformats.org/officeDocument/2006/relationships" xmlns:p="http://schemas.openxmlformats.org/presentationml/2006/main">
+  <p:cSld>
+    <p:spTree>
+      <p:nvGrpSpPr>
+        <p:cNvPr id="1" name="">
+          <a:extLst>
+            <a:ext uri="{FF2B5EF4-FFF2-40B4-BE49-F238E27FC236}">
+              <a16:creationId xmlns:a16="http://schemas.microsoft.com/office/drawing/2014/main" id="{DD8453AC-EB70-4A67-F417-8BC6D8250DCE}"/>
+            </a:ext>
+          </a:extLst>
+        </p:cNvPr>
+        <p:cNvGrpSpPr/>
+        <p:nvPr/>
+      </p:nvGrpSpPr>
+      <p:grpSpPr>
+        <a:xfrm>
+          <a:off x="0" y="0"/>
+          <a:ext cx="0" cy="0"/>
+          <a:chOff x="0" y="0"/>
+          <a:chExt cx="0" cy="0"/>
+        </a:xfrm>
+      </p:grpSpPr>
+      <p:sp>
+        <p:nvSpPr>
+          <p:cNvPr id="4" name="文字方塊 3">
+            <a:extLst>
+              <a:ext uri="{FF2B5EF4-FFF2-40B4-BE49-F238E27FC236}">
+                <a16:creationId xmlns:a16="http://schemas.microsoft.com/office/drawing/2014/main" id="{2E62D90A-238F-15C1-A17C-8D898584815F}"/>
+              </a:ext>
+            </a:extLst>
+          </p:cNvPr>
+          <p:cNvSpPr txBox="1"/>
+          <p:nvPr/>
+        </p:nvSpPr>
+        <p:spPr>
+          <a:xfrm>
+            <a:off x="520699" y="1369489"/>
+            <a:ext cx="7669813" cy="440633"/>
+          </a:xfrm>
+          <a:prstGeom prst="rect">
+            <a:avLst/>
+          </a:prstGeom>
+          <a:noFill/>
+        </p:spPr>
+        <p:txBody>
+          <a:bodyPr wrap="square">
+            <a:spAutoFit/>
+          </a:bodyPr>
+          <a:lstStyle/>
+          <a:p>
+            <a:pPr marL="457200" lvl="1" indent="-406400">
+              <a:lnSpc>
+                <a:spcPts val="3000"/>
+              </a:lnSpc>
+              <a:spcBef>
+                <a:spcPts val="560"/>
+              </a:spcBef>
+              <a:buClr>
+                <a:schemeClr val="accent2"/>
+              </a:buClr>
+              <a:buSzPts val="2800"/>
+              <a:buFont typeface="Noto Sans Symbols"/>
+              <a:buChar char="❖"/>
+            </a:pPr>
+            <a:r>
+              <a:rPr lang="zh-TW" altLang="en-US" sz="2000" dirty="0">
+                <a:latin typeface="Times New Roman" panose="02020603050405020304" pitchFamily="18" charset="0"/>
+                <a:ea typeface="標楷體" panose="03000509000000000000" pitchFamily="65" charset="-120"/>
+                <a:cs typeface="Times New Roman" panose="02020603050405020304" pitchFamily="18" charset="0"/>
+              </a:rPr>
+              <a:t>什麼是 </a:t>
+            </a:r>
+            <a:r>
+              <a:rPr lang="en-US" altLang="zh-TW" sz="2000" dirty="0">
+                <a:latin typeface="Times New Roman" panose="02020603050405020304" pitchFamily="18" charset="0"/>
+                <a:ea typeface="標楷體" panose="03000509000000000000" pitchFamily="65" charset="-120"/>
+                <a:cs typeface="Times New Roman" panose="02020603050405020304" pitchFamily="18" charset="0"/>
+              </a:rPr>
+              <a:t>Device Color Space</a:t>
+            </a:r>
+            <a:r>
+              <a:rPr lang="zh-TW" altLang="en-US" sz="2000" dirty="0">
+                <a:latin typeface="Times New Roman" panose="02020603050405020304" pitchFamily="18" charset="0"/>
+                <a:ea typeface="標楷體" panose="03000509000000000000" pitchFamily="65" charset="-120"/>
+                <a:cs typeface="Times New Roman" panose="02020603050405020304" pitchFamily="18" charset="0"/>
+              </a:rPr>
+              <a:t>？</a:t>
+            </a:r>
+            <a:endParaRPr lang="en-US" altLang="zh-TW" sz="2000" dirty="0">
+              <a:latin typeface="Times New Roman" panose="02020603050405020304" pitchFamily="18" charset="0"/>
+              <a:ea typeface="標楷體" panose="03000509000000000000" pitchFamily="65" charset="-120"/>
+              <a:cs typeface="Times New Roman" panose="02020603050405020304" pitchFamily="18" charset="0"/>
+            </a:endParaRPr>
+          </a:p>
+        </p:txBody>
+      </p:sp>
+      <p:sp>
+        <p:nvSpPr>
+          <p:cNvPr id="8" name="標題 1">
+            <a:extLst>
+              <a:ext uri="{FF2B5EF4-FFF2-40B4-BE49-F238E27FC236}">
+                <a16:creationId xmlns:a16="http://schemas.microsoft.com/office/drawing/2014/main" id="{A46802AE-6441-4C36-D719-6F0C7C8257B9}"/>
+              </a:ext>
+            </a:extLst>
+          </p:cNvPr>
+          <p:cNvSpPr>
+            <a:spLocks noGrp="1"/>
+          </p:cNvSpPr>
+          <p:nvPr>
+            <p:ph type="title"/>
+          </p:nvPr>
+        </p:nvSpPr>
+        <p:spPr>
+          <a:xfrm>
+            <a:off x="609602" y="609600"/>
+            <a:ext cx="8077200" cy="533400"/>
+          </a:xfrm>
+        </p:spPr>
+        <p:txBody>
+          <a:bodyPr/>
+          <a:lstStyle/>
+          <a:p>
+            <a:r>
+              <a:rPr lang="zh-TW" altLang="en-US" dirty="0">
+                <a:latin typeface="Times New Roman" panose="02020603050405020304" pitchFamily="18" charset="0"/>
+                <a:ea typeface="標楷體" panose="03000509000000000000" pitchFamily="65" charset="-120"/>
+                <a:cs typeface="Times New Roman" panose="02020603050405020304" pitchFamily="18" charset="0"/>
+              </a:rPr>
+              <a:t>本次進度</a:t>
+            </a:r>
+            <a:r>
+              <a:rPr lang="en-US" altLang="zh-TW" dirty="0">
+                <a:latin typeface="Times New Roman" panose="02020603050405020304" pitchFamily="18" charset="0"/>
+                <a:ea typeface="標楷體" panose="03000509000000000000" pitchFamily="65" charset="-120"/>
+                <a:cs typeface="Times New Roman" panose="02020603050405020304" pitchFamily="18" charset="0"/>
+              </a:rPr>
+              <a:t>:</a:t>
+            </a:r>
+            <a:r>
+              <a:rPr lang="en-US" altLang="zh-TW" dirty="0"/>
+              <a:t>PCS(Profile Connection Space)</a:t>
+            </a:r>
+            <a:endParaRPr lang="zh-TW" altLang="en-US" dirty="0">
+              <a:latin typeface="Times New Roman" panose="02020603050405020304" pitchFamily="18" charset="0"/>
+              <a:ea typeface="標楷體" panose="03000509000000000000" pitchFamily="65" charset="-120"/>
+              <a:cs typeface="Times New Roman" panose="02020603050405020304" pitchFamily="18" charset="0"/>
+            </a:endParaRPr>
+          </a:p>
+        </p:txBody>
+      </p:sp>
+    </p:spTree>
+    <p:extLst>
+      <p:ext uri="{BB962C8B-B14F-4D97-AF65-F5344CB8AC3E}">
+        <p14:creationId xmlns:p14="http://schemas.microsoft.com/office/powerpoint/2010/main" val="2096281752"/>
+      </p:ext>
+    </p:extLst>
+  </p:cSld>
+  <p:clrMapOvr>
+    <a:masterClrMapping/>
+  </p:clrMapOvr>
+</p:sld>
+</file>
+
+<file path=ppt/slides/slide6.xml><?xml version="1.0" encoding="utf-8"?>
+<p:sld xmlns:a="http://schemas.openxmlformats.org/drawingml/2006/main" xmlns:r="http://schemas.openxmlformats.org/officeDocument/2006/relationships" xmlns:p="http://schemas.openxmlformats.org/presentationml/2006/main">
+  <p:cSld>
+    <p:spTree>
+      <p:nvGrpSpPr>
+        <p:cNvPr id="1" name=""/>
+        <p:cNvGrpSpPr/>
+        <p:nvPr/>
+      </p:nvGrpSpPr>
+      <p:grpSpPr>
+        <a:xfrm>
+          <a:off x="0" y="0"/>
+          <a:ext cx="0" cy="0"/>
+          <a:chOff x="0" y="0"/>
+          <a:chExt cx="0" cy="0"/>
+        </a:xfrm>
+      </p:grpSpPr>
+      <p:sp>
+        <p:nvSpPr>
+          <p:cNvPr id="2" name="標題 1">
+            <a:extLst>
+              <a:ext uri="{FF2B5EF4-FFF2-40B4-BE49-F238E27FC236}">
+                <a16:creationId xmlns:a16="http://schemas.microsoft.com/office/drawing/2014/main" id="{F230278E-9DDB-1083-DE26-7377E52832B3}"/>
+              </a:ext>
+            </a:extLst>
+          </p:cNvPr>
+          <p:cNvSpPr>
+            <a:spLocks noGrp="1"/>
+          </p:cNvSpPr>
+          <p:nvPr>
+            <p:ph type="title"/>
+          </p:nvPr>
+        </p:nvSpPr>
+        <p:spPr/>
+        <p:txBody>
+          <a:bodyPr/>
+          <a:lstStyle/>
+          <a:p>
+            <a:r>
+              <a:rPr lang="zh-TW" altLang="en-US" dirty="0">
+                <a:latin typeface="Times New Roman" panose="02020603050405020304" pitchFamily="18" charset="0"/>
+                <a:ea typeface="標楷體" panose="03000509000000000000" pitchFamily="65" charset="-120"/>
+                <a:cs typeface="Times New Roman" panose="02020603050405020304" pitchFamily="18" charset="0"/>
+              </a:rPr>
+              <a:t>本次進度</a:t>
+            </a:r>
+            <a:r>
+              <a:rPr lang="en-US" altLang="zh-TW" dirty="0">
+                <a:latin typeface="Times New Roman" panose="02020603050405020304" pitchFamily="18" charset="0"/>
+                <a:ea typeface="標楷體" panose="03000509000000000000" pitchFamily="65" charset="-120"/>
+                <a:cs typeface="Times New Roman" panose="02020603050405020304" pitchFamily="18" charset="0"/>
+              </a:rPr>
+              <a:t>:</a:t>
+            </a:r>
+            <a:endParaRPr lang="zh-TW" altLang="en-US" dirty="0"/>
+          </a:p>
+        </p:txBody>
+      </p:sp>
+      <p:sp>
+        <p:nvSpPr>
+          <p:cNvPr id="3" name="圖表版面配置區 2">
+            <a:extLst>
+              <a:ext uri="{FF2B5EF4-FFF2-40B4-BE49-F238E27FC236}">
+                <a16:creationId xmlns:a16="http://schemas.microsoft.com/office/drawing/2014/main" id="{6F76EA7C-89FA-596C-B414-662A677616BF}"/>
+              </a:ext>
+            </a:extLst>
+          </p:cNvPr>
+          <p:cNvSpPr>
+            <a:spLocks noGrp="1"/>
+          </p:cNvSpPr>
+          <p:nvPr>
+            <p:ph type="chart" idx="1"/>
+          </p:nvPr>
+        </p:nvSpPr>
+        <p:spPr/>
+      </p:sp>
+    </p:spTree>
+    <p:extLst>
+      <p:ext uri="{BB962C8B-B14F-4D97-AF65-F5344CB8AC3E}">
+        <p14:creationId xmlns:p14="http://schemas.microsoft.com/office/powerpoint/2010/main" val="1903635022"/>
+      </p:ext>
+    </p:extLst>
+  </p:cSld>
+  <p:clrMapOvr>
+    <a:masterClrMapping/>
+  </p:clrMapOvr>
+</p:sld>
+</file>
+
+<file path=ppt/slides/slide7.xml><?xml version="1.0" encoding="utf-8"?>
+<p:sld xmlns:a="http://schemas.openxmlformats.org/drawingml/2006/main" xmlns:r="http://schemas.openxmlformats.org/officeDocument/2006/relationships" xmlns:p="http://schemas.openxmlformats.org/presentationml/2006/main">
+  <p:cSld>
+    <p:spTree>
+      <p:nvGrpSpPr>
+        <p:cNvPr id="1" name=""/>
+        <p:cNvGrpSpPr/>
+        <p:nvPr/>
+      </p:nvGrpSpPr>
+      <p:grpSpPr>
+        <a:xfrm>
+          <a:off x="0" y="0"/>
+          <a:ext cx="0" cy="0"/>
+          <a:chOff x="0" y="0"/>
+          <a:chExt cx="0" cy="0"/>
+        </a:xfrm>
+      </p:grpSpPr>
+      <p:sp>
+        <p:nvSpPr>
+          <p:cNvPr id="2" name="標題 1">
+            <a:extLst>
+              <a:ext uri="{FF2B5EF4-FFF2-40B4-BE49-F238E27FC236}">
+                <a16:creationId xmlns:a16="http://schemas.microsoft.com/office/drawing/2014/main" id="{F230278E-9DDB-1083-DE26-7377E52832B3}"/>
+              </a:ext>
+            </a:extLst>
+          </p:cNvPr>
+          <p:cNvSpPr>
+            <a:spLocks noGrp="1"/>
+          </p:cNvSpPr>
+          <p:nvPr>
+            <p:ph type="title"/>
+          </p:nvPr>
+        </p:nvSpPr>
+        <p:spPr/>
+        <p:txBody>
+          <a:bodyPr/>
+          <a:lstStyle/>
+          <a:p>
+            <a:r>
+              <a:rPr lang="zh-TW" altLang="en-US" dirty="0">
+                <a:latin typeface="Times New Roman" panose="02020603050405020304" pitchFamily="18" charset="0"/>
+                <a:ea typeface="標楷體" panose="03000509000000000000" pitchFamily="65" charset="-120"/>
+                <a:cs typeface="Times New Roman" panose="02020603050405020304" pitchFamily="18" charset="0"/>
+              </a:rPr>
+              <a:t>本次進度</a:t>
+            </a:r>
+            <a:r>
+              <a:rPr lang="en-US" altLang="zh-TW" dirty="0">
+                <a:latin typeface="Times New Roman" panose="02020603050405020304" pitchFamily="18" charset="0"/>
+                <a:ea typeface="標楷體" panose="03000509000000000000" pitchFamily="65" charset="-120"/>
+                <a:cs typeface="Times New Roman" panose="02020603050405020304" pitchFamily="18" charset="0"/>
+              </a:rPr>
+              <a:t>:</a:t>
+            </a:r>
+            <a:endParaRPr lang="zh-TW" altLang="en-US" dirty="0"/>
+          </a:p>
+        </p:txBody>
+      </p:sp>
+      <p:sp>
+        <p:nvSpPr>
+          <p:cNvPr id="3" name="圖表版面配置區 2">
+            <a:extLst>
+              <a:ext uri="{FF2B5EF4-FFF2-40B4-BE49-F238E27FC236}">
+                <a16:creationId xmlns:a16="http://schemas.microsoft.com/office/drawing/2014/main" id="{6F76EA7C-89FA-596C-B414-662A677616BF}"/>
+              </a:ext>
+            </a:extLst>
+          </p:cNvPr>
+          <p:cNvSpPr>
+            <a:spLocks noGrp="1"/>
+          </p:cNvSpPr>
+          <p:nvPr>
+            <p:ph type="chart" idx="1"/>
+          </p:nvPr>
+        </p:nvSpPr>
+        <p:spPr/>
+      </p:sp>
+    </p:spTree>
+    <p:extLst>
+      <p:ext uri="{BB962C8B-B14F-4D97-AF65-F5344CB8AC3E}">
+        <p14:creationId xmlns:p14="http://schemas.microsoft.com/office/powerpoint/2010/main" val="2538759998"/>
+      </p:ext>
+    </p:extLst>
+  </p:cSld>
+  <p:clrMapOvr>
+    <a:masterClrMapping/>
+  </p:clrMapOvr>
+</p:sld>
+</file>
+
+<file path=ppt/slides/slide8.xml><?xml version="1.0" encoding="utf-8"?>
 <p:sld xmlns:a="http://schemas.openxmlformats.org/drawingml/2006/main" xmlns:r="http://schemas.openxmlformats.org/officeDocument/2006/relationships" xmlns:p="http://schemas.openxmlformats.org/presentationml/2006/main">
   <p:cSld>
     <p:spTree>

--- a/ICCPROFILE.pptx
+++ b/ICCPROFILE.pptx
@@ -5,7 +5,7 @@
     <p:sldMasterId id="2147483658" r:id="rId1"/>
   </p:sldMasterIdLst>
   <p:notesMasterIdLst>
-    <p:notesMasterId r:id="rId10"/>
+    <p:notesMasterId r:id="rId9"/>
   </p:notesMasterIdLst>
   <p:sldIdLst>
     <p:sldId id="277" r:id="rId2"/>
@@ -13,9 +13,8 @@
     <p:sldId id="1937" r:id="rId4"/>
     <p:sldId id="1938" r:id="rId5"/>
     <p:sldId id="1997" r:id="rId6"/>
-    <p:sldId id="1995" r:id="rId7"/>
-    <p:sldId id="1996" r:id="rId8"/>
-    <p:sldId id="286" r:id="rId9"/>
+    <p:sldId id="1998" r:id="rId7"/>
+    <p:sldId id="286" r:id="rId8"/>
   </p:sldIdLst>
   <p:sldSz cx="9906000" cy="6858000" type="A4"/>
   <p:notesSz cx="7315200" cy="9601200"/>
@@ -262,8 +261,7 @@
             <p14:sldId id="1937"/>
             <p14:sldId id="1938"/>
             <p14:sldId id="1997"/>
-            <p14:sldId id="1995"/>
-            <p14:sldId id="1996"/>
+            <p14:sldId id="1998"/>
           </p14:sldIdLst>
         </p14:section>
         <p14:section name="End" id="{33EEDC85-A799-4CB3-BF13-F4955B8630BE}">
@@ -1822,44 +1820,17 @@
           <a:lstStyle/>
           <a:p>
             <a:r>
-              <a:rPr lang="zh-TW" altLang="en-US" dirty="0"/>
-              <a:t>不同裝置使用不同的方式表示色彩。因此，</a:t>
-            </a:r>
-            <a:r>
-              <a:rPr lang="en-US" altLang="zh-TW" dirty="0"/>
-              <a:t>RGB </a:t>
-            </a:r>
-            <a:r>
-              <a:rPr lang="zh-TW" altLang="en-US" dirty="0"/>
-              <a:t>數值本身只是「裝置值（</a:t>
-            </a:r>
-            <a:r>
-              <a:rPr lang="en-US" altLang="zh-TW" dirty="0"/>
-              <a:t>device values</a:t>
-            </a:r>
-            <a:r>
-              <a:rPr lang="zh-TW" altLang="en-US" dirty="0"/>
-              <a:t>）」，並不直接等同於一個跨裝置通用的顏色。</a:t>
+              <a:rPr lang="zh-TW" altLang="zh-TW" dirty="0"/>
+              <a:t>不同裝置有自己的色彩表示方式。如果直接做裝置對裝置的轉換，裝置種類增加時，就需要考慮更多裝置間的對應關係。</a:t>
             </a:r>
             <a:endParaRPr lang="en-US" altLang="zh-TW" dirty="0"/>
           </a:p>
           <a:p>
             <a:r>
-              <a:rPr lang="en-US" altLang="zh-TW" dirty="0"/>
-              <a:t>ICC </a:t>
+              <a:rPr lang="zh-TW" altLang="en-US" dirty="0"/>
+              <a:t>例如：相機的照片想要在印表機上顯示相同畫面他們的色彩關係必然需要做轉換，如此一來設備數量變多時，每台設備間都要有獨立的轉換關係會讓色彩管理變得困難。</a:t>
             </a:r>
-            <a:r>
-              <a:rPr lang="zh-TW" altLang="en-US" dirty="0"/>
-              <a:t>將這類裝置原生使用的色彩表示方式稱為 </a:t>
-            </a:r>
-            <a:r>
-              <a:rPr lang="en-US" altLang="zh-TW" b="1" dirty="0"/>
-              <a:t>device color space</a:t>
-            </a:r>
-            <a:r>
-              <a:rPr lang="zh-TW" altLang="en-US" dirty="0"/>
-              <a:t>。</a:t>
-            </a:r>
+            <a:endParaRPr lang="en-US" altLang="zh-TW" dirty="0"/>
           </a:p>
         </p:txBody>
       </p:sp>
@@ -1992,6 +1963,22 @@
           <a:bodyPr/>
           <a:lstStyle/>
           <a:p>
+            <a:r>
+              <a:rPr lang="zh-TW" altLang="en-US" dirty="0"/>
+              <a:t>因此</a:t>
+            </a:r>
+            <a:r>
+              <a:rPr lang="en-US" altLang="zh-TW" dirty="0"/>
+              <a:t>ICC</a:t>
+            </a:r>
+            <a:r>
+              <a:rPr lang="zh-TW" altLang="en-US" dirty="0"/>
+              <a:t>做了一件事，他訂了讓所有設備都能通用的標準，這樣不同設備間就能</a:t>
+            </a:r>
+            <a:r>
+              <a:rPr lang="zh-TW" altLang="zh-TW" dirty="0"/>
+              <a:t>將自己的 Device Color Space 與共同的 PCS 建立轉換關係，使不同設備的 Profile 可以透過同一個 PCS 互相連接。</a:t>
+            </a:r>
             <a:endParaRPr lang="zh-TW" altLang="en-US" dirty="0"/>
           </a:p>
         </p:txBody>
@@ -2201,6 +2188,143 @@
   <p:cSld>
     <p:spTree>
       <p:nvGrpSpPr>
+        <p:cNvPr id="1" name="">
+          <a:extLst>
+            <a:ext uri="{FF2B5EF4-FFF2-40B4-BE49-F238E27FC236}">
+              <a16:creationId xmlns:a16="http://schemas.microsoft.com/office/drawing/2014/main" id="{9A851A70-D7FF-B69E-2F1F-5276D7F44C59}"/>
+            </a:ext>
+          </a:extLst>
+        </p:cNvPr>
+        <p:cNvGrpSpPr/>
+        <p:nvPr/>
+      </p:nvGrpSpPr>
+      <p:grpSpPr>
+        <a:xfrm>
+          <a:off x="0" y="0"/>
+          <a:ext cx="0" cy="0"/>
+          <a:chOff x="0" y="0"/>
+          <a:chExt cx="0" cy="0"/>
+        </a:xfrm>
+      </p:grpSpPr>
+      <p:sp>
+        <p:nvSpPr>
+          <p:cNvPr id="2" name="投影片影像版面配置區 1">
+            <a:extLst>
+              <a:ext uri="{FF2B5EF4-FFF2-40B4-BE49-F238E27FC236}">
+                <a16:creationId xmlns:a16="http://schemas.microsoft.com/office/drawing/2014/main" id="{4FB2E1DE-40DE-B1BA-7135-64BFFB1631B9}"/>
+              </a:ext>
+            </a:extLst>
+          </p:cNvPr>
+          <p:cNvSpPr>
+            <a:spLocks noGrp="1" noRot="1" noChangeAspect="1"/>
+          </p:cNvSpPr>
+          <p:nvPr>
+            <p:ph type="sldImg"/>
+          </p:nvPr>
+        </p:nvSpPr>
+        <p:spPr/>
+      </p:sp>
+      <p:sp>
+        <p:nvSpPr>
+          <p:cNvPr id="3" name="備忘稿版面配置區 2">
+            <a:extLst>
+              <a:ext uri="{FF2B5EF4-FFF2-40B4-BE49-F238E27FC236}">
+                <a16:creationId xmlns:a16="http://schemas.microsoft.com/office/drawing/2014/main" id="{C4F8DB8E-F5F1-21EB-D41F-2C635FB715D5}"/>
+              </a:ext>
+            </a:extLst>
+          </p:cNvPr>
+          <p:cNvSpPr>
+            <a:spLocks noGrp="1"/>
+          </p:cNvSpPr>
+          <p:nvPr>
+            <p:ph type="body" idx="1"/>
+          </p:nvPr>
+        </p:nvSpPr>
+        <p:spPr/>
+        <p:txBody>
+          <a:bodyPr/>
+          <a:lstStyle/>
+          <a:p>
+            <a:r>
+              <a:rPr lang="zh-TW" altLang="zh-TW"/>
+              <a:t>ICC Profile 不是一個單純的「RGB → XYZ 表」</a:t>
+            </a:r>
+            <a:endParaRPr lang="zh-TW" altLang="en-US" dirty="0"/>
+          </a:p>
+        </p:txBody>
+      </p:sp>
+      <p:sp>
+        <p:nvSpPr>
+          <p:cNvPr id="4" name="投影片編號版面配置區 3">
+            <a:extLst>
+              <a:ext uri="{FF2B5EF4-FFF2-40B4-BE49-F238E27FC236}">
+                <a16:creationId xmlns:a16="http://schemas.microsoft.com/office/drawing/2014/main" id="{A81AD260-1FA1-46D2-EEFC-6CE390861C06}"/>
+              </a:ext>
+            </a:extLst>
+          </p:cNvPr>
+          <p:cNvSpPr>
+            <a:spLocks noGrp="1"/>
+          </p:cNvSpPr>
+          <p:nvPr>
+            <p:ph type="sldNum" idx="12"/>
+          </p:nvPr>
+        </p:nvSpPr>
+        <p:spPr/>
+        <p:txBody>
+          <a:bodyPr/>
+          <a:lstStyle/>
+          <a:p>
+            <a:pPr marL="0" marR="0" lvl="0" indent="0" algn="r" rtl="0">
+              <a:spcBef>
+                <a:spcPts val="0"/>
+              </a:spcBef>
+              <a:spcAft>
+                <a:spcPts val="0"/>
+              </a:spcAft>
+              <a:buNone/>
+            </a:pPr>
+            <a:fld id="{00000000-1234-1234-1234-123412341234}" type="slidenum">
+              <a:rPr lang="en-US" sz="2000" b="0" i="0" u="none" strike="noStrike" cap="none" smtClean="0">
+                <a:solidFill>
+                  <a:schemeClr val="dk1"/>
+                </a:solidFill>
+                <a:latin typeface="Times New Roman"/>
+                <a:ea typeface="Times New Roman"/>
+                <a:cs typeface="Times New Roman"/>
+                <a:sym typeface="Times New Roman"/>
+              </a:rPr>
+              <a:t>6</a:t>
+            </a:fld>
+            <a:endParaRPr lang="en-US" sz="2000" b="0" i="0" u="none" strike="noStrike" cap="none" dirty="0">
+              <a:solidFill>
+                <a:schemeClr val="dk1"/>
+              </a:solidFill>
+              <a:latin typeface="Times New Roman"/>
+              <a:ea typeface="Times New Roman"/>
+              <a:cs typeface="Times New Roman"/>
+              <a:sym typeface="Times New Roman"/>
+            </a:endParaRPr>
+          </a:p>
+        </p:txBody>
+      </p:sp>
+    </p:spTree>
+    <p:extLst>
+      <p:ext uri="{BB962C8B-B14F-4D97-AF65-F5344CB8AC3E}">
+        <p14:creationId xmlns:p14="http://schemas.microsoft.com/office/powerpoint/2010/main" val="2449486889"/>
+      </p:ext>
+    </p:extLst>
+  </p:cSld>
+  <p:clrMapOvr>
+    <a:masterClrMapping/>
+  </p:clrMapOvr>
+</p:notes>
+</file>
+
+<file path=ppt/notesSlides/notesSlide7.xml><?xml version="1.0" encoding="utf-8"?>
+<p:notes xmlns:a="http://schemas.openxmlformats.org/drawingml/2006/main" xmlns:r="http://schemas.openxmlformats.org/officeDocument/2006/relationships" xmlns:p="http://schemas.openxmlformats.org/presentationml/2006/main">
+  <p:cSld>
+    <p:spTree>
+      <p:nvGrpSpPr>
         <p:cNvPr id="1" name=""/>
         <p:cNvGrpSpPr/>
         <p:nvPr/>
@@ -2264,7 +2388,7 @@
           <a:p>
             <a:fld id="{F5753A29-9D77-4C26-8BEC-432FE5D4B0A4}" type="slidenum">
               <a:rPr lang="en-US" altLang="zh-TW" smtClean="0"/>
-              <a:t>8</a:t>
+              <a:t>7</a:t>
             </a:fld>
             <a:endParaRPr lang="en-US" altLang="zh-TW" dirty="0"/>
           </a:p>
@@ -7938,86 +8062,12 @@
           </a:p>
         </p:txBody>
       </p:sp>
-      <p:sp>
-        <p:nvSpPr>
-          <p:cNvPr id="5" name="文字方塊 4">
+      <p:pic>
+        <p:nvPicPr>
+          <p:cNvPr id="4" name="圖片 3">
             <a:extLst>
               <a:ext uri="{FF2B5EF4-FFF2-40B4-BE49-F238E27FC236}">
-                <a16:creationId xmlns:a16="http://schemas.microsoft.com/office/drawing/2014/main" id="{C03FE17D-B09D-9139-788E-94F7382115DA}"/>
-              </a:ext>
-            </a:extLst>
-          </p:cNvPr>
-          <p:cNvSpPr txBox="1"/>
-          <p:nvPr/>
-        </p:nvSpPr>
-        <p:spPr>
-          <a:xfrm>
-            <a:off x="520699" y="1369489"/>
-            <a:ext cx="7669813" cy="440633"/>
-          </a:xfrm>
-          <a:prstGeom prst="rect">
-            <a:avLst/>
-          </a:prstGeom>
-          <a:noFill/>
-        </p:spPr>
-        <p:txBody>
-          <a:bodyPr wrap="square">
-            <a:spAutoFit/>
-          </a:bodyPr>
-          <a:lstStyle/>
-          <a:p>
-            <a:pPr marL="457200" lvl="1" indent="-406400">
-              <a:lnSpc>
-                <a:spcPts val="3000"/>
-              </a:lnSpc>
-              <a:spcBef>
-                <a:spcPts val="560"/>
-              </a:spcBef>
-              <a:buClr>
-                <a:schemeClr val="accent2"/>
-              </a:buClr>
-              <a:buSzPts val="2800"/>
-              <a:buFont typeface="Noto Sans Symbols"/>
-              <a:buChar char="❖"/>
-            </a:pPr>
-            <a:r>
-              <a:rPr lang="zh-TW" altLang="en-US" sz="2000" dirty="0">
-                <a:latin typeface="Times New Roman" panose="02020603050405020304" pitchFamily="18" charset="0"/>
-                <a:ea typeface="標楷體" panose="03000509000000000000" pitchFamily="65" charset="-120"/>
-                <a:cs typeface="Times New Roman" panose="02020603050405020304" pitchFamily="18" charset="0"/>
-              </a:rPr>
-              <a:t>什麼是 </a:t>
-            </a:r>
-            <a:r>
-              <a:rPr lang="en-US" altLang="zh-TW" sz="2000" dirty="0">
-                <a:latin typeface="Times New Roman" panose="02020603050405020304" pitchFamily="18" charset="0"/>
-                <a:ea typeface="標楷體" panose="03000509000000000000" pitchFamily="65" charset="-120"/>
-                <a:cs typeface="Times New Roman" panose="02020603050405020304" pitchFamily="18" charset="0"/>
-              </a:rPr>
-              <a:t>Device Color Space</a:t>
-            </a:r>
-            <a:r>
-              <a:rPr lang="zh-TW" altLang="en-US" sz="2000" dirty="0">
-                <a:latin typeface="Times New Roman" panose="02020603050405020304" pitchFamily="18" charset="0"/>
-                <a:ea typeface="標楷體" panose="03000509000000000000" pitchFamily="65" charset="-120"/>
-                <a:cs typeface="Times New Roman" panose="02020603050405020304" pitchFamily="18" charset="0"/>
-              </a:rPr>
-              <a:t>？</a:t>
-            </a:r>
-            <a:endParaRPr lang="en-US" altLang="zh-TW" sz="2000" dirty="0">
-              <a:latin typeface="Times New Roman" panose="02020603050405020304" pitchFamily="18" charset="0"/>
-              <a:ea typeface="標楷體" panose="03000509000000000000" pitchFamily="65" charset="-120"/>
-              <a:cs typeface="Times New Roman" panose="02020603050405020304" pitchFamily="18" charset="0"/>
-            </a:endParaRPr>
-          </a:p>
-        </p:txBody>
-      </p:sp>
-      <p:pic>
-        <p:nvPicPr>
-          <p:cNvPr id="15" name="圖片 14">
-            <a:extLst>
-              <a:ext uri="{FF2B5EF4-FFF2-40B4-BE49-F238E27FC236}">
-                <a16:creationId xmlns:a16="http://schemas.microsoft.com/office/drawing/2014/main" id="{0C1BDABE-FEA0-3ED5-4398-9390AE5CB23C}"/>
+                <a16:creationId xmlns:a16="http://schemas.microsoft.com/office/drawing/2014/main" id="{E6234153-2243-3AE6-50F0-5BF73B34C545}"/>
               </a:ext>
             </a:extLst>
           </p:cNvPr>
@@ -8028,18 +8078,95 @@
         </p:nvPicPr>
         <p:blipFill>
           <a:blip r:embed="rId3"/>
+          <a:srcRect/>
           <a:stretch>
             <a:fillRect/>
           </a:stretch>
         </p:blipFill>
         <p:spPr>
           <a:xfrm>
-            <a:off x="1214582" y="1799222"/>
-            <a:ext cx="7476836" cy="4409681"/>
+            <a:off x="827963" y="1382679"/>
+            <a:ext cx="8250074" cy="4865721"/>
           </a:xfrm>
-          <a:prstGeom prst="rect">
+          <a:custGeom>
             <a:avLst/>
-          </a:prstGeom>
+            <a:gdLst>
+              <a:gd name="csX0" fmla="*/ 6192058 w 7476836"/>
+              <a:gd name="csY0" fmla="*/ 3412858 h 4409681"/>
+              <a:gd name="csX1" fmla="*/ 6192058 w 7476836"/>
+              <a:gd name="csY1" fmla="*/ 4286618 h 4409681"/>
+              <a:gd name="csX2" fmla="*/ 7390938 w 7476836"/>
+              <a:gd name="csY2" fmla="*/ 4286618 h 4409681"/>
+              <a:gd name="csX3" fmla="*/ 7390938 w 7476836"/>
+              <a:gd name="csY3" fmla="*/ 3412858 h 4409681"/>
+              <a:gd name="csX4" fmla="*/ 0 w 7476836"/>
+              <a:gd name="csY4" fmla="*/ 0 h 4409681"/>
+              <a:gd name="csX5" fmla="*/ 7476836 w 7476836"/>
+              <a:gd name="csY5" fmla="*/ 0 h 4409681"/>
+              <a:gd name="csX6" fmla="*/ 7476836 w 7476836"/>
+              <a:gd name="csY6" fmla="*/ 4409681 h 4409681"/>
+              <a:gd name="csX7" fmla="*/ 0 w 7476836"/>
+              <a:gd name="csY7" fmla="*/ 4409681 h 4409681"/>
+            </a:gdLst>
+            <a:ahLst/>
+            <a:cxnLst>
+              <a:cxn ang="0">
+                <a:pos x="csX0" y="csY0"/>
+              </a:cxn>
+              <a:cxn ang="0">
+                <a:pos x="csX1" y="csY1"/>
+              </a:cxn>
+              <a:cxn ang="0">
+                <a:pos x="csX2" y="csY2"/>
+              </a:cxn>
+              <a:cxn ang="0">
+                <a:pos x="csX3" y="csY3"/>
+              </a:cxn>
+              <a:cxn ang="0">
+                <a:pos x="csX4" y="csY4"/>
+              </a:cxn>
+              <a:cxn ang="0">
+                <a:pos x="csX5" y="csY5"/>
+              </a:cxn>
+              <a:cxn ang="0">
+                <a:pos x="csX6" y="csY6"/>
+              </a:cxn>
+              <a:cxn ang="0">
+                <a:pos x="csX7" y="csY7"/>
+              </a:cxn>
+            </a:cxnLst>
+            <a:rect l="l" t="t" r="r" b="b"/>
+            <a:pathLst>
+              <a:path w="7476836" h="4409681">
+                <a:moveTo>
+                  <a:pt x="6192058" y="3412858"/>
+                </a:moveTo>
+                <a:lnTo>
+                  <a:pt x="6192058" y="4286618"/>
+                </a:lnTo>
+                <a:lnTo>
+                  <a:pt x="7390938" y="4286618"/>
+                </a:lnTo>
+                <a:lnTo>
+                  <a:pt x="7390938" y="3412858"/>
+                </a:lnTo>
+                <a:close/>
+                <a:moveTo>
+                  <a:pt x="0" y="0"/>
+                </a:moveTo>
+                <a:lnTo>
+                  <a:pt x="7476836" y="0"/>
+                </a:lnTo>
+                <a:lnTo>
+                  <a:pt x="7476836" y="4409681"/>
+                </a:lnTo>
+                <a:lnTo>
+                  <a:pt x="0" y="4409681"/>
+                </a:lnTo>
+                <a:close/>
+              </a:path>
+            </a:pathLst>
+          </a:custGeom>
         </p:spPr>
       </p:pic>
     </p:spTree>
@@ -8080,10 +8207,10 @@
       </p:grpSpPr>
       <p:pic>
         <p:nvPicPr>
-          <p:cNvPr id="14" name="圖片 13">
+          <p:cNvPr id="5" name="圖片 4">
             <a:extLst>
               <a:ext uri="{FF2B5EF4-FFF2-40B4-BE49-F238E27FC236}">
-                <a16:creationId xmlns:a16="http://schemas.microsoft.com/office/drawing/2014/main" id="{646051B0-D8D4-340A-55DE-B64A86894E7E}"/>
+                <a16:creationId xmlns:a16="http://schemas.microsoft.com/office/drawing/2014/main" id="{022D6573-B360-5362-29E4-19065BAD6A7B}"/>
               </a:ext>
             </a:extLst>
           </p:cNvPr>
@@ -8094,94 +8221,97 @@
         </p:nvPicPr>
         <p:blipFill>
           <a:blip r:embed="rId3"/>
+          <a:srcRect/>
           <a:stretch>
             <a:fillRect/>
           </a:stretch>
         </p:blipFill>
         <p:spPr>
           <a:xfrm>
-            <a:off x="1268497" y="1799222"/>
-            <a:ext cx="7369006" cy="4401214"/>
+            <a:off x="719137" y="1190964"/>
+            <a:ext cx="8467726" cy="5057436"/>
           </a:xfrm>
-          <a:prstGeom prst="rect">
+          <a:custGeom>
             <a:avLst/>
-          </a:prstGeom>
+            <a:gdLst>
+              <a:gd name="csX0" fmla="*/ 6138143 w 7369006"/>
+              <a:gd name="csY0" fmla="*/ 3412858 h 4401214"/>
+              <a:gd name="csX1" fmla="*/ 6138143 w 7369006"/>
+              <a:gd name="csY1" fmla="*/ 4286618 h 4401214"/>
+              <a:gd name="csX2" fmla="*/ 7337023 w 7369006"/>
+              <a:gd name="csY2" fmla="*/ 4286618 h 4401214"/>
+              <a:gd name="csX3" fmla="*/ 7337023 w 7369006"/>
+              <a:gd name="csY3" fmla="*/ 3412858 h 4401214"/>
+              <a:gd name="csX4" fmla="*/ 0 w 7369006"/>
+              <a:gd name="csY4" fmla="*/ 0 h 4401214"/>
+              <a:gd name="csX5" fmla="*/ 7369006 w 7369006"/>
+              <a:gd name="csY5" fmla="*/ 0 h 4401214"/>
+              <a:gd name="csX6" fmla="*/ 7369006 w 7369006"/>
+              <a:gd name="csY6" fmla="*/ 4401214 h 4401214"/>
+              <a:gd name="csX7" fmla="*/ 0 w 7369006"/>
+              <a:gd name="csY7" fmla="*/ 4401214 h 4401214"/>
+            </a:gdLst>
+            <a:ahLst/>
+            <a:cxnLst>
+              <a:cxn ang="0">
+                <a:pos x="csX0" y="csY0"/>
+              </a:cxn>
+              <a:cxn ang="0">
+                <a:pos x="csX1" y="csY1"/>
+              </a:cxn>
+              <a:cxn ang="0">
+                <a:pos x="csX2" y="csY2"/>
+              </a:cxn>
+              <a:cxn ang="0">
+                <a:pos x="csX3" y="csY3"/>
+              </a:cxn>
+              <a:cxn ang="0">
+                <a:pos x="csX4" y="csY4"/>
+              </a:cxn>
+              <a:cxn ang="0">
+                <a:pos x="csX5" y="csY5"/>
+              </a:cxn>
+              <a:cxn ang="0">
+                <a:pos x="csX6" y="csY6"/>
+              </a:cxn>
+              <a:cxn ang="0">
+                <a:pos x="csX7" y="csY7"/>
+              </a:cxn>
+            </a:cxnLst>
+            <a:rect l="l" t="t" r="r" b="b"/>
+            <a:pathLst>
+              <a:path w="7369006" h="4401214">
+                <a:moveTo>
+                  <a:pt x="6138143" y="3412858"/>
+                </a:moveTo>
+                <a:lnTo>
+                  <a:pt x="6138143" y="4286618"/>
+                </a:lnTo>
+                <a:lnTo>
+                  <a:pt x="7337023" y="4286618"/>
+                </a:lnTo>
+                <a:lnTo>
+                  <a:pt x="7337023" y="3412858"/>
+                </a:lnTo>
+                <a:close/>
+                <a:moveTo>
+                  <a:pt x="0" y="0"/>
+                </a:moveTo>
+                <a:lnTo>
+                  <a:pt x="7369006" y="0"/>
+                </a:lnTo>
+                <a:lnTo>
+                  <a:pt x="7369006" y="4401214"/>
+                </a:lnTo>
+                <a:lnTo>
+                  <a:pt x="0" y="4401214"/>
+                </a:lnTo>
+                <a:close/>
+              </a:path>
+            </a:pathLst>
+          </a:custGeom>
         </p:spPr>
       </p:pic>
-      <p:sp>
-        <p:nvSpPr>
-          <p:cNvPr id="4" name="文字方塊 3">
-            <a:extLst>
-              <a:ext uri="{FF2B5EF4-FFF2-40B4-BE49-F238E27FC236}">
-                <a16:creationId xmlns:a16="http://schemas.microsoft.com/office/drawing/2014/main" id="{2E62D90A-238F-15C1-A17C-8D898584815F}"/>
-              </a:ext>
-            </a:extLst>
-          </p:cNvPr>
-          <p:cNvSpPr txBox="1"/>
-          <p:nvPr/>
-        </p:nvSpPr>
-        <p:spPr>
-          <a:xfrm>
-            <a:off x="520699" y="1369489"/>
-            <a:ext cx="7669813" cy="440633"/>
-          </a:xfrm>
-          <a:prstGeom prst="rect">
-            <a:avLst/>
-          </a:prstGeom>
-          <a:noFill/>
-        </p:spPr>
-        <p:txBody>
-          <a:bodyPr wrap="square">
-            <a:spAutoFit/>
-          </a:bodyPr>
-          <a:lstStyle/>
-          <a:p>
-            <a:pPr marL="457200" lvl="1" indent="-406400">
-              <a:lnSpc>
-                <a:spcPts val="3000"/>
-              </a:lnSpc>
-              <a:spcBef>
-                <a:spcPts val="560"/>
-              </a:spcBef>
-              <a:buClr>
-                <a:schemeClr val="accent2"/>
-              </a:buClr>
-              <a:buSzPts val="2800"/>
-              <a:buFont typeface="Noto Sans Symbols"/>
-              <a:buChar char="❖"/>
-            </a:pPr>
-            <a:r>
-              <a:rPr lang="zh-TW" altLang="en-US" sz="2000" dirty="0">
-                <a:latin typeface="Times New Roman" panose="02020603050405020304" pitchFamily="18" charset="0"/>
-                <a:ea typeface="標楷體" panose="03000509000000000000" pitchFamily="65" charset="-120"/>
-                <a:cs typeface="Times New Roman" panose="02020603050405020304" pitchFamily="18" charset="0"/>
-              </a:rPr>
-              <a:t>什麼是 </a:t>
-            </a:r>
-            <a:r>
-              <a:rPr lang="en-US" altLang="zh-TW" sz="2000" dirty="0">
-                <a:latin typeface="Times New Roman" panose="02020603050405020304" pitchFamily="18" charset="0"/>
-                <a:ea typeface="標楷體" panose="03000509000000000000" pitchFamily="65" charset="-120"/>
-                <a:cs typeface="Times New Roman" panose="02020603050405020304" pitchFamily="18" charset="0"/>
-              </a:rPr>
-              <a:t>Device Color Space</a:t>
-            </a:r>
-            <a:r>
-              <a:rPr lang="zh-TW" altLang="en-US" sz="2000" dirty="0">
-                <a:latin typeface="Times New Roman" panose="02020603050405020304" pitchFamily="18" charset="0"/>
-                <a:ea typeface="標楷體" panose="03000509000000000000" pitchFamily="65" charset="-120"/>
-                <a:cs typeface="Times New Roman" panose="02020603050405020304" pitchFamily="18" charset="0"/>
-              </a:rPr>
-              <a:t>？</a:t>
-            </a:r>
-            <a:endParaRPr lang="en-US" altLang="zh-TW" sz="2000" dirty="0">
-              <a:latin typeface="Times New Roman" panose="02020603050405020304" pitchFamily="18" charset="0"/>
-              <a:ea typeface="標楷體" panose="03000509000000000000" pitchFamily="65" charset="-120"/>
-              <a:cs typeface="Times New Roman" panose="02020603050405020304" pitchFamily="18" charset="0"/>
-            </a:endParaRPr>
-          </a:p>
-        </p:txBody>
-      </p:sp>
       <p:sp>
         <p:nvSpPr>
           <p:cNvPr id="8" name="標題 1">
@@ -8320,23 +8450,7 @@
                 <a:ea typeface="標楷體" panose="03000509000000000000" pitchFamily="65" charset="-120"/>
                 <a:cs typeface="Times New Roman" panose="02020603050405020304" pitchFamily="18" charset="0"/>
               </a:rPr>
-              <a:t>什麼是 </a:t>
-            </a:r>
-            <a:r>
-              <a:rPr lang="en-US" altLang="zh-TW" sz="2000" dirty="0">
-                <a:latin typeface="Times New Roman" panose="02020603050405020304" pitchFamily="18" charset="0"/>
-                <a:ea typeface="標楷體" panose="03000509000000000000" pitchFamily="65" charset="-120"/>
-                <a:cs typeface="Times New Roman" panose="02020603050405020304" pitchFamily="18" charset="0"/>
-              </a:rPr>
-              <a:t>Device Color Space</a:t>
-            </a:r>
-            <a:r>
-              <a:rPr lang="zh-TW" altLang="en-US" sz="2000" dirty="0">
-                <a:latin typeface="Times New Roman" panose="02020603050405020304" pitchFamily="18" charset="0"/>
-                <a:ea typeface="標楷體" panose="03000509000000000000" pitchFamily="65" charset="-120"/>
-                <a:cs typeface="Times New Roman" panose="02020603050405020304" pitchFamily="18" charset="0"/>
-              </a:rPr>
-              <a:t>？</a:t>
+              <a:t>實際轉換流程</a:t>
             </a:r>
             <a:endParaRPr lang="en-US" altLang="zh-TW" sz="2000" dirty="0">
               <a:latin typeface="Times New Roman" panose="02020603050405020304" pitchFamily="18" charset="0"/>
@@ -8400,6 +8514,581 @@
           </a:p>
         </p:txBody>
       </p:sp>
+      <p:sp>
+        <p:nvSpPr>
+          <p:cNvPr id="3" name="矩形 2">
+            <a:extLst>
+              <a:ext uri="{FF2B5EF4-FFF2-40B4-BE49-F238E27FC236}">
+                <a16:creationId xmlns:a16="http://schemas.microsoft.com/office/drawing/2014/main" id="{8996691D-0E63-96A8-06C3-40BD92D16B49}"/>
+              </a:ext>
+            </a:extLst>
+          </p:cNvPr>
+          <p:cNvSpPr/>
+          <p:nvPr/>
+        </p:nvSpPr>
+        <p:spPr>
+          <a:xfrm>
+            <a:off x="818867" y="2156346"/>
+            <a:ext cx="2162272" cy="1132764"/>
+          </a:xfrm>
+          <a:prstGeom prst="rect">
+            <a:avLst/>
+          </a:prstGeom>
+          <a:solidFill>
+            <a:schemeClr val="bg1"/>
+          </a:solidFill>
+          <a:ln>
+            <a:solidFill>
+              <a:schemeClr val="tx1"/>
+            </a:solidFill>
+          </a:ln>
+        </p:spPr>
+        <p:style>
+          <a:lnRef idx="2">
+            <a:schemeClr val="accent1">
+              <a:shade val="15000"/>
+            </a:schemeClr>
+          </a:lnRef>
+          <a:fillRef idx="1">
+            <a:schemeClr val="accent1"/>
+          </a:fillRef>
+          <a:effectRef idx="0">
+            <a:schemeClr val="accent1"/>
+          </a:effectRef>
+          <a:fontRef idx="minor">
+            <a:schemeClr val="lt1"/>
+          </a:fontRef>
+        </p:style>
+        <p:txBody>
+          <a:bodyPr rtlCol="0" anchor="ctr"/>
+          <a:lstStyle/>
+          <a:p>
+            <a:pPr algn="ctr"/>
+            <a:r>
+              <a:rPr lang="zh-TW" altLang="zh-TW" sz="2000" dirty="0">
+                <a:ln w="0"/>
+                <a:solidFill>
+                  <a:schemeClr val="tx1"/>
+                </a:solidFill>
+                <a:latin typeface="Times New Roman" panose="02020603050405020304" pitchFamily="18" charset="0"/>
+                <a:ea typeface="標楷體" panose="03000509000000000000" pitchFamily="65" charset="-120"/>
+                <a:cs typeface="Times New Roman" panose="02020603050405020304" pitchFamily="18" charset="0"/>
+              </a:rPr>
+              <a:t>A Device RGB</a:t>
+            </a:r>
+            <a:endParaRPr lang="zh-TW" altLang="en-US" sz="2000" dirty="0">
+              <a:ln w="0"/>
+              <a:solidFill>
+                <a:schemeClr val="tx1"/>
+              </a:solidFill>
+              <a:latin typeface="Times New Roman" panose="02020603050405020304" pitchFamily="18" charset="0"/>
+              <a:ea typeface="標楷體" panose="03000509000000000000" pitchFamily="65" charset="-120"/>
+              <a:cs typeface="Times New Roman" panose="02020603050405020304" pitchFamily="18" charset="0"/>
+            </a:endParaRPr>
+          </a:p>
+        </p:txBody>
+      </p:sp>
+      <p:sp>
+        <p:nvSpPr>
+          <p:cNvPr id="6" name="矩形 5">
+            <a:extLst>
+              <a:ext uri="{FF2B5EF4-FFF2-40B4-BE49-F238E27FC236}">
+                <a16:creationId xmlns:a16="http://schemas.microsoft.com/office/drawing/2014/main" id="{4799A24E-5028-5D4A-D223-7433C160BC28}"/>
+              </a:ext>
+            </a:extLst>
+          </p:cNvPr>
+          <p:cNvSpPr/>
+          <p:nvPr/>
+        </p:nvSpPr>
+        <p:spPr>
+          <a:xfrm>
+            <a:off x="4246730" y="2156346"/>
+            <a:ext cx="2162272" cy="1132764"/>
+          </a:xfrm>
+          <a:prstGeom prst="rect">
+            <a:avLst/>
+          </a:prstGeom>
+          <a:solidFill>
+            <a:schemeClr val="bg1"/>
+          </a:solidFill>
+          <a:ln>
+            <a:solidFill>
+              <a:schemeClr val="tx1"/>
+            </a:solidFill>
+          </a:ln>
+        </p:spPr>
+        <p:style>
+          <a:lnRef idx="2">
+            <a:schemeClr val="accent1">
+              <a:shade val="15000"/>
+            </a:schemeClr>
+          </a:lnRef>
+          <a:fillRef idx="1">
+            <a:schemeClr val="accent1"/>
+          </a:fillRef>
+          <a:effectRef idx="0">
+            <a:schemeClr val="accent1"/>
+          </a:effectRef>
+          <a:fontRef idx="minor">
+            <a:schemeClr val="lt1"/>
+          </a:fontRef>
+        </p:style>
+        <p:txBody>
+          <a:bodyPr rtlCol="0" anchor="ctr"/>
+          <a:lstStyle/>
+          <a:p>
+            <a:pPr algn="ctr"/>
+            <a:r>
+              <a:rPr lang="zh-TW" altLang="zh-TW" sz="2000" dirty="0">
+                <a:solidFill>
+                  <a:schemeClr val="tx1"/>
+                </a:solidFill>
+                <a:latin typeface="Times New Roman" panose="02020603050405020304" pitchFamily="18" charset="0"/>
+                <a:ea typeface="標楷體" panose="03000509000000000000" pitchFamily="65" charset="-120"/>
+                <a:cs typeface="Times New Roman" panose="02020603050405020304" pitchFamily="18" charset="0"/>
+              </a:rPr>
+              <a:t>A Device Profile</a:t>
+            </a:r>
+            <a:endParaRPr lang="zh-TW" altLang="en-US" sz="2000" dirty="0">
+              <a:solidFill>
+                <a:schemeClr val="tx1"/>
+              </a:solidFill>
+              <a:latin typeface="Times New Roman" panose="02020603050405020304" pitchFamily="18" charset="0"/>
+              <a:ea typeface="標楷體" panose="03000509000000000000" pitchFamily="65" charset="-120"/>
+              <a:cs typeface="Times New Roman" panose="02020603050405020304" pitchFamily="18" charset="0"/>
+            </a:endParaRPr>
+          </a:p>
+        </p:txBody>
+      </p:sp>
+      <p:sp>
+        <p:nvSpPr>
+          <p:cNvPr id="9" name="矩形 8">
+            <a:extLst>
+              <a:ext uri="{FF2B5EF4-FFF2-40B4-BE49-F238E27FC236}">
+                <a16:creationId xmlns:a16="http://schemas.microsoft.com/office/drawing/2014/main" id="{0C7FD048-9844-D5F5-79C1-78326AF84161}"/>
+              </a:ext>
+            </a:extLst>
+          </p:cNvPr>
+          <p:cNvSpPr/>
+          <p:nvPr/>
+        </p:nvSpPr>
+        <p:spPr>
+          <a:xfrm>
+            <a:off x="818867" y="4481497"/>
+            <a:ext cx="2162272" cy="1132764"/>
+          </a:xfrm>
+          <a:prstGeom prst="rect">
+            <a:avLst/>
+          </a:prstGeom>
+          <a:solidFill>
+            <a:schemeClr val="bg1"/>
+          </a:solidFill>
+          <a:ln>
+            <a:solidFill>
+              <a:schemeClr val="tx1"/>
+            </a:solidFill>
+          </a:ln>
+        </p:spPr>
+        <p:style>
+          <a:lnRef idx="2">
+            <a:schemeClr val="accent1">
+              <a:shade val="15000"/>
+            </a:schemeClr>
+          </a:lnRef>
+          <a:fillRef idx="1">
+            <a:schemeClr val="accent1"/>
+          </a:fillRef>
+          <a:effectRef idx="0">
+            <a:schemeClr val="accent1"/>
+          </a:effectRef>
+          <a:fontRef idx="minor">
+            <a:schemeClr val="lt1"/>
+          </a:fontRef>
+        </p:style>
+        <p:txBody>
+          <a:bodyPr rtlCol="0" anchor="ctr"/>
+          <a:lstStyle/>
+          <a:p>
+            <a:pPr algn="ctr"/>
+            <a:r>
+              <a:rPr lang="zh-TW" altLang="zh-TW" sz="2000" dirty="0">
+                <a:solidFill>
+                  <a:schemeClr val="tx1"/>
+                </a:solidFill>
+                <a:latin typeface="Times New Roman" panose="02020603050405020304" pitchFamily="18" charset="0"/>
+                <a:ea typeface="標楷體" panose="03000509000000000000" pitchFamily="65" charset="-120"/>
+                <a:cs typeface="Times New Roman" panose="02020603050405020304" pitchFamily="18" charset="0"/>
+              </a:rPr>
+              <a:t>B Device RGB</a:t>
+            </a:r>
+          </a:p>
+        </p:txBody>
+      </p:sp>
+      <p:sp>
+        <p:nvSpPr>
+          <p:cNvPr id="11" name="矩形 10">
+            <a:extLst>
+              <a:ext uri="{FF2B5EF4-FFF2-40B4-BE49-F238E27FC236}">
+                <a16:creationId xmlns:a16="http://schemas.microsoft.com/office/drawing/2014/main" id="{CBAE6D19-C5AE-76A5-69B0-0B748849B999}"/>
+              </a:ext>
+            </a:extLst>
+          </p:cNvPr>
+          <p:cNvSpPr/>
+          <p:nvPr/>
+        </p:nvSpPr>
+        <p:spPr>
+          <a:xfrm>
+            <a:off x="4246730" y="4481497"/>
+            <a:ext cx="2162272" cy="1132764"/>
+          </a:xfrm>
+          <a:prstGeom prst="rect">
+            <a:avLst/>
+          </a:prstGeom>
+          <a:solidFill>
+            <a:schemeClr val="bg1"/>
+          </a:solidFill>
+          <a:ln>
+            <a:solidFill>
+              <a:schemeClr val="tx1"/>
+            </a:solidFill>
+          </a:ln>
+        </p:spPr>
+        <p:style>
+          <a:lnRef idx="2">
+            <a:schemeClr val="accent1">
+              <a:shade val="15000"/>
+            </a:schemeClr>
+          </a:lnRef>
+          <a:fillRef idx="1">
+            <a:schemeClr val="accent1"/>
+          </a:fillRef>
+          <a:effectRef idx="0">
+            <a:schemeClr val="accent1"/>
+          </a:effectRef>
+          <a:fontRef idx="minor">
+            <a:schemeClr val="lt1"/>
+          </a:fontRef>
+        </p:style>
+        <p:txBody>
+          <a:bodyPr rtlCol="0" anchor="ctr"/>
+          <a:lstStyle/>
+          <a:p>
+            <a:pPr algn="ctr"/>
+            <a:r>
+              <a:rPr lang="zh-TW" altLang="zh-TW" sz="2000" dirty="0">
+                <a:solidFill>
+                  <a:schemeClr val="tx1"/>
+                </a:solidFill>
+                <a:latin typeface="Times New Roman" panose="02020603050405020304" pitchFamily="18" charset="0"/>
+                <a:ea typeface="標楷體" panose="03000509000000000000" pitchFamily="65" charset="-120"/>
+                <a:cs typeface="Times New Roman" panose="02020603050405020304" pitchFamily="18" charset="0"/>
+              </a:rPr>
+              <a:t>B Device Profile</a:t>
+            </a:r>
+            <a:endParaRPr lang="zh-TW" altLang="en-US" sz="2000" dirty="0">
+              <a:solidFill>
+                <a:schemeClr val="tx1"/>
+              </a:solidFill>
+              <a:latin typeface="Times New Roman" panose="02020603050405020304" pitchFamily="18" charset="0"/>
+              <a:ea typeface="標楷體" panose="03000509000000000000" pitchFamily="65" charset="-120"/>
+              <a:cs typeface="Times New Roman" panose="02020603050405020304" pitchFamily="18" charset="0"/>
+            </a:endParaRPr>
+          </a:p>
+        </p:txBody>
+      </p:sp>
+      <p:sp>
+        <p:nvSpPr>
+          <p:cNvPr id="13" name="矩形 12">
+            <a:extLst>
+              <a:ext uri="{FF2B5EF4-FFF2-40B4-BE49-F238E27FC236}">
+                <a16:creationId xmlns:a16="http://schemas.microsoft.com/office/drawing/2014/main" id="{2502BAEE-F1D2-BEA9-82BD-3CC9D2FBDA07}"/>
+              </a:ext>
+            </a:extLst>
+          </p:cNvPr>
+          <p:cNvSpPr/>
+          <p:nvPr/>
+        </p:nvSpPr>
+        <p:spPr>
+          <a:xfrm>
+            <a:off x="7251512" y="3352145"/>
+            <a:ext cx="2162272" cy="1132764"/>
+          </a:xfrm>
+          <a:prstGeom prst="rect">
+            <a:avLst/>
+          </a:prstGeom>
+          <a:solidFill>
+            <a:schemeClr val="bg1"/>
+          </a:solidFill>
+          <a:ln>
+            <a:solidFill>
+              <a:schemeClr val="tx1"/>
+            </a:solidFill>
+          </a:ln>
+        </p:spPr>
+        <p:style>
+          <a:lnRef idx="2">
+            <a:schemeClr val="accent1">
+              <a:shade val="15000"/>
+            </a:schemeClr>
+          </a:lnRef>
+          <a:fillRef idx="1">
+            <a:schemeClr val="accent1"/>
+          </a:fillRef>
+          <a:effectRef idx="0">
+            <a:schemeClr val="accent1"/>
+          </a:effectRef>
+          <a:fontRef idx="minor">
+            <a:schemeClr val="lt1"/>
+          </a:fontRef>
+        </p:style>
+        <p:txBody>
+          <a:bodyPr rtlCol="0" anchor="ctr"/>
+          <a:lstStyle/>
+          <a:p>
+            <a:pPr algn="ctr"/>
+            <a:r>
+              <a:rPr lang="zh-TW" altLang="zh-TW" sz="2000" dirty="0">
+                <a:solidFill>
+                  <a:schemeClr val="tx1"/>
+                </a:solidFill>
+                <a:latin typeface="Times New Roman" panose="02020603050405020304" pitchFamily="18" charset="0"/>
+                <a:ea typeface="標楷體" panose="03000509000000000000" pitchFamily="65" charset="-120"/>
+                <a:cs typeface="Times New Roman" panose="02020603050405020304" pitchFamily="18" charset="0"/>
+              </a:rPr>
+              <a:t>PCS </a:t>
+            </a:r>
+            <a:r>
+              <a:rPr lang="zh-TW" altLang="en-US" sz="2000" dirty="0">
+                <a:solidFill>
+                  <a:schemeClr val="tx1"/>
+                </a:solidFill>
+                <a:latin typeface="Times New Roman" panose="02020603050405020304" pitchFamily="18" charset="0"/>
+                <a:ea typeface="標楷體" panose="03000509000000000000" pitchFamily="65" charset="-120"/>
+                <a:cs typeface="Times New Roman" panose="02020603050405020304" pitchFamily="18" charset="0"/>
+              </a:rPr>
+              <a:t> </a:t>
+            </a:r>
+            <a:endParaRPr lang="en-US" altLang="zh-TW" sz="2000" dirty="0">
+              <a:solidFill>
+                <a:schemeClr val="tx1"/>
+              </a:solidFill>
+              <a:latin typeface="Times New Roman" panose="02020603050405020304" pitchFamily="18" charset="0"/>
+              <a:ea typeface="標楷體" panose="03000509000000000000" pitchFamily="65" charset="-120"/>
+              <a:cs typeface="Times New Roman" panose="02020603050405020304" pitchFamily="18" charset="0"/>
+            </a:endParaRPr>
+          </a:p>
+          <a:p>
+            <a:pPr algn="ctr"/>
+            <a:r>
+              <a:rPr lang="zh-TW" altLang="zh-TW" sz="2000" dirty="0">
+                <a:solidFill>
+                  <a:schemeClr val="tx1"/>
+                </a:solidFill>
+                <a:latin typeface="Times New Roman" panose="02020603050405020304" pitchFamily="18" charset="0"/>
+                <a:ea typeface="標楷體" panose="03000509000000000000" pitchFamily="65" charset="-120"/>
+                <a:cs typeface="Times New Roman" panose="02020603050405020304" pitchFamily="18" charset="0"/>
+              </a:rPr>
+              <a:t>XYZ/Lab </a:t>
+            </a:r>
+            <a:endParaRPr lang="zh-TW" altLang="en-US" sz="2000" dirty="0">
+              <a:solidFill>
+                <a:schemeClr val="tx1"/>
+              </a:solidFill>
+              <a:latin typeface="Times New Roman" panose="02020603050405020304" pitchFamily="18" charset="0"/>
+              <a:ea typeface="標楷體" panose="03000509000000000000" pitchFamily="65" charset="-120"/>
+              <a:cs typeface="Times New Roman" panose="02020603050405020304" pitchFamily="18" charset="0"/>
+            </a:endParaRPr>
+          </a:p>
+        </p:txBody>
+      </p:sp>
+      <p:cxnSp>
+        <p:nvCxnSpPr>
+          <p:cNvPr id="15" name="直線單箭頭接點 14">
+            <a:extLst>
+              <a:ext uri="{FF2B5EF4-FFF2-40B4-BE49-F238E27FC236}">
+                <a16:creationId xmlns:a16="http://schemas.microsoft.com/office/drawing/2014/main" id="{2BD354F0-AC29-3F7F-21BC-649A5C656B58}"/>
+              </a:ext>
+            </a:extLst>
+          </p:cNvPr>
+          <p:cNvCxnSpPr>
+            <a:cxnSpLocks/>
+            <a:stCxn id="3" idx="3"/>
+            <a:endCxn id="6" idx="1"/>
+          </p:cNvCxnSpPr>
+          <p:nvPr/>
+        </p:nvCxnSpPr>
+        <p:spPr>
+          <a:xfrm>
+            <a:off x="2981139" y="2722728"/>
+            <a:ext cx="1265591" cy="0"/>
+          </a:xfrm>
+          <a:prstGeom prst="straightConnector1">
+            <a:avLst/>
+          </a:prstGeom>
+          <a:ln w="44450" cap="flat" cmpd="sng" algn="ctr">
+            <a:solidFill>
+              <a:schemeClr val="accent4"/>
+            </a:solidFill>
+            <a:prstDash val="solid"/>
+            <a:round/>
+            <a:headEnd type="none" w="med" len="med"/>
+            <a:tailEnd type="arrow" w="med" len="med"/>
+          </a:ln>
+        </p:spPr>
+        <p:style>
+          <a:lnRef idx="0">
+            <a:scrgbClr r="0" g="0" b="0"/>
+          </a:lnRef>
+          <a:fillRef idx="0">
+            <a:scrgbClr r="0" g="0" b="0"/>
+          </a:fillRef>
+          <a:effectRef idx="0">
+            <a:scrgbClr r="0" g="0" b="0"/>
+          </a:effectRef>
+          <a:fontRef idx="minor">
+            <a:schemeClr val="tx1"/>
+          </a:fontRef>
+        </p:style>
+      </p:cxnSp>
+      <p:cxnSp>
+        <p:nvCxnSpPr>
+          <p:cNvPr id="17" name="直線單箭頭接點 16">
+            <a:extLst>
+              <a:ext uri="{FF2B5EF4-FFF2-40B4-BE49-F238E27FC236}">
+                <a16:creationId xmlns:a16="http://schemas.microsoft.com/office/drawing/2014/main" id="{91C66148-B7CE-F63D-A1CA-8F52D14070C9}"/>
+              </a:ext>
+            </a:extLst>
+          </p:cNvPr>
+          <p:cNvCxnSpPr>
+            <a:cxnSpLocks/>
+            <a:stCxn id="11" idx="1"/>
+            <a:endCxn id="9" idx="3"/>
+          </p:cNvCxnSpPr>
+          <p:nvPr/>
+        </p:nvCxnSpPr>
+        <p:spPr>
+          <a:xfrm flipH="1">
+            <a:off x="2981139" y="5047879"/>
+            <a:ext cx="1265591" cy="0"/>
+          </a:xfrm>
+          <a:prstGeom prst="straightConnector1">
+            <a:avLst/>
+          </a:prstGeom>
+          <a:ln w="44450" cap="flat" cmpd="sng" algn="ctr">
+            <a:solidFill>
+              <a:schemeClr val="accent4"/>
+            </a:solidFill>
+            <a:prstDash val="solid"/>
+            <a:round/>
+            <a:headEnd type="none" w="med" len="med"/>
+            <a:tailEnd type="arrow" w="med" len="med"/>
+          </a:ln>
+        </p:spPr>
+        <p:style>
+          <a:lnRef idx="0">
+            <a:scrgbClr r="0" g="0" b="0"/>
+          </a:lnRef>
+          <a:fillRef idx="0">
+            <a:scrgbClr r="0" g="0" b="0"/>
+          </a:fillRef>
+          <a:effectRef idx="0">
+            <a:scrgbClr r="0" g="0" b="0"/>
+          </a:effectRef>
+          <a:fontRef idx="minor">
+            <a:schemeClr val="tx1"/>
+          </a:fontRef>
+        </p:style>
+      </p:cxnSp>
+      <p:cxnSp>
+        <p:nvCxnSpPr>
+          <p:cNvPr id="25" name="接點: 肘形 24">
+            <a:extLst>
+              <a:ext uri="{FF2B5EF4-FFF2-40B4-BE49-F238E27FC236}">
+                <a16:creationId xmlns:a16="http://schemas.microsoft.com/office/drawing/2014/main" id="{A078D20F-E1A1-89E1-B06C-8361B263C03A}"/>
+              </a:ext>
+            </a:extLst>
+          </p:cNvPr>
+          <p:cNvCxnSpPr>
+            <a:stCxn id="6" idx="3"/>
+            <a:endCxn id="13" idx="0"/>
+          </p:cNvCxnSpPr>
+          <p:nvPr/>
+        </p:nvCxnSpPr>
+        <p:spPr>
+          <a:xfrm>
+            <a:off x="6409002" y="2722728"/>
+            <a:ext cx="1923646" cy="629417"/>
+          </a:xfrm>
+          <a:prstGeom prst="bentConnector2">
+            <a:avLst/>
+          </a:prstGeom>
+          <a:ln w="44450">
+            <a:solidFill>
+              <a:schemeClr val="tx1"/>
+            </a:solidFill>
+            <a:tailEnd type="triangle"/>
+          </a:ln>
+        </p:spPr>
+        <p:style>
+          <a:lnRef idx="1">
+            <a:schemeClr val="accent1"/>
+          </a:lnRef>
+          <a:fillRef idx="0">
+            <a:schemeClr val="accent1"/>
+          </a:fillRef>
+          <a:effectRef idx="0">
+            <a:schemeClr val="accent1"/>
+          </a:effectRef>
+          <a:fontRef idx="minor">
+            <a:schemeClr val="tx1"/>
+          </a:fontRef>
+        </p:style>
+      </p:cxnSp>
+      <p:cxnSp>
+        <p:nvCxnSpPr>
+          <p:cNvPr id="27" name="接點: 肘形 26">
+            <a:extLst>
+              <a:ext uri="{FF2B5EF4-FFF2-40B4-BE49-F238E27FC236}">
+                <a16:creationId xmlns:a16="http://schemas.microsoft.com/office/drawing/2014/main" id="{84FB698F-C81D-C384-B862-92390427F862}"/>
+              </a:ext>
+            </a:extLst>
+          </p:cNvPr>
+          <p:cNvCxnSpPr>
+            <a:stCxn id="13" idx="2"/>
+            <a:endCxn id="11" idx="3"/>
+          </p:cNvCxnSpPr>
+          <p:nvPr/>
+        </p:nvCxnSpPr>
+        <p:spPr>
+          <a:xfrm rot="5400000">
+            <a:off x="7089340" y="3804571"/>
+            <a:ext cx="562970" cy="1923646"/>
+          </a:xfrm>
+          <a:prstGeom prst="bentConnector2">
+            <a:avLst/>
+          </a:prstGeom>
+          <a:ln w="44450">
+            <a:solidFill>
+              <a:schemeClr val="tx1"/>
+            </a:solidFill>
+            <a:tailEnd type="triangle"/>
+          </a:ln>
+        </p:spPr>
+        <p:style>
+          <a:lnRef idx="1">
+            <a:schemeClr val="accent1"/>
+          </a:lnRef>
+          <a:fillRef idx="0">
+            <a:schemeClr val="accent1"/>
+          </a:fillRef>
+          <a:effectRef idx="0">
+            <a:schemeClr val="accent1"/>
+          </a:effectRef>
+          <a:fontRef idx="minor">
+            <a:schemeClr val="tx1"/>
+          </a:fontRef>
+        </p:style>
+      </p:cxnSp>
     </p:spTree>
     <p:extLst>
       <p:ext uri="{BB962C8B-B14F-4D97-AF65-F5344CB8AC3E}">
@@ -8418,7 +9107,13 @@
   <p:cSld>
     <p:spTree>
       <p:nvGrpSpPr>
-        <p:cNvPr id="1" name=""/>
+        <p:cNvPr id="1" name="">
+          <a:extLst>
+            <a:ext uri="{FF2B5EF4-FFF2-40B4-BE49-F238E27FC236}">
+              <a16:creationId xmlns:a16="http://schemas.microsoft.com/office/drawing/2014/main" id="{C25E9AAA-7E36-1E17-83F9-FD3A18A28BE9}"/>
+            </a:ext>
+          </a:extLst>
+        </p:cNvPr>
         <p:cNvGrpSpPr/>
         <p:nvPr/>
       </p:nvGrpSpPr>
@@ -8432,10 +9127,84 @@
       </p:grpSpPr>
       <p:sp>
         <p:nvSpPr>
-          <p:cNvPr id="2" name="標題 1">
+          <p:cNvPr id="4" name="文字方塊 3">
             <a:extLst>
               <a:ext uri="{FF2B5EF4-FFF2-40B4-BE49-F238E27FC236}">
-                <a16:creationId xmlns:a16="http://schemas.microsoft.com/office/drawing/2014/main" id="{F230278E-9DDB-1083-DE26-7377E52832B3}"/>
+                <a16:creationId xmlns:a16="http://schemas.microsoft.com/office/drawing/2014/main" id="{2F17524D-2567-3815-714D-5B3931C4B306}"/>
+              </a:ext>
+            </a:extLst>
+          </p:cNvPr>
+          <p:cNvSpPr txBox="1"/>
+          <p:nvPr/>
+        </p:nvSpPr>
+        <p:spPr>
+          <a:xfrm>
+            <a:off x="520699" y="1369489"/>
+            <a:ext cx="7669813" cy="440633"/>
+          </a:xfrm>
+          <a:prstGeom prst="rect">
+            <a:avLst/>
+          </a:prstGeom>
+          <a:noFill/>
+        </p:spPr>
+        <p:txBody>
+          <a:bodyPr wrap="square">
+            <a:spAutoFit/>
+          </a:bodyPr>
+          <a:lstStyle/>
+          <a:p>
+            <a:pPr marL="457200" lvl="1" indent="-406400">
+              <a:lnSpc>
+                <a:spcPts val="3000"/>
+              </a:lnSpc>
+              <a:spcBef>
+                <a:spcPts val="560"/>
+              </a:spcBef>
+              <a:buClr>
+                <a:schemeClr val="accent2"/>
+              </a:buClr>
+              <a:buSzPts val="2800"/>
+              <a:buFont typeface="Noto Sans Symbols"/>
+              <a:buChar char="❖"/>
+            </a:pPr>
+            <a:r>
+              <a:rPr lang="zh-TW" altLang="en-US" sz="2000" dirty="0">
+                <a:latin typeface="Times New Roman" panose="02020603050405020304" pitchFamily="18" charset="0"/>
+                <a:ea typeface="標楷體" panose="03000509000000000000" pitchFamily="65" charset="-120"/>
+                <a:cs typeface="Times New Roman" panose="02020603050405020304" pitchFamily="18" charset="0"/>
+              </a:rPr>
+              <a:t>什麼是 </a:t>
+            </a:r>
+            <a:r>
+              <a:rPr lang="en-US" altLang="zh-TW" sz="2000" dirty="0">
+                <a:latin typeface="Times New Roman" panose="02020603050405020304" pitchFamily="18" charset="0"/>
+                <a:ea typeface="標楷體" panose="03000509000000000000" pitchFamily="65" charset="-120"/>
+                <a:cs typeface="Times New Roman" panose="02020603050405020304" pitchFamily="18" charset="0"/>
+              </a:rPr>
+              <a:t>Device Color Space</a:t>
+            </a:r>
+            <a:r>
+              <a:rPr lang="zh-TW" altLang="en-US" sz="2000" dirty="0">
+                <a:latin typeface="Times New Roman" panose="02020603050405020304" pitchFamily="18" charset="0"/>
+                <a:ea typeface="標楷體" panose="03000509000000000000" pitchFamily="65" charset="-120"/>
+                <a:cs typeface="Times New Roman" panose="02020603050405020304" pitchFamily="18" charset="0"/>
+              </a:rPr>
+              <a:t>？</a:t>
+            </a:r>
+            <a:endParaRPr lang="en-US" altLang="zh-TW" sz="2000" dirty="0">
+              <a:latin typeface="Times New Roman" panose="02020603050405020304" pitchFamily="18" charset="0"/>
+              <a:ea typeface="標楷體" panose="03000509000000000000" pitchFamily="65" charset="-120"/>
+              <a:cs typeface="Times New Roman" panose="02020603050405020304" pitchFamily="18" charset="0"/>
+            </a:endParaRPr>
+          </a:p>
+        </p:txBody>
+      </p:sp>
+      <p:sp>
+        <p:nvSpPr>
+          <p:cNvPr id="8" name="標題 1">
+            <a:extLst>
+              <a:ext uri="{FF2B5EF4-FFF2-40B4-BE49-F238E27FC236}">
+                <a16:creationId xmlns:a16="http://schemas.microsoft.com/office/drawing/2014/main" id="{912256C4-A35A-439C-D194-BE22EDF76531}"/>
               </a:ext>
             </a:extLst>
           </p:cNvPr>
@@ -8446,7 +9215,12 @@
             <p:ph type="title"/>
           </p:nvPr>
         </p:nvSpPr>
-        <p:spPr/>
+        <p:spPr>
+          <a:xfrm>
+            <a:off x="609602" y="609600"/>
+            <a:ext cx="8077200" cy="533400"/>
+          </a:xfrm>
+        </p:spPr>
         <p:txBody>
           <a:bodyPr/>
           <a:lstStyle/>
@@ -8467,32 +9241,26 @@
               </a:rPr>
               <a:t>:</a:t>
             </a:r>
-            <a:endParaRPr lang="zh-TW" altLang="en-US" dirty="0"/>
+            <a:r>
+              <a:rPr lang="zh-TW" altLang="zh-TW" dirty="0">
+                <a:latin typeface="Times New Roman" panose="02020603050405020304" pitchFamily="18" charset="0"/>
+                <a:ea typeface="標楷體" panose="03000509000000000000" pitchFamily="65" charset="-120"/>
+                <a:cs typeface="Times New Roman" panose="02020603050405020304" pitchFamily="18" charset="0"/>
+              </a:rPr>
+              <a:t>Display ICC Profile 裡面到底有什麼？</a:t>
+            </a:r>
+            <a:endParaRPr lang="zh-TW" altLang="en-US" dirty="0">
+              <a:latin typeface="Times New Roman" panose="02020603050405020304" pitchFamily="18" charset="0"/>
+              <a:ea typeface="標楷體" panose="03000509000000000000" pitchFamily="65" charset="-120"/>
+              <a:cs typeface="Times New Roman" panose="02020603050405020304" pitchFamily="18" charset="0"/>
+            </a:endParaRPr>
           </a:p>
         </p:txBody>
-      </p:sp>
-      <p:sp>
-        <p:nvSpPr>
-          <p:cNvPr id="3" name="圖表版面配置區 2">
-            <a:extLst>
-              <a:ext uri="{FF2B5EF4-FFF2-40B4-BE49-F238E27FC236}">
-                <a16:creationId xmlns:a16="http://schemas.microsoft.com/office/drawing/2014/main" id="{6F76EA7C-89FA-596C-B414-662A677616BF}"/>
-              </a:ext>
-            </a:extLst>
-          </p:cNvPr>
-          <p:cNvSpPr>
-            <a:spLocks noGrp="1"/>
-          </p:cNvSpPr>
-          <p:nvPr>
-            <p:ph type="chart" idx="1"/>
-          </p:nvPr>
-        </p:nvSpPr>
-        <p:spPr/>
       </p:sp>
     </p:spTree>
     <p:extLst>
       <p:ext uri="{BB962C8B-B14F-4D97-AF65-F5344CB8AC3E}">
-        <p14:creationId xmlns:p14="http://schemas.microsoft.com/office/powerpoint/2010/main" val="1903635022"/>
+        <p14:creationId xmlns:p14="http://schemas.microsoft.com/office/powerpoint/2010/main" val="3369118984"/>
       </p:ext>
     </p:extLst>
   </p:cSld>
@@ -8503,95 +9271,6 @@
 </file>
 
 <file path=ppt/slides/slide7.xml><?xml version="1.0" encoding="utf-8"?>
-<p:sld xmlns:a="http://schemas.openxmlformats.org/drawingml/2006/main" xmlns:r="http://schemas.openxmlformats.org/officeDocument/2006/relationships" xmlns:p="http://schemas.openxmlformats.org/presentationml/2006/main">
-  <p:cSld>
-    <p:spTree>
-      <p:nvGrpSpPr>
-        <p:cNvPr id="1" name=""/>
-        <p:cNvGrpSpPr/>
-        <p:nvPr/>
-      </p:nvGrpSpPr>
-      <p:grpSpPr>
-        <a:xfrm>
-          <a:off x="0" y="0"/>
-          <a:ext cx="0" cy="0"/>
-          <a:chOff x="0" y="0"/>
-          <a:chExt cx="0" cy="0"/>
-        </a:xfrm>
-      </p:grpSpPr>
-      <p:sp>
-        <p:nvSpPr>
-          <p:cNvPr id="2" name="標題 1">
-            <a:extLst>
-              <a:ext uri="{FF2B5EF4-FFF2-40B4-BE49-F238E27FC236}">
-                <a16:creationId xmlns:a16="http://schemas.microsoft.com/office/drawing/2014/main" id="{F230278E-9DDB-1083-DE26-7377E52832B3}"/>
-              </a:ext>
-            </a:extLst>
-          </p:cNvPr>
-          <p:cNvSpPr>
-            <a:spLocks noGrp="1"/>
-          </p:cNvSpPr>
-          <p:nvPr>
-            <p:ph type="title"/>
-          </p:nvPr>
-        </p:nvSpPr>
-        <p:spPr/>
-        <p:txBody>
-          <a:bodyPr/>
-          <a:lstStyle/>
-          <a:p>
-            <a:r>
-              <a:rPr lang="zh-TW" altLang="en-US" dirty="0">
-                <a:latin typeface="Times New Roman" panose="02020603050405020304" pitchFamily="18" charset="0"/>
-                <a:ea typeface="標楷體" panose="03000509000000000000" pitchFamily="65" charset="-120"/>
-                <a:cs typeface="Times New Roman" panose="02020603050405020304" pitchFamily="18" charset="0"/>
-              </a:rPr>
-              <a:t>本次進度</a:t>
-            </a:r>
-            <a:r>
-              <a:rPr lang="en-US" altLang="zh-TW" dirty="0">
-                <a:latin typeface="Times New Roman" panose="02020603050405020304" pitchFamily="18" charset="0"/>
-                <a:ea typeface="標楷體" panose="03000509000000000000" pitchFamily="65" charset="-120"/>
-                <a:cs typeface="Times New Roman" panose="02020603050405020304" pitchFamily="18" charset="0"/>
-              </a:rPr>
-              <a:t>:</a:t>
-            </a:r>
-            <a:endParaRPr lang="zh-TW" altLang="en-US" dirty="0"/>
-          </a:p>
-        </p:txBody>
-      </p:sp>
-      <p:sp>
-        <p:nvSpPr>
-          <p:cNvPr id="3" name="圖表版面配置區 2">
-            <a:extLst>
-              <a:ext uri="{FF2B5EF4-FFF2-40B4-BE49-F238E27FC236}">
-                <a16:creationId xmlns:a16="http://schemas.microsoft.com/office/drawing/2014/main" id="{6F76EA7C-89FA-596C-B414-662A677616BF}"/>
-              </a:ext>
-            </a:extLst>
-          </p:cNvPr>
-          <p:cNvSpPr>
-            <a:spLocks noGrp="1"/>
-          </p:cNvSpPr>
-          <p:nvPr>
-            <p:ph type="chart" idx="1"/>
-          </p:nvPr>
-        </p:nvSpPr>
-        <p:spPr/>
-      </p:sp>
-    </p:spTree>
-    <p:extLst>
-      <p:ext uri="{BB962C8B-B14F-4D97-AF65-F5344CB8AC3E}">
-        <p14:creationId xmlns:p14="http://schemas.microsoft.com/office/powerpoint/2010/main" val="2538759998"/>
-      </p:ext>
-    </p:extLst>
-  </p:cSld>
-  <p:clrMapOvr>
-    <a:masterClrMapping/>
-  </p:clrMapOvr>
-</p:sld>
-</file>
-
-<file path=ppt/slides/slide8.xml><?xml version="1.0" encoding="utf-8"?>
 <p:sld xmlns:a="http://schemas.openxmlformats.org/drawingml/2006/main" xmlns:r="http://schemas.openxmlformats.org/officeDocument/2006/relationships" xmlns:p="http://schemas.openxmlformats.org/presentationml/2006/main">
   <p:cSld>
     <p:spTree>

--- a/ICCPROFILE.pptx
+++ b/ICCPROFILE.pptx
@@ -5,7 +5,7 @@
     <p:sldMasterId id="2147483658" r:id="rId1"/>
   </p:sldMasterIdLst>
   <p:notesMasterIdLst>
-    <p:notesMasterId r:id="rId9"/>
+    <p:notesMasterId r:id="rId13"/>
   </p:notesMasterIdLst>
   <p:sldIdLst>
     <p:sldId id="277" r:id="rId2"/>
@@ -14,7 +14,11 @@
     <p:sldId id="1938" r:id="rId5"/>
     <p:sldId id="1997" r:id="rId6"/>
     <p:sldId id="1998" r:id="rId7"/>
-    <p:sldId id="286" r:id="rId8"/>
+    <p:sldId id="1999" r:id="rId8"/>
+    <p:sldId id="2001" r:id="rId9"/>
+    <p:sldId id="2002" r:id="rId10"/>
+    <p:sldId id="2003" r:id="rId11"/>
+    <p:sldId id="286" r:id="rId12"/>
   </p:sldIdLst>
   <p:sldSz cx="9906000" cy="6858000" type="A4"/>
   <p:notesSz cx="7315200" cy="9601200"/>
@@ -262,6 +266,10 @@
             <p14:sldId id="1938"/>
             <p14:sldId id="1997"/>
             <p14:sldId id="1998"/>
+            <p14:sldId id="1999"/>
+            <p14:sldId id="2001"/>
+            <p14:sldId id="2002"/>
+            <p14:sldId id="2003"/>
           </p14:sldIdLst>
         </p14:section>
         <p14:section name="End" id="{33EEDC85-A799-4CB3-BF13-F4955B8630BE}">
@@ -1603,6 +1611,221 @@
 </p:notes>
 </file>
 
+<file path=ppt/notesSlides/notesSlide10.xml><?xml version="1.0" encoding="utf-8"?>
+<p:notes xmlns:a="http://schemas.openxmlformats.org/drawingml/2006/main" xmlns:r="http://schemas.openxmlformats.org/officeDocument/2006/relationships" xmlns:p="http://schemas.openxmlformats.org/presentationml/2006/main">
+  <p:cSld>
+    <p:spTree>
+      <p:nvGrpSpPr>
+        <p:cNvPr id="1" name="">
+          <a:extLst>
+            <a:ext uri="{FF2B5EF4-FFF2-40B4-BE49-F238E27FC236}">
+              <a16:creationId xmlns:a16="http://schemas.microsoft.com/office/drawing/2014/main" id="{D83B1E6A-07EA-2C49-E94E-89150806B35A}"/>
+            </a:ext>
+          </a:extLst>
+        </p:cNvPr>
+        <p:cNvGrpSpPr/>
+        <p:nvPr/>
+      </p:nvGrpSpPr>
+      <p:grpSpPr>
+        <a:xfrm>
+          <a:off x="0" y="0"/>
+          <a:ext cx="0" cy="0"/>
+          <a:chOff x="0" y="0"/>
+          <a:chExt cx="0" cy="0"/>
+        </a:xfrm>
+      </p:grpSpPr>
+      <p:sp>
+        <p:nvSpPr>
+          <p:cNvPr id="2" name="投影片影像版面配置區 1">
+            <a:extLst>
+              <a:ext uri="{FF2B5EF4-FFF2-40B4-BE49-F238E27FC236}">
+                <a16:creationId xmlns:a16="http://schemas.microsoft.com/office/drawing/2014/main" id="{D368E216-B8FB-E497-CE96-7A22127E4773}"/>
+              </a:ext>
+            </a:extLst>
+          </p:cNvPr>
+          <p:cNvSpPr>
+            <a:spLocks noGrp="1" noRot="1" noChangeAspect="1"/>
+          </p:cNvSpPr>
+          <p:nvPr>
+            <p:ph type="sldImg"/>
+          </p:nvPr>
+        </p:nvSpPr>
+        <p:spPr/>
+      </p:sp>
+      <p:sp>
+        <p:nvSpPr>
+          <p:cNvPr id="3" name="備忘稿版面配置區 2">
+            <a:extLst>
+              <a:ext uri="{FF2B5EF4-FFF2-40B4-BE49-F238E27FC236}">
+                <a16:creationId xmlns:a16="http://schemas.microsoft.com/office/drawing/2014/main" id="{37CFCF3B-751C-7B04-59E2-90C7F3AAC38C}"/>
+              </a:ext>
+            </a:extLst>
+          </p:cNvPr>
+          <p:cNvSpPr>
+            <a:spLocks noGrp="1"/>
+          </p:cNvSpPr>
+          <p:nvPr>
+            <p:ph type="body" idx="1"/>
+          </p:nvPr>
+        </p:nvSpPr>
+        <p:spPr/>
+        <p:txBody>
+          <a:bodyPr/>
+          <a:lstStyle/>
+          <a:p>
+            <a:endParaRPr lang="zh-TW" altLang="en-US" dirty="0"/>
+          </a:p>
+        </p:txBody>
+      </p:sp>
+      <p:sp>
+        <p:nvSpPr>
+          <p:cNvPr id="4" name="投影片編號版面配置區 3">
+            <a:extLst>
+              <a:ext uri="{FF2B5EF4-FFF2-40B4-BE49-F238E27FC236}">
+                <a16:creationId xmlns:a16="http://schemas.microsoft.com/office/drawing/2014/main" id="{C74B9077-19CE-89B0-AB98-4BB2D2D042E5}"/>
+              </a:ext>
+            </a:extLst>
+          </p:cNvPr>
+          <p:cNvSpPr>
+            <a:spLocks noGrp="1"/>
+          </p:cNvSpPr>
+          <p:nvPr>
+            <p:ph type="sldNum" idx="12"/>
+          </p:nvPr>
+        </p:nvSpPr>
+        <p:spPr/>
+        <p:txBody>
+          <a:bodyPr/>
+          <a:lstStyle/>
+          <a:p>
+            <a:pPr marL="0" marR="0" lvl="0" indent="0" algn="r" rtl="0">
+              <a:spcBef>
+                <a:spcPts val="0"/>
+              </a:spcBef>
+              <a:spcAft>
+                <a:spcPts val="0"/>
+              </a:spcAft>
+              <a:buNone/>
+            </a:pPr>
+            <a:fld id="{00000000-1234-1234-1234-123412341234}" type="slidenum">
+              <a:rPr lang="en-US" sz="2000" b="0" i="0" u="none" strike="noStrike" cap="none" smtClean="0">
+                <a:solidFill>
+                  <a:schemeClr val="dk1"/>
+                </a:solidFill>
+                <a:latin typeface="Times New Roman"/>
+                <a:ea typeface="Times New Roman"/>
+                <a:cs typeface="Times New Roman"/>
+                <a:sym typeface="Times New Roman"/>
+              </a:rPr>
+              <a:t>10</a:t>
+            </a:fld>
+            <a:endParaRPr lang="en-US" sz="2000" b="0" i="0" u="none" strike="noStrike" cap="none" dirty="0">
+              <a:solidFill>
+                <a:schemeClr val="dk1"/>
+              </a:solidFill>
+              <a:latin typeface="Times New Roman"/>
+              <a:ea typeface="Times New Roman"/>
+              <a:cs typeface="Times New Roman"/>
+              <a:sym typeface="Times New Roman"/>
+            </a:endParaRPr>
+          </a:p>
+        </p:txBody>
+      </p:sp>
+    </p:spTree>
+    <p:extLst>
+      <p:ext uri="{BB962C8B-B14F-4D97-AF65-F5344CB8AC3E}">
+        <p14:creationId xmlns:p14="http://schemas.microsoft.com/office/powerpoint/2010/main" val="431712648"/>
+      </p:ext>
+    </p:extLst>
+  </p:cSld>
+  <p:clrMapOvr>
+    <a:masterClrMapping/>
+  </p:clrMapOvr>
+</p:notes>
+</file>
+
+<file path=ppt/notesSlides/notesSlide11.xml><?xml version="1.0" encoding="utf-8"?>
+<p:notes xmlns:a="http://schemas.openxmlformats.org/drawingml/2006/main" xmlns:r="http://schemas.openxmlformats.org/officeDocument/2006/relationships" xmlns:p="http://schemas.openxmlformats.org/presentationml/2006/main">
+  <p:cSld>
+    <p:spTree>
+      <p:nvGrpSpPr>
+        <p:cNvPr id="1" name=""/>
+        <p:cNvGrpSpPr/>
+        <p:nvPr/>
+      </p:nvGrpSpPr>
+      <p:grpSpPr>
+        <a:xfrm>
+          <a:off x="0" y="0"/>
+          <a:ext cx="0" cy="0"/>
+          <a:chOff x="0" y="0"/>
+          <a:chExt cx="0" cy="0"/>
+        </a:xfrm>
+      </p:grpSpPr>
+      <p:sp>
+        <p:nvSpPr>
+          <p:cNvPr id="1048641" name="投影片影像版面配置區 1"/>
+          <p:cNvSpPr>
+            <a:spLocks noGrp="1" noRot="1" noChangeAspect="1"/>
+          </p:cNvSpPr>
+          <p:nvPr>
+            <p:ph type="sldImg"/>
+          </p:nvPr>
+        </p:nvSpPr>
+        <p:spPr/>
+      </p:sp>
+      <p:sp>
+        <p:nvSpPr>
+          <p:cNvPr id="1048642" name="備忘稿版面配置區 2"/>
+          <p:cNvSpPr>
+            <a:spLocks noGrp="1"/>
+          </p:cNvSpPr>
+          <p:nvPr>
+            <p:ph type="body" idx="1"/>
+          </p:nvPr>
+        </p:nvSpPr>
+        <p:spPr/>
+        <p:txBody>
+          <a:bodyPr/>
+          <a:lstStyle/>
+          <a:p>
+            <a:pPr marL="228600" indent="0">
+              <a:buNone/>
+            </a:pPr>
+            <a:endParaRPr lang="en-US" altLang="zh-TW" dirty="0"/>
+          </a:p>
+        </p:txBody>
+      </p:sp>
+      <p:sp>
+        <p:nvSpPr>
+          <p:cNvPr id="1048643" name="投影片編號版面配置區 3"/>
+          <p:cNvSpPr>
+            <a:spLocks noGrp="1"/>
+          </p:cNvSpPr>
+          <p:nvPr>
+            <p:ph type="sldNum" sz="quarter" idx="5"/>
+          </p:nvPr>
+        </p:nvSpPr>
+        <p:spPr/>
+        <p:txBody>
+          <a:bodyPr/>
+          <a:lstStyle/>
+          <a:p>
+            <a:fld id="{F5753A29-9D77-4C26-8BEC-432FE5D4B0A4}" type="slidenum">
+              <a:rPr lang="en-US" altLang="zh-TW" smtClean="0"/>
+              <a:t>11</a:t>
+            </a:fld>
+            <a:endParaRPr lang="en-US" altLang="zh-TW" dirty="0"/>
+          </a:p>
+        </p:txBody>
+      </p:sp>
+    </p:spTree>
+  </p:cSld>
+  <p:clrMapOvr>
+    <a:masterClrMapping/>
+  </p:clrMapOvr>
+</p:notes>
+</file>
+
 <file path=ppt/notesSlides/notesSlide2.xml><?xml version="1.0" encoding="utf-8"?>
 <p:notes xmlns:a="http://schemas.openxmlformats.org/drawingml/2006/main" xmlns:r="http://schemas.openxmlformats.org/officeDocument/2006/relationships" xmlns:p="http://schemas.openxmlformats.org/presentationml/2006/main">
   <p:cSld>
@@ -2246,10 +2469,43 @@
           <a:lstStyle/>
           <a:p>
             <a:r>
-              <a:rPr lang="zh-TW" altLang="zh-TW"/>
-              <a:t>ICC Profile 不是一個單純的「RGB → XYZ 表」</a:t>
+              <a:rPr lang="zh-TW" altLang="zh-TW" dirty="0"/>
+              <a:t>ICC Profile 是一種具有固定資料結構的二進位 Profile 檔案。其主要結構由三部分組成：Profile Header、Profile Tag Table，以及 Profile Tagged Element Data。Header 告訴系統這個 Profile 的基本資訊；Tag Table 則像目錄，告訴系統 Profile 裡有哪些 Tag 以及資料在哪裡；真正的資料則放在 Tagged Element Data 裡。</a:t>
             </a:r>
-            <a:endParaRPr lang="zh-TW" altLang="en-US" dirty="0"/>
+            <a:endParaRPr lang="en-US" altLang="zh-TW" dirty="0"/>
+          </a:p>
+          <a:p>
+            <a:endParaRPr lang="en-US" altLang="zh-TW" dirty="0"/>
+          </a:p>
+          <a:p>
+            <a:r>
+              <a:rPr lang="zh-TW" altLang="en-US" dirty="0"/>
+              <a:t>範例的</a:t>
+            </a:r>
+            <a:r>
+              <a:rPr lang="en-US" altLang="zh-TW" dirty="0"/>
+              <a:t>ICC</a:t>
+            </a:r>
+            <a:r>
+              <a:rPr lang="zh-TW" altLang="en-US" dirty="0"/>
+              <a:t>是我使用</a:t>
+            </a:r>
+            <a:r>
+              <a:rPr lang="en-US" altLang="zh-TW" dirty="0"/>
+              <a:t>windows</a:t>
+            </a:r>
+            <a:r>
+              <a:rPr lang="zh-TW" altLang="en-US" dirty="0"/>
+              <a:t>校正自己產生的</a:t>
+            </a:r>
+            <a:r>
+              <a:rPr lang="en-US" altLang="zh-TW" dirty="0"/>
+              <a:t>ICC</a:t>
+            </a:r>
+            <a:r>
+              <a:rPr lang="zh-TW" altLang="en-US" dirty="0"/>
+              <a:t>檔案</a:t>
+            </a:r>
           </a:p>
         </p:txBody>
       </p:sp>
@@ -2325,7 +2581,13 @@
   <p:cSld>
     <p:spTree>
       <p:nvGrpSpPr>
-        <p:cNvPr id="1" name=""/>
+        <p:cNvPr id="1" name="">
+          <a:extLst>
+            <a:ext uri="{FF2B5EF4-FFF2-40B4-BE49-F238E27FC236}">
+              <a16:creationId xmlns:a16="http://schemas.microsoft.com/office/drawing/2014/main" id="{482234D3-9375-BB4A-497F-CAD6E52510CE}"/>
+            </a:ext>
+          </a:extLst>
+        </p:cNvPr>
         <p:cNvGrpSpPr/>
         <p:nvPr/>
       </p:nvGrpSpPr>
@@ -2339,7 +2601,13 @@
       </p:grpSpPr>
       <p:sp>
         <p:nvSpPr>
-          <p:cNvPr id="1048641" name="投影片影像版面配置區 1"/>
+          <p:cNvPr id="2" name="投影片影像版面配置區 1">
+            <a:extLst>
+              <a:ext uri="{FF2B5EF4-FFF2-40B4-BE49-F238E27FC236}">
+                <a16:creationId xmlns:a16="http://schemas.microsoft.com/office/drawing/2014/main" id="{EA9971EE-DFCF-DEF4-8444-9F59BC3FDB40}"/>
+              </a:ext>
+            </a:extLst>
+          </p:cNvPr>
           <p:cNvSpPr>
             <a:spLocks noGrp="1" noRot="1" noChangeAspect="1"/>
           </p:cNvSpPr>
@@ -2351,7 +2619,13 @@
       </p:sp>
       <p:sp>
         <p:nvSpPr>
-          <p:cNvPr id="1048642" name="備忘稿版面配置區 2"/>
+          <p:cNvPr id="3" name="備忘稿版面配置區 2">
+            <a:extLst>
+              <a:ext uri="{FF2B5EF4-FFF2-40B4-BE49-F238E27FC236}">
+                <a16:creationId xmlns:a16="http://schemas.microsoft.com/office/drawing/2014/main" id="{7430228E-C839-67A5-540C-6AD6AE97E8D7}"/>
+              </a:ext>
+            </a:extLst>
+          </p:cNvPr>
           <p:cNvSpPr>
             <a:spLocks noGrp="1"/>
           </p:cNvSpPr>
@@ -2364,21 +2638,24 @@
           <a:bodyPr/>
           <a:lstStyle/>
           <a:p>
-            <a:pPr marL="228600" indent="0">
-              <a:buNone/>
-            </a:pPr>
-            <a:endParaRPr lang="en-US" altLang="zh-TW" dirty="0"/>
+            <a:endParaRPr lang="zh-TW" altLang="en-US" dirty="0"/>
           </a:p>
         </p:txBody>
       </p:sp>
       <p:sp>
         <p:nvSpPr>
-          <p:cNvPr id="1048643" name="投影片編號版面配置區 3"/>
+          <p:cNvPr id="4" name="投影片編號版面配置區 3">
+            <a:extLst>
+              <a:ext uri="{FF2B5EF4-FFF2-40B4-BE49-F238E27FC236}">
+                <a16:creationId xmlns:a16="http://schemas.microsoft.com/office/drawing/2014/main" id="{A952236C-32FD-79CC-D314-A1D3EDE40852}"/>
+              </a:ext>
+            </a:extLst>
+          </p:cNvPr>
           <p:cNvSpPr>
             <a:spLocks noGrp="1"/>
           </p:cNvSpPr>
           <p:nvPr>
-            <p:ph type="sldNum" sz="quarter" idx="5"/>
+            <p:ph type="sldNum" idx="12"/>
           </p:nvPr>
         </p:nvSpPr>
         <p:spPr/>
@@ -2386,15 +2663,399 @@
           <a:bodyPr/>
           <a:lstStyle/>
           <a:p>
-            <a:fld id="{F5753A29-9D77-4C26-8BEC-432FE5D4B0A4}" type="slidenum">
-              <a:rPr lang="en-US" altLang="zh-TW" smtClean="0"/>
+            <a:pPr marL="0" marR="0" lvl="0" indent="0" algn="r" rtl="0">
+              <a:spcBef>
+                <a:spcPts val="0"/>
+              </a:spcBef>
+              <a:spcAft>
+                <a:spcPts val="0"/>
+              </a:spcAft>
+              <a:buNone/>
+            </a:pPr>
+            <a:fld id="{00000000-1234-1234-1234-123412341234}" type="slidenum">
+              <a:rPr lang="en-US" sz="2000" b="0" i="0" u="none" strike="noStrike" cap="none" smtClean="0">
+                <a:solidFill>
+                  <a:schemeClr val="dk1"/>
+                </a:solidFill>
+                <a:latin typeface="Times New Roman"/>
+                <a:ea typeface="Times New Roman"/>
+                <a:cs typeface="Times New Roman"/>
+                <a:sym typeface="Times New Roman"/>
+              </a:rPr>
               <a:t>7</a:t>
             </a:fld>
-            <a:endParaRPr lang="en-US" altLang="zh-TW" dirty="0"/>
+            <a:endParaRPr lang="en-US" sz="2000" b="0" i="0" u="none" strike="noStrike" cap="none" dirty="0">
+              <a:solidFill>
+                <a:schemeClr val="dk1"/>
+              </a:solidFill>
+              <a:latin typeface="Times New Roman"/>
+              <a:ea typeface="Times New Roman"/>
+              <a:cs typeface="Times New Roman"/>
+              <a:sym typeface="Times New Roman"/>
+            </a:endParaRPr>
           </a:p>
         </p:txBody>
       </p:sp>
     </p:spTree>
+    <p:extLst>
+      <p:ext uri="{BB962C8B-B14F-4D97-AF65-F5344CB8AC3E}">
+        <p14:creationId xmlns:p14="http://schemas.microsoft.com/office/powerpoint/2010/main" val="1756993129"/>
+      </p:ext>
+    </p:extLst>
+  </p:cSld>
+  <p:clrMapOvr>
+    <a:masterClrMapping/>
+  </p:clrMapOvr>
+</p:notes>
+</file>
+
+<file path=ppt/notesSlides/notesSlide8.xml><?xml version="1.0" encoding="utf-8"?>
+<p:notes xmlns:a="http://schemas.openxmlformats.org/drawingml/2006/main" xmlns:r="http://schemas.openxmlformats.org/officeDocument/2006/relationships" xmlns:p="http://schemas.openxmlformats.org/presentationml/2006/main">
+  <p:cSld>
+    <p:spTree>
+      <p:nvGrpSpPr>
+        <p:cNvPr id="1" name="">
+          <a:extLst>
+            <a:ext uri="{FF2B5EF4-FFF2-40B4-BE49-F238E27FC236}">
+              <a16:creationId xmlns:a16="http://schemas.microsoft.com/office/drawing/2014/main" id="{19BD7BE6-0C6A-24C7-EDCE-42FCC8CD50FA}"/>
+            </a:ext>
+          </a:extLst>
+        </p:cNvPr>
+        <p:cNvGrpSpPr/>
+        <p:nvPr/>
+      </p:nvGrpSpPr>
+      <p:grpSpPr>
+        <a:xfrm>
+          <a:off x="0" y="0"/>
+          <a:ext cx="0" cy="0"/>
+          <a:chOff x="0" y="0"/>
+          <a:chExt cx="0" cy="0"/>
+        </a:xfrm>
+      </p:grpSpPr>
+      <p:sp>
+        <p:nvSpPr>
+          <p:cNvPr id="2" name="投影片影像版面配置區 1">
+            <a:extLst>
+              <a:ext uri="{FF2B5EF4-FFF2-40B4-BE49-F238E27FC236}">
+                <a16:creationId xmlns:a16="http://schemas.microsoft.com/office/drawing/2014/main" id="{963FA2D6-6572-94E0-F6B6-6A5BA5019224}"/>
+              </a:ext>
+            </a:extLst>
+          </p:cNvPr>
+          <p:cNvSpPr>
+            <a:spLocks noGrp="1" noRot="1" noChangeAspect="1"/>
+          </p:cNvSpPr>
+          <p:nvPr>
+            <p:ph type="sldImg"/>
+          </p:nvPr>
+        </p:nvSpPr>
+        <p:spPr/>
+      </p:sp>
+      <p:sp>
+        <p:nvSpPr>
+          <p:cNvPr id="3" name="備忘稿版面配置區 2">
+            <a:extLst>
+              <a:ext uri="{FF2B5EF4-FFF2-40B4-BE49-F238E27FC236}">
+                <a16:creationId xmlns:a16="http://schemas.microsoft.com/office/drawing/2014/main" id="{57639A5D-EDAF-4F81-B67C-950D2048D712}"/>
+              </a:ext>
+            </a:extLst>
+          </p:cNvPr>
+          <p:cNvSpPr>
+            <a:spLocks noGrp="1"/>
+          </p:cNvSpPr>
+          <p:nvPr>
+            <p:ph type="body" idx="1"/>
+          </p:nvPr>
+        </p:nvSpPr>
+        <p:spPr/>
+        <p:txBody>
+          <a:bodyPr/>
+          <a:lstStyle/>
+          <a:p>
+            <a:r>
+              <a:rPr lang="zh-TW" altLang="en-US" dirty="0"/>
+              <a:t>例子中的</a:t>
+            </a:r>
+            <a:r>
+              <a:rPr lang="en-US" altLang="zh-TW" dirty="0"/>
+              <a:t>gamma2.2</a:t>
+            </a:r>
+            <a:r>
+              <a:rPr lang="zh-TW" altLang="en-US" dirty="0"/>
+              <a:t>做的事情就可以說是一種</a:t>
+            </a:r>
+            <a:r>
+              <a:rPr lang="en-US" altLang="zh-TW" dirty="0"/>
+              <a:t>TRC</a:t>
+            </a:r>
+            <a:r>
+              <a:rPr lang="zh-TW" altLang="en-US" dirty="0"/>
+              <a:t>，將原先非線性的</a:t>
+            </a:r>
+            <a:r>
+              <a:rPr lang="en-US" altLang="zh-TW" dirty="0"/>
+              <a:t>RGB</a:t>
+            </a:r>
+            <a:r>
+              <a:rPr lang="zh-TW" altLang="en-US" dirty="0"/>
+              <a:t>轉換為線性的</a:t>
+            </a:r>
+            <a:r>
+              <a:rPr lang="en-US" altLang="zh-TW" dirty="0"/>
+              <a:t>RGB</a:t>
+            </a:r>
+            <a:r>
+              <a:rPr lang="zh-TW" altLang="en-US" dirty="0"/>
+              <a:t>，這就是</a:t>
+            </a:r>
+            <a:r>
+              <a:rPr lang="en-US" altLang="zh-TW" dirty="0"/>
+              <a:t>TRC</a:t>
+            </a:r>
+            <a:r>
+              <a:rPr lang="zh-TW" altLang="en-US" dirty="0"/>
+              <a:t>的具體功能，當然</a:t>
+            </a:r>
+            <a:r>
+              <a:rPr lang="en-US" altLang="zh-TW" dirty="0"/>
+              <a:t>TRC</a:t>
+            </a:r>
+            <a:r>
+              <a:rPr lang="zh-TW" altLang="en-US" dirty="0"/>
+              <a:t>可以是</a:t>
+            </a:r>
+            <a:r>
+              <a:rPr lang="en-US" altLang="zh-TW" dirty="0"/>
+              <a:t>3</a:t>
+            </a:r>
+            <a:r>
+              <a:rPr lang="zh-TW" altLang="en-US" dirty="0"/>
+              <a:t>條獨立的</a:t>
+            </a:r>
+            <a:r>
+              <a:rPr lang="en-US" altLang="zh-TW" dirty="0"/>
+              <a:t>LUT</a:t>
+            </a:r>
+            <a:r>
+              <a:rPr lang="zh-TW" altLang="en-US" dirty="0"/>
+              <a:t>也可以是「</a:t>
+            </a:r>
+            <a:r>
+              <a:rPr lang="zh-TW" altLang="zh-TW" b="1" dirty="0"/>
+              <a:t>曲線資料</a:t>
+            </a:r>
+            <a:r>
+              <a:rPr lang="zh-TW" altLang="zh-TW" dirty="0"/>
+              <a:t>或</a:t>
+            </a:r>
+            <a:r>
+              <a:rPr lang="zh-TW" altLang="zh-TW" b="1" dirty="0"/>
+              <a:t>參數化函數</a:t>
+            </a:r>
+            <a:r>
+              <a:rPr lang="zh-TW" altLang="en-US" b="1" dirty="0"/>
+              <a:t>」甚至是簡單的</a:t>
+            </a:r>
+            <a:r>
+              <a:rPr lang="en-US" altLang="zh-TW" b="1" dirty="0"/>
+              <a:t>gamma</a:t>
+            </a:r>
+            <a:endParaRPr lang="zh-TW" altLang="en-US" dirty="0"/>
+          </a:p>
+        </p:txBody>
+      </p:sp>
+      <p:sp>
+        <p:nvSpPr>
+          <p:cNvPr id="4" name="投影片編號版面配置區 3">
+            <a:extLst>
+              <a:ext uri="{FF2B5EF4-FFF2-40B4-BE49-F238E27FC236}">
+                <a16:creationId xmlns:a16="http://schemas.microsoft.com/office/drawing/2014/main" id="{F8ED7604-660E-D030-99B4-A4E74D119DFC}"/>
+              </a:ext>
+            </a:extLst>
+          </p:cNvPr>
+          <p:cNvSpPr>
+            <a:spLocks noGrp="1"/>
+          </p:cNvSpPr>
+          <p:nvPr>
+            <p:ph type="sldNum" idx="12"/>
+          </p:nvPr>
+        </p:nvSpPr>
+        <p:spPr/>
+        <p:txBody>
+          <a:bodyPr/>
+          <a:lstStyle/>
+          <a:p>
+            <a:pPr marL="0" marR="0" lvl="0" indent="0" algn="r" rtl="0">
+              <a:spcBef>
+                <a:spcPts val="0"/>
+              </a:spcBef>
+              <a:spcAft>
+                <a:spcPts val="0"/>
+              </a:spcAft>
+              <a:buNone/>
+            </a:pPr>
+            <a:fld id="{00000000-1234-1234-1234-123412341234}" type="slidenum">
+              <a:rPr lang="en-US" sz="2000" b="0" i="0" u="none" strike="noStrike" cap="none" smtClean="0">
+                <a:solidFill>
+                  <a:schemeClr val="dk1"/>
+                </a:solidFill>
+                <a:latin typeface="Times New Roman"/>
+                <a:ea typeface="Times New Roman"/>
+                <a:cs typeface="Times New Roman"/>
+                <a:sym typeface="Times New Roman"/>
+              </a:rPr>
+              <a:t>8</a:t>
+            </a:fld>
+            <a:endParaRPr lang="en-US" sz="2000" b="0" i="0" u="none" strike="noStrike" cap="none" dirty="0">
+              <a:solidFill>
+                <a:schemeClr val="dk1"/>
+              </a:solidFill>
+              <a:latin typeface="Times New Roman"/>
+              <a:ea typeface="Times New Roman"/>
+              <a:cs typeface="Times New Roman"/>
+              <a:sym typeface="Times New Roman"/>
+            </a:endParaRPr>
+          </a:p>
+        </p:txBody>
+      </p:sp>
+    </p:spTree>
+    <p:extLst>
+      <p:ext uri="{BB962C8B-B14F-4D97-AF65-F5344CB8AC3E}">
+        <p14:creationId xmlns:p14="http://schemas.microsoft.com/office/powerpoint/2010/main" val="1780622018"/>
+      </p:ext>
+    </p:extLst>
+  </p:cSld>
+  <p:clrMapOvr>
+    <a:masterClrMapping/>
+  </p:clrMapOvr>
+</p:notes>
+</file>
+
+<file path=ppt/notesSlides/notesSlide9.xml><?xml version="1.0" encoding="utf-8"?>
+<p:notes xmlns:a="http://schemas.openxmlformats.org/drawingml/2006/main" xmlns:r="http://schemas.openxmlformats.org/officeDocument/2006/relationships" xmlns:p="http://schemas.openxmlformats.org/presentationml/2006/main">
+  <p:cSld>
+    <p:spTree>
+      <p:nvGrpSpPr>
+        <p:cNvPr id="1" name="">
+          <a:extLst>
+            <a:ext uri="{FF2B5EF4-FFF2-40B4-BE49-F238E27FC236}">
+              <a16:creationId xmlns:a16="http://schemas.microsoft.com/office/drawing/2014/main" id="{D5BDCB87-D510-3E12-0B70-9F66CF2E4F53}"/>
+            </a:ext>
+          </a:extLst>
+        </p:cNvPr>
+        <p:cNvGrpSpPr/>
+        <p:nvPr/>
+      </p:nvGrpSpPr>
+      <p:grpSpPr>
+        <a:xfrm>
+          <a:off x="0" y="0"/>
+          <a:ext cx="0" cy="0"/>
+          <a:chOff x="0" y="0"/>
+          <a:chExt cx="0" cy="0"/>
+        </a:xfrm>
+      </p:grpSpPr>
+      <p:sp>
+        <p:nvSpPr>
+          <p:cNvPr id="2" name="投影片影像版面配置區 1">
+            <a:extLst>
+              <a:ext uri="{FF2B5EF4-FFF2-40B4-BE49-F238E27FC236}">
+                <a16:creationId xmlns:a16="http://schemas.microsoft.com/office/drawing/2014/main" id="{9C2220D8-AB85-841B-EEFB-AA26789AEC0A}"/>
+              </a:ext>
+            </a:extLst>
+          </p:cNvPr>
+          <p:cNvSpPr>
+            <a:spLocks noGrp="1" noRot="1" noChangeAspect="1"/>
+          </p:cNvSpPr>
+          <p:nvPr>
+            <p:ph type="sldImg"/>
+          </p:nvPr>
+        </p:nvSpPr>
+        <p:spPr/>
+      </p:sp>
+      <p:sp>
+        <p:nvSpPr>
+          <p:cNvPr id="3" name="備忘稿版面配置區 2">
+            <a:extLst>
+              <a:ext uri="{FF2B5EF4-FFF2-40B4-BE49-F238E27FC236}">
+                <a16:creationId xmlns:a16="http://schemas.microsoft.com/office/drawing/2014/main" id="{7E014429-932D-C388-46B7-D1B69AE89375}"/>
+              </a:ext>
+            </a:extLst>
+          </p:cNvPr>
+          <p:cNvSpPr>
+            <a:spLocks noGrp="1"/>
+          </p:cNvSpPr>
+          <p:nvPr>
+            <p:ph type="body" idx="1"/>
+          </p:nvPr>
+        </p:nvSpPr>
+        <p:spPr/>
+        <p:txBody>
+          <a:bodyPr/>
+          <a:lstStyle/>
+          <a:p>
+            <a:endParaRPr lang="zh-TW" altLang="en-US" dirty="0"/>
+          </a:p>
+        </p:txBody>
+      </p:sp>
+      <p:sp>
+        <p:nvSpPr>
+          <p:cNvPr id="4" name="投影片編號版面配置區 3">
+            <a:extLst>
+              <a:ext uri="{FF2B5EF4-FFF2-40B4-BE49-F238E27FC236}">
+                <a16:creationId xmlns:a16="http://schemas.microsoft.com/office/drawing/2014/main" id="{ECE301C6-59CB-7CC2-23BD-00E11BDD5D3D}"/>
+              </a:ext>
+            </a:extLst>
+          </p:cNvPr>
+          <p:cNvSpPr>
+            <a:spLocks noGrp="1"/>
+          </p:cNvSpPr>
+          <p:nvPr>
+            <p:ph type="sldNum" idx="12"/>
+          </p:nvPr>
+        </p:nvSpPr>
+        <p:spPr/>
+        <p:txBody>
+          <a:bodyPr/>
+          <a:lstStyle/>
+          <a:p>
+            <a:pPr marL="0" marR="0" lvl="0" indent="0" algn="r" rtl="0">
+              <a:spcBef>
+                <a:spcPts val="0"/>
+              </a:spcBef>
+              <a:spcAft>
+                <a:spcPts val="0"/>
+              </a:spcAft>
+              <a:buNone/>
+            </a:pPr>
+            <a:fld id="{00000000-1234-1234-1234-123412341234}" type="slidenum">
+              <a:rPr lang="en-US" sz="2000" b="0" i="0" u="none" strike="noStrike" cap="none" smtClean="0">
+                <a:solidFill>
+                  <a:schemeClr val="dk1"/>
+                </a:solidFill>
+                <a:latin typeface="Times New Roman"/>
+                <a:ea typeface="Times New Roman"/>
+                <a:cs typeface="Times New Roman"/>
+                <a:sym typeface="Times New Roman"/>
+              </a:rPr>
+              <a:t>9</a:t>
+            </a:fld>
+            <a:endParaRPr lang="en-US" sz="2000" b="0" i="0" u="none" strike="noStrike" cap="none" dirty="0">
+              <a:solidFill>
+                <a:schemeClr val="dk1"/>
+              </a:solidFill>
+              <a:latin typeface="Times New Roman"/>
+              <a:ea typeface="Times New Roman"/>
+              <a:cs typeface="Times New Roman"/>
+              <a:sym typeface="Times New Roman"/>
+            </a:endParaRPr>
+          </a:p>
+        </p:txBody>
+      </p:sp>
+    </p:spTree>
+    <p:extLst>
+      <p:ext uri="{BB962C8B-B14F-4D97-AF65-F5344CB8AC3E}">
+        <p14:creationId xmlns:p14="http://schemas.microsoft.com/office/powerpoint/2010/main" val="3964529647"/>
+      </p:ext>
+    </p:extLst>
   </p:cSld>
   <p:clrMapOvr>
     <a:masterClrMapping/>
@@ -7379,6 +8040,554 @@
 </p:sld>
 </file>
 
+<file path=ppt/slides/slide10.xml><?xml version="1.0" encoding="utf-8"?>
+<p:sld xmlns:a="http://schemas.openxmlformats.org/drawingml/2006/main" xmlns:r="http://schemas.openxmlformats.org/officeDocument/2006/relationships" xmlns:p="http://schemas.openxmlformats.org/presentationml/2006/main">
+  <p:cSld>
+    <p:spTree>
+      <p:nvGrpSpPr>
+        <p:cNvPr id="1" name="">
+          <a:extLst>
+            <a:ext uri="{FF2B5EF4-FFF2-40B4-BE49-F238E27FC236}">
+              <a16:creationId xmlns:a16="http://schemas.microsoft.com/office/drawing/2014/main" id="{CB3F1D18-D49B-24B7-7AE4-1C148C1CF218}"/>
+            </a:ext>
+          </a:extLst>
+        </p:cNvPr>
+        <p:cNvGrpSpPr/>
+        <p:nvPr/>
+      </p:nvGrpSpPr>
+      <p:grpSpPr>
+        <a:xfrm>
+          <a:off x="0" y="0"/>
+          <a:ext cx="0" cy="0"/>
+          <a:chOff x="0" y="0"/>
+          <a:chExt cx="0" cy="0"/>
+        </a:xfrm>
+      </p:grpSpPr>
+      <p:sp>
+        <p:nvSpPr>
+          <p:cNvPr id="5" name="標題 1">
+            <a:extLst>
+              <a:ext uri="{FF2B5EF4-FFF2-40B4-BE49-F238E27FC236}">
+                <a16:creationId xmlns:a16="http://schemas.microsoft.com/office/drawing/2014/main" id="{509D26C7-0D1B-6B5F-78B0-58B9AB2272BC}"/>
+              </a:ext>
+            </a:extLst>
+          </p:cNvPr>
+          <p:cNvSpPr>
+            <a:spLocks noGrp="1"/>
+          </p:cNvSpPr>
+          <p:nvPr>
+            <p:ph type="title"/>
+          </p:nvPr>
+        </p:nvSpPr>
+        <p:spPr>
+          <a:xfrm>
+            <a:off x="609602" y="609600"/>
+            <a:ext cx="8077200" cy="533400"/>
+          </a:xfrm>
+        </p:spPr>
+        <p:txBody>
+          <a:bodyPr/>
+          <a:lstStyle/>
+          <a:p>
+            <a:r>
+              <a:rPr lang="zh-TW" altLang="en-US" dirty="0">
+                <a:latin typeface="Times New Roman" panose="02020603050405020304" pitchFamily="18" charset="0"/>
+                <a:ea typeface="標楷體" panose="03000509000000000000" pitchFamily="65" charset="-120"/>
+                <a:cs typeface="Times New Roman" panose="02020603050405020304" pitchFamily="18" charset="0"/>
+              </a:rPr>
+              <a:t>本次進度</a:t>
+            </a:r>
+            <a:r>
+              <a:rPr lang="en-US" altLang="zh-TW" dirty="0">
+                <a:latin typeface="Times New Roman" panose="02020603050405020304" pitchFamily="18" charset="0"/>
+                <a:ea typeface="標楷體" panose="03000509000000000000" pitchFamily="65" charset="-120"/>
+                <a:cs typeface="Times New Roman" panose="02020603050405020304" pitchFamily="18" charset="0"/>
+              </a:rPr>
+              <a:t>:</a:t>
+            </a:r>
+            <a:r>
+              <a:rPr lang="zh-TW" altLang="zh-TW" dirty="0"/>
+              <a:t>Matrix-based Display Profile</a:t>
+            </a:r>
+            <a:endParaRPr lang="zh-TW" altLang="en-US" dirty="0">
+              <a:latin typeface="Times New Roman" panose="02020603050405020304" pitchFamily="18" charset="0"/>
+              <a:ea typeface="標楷體" panose="03000509000000000000" pitchFamily="65" charset="-120"/>
+              <a:cs typeface="Times New Roman" panose="02020603050405020304" pitchFamily="18" charset="0"/>
+            </a:endParaRPr>
+          </a:p>
+        </p:txBody>
+      </p:sp>
+      <p:sp>
+        <p:nvSpPr>
+          <p:cNvPr id="10" name="文字版面配置區 6">
+            <a:extLst>
+              <a:ext uri="{FF2B5EF4-FFF2-40B4-BE49-F238E27FC236}">
+                <a16:creationId xmlns:a16="http://schemas.microsoft.com/office/drawing/2014/main" id="{ED0EFAE0-FF23-F1C1-C216-8C274B22FF64}"/>
+              </a:ext>
+            </a:extLst>
+          </p:cNvPr>
+          <p:cNvSpPr txBox="1"/>
+          <p:nvPr/>
+        </p:nvSpPr>
+        <p:spPr>
+          <a:xfrm>
+            <a:off x="497549" y="1284684"/>
+            <a:ext cx="8686796" cy="4700685"/>
+          </a:xfrm>
+          <a:prstGeom prst="rect">
+            <a:avLst/>
+          </a:prstGeom>
+          <a:noFill/>
+          <a:ln>
+            <a:noFill/>
+          </a:ln>
+        </p:spPr>
+        <p:txBody>
+          <a:bodyPr spcFirstLastPara="1" wrap="square" lIns="91425" tIns="45700" rIns="91425" bIns="45700" anchor="t" anchorCtr="0">
+            <a:noAutofit/>
+          </a:bodyPr>
+          <a:lstStyle>
+            <a:defPPr marR="0" lvl="0" algn="l" rtl="0">
+              <a:lnSpc>
+                <a:spcPct val="100000"/>
+              </a:lnSpc>
+              <a:spcBef>
+                <a:spcPts val="0"/>
+              </a:spcBef>
+              <a:spcAft>
+                <a:spcPts val="0"/>
+              </a:spcAft>
+            </a:defPPr>
+            <a:lvl1pPr marL="457200" marR="0" lvl="0" indent="-406400" algn="l" rtl="0">
+              <a:lnSpc>
+                <a:spcPct val="100000"/>
+              </a:lnSpc>
+              <a:spcBef>
+                <a:spcPts val="560"/>
+              </a:spcBef>
+              <a:spcAft>
+                <a:spcPts val="0"/>
+              </a:spcAft>
+              <a:buClr>
+                <a:schemeClr val="accent2"/>
+              </a:buClr>
+              <a:buSzPts val="2800"/>
+              <a:buFont typeface="Noto Sans Symbols"/>
+              <a:buChar char="❖"/>
+              <a:defRPr sz="2800" b="0" i="0" u="none" strike="noStrike" cap="none">
+                <a:solidFill>
+                  <a:schemeClr val="dk1"/>
+                </a:solidFill>
+                <a:latin typeface="Times New Roman"/>
+                <a:ea typeface="Times New Roman"/>
+                <a:cs typeface="Times New Roman"/>
+                <a:sym typeface="Times New Roman"/>
+              </a:defRPr>
+            </a:lvl1pPr>
+            <a:lvl2pPr marL="914400" marR="0" lvl="1" indent="-381000" algn="l" rtl="0">
+              <a:lnSpc>
+                <a:spcPct val="100000"/>
+              </a:lnSpc>
+              <a:spcBef>
+                <a:spcPts val="480"/>
+              </a:spcBef>
+              <a:spcAft>
+                <a:spcPts val="0"/>
+              </a:spcAft>
+              <a:buClr>
+                <a:srgbClr val="FF5050"/>
+              </a:buClr>
+              <a:buSzPts val="2400"/>
+              <a:buFont typeface="Noto Sans Symbols"/>
+              <a:buChar char="▪"/>
+              <a:defRPr sz="2400" b="0" i="0" u="none" strike="noStrike" cap="none">
+                <a:solidFill>
+                  <a:schemeClr val="dk1"/>
+                </a:solidFill>
+                <a:latin typeface="Times New Roman"/>
+                <a:ea typeface="Times New Roman"/>
+                <a:cs typeface="Times New Roman"/>
+                <a:sym typeface="Times New Roman"/>
+              </a:defRPr>
+            </a:lvl2pPr>
+            <a:lvl3pPr marL="1371600" marR="0" lvl="2" indent="-355600" algn="l" rtl="0">
+              <a:lnSpc>
+                <a:spcPct val="100000"/>
+              </a:lnSpc>
+              <a:spcBef>
+                <a:spcPts val="400"/>
+              </a:spcBef>
+              <a:spcAft>
+                <a:spcPts val="0"/>
+              </a:spcAft>
+              <a:buClr>
+                <a:srgbClr val="6699FF"/>
+              </a:buClr>
+              <a:buSzPts val="2000"/>
+              <a:buFont typeface="Times New Roman"/>
+              <a:buChar char="•"/>
+              <a:defRPr sz="2000" b="0" i="0" u="none" strike="noStrike" cap="none">
+                <a:solidFill>
+                  <a:schemeClr val="dk1"/>
+                </a:solidFill>
+                <a:latin typeface="Times New Roman"/>
+                <a:ea typeface="Times New Roman"/>
+                <a:cs typeface="Times New Roman"/>
+                <a:sym typeface="Times New Roman"/>
+              </a:defRPr>
+            </a:lvl3pPr>
+            <a:lvl4pPr marL="1828800" marR="0" lvl="3" indent="-355600" algn="l" rtl="0">
+              <a:lnSpc>
+                <a:spcPct val="100000"/>
+              </a:lnSpc>
+              <a:spcBef>
+                <a:spcPts val="400"/>
+              </a:spcBef>
+              <a:spcAft>
+                <a:spcPts val="0"/>
+              </a:spcAft>
+              <a:buClr>
+                <a:srgbClr val="FF5050"/>
+              </a:buClr>
+              <a:buSzPts val="2000"/>
+              <a:buFont typeface="Times New Roman"/>
+              <a:buChar char="o"/>
+              <a:defRPr sz="2000" b="0" i="0" u="none" strike="noStrike" cap="none">
+                <a:solidFill>
+                  <a:schemeClr val="dk1"/>
+                </a:solidFill>
+                <a:latin typeface="Times New Roman"/>
+                <a:ea typeface="Times New Roman"/>
+                <a:cs typeface="Times New Roman"/>
+                <a:sym typeface="Times New Roman"/>
+              </a:defRPr>
+            </a:lvl4pPr>
+            <a:lvl5pPr marL="2286000" marR="0" lvl="4" indent="-355600" algn="l" rtl="0">
+              <a:lnSpc>
+                <a:spcPct val="100000"/>
+              </a:lnSpc>
+              <a:spcBef>
+                <a:spcPts val="400"/>
+              </a:spcBef>
+              <a:spcAft>
+                <a:spcPts val="0"/>
+              </a:spcAft>
+              <a:buClr>
+                <a:srgbClr val="FF5050"/>
+              </a:buClr>
+              <a:buSzPts val="2000"/>
+              <a:buFont typeface="Times New Roman"/>
+              <a:buChar char="o"/>
+              <a:defRPr sz="2000" b="0" i="0" u="none" strike="noStrike" cap="none">
+                <a:solidFill>
+                  <a:schemeClr val="dk1"/>
+                </a:solidFill>
+                <a:latin typeface="Times New Roman"/>
+                <a:ea typeface="Times New Roman"/>
+                <a:cs typeface="Times New Roman"/>
+                <a:sym typeface="Times New Roman"/>
+              </a:defRPr>
+            </a:lvl5pPr>
+            <a:lvl6pPr marL="2743200" marR="0" lvl="5" indent="-355600" algn="l" rtl="0">
+              <a:lnSpc>
+                <a:spcPct val="100000"/>
+              </a:lnSpc>
+              <a:spcBef>
+                <a:spcPts val="400"/>
+              </a:spcBef>
+              <a:spcAft>
+                <a:spcPts val="0"/>
+              </a:spcAft>
+              <a:buClr>
+                <a:srgbClr val="FF5050"/>
+              </a:buClr>
+              <a:buSzPts val="2000"/>
+              <a:buFont typeface="Times New Roman"/>
+              <a:buChar char="o"/>
+              <a:defRPr sz="2000" b="0" i="0" u="none" strike="noStrike" cap="none">
+                <a:solidFill>
+                  <a:schemeClr val="dk1"/>
+                </a:solidFill>
+                <a:latin typeface="Times New Roman"/>
+                <a:ea typeface="Times New Roman"/>
+                <a:cs typeface="Times New Roman"/>
+                <a:sym typeface="Times New Roman"/>
+              </a:defRPr>
+            </a:lvl6pPr>
+            <a:lvl7pPr marL="3200400" marR="0" lvl="6" indent="-355600" algn="l" rtl="0">
+              <a:lnSpc>
+                <a:spcPct val="100000"/>
+              </a:lnSpc>
+              <a:spcBef>
+                <a:spcPts val="400"/>
+              </a:spcBef>
+              <a:spcAft>
+                <a:spcPts val="0"/>
+              </a:spcAft>
+              <a:buClr>
+                <a:srgbClr val="FF5050"/>
+              </a:buClr>
+              <a:buSzPts val="2000"/>
+              <a:buFont typeface="Times New Roman"/>
+              <a:buChar char="o"/>
+              <a:defRPr sz="2000" b="0" i="0" u="none" strike="noStrike" cap="none">
+                <a:solidFill>
+                  <a:schemeClr val="dk1"/>
+                </a:solidFill>
+                <a:latin typeface="Times New Roman"/>
+                <a:ea typeface="Times New Roman"/>
+                <a:cs typeface="Times New Roman"/>
+                <a:sym typeface="Times New Roman"/>
+              </a:defRPr>
+            </a:lvl7pPr>
+            <a:lvl8pPr marL="3657600" marR="0" lvl="7" indent="-355600" algn="l" rtl="0">
+              <a:lnSpc>
+                <a:spcPct val="100000"/>
+              </a:lnSpc>
+              <a:spcBef>
+                <a:spcPts val="400"/>
+              </a:spcBef>
+              <a:spcAft>
+                <a:spcPts val="0"/>
+              </a:spcAft>
+              <a:buClr>
+                <a:srgbClr val="FF5050"/>
+              </a:buClr>
+              <a:buSzPts val="2000"/>
+              <a:buFont typeface="Times New Roman"/>
+              <a:buChar char="o"/>
+              <a:defRPr sz="2000" b="0" i="0" u="none" strike="noStrike" cap="none">
+                <a:solidFill>
+                  <a:schemeClr val="dk1"/>
+                </a:solidFill>
+                <a:latin typeface="Times New Roman"/>
+                <a:ea typeface="Times New Roman"/>
+                <a:cs typeface="Times New Roman"/>
+                <a:sym typeface="Times New Roman"/>
+              </a:defRPr>
+            </a:lvl8pPr>
+            <a:lvl9pPr marL="4114800" marR="0" lvl="8" indent="-355600" algn="l" rtl="0">
+              <a:lnSpc>
+                <a:spcPct val="100000"/>
+              </a:lnSpc>
+              <a:spcBef>
+                <a:spcPts val="400"/>
+              </a:spcBef>
+              <a:spcAft>
+                <a:spcPts val="0"/>
+              </a:spcAft>
+              <a:buClr>
+                <a:srgbClr val="FF5050"/>
+              </a:buClr>
+              <a:buSzPts val="2000"/>
+              <a:buFont typeface="Times New Roman"/>
+              <a:buChar char="o"/>
+              <a:defRPr sz="2000" b="0" i="0" u="none" strike="noStrike" cap="none">
+                <a:solidFill>
+                  <a:schemeClr val="dk1"/>
+                </a:solidFill>
+                <a:latin typeface="Times New Roman"/>
+                <a:ea typeface="Times New Roman"/>
+                <a:cs typeface="Times New Roman"/>
+                <a:sym typeface="Times New Roman"/>
+              </a:defRPr>
+            </a:lvl9pPr>
+          </a:lstStyle>
+          <a:p>
+            <a:pPr marL="457200" lvl="1" indent="-406400">
+              <a:spcBef>
+                <a:spcPts val="560"/>
+              </a:spcBef>
+              <a:buClr>
+                <a:schemeClr val="accent2"/>
+              </a:buClr>
+              <a:buSzPts val="2800"/>
+              <a:buFont typeface="Noto Sans Symbols"/>
+              <a:buChar char="❖"/>
+            </a:pPr>
+            <a:r>
+              <a:rPr lang="en-US" altLang="zh-TW" sz="2000" dirty="0"/>
+              <a:t>0</a:t>
+            </a:r>
+            <a:endParaRPr lang="en-US" altLang="zh-TW" dirty="0"/>
+          </a:p>
+          <a:p>
+            <a:pPr lvl="1">
+              <a:lnSpc>
+                <a:spcPts val="3000"/>
+              </a:lnSpc>
+            </a:pPr>
+            <a:r>
+              <a:rPr lang="en-US" altLang="zh-TW" sz="1600" dirty="0">
+                <a:solidFill>
+                  <a:srgbClr val="333333"/>
+                </a:solidFill>
+                <a:latin typeface="Times New Roman" panose="02020603050405020304" pitchFamily="18" charset="0"/>
+                <a:ea typeface="標楷體" panose="03000509000000000000" pitchFamily="65" charset="-120"/>
+                <a:cs typeface="Times New Roman" panose="02020603050405020304" pitchFamily="18" charset="0"/>
+              </a:rPr>
+              <a:t>0</a:t>
+            </a:r>
+          </a:p>
+          <a:p>
+            <a:pPr>
+              <a:lnSpc>
+                <a:spcPts val="3000"/>
+              </a:lnSpc>
+            </a:pPr>
+            <a:endParaRPr lang="en-US" altLang="zh-TW" sz="2000" dirty="0">
+              <a:latin typeface="Times New Roman" panose="02020603050405020304" pitchFamily="18" charset="0"/>
+              <a:ea typeface="標楷體" panose="03000509000000000000" pitchFamily="65" charset="-120"/>
+            </a:endParaRPr>
+          </a:p>
+          <a:p>
+            <a:pPr marL="533400" lvl="1" indent="0">
+              <a:lnSpc>
+                <a:spcPts val="3000"/>
+              </a:lnSpc>
+              <a:buNone/>
+            </a:pPr>
+            <a:endParaRPr lang="zh-TW" altLang="en-US" sz="1800" dirty="0">
+              <a:solidFill>
+                <a:srgbClr val="333333"/>
+              </a:solidFill>
+              <a:latin typeface="Times New Roman" panose="02020603050405020304" pitchFamily="18" charset="0"/>
+              <a:ea typeface="標楷體" panose="03000509000000000000" pitchFamily="65" charset="-120"/>
+              <a:cs typeface="Times New Roman" panose="02020603050405020304" pitchFamily="18" charset="0"/>
+            </a:endParaRPr>
+          </a:p>
+        </p:txBody>
+      </p:sp>
+    </p:spTree>
+    <p:extLst>
+      <p:ext uri="{BB962C8B-B14F-4D97-AF65-F5344CB8AC3E}">
+        <p14:creationId xmlns:p14="http://schemas.microsoft.com/office/powerpoint/2010/main" val="3423728179"/>
+      </p:ext>
+    </p:extLst>
+  </p:cSld>
+  <p:clrMapOvr>
+    <a:masterClrMapping/>
+  </p:clrMapOvr>
+</p:sld>
+</file>
+
+<file path=ppt/slides/slide11.xml><?xml version="1.0" encoding="utf-8"?>
+<p:sld xmlns:a="http://schemas.openxmlformats.org/drawingml/2006/main" xmlns:r="http://schemas.openxmlformats.org/officeDocument/2006/relationships" xmlns:p="http://schemas.openxmlformats.org/presentationml/2006/main">
+  <p:cSld>
+    <p:spTree>
+      <p:nvGrpSpPr>
+        <p:cNvPr id="1" name=""/>
+        <p:cNvGrpSpPr/>
+        <p:nvPr/>
+      </p:nvGrpSpPr>
+      <p:grpSpPr>
+        <a:xfrm>
+          <a:off x="0" y="0"/>
+          <a:ext cx="0" cy="0"/>
+          <a:chOff x="0" y="0"/>
+          <a:chExt cx="0" cy="0"/>
+        </a:xfrm>
+      </p:grpSpPr>
+      <p:pic>
+        <p:nvPicPr>
+          <p:cNvPr id="2097164" name="圖片 6"/>
+          <p:cNvPicPr>
+            <a:picLocks noChangeAspect="1"/>
+          </p:cNvPicPr>
+          <p:nvPr/>
+        </p:nvPicPr>
+        <p:blipFill>
+          <a:blip r:embed="rId3"/>
+          <a:srcRect/>
+          <a:stretch>
+            <a:fillRect/>
+          </a:stretch>
+        </p:blipFill>
+        <p:spPr bwMode="auto">
+          <a:xfrm>
+            <a:off x="3357746" y="3004771"/>
+            <a:ext cx="5556738" cy="848458"/>
+          </a:xfrm>
+          <a:prstGeom prst="rect">
+            <a:avLst/>
+          </a:prstGeom>
+          <a:effectLst>
+            <a:outerShdw blurRad="50800" dist="38100" dir="5400000" algn="t" rotWithShape="0">
+              <a:prstClr val="black">
+                <a:alpha val="40000"/>
+              </a:prstClr>
+            </a:outerShdw>
+          </a:effectLst>
+        </p:spPr>
+      </p:pic>
+      <p:pic>
+        <p:nvPicPr>
+          <p:cNvPr id="2097165" name="Picture 2" descr="http://www.secretariat.ntust.edu.tw/ezfiles/20/1020/img/1688/09.png"/>
+          <p:cNvPicPr>
+            <a:picLocks noChangeAspect="1" noChangeArrowheads="1"/>
+          </p:cNvPicPr>
+          <p:nvPr/>
+        </p:nvPicPr>
+        <p:blipFill>
+          <a:blip r:embed="rId4" cstate="print"/>
+          <a:srcRect/>
+          <a:stretch>
+            <a:fillRect/>
+          </a:stretch>
+        </p:blipFill>
+        <p:spPr bwMode="auto">
+          <a:xfrm>
+            <a:off x="964866" y="1628181"/>
+            <a:ext cx="6260123" cy="1186962"/>
+          </a:xfrm>
+          <a:prstGeom prst="rect">
+            <a:avLst/>
+          </a:prstGeom>
+          <a:noFill/>
+          <a:ln>
+            <a:noFill/>
+          </a:ln>
+          <a:effectLst>
+            <a:outerShdw blurRad="63500" sx="102000" sy="102000" algn="ctr" rotWithShape="0">
+              <a:prstClr val="black">
+                <a:alpha val="40000"/>
+              </a:prstClr>
+            </a:outerShdw>
+          </a:effectLst>
+        </p:spPr>
+      </p:pic>
+      <p:pic>
+        <p:nvPicPr>
+          <p:cNvPr id="2097166" name="圖片 7"/>
+          <p:cNvPicPr>
+            <a:picLocks noChangeAspect="1"/>
+          </p:cNvPicPr>
+          <p:nvPr/>
+        </p:nvPicPr>
+        <p:blipFill>
+          <a:blip r:embed="rId5"/>
+          <a:stretch>
+            <a:fillRect/>
+          </a:stretch>
+        </p:blipFill>
+        <p:spPr>
+          <a:xfrm>
+            <a:off x="2493650" y="4226628"/>
+            <a:ext cx="4266522" cy="930565"/>
+          </a:xfrm>
+          <a:prstGeom prst="rect">
+            <a:avLst/>
+          </a:prstGeom>
+        </p:spPr>
+      </p:pic>
+    </p:spTree>
+  </p:cSld>
+  <p:clrMapOvr>
+    <a:masterClrMapping/>
+  </p:clrMapOvr>
+</p:sld>
+</file>
+
 <file path=ppt/slides/slide2.xml><?xml version="1.0" encoding="utf-8"?>
 <p:sld xmlns:a="http://schemas.openxmlformats.org/drawingml/2006/main" xmlns:r="http://schemas.openxmlformats.org/officeDocument/2006/relationships" xmlns:p="http://schemas.openxmlformats.org/presentationml/2006/main">
   <p:cSld>
@@ -9127,80 +10336,6 @@
       </p:grpSpPr>
       <p:sp>
         <p:nvSpPr>
-          <p:cNvPr id="4" name="文字方塊 3">
-            <a:extLst>
-              <a:ext uri="{FF2B5EF4-FFF2-40B4-BE49-F238E27FC236}">
-                <a16:creationId xmlns:a16="http://schemas.microsoft.com/office/drawing/2014/main" id="{2F17524D-2567-3815-714D-5B3931C4B306}"/>
-              </a:ext>
-            </a:extLst>
-          </p:cNvPr>
-          <p:cNvSpPr txBox="1"/>
-          <p:nvPr/>
-        </p:nvSpPr>
-        <p:spPr>
-          <a:xfrm>
-            <a:off x="520699" y="1369489"/>
-            <a:ext cx="7669813" cy="440633"/>
-          </a:xfrm>
-          <a:prstGeom prst="rect">
-            <a:avLst/>
-          </a:prstGeom>
-          <a:noFill/>
-        </p:spPr>
-        <p:txBody>
-          <a:bodyPr wrap="square">
-            <a:spAutoFit/>
-          </a:bodyPr>
-          <a:lstStyle/>
-          <a:p>
-            <a:pPr marL="457200" lvl="1" indent="-406400">
-              <a:lnSpc>
-                <a:spcPts val="3000"/>
-              </a:lnSpc>
-              <a:spcBef>
-                <a:spcPts val="560"/>
-              </a:spcBef>
-              <a:buClr>
-                <a:schemeClr val="accent2"/>
-              </a:buClr>
-              <a:buSzPts val="2800"/>
-              <a:buFont typeface="Noto Sans Symbols"/>
-              <a:buChar char="❖"/>
-            </a:pPr>
-            <a:r>
-              <a:rPr lang="zh-TW" altLang="en-US" sz="2000" dirty="0">
-                <a:latin typeface="Times New Roman" panose="02020603050405020304" pitchFamily="18" charset="0"/>
-                <a:ea typeface="標楷體" panose="03000509000000000000" pitchFamily="65" charset="-120"/>
-                <a:cs typeface="Times New Roman" panose="02020603050405020304" pitchFamily="18" charset="0"/>
-              </a:rPr>
-              <a:t>什麼是 </a:t>
-            </a:r>
-            <a:r>
-              <a:rPr lang="en-US" altLang="zh-TW" sz="2000" dirty="0">
-                <a:latin typeface="Times New Roman" panose="02020603050405020304" pitchFamily="18" charset="0"/>
-                <a:ea typeface="標楷體" panose="03000509000000000000" pitchFamily="65" charset="-120"/>
-                <a:cs typeface="Times New Roman" panose="02020603050405020304" pitchFamily="18" charset="0"/>
-              </a:rPr>
-              <a:t>Device Color Space</a:t>
-            </a:r>
-            <a:r>
-              <a:rPr lang="zh-TW" altLang="en-US" sz="2000" dirty="0">
-                <a:latin typeface="Times New Roman" panose="02020603050405020304" pitchFamily="18" charset="0"/>
-                <a:ea typeface="標楷體" panose="03000509000000000000" pitchFamily="65" charset="-120"/>
-                <a:cs typeface="Times New Roman" panose="02020603050405020304" pitchFamily="18" charset="0"/>
-              </a:rPr>
-              <a:t>？</a:t>
-            </a:r>
-            <a:endParaRPr lang="en-US" altLang="zh-TW" sz="2000" dirty="0">
-              <a:latin typeface="Times New Roman" panose="02020603050405020304" pitchFamily="18" charset="0"/>
-              <a:ea typeface="標楷體" panose="03000509000000000000" pitchFamily="65" charset="-120"/>
-              <a:cs typeface="Times New Roman" panose="02020603050405020304" pitchFamily="18" charset="0"/>
-            </a:endParaRPr>
-          </a:p>
-        </p:txBody>
-      </p:sp>
-      <p:sp>
-        <p:nvSpPr>
           <p:cNvPr id="8" name="標題 1">
             <a:extLst>
               <a:ext uri="{FF2B5EF4-FFF2-40B4-BE49-F238E27FC236}">
@@ -9247,13 +10382,345 @@
                 <a:ea typeface="標楷體" panose="03000509000000000000" pitchFamily="65" charset="-120"/>
                 <a:cs typeface="Times New Roman" panose="02020603050405020304" pitchFamily="18" charset="0"/>
               </a:rPr>
-              <a:t>Display ICC Profile 裡面到底有什麼？</a:t>
+              <a:t>Display ICC Profile</a:t>
             </a:r>
-            <a:endParaRPr lang="zh-TW" altLang="en-US" dirty="0">
-              <a:latin typeface="Times New Roman" panose="02020603050405020304" pitchFamily="18" charset="0"/>
-              <a:ea typeface="標楷體" panose="03000509000000000000" pitchFamily="65" charset="-120"/>
-              <a:cs typeface="Times New Roman" panose="02020603050405020304" pitchFamily="18" charset="0"/>
-            </a:endParaRPr>
+            <a:r>
+              <a:rPr lang="zh-TW" altLang="en-US" dirty="0">
+                <a:latin typeface="Times New Roman" panose="02020603050405020304" pitchFamily="18" charset="0"/>
+                <a:ea typeface="標楷體" panose="03000509000000000000" pitchFamily="65" charset="-120"/>
+                <a:cs typeface="Times New Roman" panose="02020603050405020304" pitchFamily="18" charset="0"/>
+              </a:rPr>
+              <a:t>結構</a:t>
+            </a:r>
+          </a:p>
+        </p:txBody>
+      </p:sp>
+      <p:pic>
+        <p:nvPicPr>
+          <p:cNvPr id="3" name="圖片 2">
+            <a:extLst>
+              <a:ext uri="{FF2B5EF4-FFF2-40B4-BE49-F238E27FC236}">
+                <a16:creationId xmlns:a16="http://schemas.microsoft.com/office/drawing/2014/main" id="{2639EB24-C1BB-C0D1-86B0-82E9D709404B}"/>
+              </a:ext>
+            </a:extLst>
+          </p:cNvPr>
+          <p:cNvPicPr>
+            <a:picLocks noChangeAspect="1"/>
+          </p:cNvPicPr>
+          <p:nvPr/>
+        </p:nvPicPr>
+        <p:blipFill>
+          <a:blip r:embed="rId3"/>
+          <a:stretch>
+            <a:fillRect/>
+          </a:stretch>
+        </p:blipFill>
+        <p:spPr>
+          <a:xfrm>
+            <a:off x="609602" y="1461470"/>
+            <a:ext cx="6274122" cy="4578585"/>
+          </a:xfrm>
+          <a:prstGeom prst="rect">
+            <a:avLst/>
+          </a:prstGeom>
+        </p:spPr>
+      </p:pic>
+      <p:graphicFrame>
+        <p:nvGraphicFramePr>
+          <p:cNvPr id="5" name="表格 4">
+            <a:extLst>
+              <a:ext uri="{FF2B5EF4-FFF2-40B4-BE49-F238E27FC236}">
+                <a16:creationId xmlns:a16="http://schemas.microsoft.com/office/drawing/2014/main" id="{309845EE-BEFD-0830-6F6A-014C6C37200E}"/>
+              </a:ext>
+            </a:extLst>
+          </p:cNvPr>
+          <p:cNvGraphicFramePr>
+            <a:graphicFrameLocks noGrp="1"/>
+          </p:cNvGraphicFramePr>
+          <p:nvPr>
+            <p:extLst>
+              <p:ext uri="{D42A27DB-BD31-4B8C-83A1-F6EECF244321}">
+                <p14:modId xmlns:p14="http://schemas.microsoft.com/office/powerpoint/2010/main" val="4108931637"/>
+              </p:ext>
+            </p:extLst>
+          </p:nvPr>
+        </p:nvGraphicFramePr>
+        <p:xfrm>
+          <a:off x="7072132" y="1544421"/>
+          <a:ext cx="2224266" cy="4592769"/>
+        </p:xfrm>
+        <a:graphic>
+          <a:graphicData uri="http://schemas.openxmlformats.org/drawingml/2006/table">
+            <a:tbl>
+              <a:tblPr firstRow="1" bandRow="1">
+                <a:tableStyleId>{616DA210-FB5B-4158-B5E0-FEB733F419BA}</a:tableStyleId>
+              </a:tblPr>
+              <a:tblGrid>
+                <a:gridCol w="2224266">
+                  <a:extLst>
+                    <a:ext uri="{9D8B030D-6E8A-4147-A177-3AD203B41FA5}">
+                      <a16:colId xmlns:a16="http://schemas.microsoft.com/office/drawing/2014/main" val="3358617967"/>
+                    </a:ext>
+                  </a:extLst>
+                </a:gridCol>
+              </a:tblGrid>
+              <a:tr h="805521">
+                <a:tc>
+                  <a:txBody>
+                    <a:bodyPr/>
+                    <a:lstStyle/>
+                    <a:p>
+                      <a:pPr algn="ctr"/>
+                      <a:r>
+                        <a:rPr lang="zh-TW" altLang="zh-TW" sz="1600" dirty="0">
+                          <a:latin typeface="Times New Roman" panose="02020603050405020304" pitchFamily="18" charset="0"/>
+                          <a:ea typeface="標楷體" panose="03000509000000000000" pitchFamily="65" charset="-120"/>
+                          <a:cs typeface="Times New Roman" panose="02020603050405020304" pitchFamily="18" charset="0"/>
+                        </a:rPr>
+                        <a:t>Profile Header </a:t>
+                      </a:r>
+                      <a:endParaRPr lang="en-US" altLang="zh-TW" sz="1600" dirty="0">
+                        <a:latin typeface="Times New Roman" panose="02020603050405020304" pitchFamily="18" charset="0"/>
+                        <a:ea typeface="標楷體" panose="03000509000000000000" pitchFamily="65" charset="-120"/>
+                        <a:cs typeface="Times New Roman" panose="02020603050405020304" pitchFamily="18" charset="0"/>
+                      </a:endParaRPr>
+                    </a:p>
+                    <a:p>
+                      <a:pPr algn="ctr"/>
+                      <a:r>
+                        <a:rPr lang="zh-TW" altLang="zh-TW" sz="1600" dirty="0">
+                          <a:latin typeface="Times New Roman" panose="02020603050405020304" pitchFamily="18" charset="0"/>
+                          <a:ea typeface="標楷體" panose="03000509000000000000" pitchFamily="65" charset="-120"/>
+                          <a:cs typeface="Times New Roman" panose="02020603050405020304" pitchFamily="18" charset="0"/>
+                        </a:rPr>
+                        <a:t>128 bytes</a:t>
+                      </a:r>
+                      <a:endParaRPr lang="zh-TW" altLang="en-US" sz="1600" dirty="0">
+                        <a:latin typeface="Times New Roman" panose="02020603050405020304" pitchFamily="18" charset="0"/>
+                        <a:ea typeface="標楷體" panose="03000509000000000000" pitchFamily="65" charset="-120"/>
+                        <a:cs typeface="Times New Roman" panose="02020603050405020304" pitchFamily="18" charset="0"/>
+                      </a:endParaRPr>
+                    </a:p>
+                  </a:txBody>
+                  <a:tcPr/>
+                </a:tc>
+                <a:extLst>
+                  <a:ext uri="{0D108BD9-81ED-4DB2-BD59-A6C34878D82A}">
+                    <a16:rowId xmlns:a16="http://schemas.microsoft.com/office/drawing/2014/main" val="1724688990"/>
+                  </a:ext>
+                </a:extLst>
+              </a:tr>
+              <a:tr h="1213505">
+                <a:tc>
+                  <a:txBody>
+                    <a:bodyPr/>
+                    <a:lstStyle/>
+                    <a:p>
+                      <a:pPr algn="ctr"/>
+                      <a:r>
+                        <a:rPr lang="zh-TW" altLang="zh-TW" sz="1600" dirty="0">
+                          <a:latin typeface="Times New Roman" panose="02020603050405020304" pitchFamily="18" charset="0"/>
+                          <a:ea typeface="標楷體" panose="03000509000000000000" pitchFamily="65" charset="-120"/>
+                          <a:cs typeface="Times New Roman" panose="02020603050405020304" pitchFamily="18" charset="0"/>
+                        </a:rPr>
+                        <a:t>Tag Table</a:t>
+                      </a:r>
+                      <a:endParaRPr lang="en-US" altLang="zh-TW" sz="1600" dirty="0">
+                        <a:latin typeface="Times New Roman" panose="02020603050405020304" pitchFamily="18" charset="0"/>
+                        <a:ea typeface="標楷體" panose="03000509000000000000" pitchFamily="65" charset="-120"/>
+                        <a:cs typeface="Times New Roman" panose="02020603050405020304" pitchFamily="18" charset="0"/>
+                      </a:endParaRPr>
+                    </a:p>
+                    <a:p>
+                      <a:pPr algn="ctr"/>
+                      <a:r>
+                        <a:rPr lang="zh-TW" altLang="zh-TW" sz="1600" dirty="0">
+                          <a:latin typeface="Times New Roman" panose="02020603050405020304" pitchFamily="18" charset="0"/>
+                          <a:ea typeface="標楷體" panose="03000509000000000000" pitchFamily="65" charset="-120"/>
+                          <a:cs typeface="Times New Roman" panose="02020603050405020304" pitchFamily="18" charset="0"/>
+                        </a:rPr>
+                        <a:t>wtpt → offset / size </a:t>
+                      </a:r>
+                      <a:endParaRPr lang="en-US" altLang="zh-TW" sz="1600" dirty="0">
+                        <a:latin typeface="Times New Roman" panose="02020603050405020304" pitchFamily="18" charset="0"/>
+                        <a:ea typeface="標楷體" panose="03000509000000000000" pitchFamily="65" charset="-120"/>
+                        <a:cs typeface="Times New Roman" panose="02020603050405020304" pitchFamily="18" charset="0"/>
+                      </a:endParaRPr>
+                    </a:p>
+                    <a:p>
+                      <a:pPr algn="ctr"/>
+                      <a:r>
+                        <a:rPr lang="zh-TW" altLang="zh-TW" sz="1600" dirty="0">
+                          <a:latin typeface="Times New Roman" panose="02020603050405020304" pitchFamily="18" charset="0"/>
+                          <a:ea typeface="標楷體" panose="03000509000000000000" pitchFamily="65" charset="-120"/>
+                          <a:cs typeface="Times New Roman" panose="02020603050405020304" pitchFamily="18" charset="0"/>
+                        </a:rPr>
+                        <a:t>rXYZ → offset / size</a:t>
+                      </a:r>
+                      <a:endParaRPr lang="en-US" altLang="zh-TW" sz="1600" dirty="0">
+                        <a:latin typeface="Times New Roman" panose="02020603050405020304" pitchFamily="18" charset="0"/>
+                        <a:ea typeface="標楷體" panose="03000509000000000000" pitchFamily="65" charset="-120"/>
+                        <a:cs typeface="Times New Roman" panose="02020603050405020304" pitchFamily="18" charset="0"/>
+                      </a:endParaRPr>
+                    </a:p>
+                    <a:p>
+                      <a:pPr algn="ctr"/>
+                      <a:r>
+                        <a:rPr lang="zh-TW" altLang="zh-TW" sz="1600" dirty="0">
+                          <a:latin typeface="Times New Roman" panose="02020603050405020304" pitchFamily="18" charset="0"/>
+                          <a:ea typeface="標楷體" panose="03000509000000000000" pitchFamily="65" charset="-120"/>
+                          <a:cs typeface="Times New Roman" panose="02020603050405020304" pitchFamily="18" charset="0"/>
+                        </a:rPr>
+                        <a:t>rTRC → offset / size</a:t>
+                      </a:r>
+                      <a:endParaRPr lang="en-US" altLang="zh-TW" sz="1600" dirty="0">
+                        <a:latin typeface="Times New Roman" panose="02020603050405020304" pitchFamily="18" charset="0"/>
+                        <a:ea typeface="標楷體" panose="03000509000000000000" pitchFamily="65" charset="-120"/>
+                        <a:cs typeface="Times New Roman" panose="02020603050405020304" pitchFamily="18" charset="0"/>
+                      </a:endParaRPr>
+                    </a:p>
+                    <a:p>
+                      <a:pPr marL="0" marR="0" lvl="0" indent="0" algn="ctr" defTabSz="914400" rtl="0" eaLnBrk="1" fontAlgn="auto" latinLnBrk="0" hangingPunct="1">
+                        <a:lnSpc>
+                          <a:spcPct val="100000"/>
+                        </a:lnSpc>
+                        <a:spcBef>
+                          <a:spcPts val="0"/>
+                        </a:spcBef>
+                        <a:spcAft>
+                          <a:spcPts val="0"/>
+                        </a:spcAft>
+                        <a:buClr>
+                          <a:srgbClr val="000000"/>
+                        </a:buClr>
+                        <a:buSzTx/>
+                        <a:buFont typeface="Arial"/>
+                        <a:buNone/>
+                        <a:tabLst/>
+                        <a:defRPr/>
+                      </a:pPr>
+                      <a:r>
+                        <a:rPr lang="en-US" altLang="zh-TW" sz="1600" dirty="0">
+                          <a:latin typeface="Times New Roman" panose="02020603050405020304" pitchFamily="18" charset="0"/>
+                          <a:ea typeface="標楷體" panose="03000509000000000000" pitchFamily="65" charset="-120"/>
+                          <a:cs typeface="Times New Roman" panose="02020603050405020304" pitchFamily="18" charset="0"/>
+                        </a:rPr>
+                        <a:t>…...</a:t>
+                      </a:r>
+                    </a:p>
+                  </a:txBody>
+                  <a:tcPr/>
+                </a:tc>
+                <a:extLst>
+                  <a:ext uri="{0D108BD9-81ED-4DB2-BD59-A6C34878D82A}">
+                    <a16:rowId xmlns:a16="http://schemas.microsoft.com/office/drawing/2014/main" val="3735960893"/>
+                  </a:ext>
+                </a:extLst>
+              </a:tr>
+              <a:tr h="2476608">
+                <a:tc>
+                  <a:txBody>
+                    <a:bodyPr/>
+                    <a:lstStyle/>
+                    <a:p>
+                      <a:pPr algn="ctr"/>
+                      <a:r>
+                        <a:rPr lang="zh-TW" altLang="zh-TW" sz="1600" dirty="0">
+                          <a:latin typeface="Times New Roman" panose="02020603050405020304" pitchFamily="18" charset="0"/>
+                          <a:ea typeface="標楷體" panose="03000509000000000000" pitchFamily="65" charset="-120"/>
+                          <a:cs typeface="Times New Roman" panose="02020603050405020304" pitchFamily="18" charset="0"/>
+                        </a:rPr>
+                        <a:t>Tagged Element Data</a:t>
+                      </a:r>
+                      <a:endParaRPr lang="en-US" altLang="zh-TW" sz="1600" dirty="0">
+                        <a:latin typeface="Times New Roman" panose="02020603050405020304" pitchFamily="18" charset="0"/>
+                        <a:ea typeface="標楷體" panose="03000509000000000000" pitchFamily="65" charset="-120"/>
+                        <a:cs typeface="Times New Roman" panose="02020603050405020304" pitchFamily="18" charset="0"/>
+                      </a:endParaRPr>
+                    </a:p>
+                    <a:p>
+                      <a:pPr algn="ctr"/>
+                      <a:r>
+                        <a:rPr lang="en-US" altLang="zh-TW" sz="1600" dirty="0">
+                          <a:latin typeface="Times New Roman" panose="02020603050405020304" pitchFamily="18" charset="0"/>
+                          <a:ea typeface="標楷體" panose="03000509000000000000" pitchFamily="65" charset="-120"/>
+                          <a:cs typeface="Times New Roman" panose="02020603050405020304" pitchFamily="18" charset="0"/>
+                        </a:rPr>
+                        <a:t>…...</a:t>
+                      </a:r>
+                    </a:p>
+                  </a:txBody>
+                  <a:tcPr/>
+                </a:tc>
+                <a:extLst>
+                  <a:ext uri="{0D108BD9-81ED-4DB2-BD59-A6C34878D82A}">
+                    <a16:rowId xmlns:a16="http://schemas.microsoft.com/office/drawing/2014/main" val="29441199"/>
+                  </a:ext>
+                </a:extLst>
+              </a:tr>
+            </a:tbl>
+          </a:graphicData>
+        </a:graphic>
+      </p:graphicFrame>
+      <p:sp>
+        <p:nvSpPr>
+          <p:cNvPr id="7" name="文字方塊 6">
+            <a:extLst>
+              <a:ext uri="{FF2B5EF4-FFF2-40B4-BE49-F238E27FC236}">
+                <a16:creationId xmlns:a16="http://schemas.microsoft.com/office/drawing/2014/main" id="{7B3BC9D9-DB6E-B366-7FB4-7B64CF0727F4}"/>
+              </a:ext>
+            </a:extLst>
+          </p:cNvPr>
+          <p:cNvSpPr txBox="1"/>
+          <p:nvPr/>
+        </p:nvSpPr>
+        <p:spPr>
+          <a:xfrm>
+            <a:off x="1152647" y="6396335"/>
+            <a:ext cx="8489064" cy="461665"/>
+          </a:xfrm>
+          <a:prstGeom prst="rect">
+            <a:avLst/>
+          </a:prstGeom>
+          <a:noFill/>
+        </p:spPr>
+        <p:txBody>
+          <a:bodyPr wrap="square">
+            <a:spAutoFit/>
+          </a:bodyPr>
+          <a:lstStyle/>
+          <a:p>
+            <a:r>
+              <a:rPr lang="zh-TW" altLang="zh-TW" sz="1200" b="1" dirty="0"/>
+              <a:t>[</a:t>
+            </a:r>
+            <a:r>
+              <a:rPr lang="en-US" altLang="zh-TW" sz="1200" b="1" dirty="0"/>
+              <a:t>2</a:t>
+            </a:r>
+            <a:r>
+              <a:rPr lang="zh-TW" altLang="zh-TW" sz="1200" b="1" dirty="0"/>
+              <a:t>]</a:t>
+            </a:r>
+            <a:r>
+              <a:rPr lang="zh-TW" altLang="zh-TW" sz="1200" dirty="0"/>
+              <a:t> International Color Consortium, </a:t>
+            </a:r>
+            <a:r>
+              <a:rPr lang="zh-TW" altLang="zh-TW" sz="1200" i="1" dirty="0"/>
+              <a:t>ICC.1:2022: Image technology colour management—Architecture, profile format, and data structure</a:t>
+            </a:r>
+            <a:r>
+              <a:rPr lang="zh-TW" altLang="zh-TW" sz="1200" dirty="0"/>
+              <a:t>, Profile version 4.4.0.0, 2022. [Online]. Available: </a:t>
+            </a:r>
+            <a:r>
+              <a:rPr lang="zh-TW" altLang="zh-TW" sz="1200" dirty="0">
+                <a:hlinkClick r:id="rId4"/>
+              </a:rPr>
+              <a:t>https://archive.color.org/specifications/ICC.1-2022-05.pdf</a:t>
+            </a:r>
+            <a:endParaRPr lang="zh-TW" altLang="en-US" sz="1200" dirty="0"/>
           </a:p>
         </p:txBody>
       </p:sp>
@@ -9275,7 +10742,13 @@
   <p:cSld>
     <p:spTree>
       <p:nvGrpSpPr>
-        <p:cNvPr id="1" name=""/>
+        <p:cNvPr id="1" name="">
+          <a:extLst>
+            <a:ext uri="{FF2B5EF4-FFF2-40B4-BE49-F238E27FC236}">
+              <a16:creationId xmlns:a16="http://schemas.microsoft.com/office/drawing/2014/main" id="{504AD5BA-9E96-F48B-0A28-E0050EC4AC1F}"/>
+            </a:ext>
+          </a:extLst>
+        </p:cNvPr>
         <p:cNvGrpSpPr/>
         <p:nvPr/>
       </p:nvGrpSpPr>
@@ -9287,57 +10760,1036 @@
           <a:chExt cx="0" cy="0"/>
         </a:xfrm>
       </p:grpSpPr>
-      <p:pic>
-        <p:nvPicPr>
-          <p:cNvPr id="2097164" name="圖片 6"/>
-          <p:cNvPicPr>
-            <a:picLocks noChangeAspect="1"/>
-          </p:cNvPicPr>
+      <p:sp>
+        <p:nvSpPr>
+          <p:cNvPr id="6" name="矩形 5">
+            <a:extLst>
+              <a:ext uri="{FF2B5EF4-FFF2-40B4-BE49-F238E27FC236}">
+                <a16:creationId xmlns:a16="http://schemas.microsoft.com/office/drawing/2014/main" id="{77C89BEF-0897-A7B6-B034-EB917728FF34}"/>
+              </a:ext>
+            </a:extLst>
+          </p:cNvPr>
+          <p:cNvSpPr/>
           <p:nvPr/>
-        </p:nvPicPr>
-        <p:blipFill>
-          <a:blip r:embed="rId3"/>
-          <a:srcRect/>
-          <a:stretch>
-            <a:fillRect/>
-          </a:stretch>
-        </p:blipFill>
-        <p:spPr bwMode="auto">
+        </p:nvSpPr>
+        <p:spPr>
           <a:xfrm>
-            <a:off x="3357746" y="3004771"/>
-            <a:ext cx="5556738" cy="848458"/>
+            <a:off x="740780" y="2268937"/>
+            <a:ext cx="1562582" cy="868102"/>
           </a:xfrm>
           <a:prstGeom prst="rect">
             <a:avLst/>
           </a:prstGeom>
-          <a:effectLst>
-            <a:outerShdw blurRad="50800" dist="38100" dir="5400000" algn="t" rotWithShape="0">
-              <a:prstClr val="black">
-                <a:alpha val="40000"/>
-              </a:prstClr>
-            </a:outerShdw>
-          </a:effectLst>
+          <a:solidFill>
+            <a:schemeClr val="bg1"/>
+          </a:solidFill>
+          <a:ln>
+            <a:solidFill>
+              <a:schemeClr val="tx1"/>
+            </a:solidFill>
+          </a:ln>
         </p:spPr>
-      </p:pic>
-      <p:pic>
-        <p:nvPicPr>
-          <p:cNvPr id="2097165" name="Picture 2" descr="http://www.secretariat.ntust.edu.tw/ezfiles/20/1020/img/1688/09.png"/>
-          <p:cNvPicPr>
-            <a:picLocks noChangeAspect="1" noChangeArrowheads="1"/>
-          </p:cNvPicPr>
+        <p:style>
+          <a:lnRef idx="2">
+            <a:schemeClr val="accent1">
+              <a:shade val="15000"/>
+            </a:schemeClr>
+          </a:lnRef>
+          <a:fillRef idx="1">
+            <a:schemeClr val="accent1"/>
+          </a:fillRef>
+          <a:effectRef idx="0">
+            <a:schemeClr val="accent1"/>
+          </a:effectRef>
+          <a:fontRef idx="minor">
+            <a:schemeClr val="lt1"/>
+          </a:fontRef>
+        </p:style>
+        <p:txBody>
+          <a:bodyPr rtlCol="0" anchor="ctr"/>
+          <a:lstStyle/>
+          <a:p>
+            <a:pPr algn="ctr"/>
+            <a:r>
+              <a:rPr lang="zh-TW" altLang="zh-TW" dirty="0">
+                <a:solidFill>
+                  <a:schemeClr val="tx1"/>
+                </a:solidFill>
+                <a:latin typeface="Times New Roman" panose="02020603050405020304" pitchFamily="18" charset="0"/>
+                <a:ea typeface="標楷體" panose="03000509000000000000" pitchFamily="65" charset="-120"/>
+                <a:cs typeface="Times New Roman" panose="02020603050405020304" pitchFamily="18" charset="0"/>
+              </a:rPr>
+              <a:t>Measurement Data</a:t>
+            </a:r>
+            <a:endParaRPr lang="zh-TW" altLang="en-US" dirty="0">
+              <a:solidFill>
+                <a:schemeClr val="tx1"/>
+              </a:solidFill>
+              <a:latin typeface="Times New Roman" panose="02020603050405020304" pitchFamily="18" charset="0"/>
+              <a:ea typeface="標楷體" panose="03000509000000000000" pitchFamily="65" charset="-120"/>
+              <a:cs typeface="Times New Roman" panose="02020603050405020304" pitchFamily="18" charset="0"/>
+            </a:endParaRPr>
+          </a:p>
+        </p:txBody>
+      </p:sp>
+      <p:sp>
+        <p:nvSpPr>
+          <p:cNvPr id="9" name="矩形 8">
+            <a:extLst>
+              <a:ext uri="{FF2B5EF4-FFF2-40B4-BE49-F238E27FC236}">
+                <a16:creationId xmlns:a16="http://schemas.microsoft.com/office/drawing/2014/main" id="{C4FB4E8E-1BF4-6DE5-A5D7-1DDB774630A2}"/>
+              </a:ext>
+            </a:extLst>
+          </p:cNvPr>
+          <p:cNvSpPr/>
           <p:nvPr/>
-        </p:nvPicPr>
-        <p:blipFill>
-          <a:blip r:embed="rId4" cstate="print"/>
-          <a:srcRect/>
-          <a:stretch>
-            <a:fillRect/>
-          </a:stretch>
-        </p:blipFill>
-        <p:spPr bwMode="auto">
+        </p:nvSpPr>
+        <p:spPr>
           <a:xfrm>
-            <a:off x="964866" y="1628181"/>
-            <a:ext cx="6260123" cy="1186962"/>
+            <a:off x="3145588" y="2268937"/>
+            <a:ext cx="1562582" cy="868102"/>
+          </a:xfrm>
+          <a:prstGeom prst="rect">
+            <a:avLst/>
+          </a:prstGeom>
+          <a:solidFill>
+            <a:schemeClr val="bg1"/>
+          </a:solidFill>
+          <a:ln>
+            <a:solidFill>
+              <a:schemeClr val="tx1"/>
+            </a:solidFill>
+          </a:ln>
+        </p:spPr>
+        <p:style>
+          <a:lnRef idx="2">
+            <a:schemeClr val="accent1">
+              <a:shade val="15000"/>
+            </a:schemeClr>
+          </a:lnRef>
+          <a:fillRef idx="1">
+            <a:schemeClr val="accent1"/>
+          </a:fillRef>
+          <a:effectRef idx="0">
+            <a:schemeClr val="accent1"/>
+          </a:effectRef>
+          <a:fontRef idx="minor">
+            <a:schemeClr val="lt1"/>
+          </a:fontRef>
+        </p:style>
+        <p:txBody>
+          <a:bodyPr rtlCol="0" anchor="ctr"/>
+          <a:lstStyle/>
+          <a:p>
+            <a:pPr algn="ctr"/>
+            <a:r>
+              <a:rPr lang="zh-TW" altLang="zh-TW" dirty="0">
+                <a:solidFill>
+                  <a:schemeClr val="tx1"/>
+                </a:solidFill>
+                <a:latin typeface="Times New Roman" panose="02020603050405020304" pitchFamily="18" charset="0"/>
+                <a:ea typeface="標楷體" panose="03000509000000000000" pitchFamily="65" charset="-120"/>
+                <a:cs typeface="Times New Roman" panose="02020603050405020304" pitchFamily="18" charset="0"/>
+              </a:rPr>
+              <a:t>RGB </a:t>
+            </a:r>
+            <a:r>
+              <a:rPr lang="en-US" altLang="zh-TW" dirty="0">
+                <a:solidFill>
+                  <a:schemeClr val="tx1"/>
+                </a:solidFill>
+                <a:latin typeface="Times New Roman" panose="02020603050405020304" pitchFamily="18" charset="0"/>
+                <a:ea typeface="標楷體" panose="03000509000000000000" pitchFamily="65" charset="-120"/>
+                <a:cs typeface="Times New Roman" panose="02020603050405020304" pitchFamily="18" charset="0"/>
+              </a:rPr>
+              <a:t>/</a:t>
+            </a:r>
+            <a:r>
+              <a:rPr lang="zh-TW" altLang="en-US" dirty="0">
+                <a:solidFill>
+                  <a:schemeClr val="tx1"/>
+                </a:solidFill>
+                <a:latin typeface="Times New Roman" panose="02020603050405020304" pitchFamily="18" charset="0"/>
+                <a:ea typeface="標楷體" panose="03000509000000000000" pitchFamily="65" charset="-120"/>
+                <a:cs typeface="Times New Roman" panose="02020603050405020304" pitchFamily="18" charset="0"/>
+              </a:rPr>
+              <a:t> </a:t>
+            </a:r>
+            <a:r>
+              <a:rPr lang="zh-TW" altLang="zh-TW" dirty="0">
+                <a:solidFill>
+                  <a:schemeClr val="tx1"/>
+                </a:solidFill>
+                <a:latin typeface="Times New Roman" panose="02020603050405020304" pitchFamily="18" charset="0"/>
+                <a:ea typeface="標楷體" panose="03000509000000000000" pitchFamily="65" charset="-120"/>
+                <a:cs typeface="Times New Roman" panose="02020603050405020304" pitchFamily="18" charset="0"/>
+              </a:rPr>
+              <a:t>XYZ</a:t>
+            </a:r>
+            <a:endParaRPr lang="zh-TW" altLang="en-US" dirty="0">
+              <a:solidFill>
+                <a:schemeClr val="tx1"/>
+              </a:solidFill>
+              <a:latin typeface="Times New Roman" panose="02020603050405020304" pitchFamily="18" charset="0"/>
+              <a:ea typeface="標楷體" panose="03000509000000000000" pitchFamily="65" charset="-120"/>
+              <a:cs typeface="Times New Roman" panose="02020603050405020304" pitchFamily="18" charset="0"/>
+            </a:endParaRPr>
+          </a:p>
+        </p:txBody>
+      </p:sp>
+      <p:sp>
+        <p:nvSpPr>
+          <p:cNvPr id="11" name="矩形 10">
+            <a:extLst>
+              <a:ext uri="{FF2B5EF4-FFF2-40B4-BE49-F238E27FC236}">
+                <a16:creationId xmlns:a16="http://schemas.microsoft.com/office/drawing/2014/main" id="{289588F8-4C08-50A8-946F-E07CFA1469C4}"/>
+              </a:ext>
+            </a:extLst>
+          </p:cNvPr>
+          <p:cNvSpPr/>
+          <p:nvPr/>
+        </p:nvSpPr>
+        <p:spPr>
+          <a:xfrm>
+            <a:off x="740780" y="4330860"/>
+            <a:ext cx="1562582" cy="868102"/>
+          </a:xfrm>
+          <a:prstGeom prst="rect">
+            <a:avLst/>
+          </a:prstGeom>
+          <a:solidFill>
+            <a:schemeClr val="bg1"/>
+          </a:solidFill>
+          <a:ln>
+            <a:solidFill>
+              <a:schemeClr val="tx1"/>
+            </a:solidFill>
+          </a:ln>
+        </p:spPr>
+        <p:style>
+          <a:lnRef idx="2">
+            <a:schemeClr val="accent1">
+              <a:shade val="15000"/>
+            </a:schemeClr>
+          </a:lnRef>
+          <a:fillRef idx="1">
+            <a:schemeClr val="accent1"/>
+          </a:fillRef>
+          <a:effectRef idx="0">
+            <a:schemeClr val="accent1"/>
+          </a:effectRef>
+          <a:fontRef idx="minor">
+            <a:schemeClr val="lt1"/>
+          </a:fontRef>
+        </p:style>
+        <p:txBody>
+          <a:bodyPr rtlCol="0" anchor="ctr"/>
+          <a:lstStyle/>
+          <a:p>
+            <a:pPr algn="ctr"/>
+            <a:r>
+              <a:rPr lang="zh-TW" altLang="zh-TW" dirty="0">
+                <a:solidFill>
+                  <a:schemeClr val="tx1"/>
+                </a:solidFill>
+                <a:latin typeface="Times New Roman" panose="02020603050405020304" pitchFamily="18" charset="0"/>
+                <a:ea typeface="標楷體" panose="03000509000000000000" pitchFamily="65" charset="-120"/>
+                <a:cs typeface="Times New Roman" panose="02020603050405020304" pitchFamily="18" charset="0"/>
+              </a:rPr>
+              <a:t>ICC Profile Tags</a:t>
+            </a:r>
+            <a:endParaRPr lang="zh-TW" altLang="en-US" dirty="0">
+              <a:solidFill>
+                <a:schemeClr val="tx1"/>
+              </a:solidFill>
+              <a:latin typeface="Times New Roman" panose="02020603050405020304" pitchFamily="18" charset="0"/>
+              <a:ea typeface="標楷體" panose="03000509000000000000" pitchFamily="65" charset="-120"/>
+              <a:cs typeface="Times New Roman" panose="02020603050405020304" pitchFamily="18" charset="0"/>
+            </a:endParaRPr>
+          </a:p>
+        </p:txBody>
+      </p:sp>
+      <p:sp>
+        <p:nvSpPr>
+          <p:cNvPr id="13" name="矩形 12">
+            <a:extLst>
+              <a:ext uri="{FF2B5EF4-FFF2-40B4-BE49-F238E27FC236}">
+                <a16:creationId xmlns:a16="http://schemas.microsoft.com/office/drawing/2014/main" id="{26D269AB-B9C0-1F9A-2078-29ECB158CA0E}"/>
+              </a:ext>
+            </a:extLst>
+          </p:cNvPr>
+          <p:cNvSpPr/>
+          <p:nvPr/>
+        </p:nvSpPr>
+        <p:spPr>
+          <a:xfrm>
+            <a:off x="3145588" y="4330860"/>
+            <a:ext cx="1562582" cy="868102"/>
+          </a:xfrm>
+          <a:prstGeom prst="rect">
+            <a:avLst/>
+          </a:prstGeom>
+          <a:solidFill>
+            <a:schemeClr val="bg1"/>
+          </a:solidFill>
+          <a:ln>
+            <a:solidFill>
+              <a:schemeClr val="tx1"/>
+            </a:solidFill>
+          </a:ln>
+        </p:spPr>
+        <p:style>
+          <a:lnRef idx="2">
+            <a:schemeClr val="accent1">
+              <a:shade val="15000"/>
+            </a:schemeClr>
+          </a:lnRef>
+          <a:fillRef idx="1">
+            <a:schemeClr val="accent1"/>
+          </a:fillRef>
+          <a:effectRef idx="0">
+            <a:schemeClr val="accent1"/>
+          </a:effectRef>
+          <a:fontRef idx="minor">
+            <a:schemeClr val="lt1"/>
+          </a:fontRef>
+        </p:style>
+        <p:txBody>
+          <a:bodyPr rtlCol="0" anchor="ctr"/>
+          <a:lstStyle/>
+          <a:p>
+            <a:pPr algn="ctr"/>
+            <a:r>
+              <a:rPr lang="zh-TW" altLang="zh-TW" dirty="0">
+                <a:solidFill>
+                  <a:schemeClr val="tx1"/>
+                </a:solidFill>
+                <a:latin typeface="Times New Roman" panose="02020603050405020304" pitchFamily="18" charset="0"/>
+                <a:ea typeface="標楷體" panose="03000509000000000000" pitchFamily="65" charset="-120"/>
+                <a:cs typeface="Times New Roman" panose="02020603050405020304" pitchFamily="18" charset="0"/>
+              </a:rPr>
+              <a:t>PCS XYZ</a:t>
+            </a:r>
+            <a:endParaRPr lang="zh-TW" altLang="en-US" dirty="0">
+              <a:solidFill>
+                <a:schemeClr val="tx1"/>
+              </a:solidFill>
+              <a:latin typeface="Times New Roman" panose="02020603050405020304" pitchFamily="18" charset="0"/>
+              <a:ea typeface="標楷體" panose="03000509000000000000" pitchFamily="65" charset="-120"/>
+              <a:cs typeface="Times New Roman" panose="02020603050405020304" pitchFamily="18" charset="0"/>
+            </a:endParaRPr>
+          </a:p>
+        </p:txBody>
+      </p:sp>
+      <p:sp>
+        <p:nvSpPr>
+          <p:cNvPr id="15" name="矩形 14">
+            <a:extLst>
+              <a:ext uri="{FF2B5EF4-FFF2-40B4-BE49-F238E27FC236}">
+                <a16:creationId xmlns:a16="http://schemas.microsoft.com/office/drawing/2014/main" id="{3D38E1AE-CC63-54BD-A425-9F7062CA1A48}"/>
+              </a:ext>
+            </a:extLst>
+          </p:cNvPr>
+          <p:cNvSpPr/>
+          <p:nvPr/>
+        </p:nvSpPr>
+        <p:spPr>
+          <a:xfrm>
+            <a:off x="5550397" y="1996088"/>
+            <a:ext cx="1562582" cy="1432912"/>
+          </a:xfrm>
+          <a:prstGeom prst="rect">
+            <a:avLst/>
+          </a:prstGeom>
+          <a:solidFill>
+            <a:schemeClr val="bg1"/>
+          </a:solidFill>
+          <a:ln>
+            <a:solidFill>
+              <a:schemeClr val="tx1"/>
+            </a:solidFill>
+          </a:ln>
+        </p:spPr>
+        <p:style>
+          <a:lnRef idx="2">
+            <a:schemeClr val="accent1">
+              <a:shade val="15000"/>
+            </a:schemeClr>
+          </a:lnRef>
+          <a:fillRef idx="1">
+            <a:schemeClr val="accent1"/>
+          </a:fillRef>
+          <a:effectRef idx="0">
+            <a:schemeClr val="accent1"/>
+          </a:effectRef>
+          <a:fontRef idx="minor">
+            <a:schemeClr val="lt1"/>
+          </a:fontRef>
+        </p:style>
+        <p:txBody>
+          <a:bodyPr rtlCol="0" anchor="ctr"/>
+          <a:lstStyle/>
+          <a:p>
+            <a:pPr algn="ctr"/>
+            <a:r>
+              <a:rPr lang="zh-TW" altLang="zh-TW" dirty="0">
+                <a:solidFill>
+                  <a:schemeClr val="tx1"/>
+                </a:solidFill>
+                <a:latin typeface="Times New Roman" panose="02020603050405020304" pitchFamily="18" charset="0"/>
+                <a:ea typeface="標楷體" panose="03000509000000000000" pitchFamily="65" charset="-120"/>
+                <a:cs typeface="Times New Roman" panose="02020603050405020304" pitchFamily="18" charset="0"/>
+              </a:rPr>
+              <a:t>TRC</a:t>
+            </a:r>
+            <a:endParaRPr lang="en-US" altLang="zh-TW" dirty="0">
+              <a:solidFill>
+                <a:schemeClr val="tx1"/>
+              </a:solidFill>
+              <a:latin typeface="Times New Roman" panose="02020603050405020304" pitchFamily="18" charset="0"/>
+              <a:ea typeface="標楷體" panose="03000509000000000000" pitchFamily="65" charset="-120"/>
+              <a:cs typeface="Times New Roman" panose="02020603050405020304" pitchFamily="18" charset="0"/>
+            </a:endParaRPr>
+          </a:p>
+          <a:p>
+            <a:pPr algn="ctr"/>
+            <a:r>
+              <a:rPr lang="zh-TW" altLang="zh-TW" dirty="0">
+                <a:solidFill>
+                  <a:schemeClr val="tx1"/>
+                </a:solidFill>
+                <a:latin typeface="Times New Roman" panose="02020603050405020304" pitchFamily="18" charset="0"/>
+                <a:ea typeface="標楷體" panose="03000509000000000000" pitchFamily="65" charset="-120"/>
+                <a:cs typeface="Times New Roman" panose="02020603050405020304" pitchFamily="18" charset="0"/>
+              </a:rPr>
+              <a:t> </a:t>
+            </a:r>
+            <a:endParaRPr lang="en-US" altLang="zh-TW" dirty="0">
+              <a:solidFill>
+                <a:schemeClr val="tx1"/>
+              </a:solidFill>
+              <a:latin typeface="Times New Roman" panose="02020603050405020304" pitchFamily="18" charset="0"/>
+              <a:ea typeface="標楷體" panose="03000509000000000000" pitchFamily="65" charset="-120"/>
+              <a:cs typeface="Times New Roman" panose="02020603050405020304" pitchFamily="18" charset="0"/>
+            </a:endParaRPr>
+          </a:p>
+          <a:p>
+            <a:pPr algn="ctr"/>
+            <a:r>
+              <a:rPr lang="zh-TW" altLang="zh-TW" dirty="0">
+                <a:solidFill>
+                  <a:schemeClr val="tx1"/>
+                </a:solidFill>
+                <a:latin typeface="Times New Roman" panose="02020603050405020304" pitchFamily="18" charset="0"/>
+                <a:ea typeface="標楷體" panose="03000509000000000000" pitchFamily="65" charset="-120"/>
+                <a:cs typeface="Times New Roman" panose="02020603050405020304" pitchFamily="18" charset="0"/>
+              </a:rPr>
+              <a:t>White Point</a:t>
+            </a:r>
+            <a:endParaRPr lang="en-US" altLang="zh-TW" dirty="0">
+              <a:solidFill>
+                <a:schemeClr val="tx1"/>
+              </a:solidFill>
+              <a:latin typeface="Times New Roman" panose="02020603050405020304" pitchFamily="18" charset="0"/>
+              <a:ea typeface="標楷體" panose="03000509000000000000" pitchFamily="65" charset="-120"/>
+              <a:cs typeface="Times New Roman" panose="02020603050405020304" pitchFamily="18" charset="0"/>
+            </a:endParaRPr>
+          </a:p>
+          <a:p>
+            <a:pPr algn="ctr"/>
+            <a:endParaRPr lang="en-US" altLang="zh-TW" dirty="0">
+              <a:solidFill>
+                <a:schemeClr val="tx1"/>
+              </a:solidFill>
+              <a:latin typeface="Times New Roman" panose="02020603050405020304" pitchFamily="18" charset="0"/>
+              <a:ea typeface="標楷體" panose="03000509000000000000" pitchFamily="65" charset="-120"/>
+              <a:cs typeface="Times New Roman" panose="02020603050405020304" pitchFamily="18" charset="0"/>
+            </a:endParaRPr>
+          </a:p>
+          <a:p>
+            <a:pPr algn="ctr"/>
+            <a:r>
+              <a:rPr lang="zh-TW" altLang="zh-TW" dirty="0">
+                <a:solidFill>
+                  <a:schemeClr val="tx1"/>
+                </a:solidFill>
+                <a:latin typeface="Times New Roman" panose="02020603050405020304" pitchFamily="18" charset="0"/>
+                <a:ea typeface="標楷體" panose="03000509000000000000" pitchFamily="65" charset="-120"/>
+                <a:cs typeface="Times New Roman" panose="02020603050405020304" pitchFamily="18" charset="0"/>
+              </a:rPr>
+              <a:t> Black</a:t>
+            </a:r>
+            <a:endParaRPr lang="zh-TW" altLang="en-US" dirty="0">
+              <a:solidFill>
+                <a:schemeClr val="tx1"/>
+              </a:solidFill>
+              <a:latin typeface="Times New Roman" panose="02020603050405020304" pitchFamily="18" charset="0"/>
+              <a:ea typeface="標楷體" panose="03000509000000000000" pitchFamily="65" charset="-120"/>
+              <a:cs typeface="Times New Roman" panose="02020603050405020304" pitchFamily="18" charset="0"/>
+            </a:endParaRPr>
+          </a:p>
+        </p:txBody>
+      </p:sp>
+      <p:sp>
+        <p:nvSpPr>
+          <p:cNvPr id="17" name="矩形 16">
+            <a:extLst>
+              <a:ext uri="{FF2B5EF4-FFF2-40B4-BE49-F238E27FC236}">
+                <a16:creationId xmlns:a16="http://schemas.microsoft.com/office/drawing/2014/main" id="{6D51C1F6-02EC-2A58-7D37-AE0840FD35CB}"/>
+              </a:ext>
+            </a:extLst>
+          </p:cNvPr>
+          <p:cNvSpPr/>
+          <p:nvPr/>
+        </p:nvSpPr>
+        <p:spPr>
+          <a:xfrm>
+            <a:off x="5550397" y="4330860"/>
+            <a:ext cx="1562582" cy="868102"/>
+          </a:xfrm>
+          <a:prstGeom prst="rect">
+            <a:avLst/>
+          </a:prstGeom>
+          <a:solidFill>
+            <a:schemeClr val="bg1"/>
+          </a:solidFill>
+          <a:ln>
+            <a:solidFill>
+              <a:schemeClr val="tx1"/>
+            </a:solidFill>
+          </a:ln>
+        </p:spPr>
+        <p:style>
+          <a:lnRef idx="2">
+            <a:schemeClr val="accent1">
+              <a:shade val="15000"/>
+            </a:schemeClr>
+          </a:lnRef>
+          <a:fillRef idx="1">
+            <a:schemeClr val="accent1"/>
+          </a:fillRef>
+          <a:effectRef idx="0">
+            <a:schemeClr val="accent1"/>
+          </a:effectRef>
+          <a:fontRef idx="minor">
+            <a:schemeClr val="lt1"/>
+          </a:fontRef>
+        </p:style>
+        <p:txBody>
+          <a:bodyPr rtlCol="0" anchor="ctr"/>
+          <a:lstStyle/>
+          <a:p>
+            <a:pPr algn="ctr"/>
+            <a:r>
+              <a:rPr lang="zh-TW" altLang="zh-TW" dirty="0">
+                <a:solidFill>
+                  <a:schemeClr val="tx1"/>
+                </a:solidFill>
+                <a:latin typeface="Times New Roman" panose="02020603050405020304" pitchFamily="18" charset="0"/>
+                <a:ea typeface="標楷體" panose="03000509000000000000" pitchFamily="65" charset="-120"/>
+                <a:cs typeface="Times New Roman" panose="02020603050405020304" pitchFamily="18" charset="0"/>
+              </a:rPr>
+              <a:t>3 × 3 Matrix</a:t>
+            </a:r>
+            <a:endParaRPr lang="zh-TW" altLang="en-US" dirty="0">
+              <a:solidFill>
+                <a:schemeClr val="tx1"/>
+              </a:solidFill>
+              <a:latin typeface="Times New Roman" panose="02020603050405020304" pitchFamily="18" charset="0"/>
+              <a:ea typeface="標楷體" panose="03000509000000000000" pitchFamily="65" charset="-120"/>
+              <a:cs typeface="Times New Roman" panose="02020603050405020304" pitchFamily="18" charset="0"/>
+            </a:endParaRPr>
+          </a:p>
+        </p:txBody>
+      </p:sp>
+      <p:sp>
+        <p:nvSpPr>
+          <p:cNvPr id="19" name="矩形 18">
+            <a:extLst>
+              <a:ext uri="{FF2B5EF4-FFF2-40B4-BE49-F238E27FC236}">
+                <a16:creationId xmlns:a16="http://schemas.microsoft.com/office/drawing/2014/main" id="{1E3D21E5-C807-CED2-AFFF-E4AD13E711D7}"/>
+              </a:ext>
+            </a:extLst>
+          </p:cNvPr>
+          <p:cNvSpPr/>
+          <p:nvPr/>
+        </p:nvSpPr>
+        <p:spPr>
+          <a:xfrm>
+            <a:off x="7905511" y="3277863"/>
+            <a:ext cx="1562582" cy="868102"/>
+          </a:xfrm>
+          <a:prstGeom prst="rect">
+            <a:avLst/>
+          </a:prstGeom>
+          <a:solidFill>
+            <a:schemeClr val="bg1"/>
+          </a:solidFill>
+          <a:ln>
+            <a:solidFill>
+              <a:schemeClr val="tx1"/>
+            </a:solidFill>
+          </a:ln>
+        </p:spPr>
+        <p:style>
+          <a:lnRef idx="2">
+            <a:schemeClr val="accent1">
+              <a:shade val="15000"/>
+            </a:schemeClr>
+          </a:lnRef>
+          <a:fillRef idx="1">
+            <a:schemeClr val="accent1"/>
+          </a:fillRef>
+          <a:effectRef idx="0">
+            <a:schemeClr val="accent1"/>
+          </a:effectRef>
+          <a:fontRef idx="minor">
+            <a:schemeClr val="lt1"/>
+          </a:fontRef>
+        </p:style>
+        <p:txBody>
+          <a:bodyPr rtlCol="0" anchor="ctr"/>
+          <a:lstStyle/>
+          <a:p>
+            <a:pPr algn="ctr"/>
+            <a:r>
+              <a:rPr lang="zh-TW" altLang="zh-TW" dirty="0">
+                <a:solidFill>
+                  <a:schemeClr val="tx1"/>
+                </a:solidFill>
+                <a:latin typeface="Times New Roman" panose="02020603050405020304" pitchFamily="18" charset="0"/>
+                <a:ea typeface="標楷體" panose="03000509000000000000" pitchFamily="65" charset="-120"/>
+                <a:cs typeface="Times New Roman" panose="02020603050405020304" pitchFamily="18" charset="0"/>
+              </a:rPr>
+              <a:t>RGB Primary Data</a:t>
+            </a:r>
+            <a:endParaRPr lang="zh-TW" altLang="en-US" dirty="0">
+              <a:solidFill>
+                <a:schemeClr val="tx1"/>
+              </a:solidFill>
+              <a:latin typeface="Times New Roman" panose="02020603050405020304" pitchFamily="18" charset="0"/>
+              <a:ea typeface="標楷體" panose="03000509000000000000" pitchFamily="65" charset="-120"/>
+              <a:cs typeface="Times New Roman" panose="02020603050405020304" pitchFamily="18" charset="0"/>
+            </a:endParaRPr>
+          </a:p>
+        </p:txBody>
+      </p:sp>
+      <p:cxnSp>
+        <p:nvCxnSpPr>
+          <p:cNvPr id="21" name="直線單箭頭接點 20">
+            <a:extLst>
+              <a:ext uri="{FF2B5EF4-FFF2-40B4-BE49-F238E27FC236}">
+                <a16:creationId xmlns:a16="http://schemas.microsoft.com/office/drawing/2014/main" id="{04ED3558-6F36-B78D-E935-FEBB2A57D382}"/>
+              </a:ext>
+            </a:extLst>
+          </p:cNvPr>
+          <p:cNvCxnSpPr>
+            <a:stCxn id="6" idx="3"/>
+            <a:endCxn id="9" idx="1"/>
+          </p:cNvCxnSpPr>
+          <p:nvPr/>
+        </p:nvCxnSpPr>
+        <p:spPr>
+          <a:xfrm>
+            <a:off x="2303362" y="2702988"/>
+            <a:ext cx="842226" cy="0"/>
+          </a:xfrm>
+          <a:prstGeom prst="straightConnector1">
+            <a:avLst/>
+          </a:prstGeom>
+          <a:ln w="19050" cap="flat" cmpd="sng" algn="ctr">
+            <a:solidFill>
+              <a:schemeClr val="dk1"/>
+            </a:solidFill>
+            <a:prstDash val="solid"/>
+            <a:round/>
+            <a:headEnd type="none" w="med" len="med"/>
+            <a:tailEnd type="arrow" w="med" len="med"/>
+          </a:ln>
+        </p:spPr>
+        <p:style>
+          <a:lnRef idx="0">
+            <a:scrgbClr r="0" g="0" b="0"/>
+          </a:lnRef>
+          <a:fillRef idx="0">
+            <a:scrgbClr r="0" g="0" b="0"/>
+          </a:fillRef>
+          <a:effectRef idx="0">
+            <a:scrgbClr r="0" g="0" b="0"/>
+          </a:effectRef>
+          <a:fontRef idx="minor">
+            <a:schemeClr val="tx1"/>
+          </a:fontRef>
+        </p:style>
+      </p:cxnSp>
+      <p:cxnSp>
+        <p:nvCxnSpPr>
+          <p:cNvPr id="22" name="直線單箭頭接點 21">
+            <a:extLst>
+              <a:ext uri="{FF2B5EF4-FFF2-40B4-BE49-F238E27FC236}">
+                <a16:creationId xmlns:a16="http://schemas.microsoft.com/office/drawing/2014/main" id="{6AAF4E77-8E58-FBFA-184A-AA3A5E4AA293}"/>
+              </a:ext>
+            </a:extLst>
+          </p:cNvPr>
+          <p:cNvCxnSpPr>
+            <a:cxnSpLocks/>
+            <a:stCxn id="9" idx="3"/>
+            <a:endCxn id="15" idx="1"/>
+          </p:cNvCxnSpPr>
+          <p:nvPr/>
+        </p:nvCxnSpPr>
+        <p:spPr>
+          <a:xfrm>
+            <a:off x="4708170" y="2702988"/>
+            <a:ext cx="842227" cy="9556"/>
+          </a:xfrm>
+          <a:prstGeom prst="straightConnector1">
+            <a:avLst/>
+          </a:prstGeom>
+          <a:ln w="19050" cap="flat" cmpd="sng" algn="ctr">
+            <a:solidFill>
+              <a:schemeClr val="dk1"/>
+            </a:solidFill>
+            <a:prstDash val="solid"/>
+            <a:round/>
+            <a:headEnd type="none" w="med" len="med"/>
+            <a:tailEnd type="arrow" w="med" len="med"/>
+          </a:ln>
+        </p:spPr>
+        <p:style>
+          <a:lnRef idx="0">
+            <a:scrgbClr r="0" g="0" b="0"/>
+          </a:lnRef>
+          <a:fillRef idx="0">
+            <a:scrgbClr r="0" g="0" b="0"/>
+          </a:fillRef>
+          <a:effectRef idx="0">
+            <a:scrgbClr r="0" g="0" b="0"/>
+          </a:effectRef>
+          <a:fontRef idx="minor">
+            <a:schemeClr val="tx1"/>
+          </a:fontRef>
+        </p:style>
+      </p:cxnSp>
+      <p:cxnSp>
+        <p:nvCxnSpPr>
+          <p:cNvPr id="25" name="直線單箭頭接點 24">
+            <a:extLst>
+              <a:ext uri="{FF2B5EF4-FFF2-40B4-BE49-F238E27FC236}">
+                <a16:creationId xmlns:a16="http://schemas.microsoft.com/office/drawing/2014/main" id="{6181477D-7548-5212-6EBC-4D318C471C2D}"/>
+              </a:ext>
+            </a:extLst>
+          </p:cNvPr>
+          <p:cNvCxnSpPr>
+            <a:cxnSpLocks/>
+            <a:stCxn id="17" idx="1"/>
+            <a:endCxn id="13" idx="3"/>
+          </p:cNvCxnSpPr>
+          <p:nvPr/>
+        </p:nvCxnSpPr>
+        <p:spPr>
+          <a:xfrm flipH="1">
+            <a:off x="4708170" y="4764911"/>
+            <a:ext cx="842227" cy="0"/>
+          </a:xfrm>
+          <a:prstGeom prst="straightConnector1">
+            <a:avLst/>
+          </a:prstGeom>
+          <a:ln w="19050" cap="flat" cmpd="sng" algn="ctr">
+            <a:solidFill>
+              <a:schemeClr val="dk1"/>
+            </a:solidFill>
+            <a:prstDash val="solid"/>
+            <a:round/>
+            <a:headEnd type="none" w="med" len="med"/>
+            <a:tailEnd type="arrow" w="med" len="med"/>
+          </a:ln>
+        </p:spPr>
+        <p:style>
+          <a:lnRef idx="0">
+            <a:scrgbClr r="0" g="0" b="0"/>
+          </a:lnRef>
+          <a:fillRef idx="0">
+            <a:scrgbClr r="0" g="0" b="0"/>
+          </a:fillRef>
+          <a:effectRef idx="0">
+            <a:scrgbClr r="0" g="0" b="0"/>
+          </a:effectRef>
+          <a:fontRef idx="minor">
+            <a:schemeClr val="tx1"/>
+          </a:fontRef>
+        </p:style>
+      </p:cxnSp>
+      <p:cxnSp>
+        <p:nvCxnSpPr>
+          <p:cNvPr id="28" name="直線單箭頭接點 27">
+            <a:extLst>
+              <a:ext uri="{FF2B5EF4-FFF2-40B4-BE49-F238E27FC236}">
+                <a16:creationId xmlns:a16="http://schemas.microsoft.com/office/drawing/2014/main" id="{CC9317CC-7BA9-6767-1089-AC753074E025}"/>
+              </a:ext>
+            </a:extLst>
+          </p:cNvPr>
+          <p:cNvCxnSpPr>
+            <a:cxnSpLocks/>
+            <a:stCxn id="13" idx="1"/>
+            <a:endCxn id="11" idx="3"/>
+          </p:cNvCxnSpPr>
+          <p:nvPr/>
+        </p:nvCxnSpPr>
+        <p:spPr>
+          <a:xfrm flipH="1">
+            <a:off x="2303362" y="4764911"/>
+            <a:ext cx="842226" cy="0"/>
+          </a:xfrm>
+          <a:prstGeom prst="straightConnector1">
+            <a:avLst/>
+          </a:prstGeom>
+          <a:ln w="19050" cap="flat" cmpd="sng" algn="ctr">
+            <a:solidFill>
+              <a:schemeClr val="dk1"/>
+            </a:solidFill>
+            <a:prstDash val="solid"/>
+            <a:round/>
+            <a:headEnd type="none" w="med" len="med"/>
+            <a:tailEnd type="arrow" w="med" len="med"/>
+          </a:ln>
+        </p:spPr>
+        <p:style>
+          <a:lnRef idx="0">
+            <a:scrgbClr r="0" g="0" b="0"/>
+          </a:lnRef>
+          <a:fillRef idx="0">
+            <a:scrgbClr r="0" g="0" b="0"/>
+          </a:fillRef>
+          <a:effectRef idx="0">
+            <a:scrgbClr r="0" g="0" b="0"/>
+          </a:effectRef>
+          <a:fontRef idx="minor">
+            <a:schemeClr val="tx1"/>
+          </a:fontRef>
+        </p:style>
+      </p:cxnSp>
+      <p:cxnSp>
+        <p:nvCxnSpPr>
+          <p:cNvPr id="35" name="接點: 肘形 34">
+            <a:extLst>
+              <a:ext uri="{FF2B5EF4-FFF2-40B4-BE49-F238E27FC236}">
+                <a16:creationId xmlns:a16="http://schemas.microsoft.com/office/drawing/2014/main" id="{2590B455-C495-4FE3-98E1-2D28C2EFBF3B}"/>
+              </a:ext>
+            </a:extLst>
+          </p:cNvPr>
+          <p:cNvCxnSpPr>
+            <a:stCxn id="15" idx="3"/>
+            <a:endCxn id="19" idx="0"/>
+          </p:cNvCxnSpPr>
+          <p:nvPr/>
+        </p:nvCxnSpPr>
+        <p:spPr>
+          <a:xfrm>
+            <a:off x="7112979" y="2712544"/>
+            <a:ext cx="1573823" cy="565319"/>
+          </a:xfrm>
+          <a:prstGeom prst="bentConnector2">
+            <a:avLst/>
+          </a:prstGeom>
+          <a:ln w="19050" cap="flat" cmpd="sng" algn="ctr">
+            <a:solidFill>
+              <a:schemeClr val="dk1"/>
+            </a:solidFill>
+            <a:prstDash val="solid"/>
+            <a:round/>
+            <a:headEnd type="none" w="med" len="med"/>
+            <a:tailEnd type="arrow" w="med" len="med"/>
+          </a:ln>
+        </p:spPr>
+        <p:style>
+          <a:lnRef idx="0">
+            <a:scrgbClr r="0" g="0" b="0"/>
+          </a:lnRef>
+          <a:fillRef idx="0">
+            <a:scrgbClr r="0" g="0" b="0"/>
+          </a:fillRef>
+          <a:effectRef idx="0">
+            <a:scrgbClr r="0" g="0" b="0"/>
+          </a:effectRef>
+          <a:fontRef idx="minor">
+            <a:schemeClr val="tx1"/>
+          </a:fontRef>
+        </p:style>
+      </p:cxnSp>
+      <p:cxnSp>
+        <p:nvCxnSpPr>
+          <p:cNvPr id="37" name="接點: 肘形 36">
+            <a:extLst>
+              <a:ext uri="{FF2B5EF4-FFF2-40B4-BE49-F238E27FC236}">
+                <a16:creationId xmlns:a16="http://schemas.microsoft.com/office/drawing/2014/main" id="{A78DFA20-69CC-D714-7014-55DF3DC477A5}"/>
+              </a:ext>
+            </a:extLst>
+          </p:cNvPr>
+          <p:cNvCxnSpPr>
+            <a:stCxn id="19" idx="2"/>
+            <a:endCxn id="17" idx="3"/>
+          </p:cNvCxnSpPr>
+          <p:nvPr/>
+        </p:nvCxnSpPr>
+        <p:spPr>
+          <a:xfrm rot="5400000">
+            <a:off x="7590418" y="3668527"/>
+            <a:ext cx="618946" cy="1573823"/>
+          </a:xfrm>
+          <a:prstGeom prst="bentConnector2">
+            <a:avLst/>
+          </a:prstGeom>
+          <a:ln w="19050" cap="flat" cmpd="sng" algn="ctr">
+            <a:solidFill>
+              <a:schemeClr val="dk1"/>
+            </a:solidFill>
+            <a:prstDash val="solid"/>
+            <a:round/>
+            <a:headEnd type="none" w="med" len="med"/>
+            <a:tailEnd type="arrow" w="med" len="med"/>
+          </a:ln>
+        </p:spPr>
+        <p:style>
+          <a:lnRef idx="0">
+            <a:scrgbClr r="0" g="0" b="0"/>
+          </a:lnRef>
+          <a:fillRef idx="0">
+            <a:scrgbClr r="0" g="0" b="0"/>
+          </a:fillRef>
+          <a:effectRef idx="0">
+            <a:scrgbClr r="0" g="0" b="0"/>
+          </a:effectRef>
+          <a:fontRef idx="minor">
+            <a:schemeClr val="tx1"/>
+          </a:fontRef>
+        </p:style>
+      </p:cxnSp>
+      <p:sp>
+        <p:nvSpPr>
+          <p:cNvPr id="38" name="矩形 37">
+            <a:extLst>
+              <a:ext uri="{FF2B5EF4-FFF2-40B4-BE49-F238E27FC236}">
+                <a16:creationId xmlns:a16="http://schemas.microsoft.com/office/drawing/2014/main" id="{4AFF936C-A0A9-8BA5-E8C7-9507E5CA2971}"/>
+              </a:ext>
+            </a:extLst>
+          </p:cNvPr>
+          <p:cNvSpPr/>
+          <p:nvPr/>
+        </p:nvSpPr>
+        <p:spPr>
+          <a:xfrm>
+            <a:off x="393539" y="5773837"/>
+            <a:ext cx="9167150" cy="584775"/>
+          </a:xfrm>
+          <a:prstGeom prst="rect">
+            <a:avLst/>
+          </a:prstGeom>
+          <a:noFill/>
+        </p:spPr>
+        <p:txBody>
+          <a:bodyPr wrap="square" lIns="91440" tIns="45720" rIns="91440" bIns="45720">
+            <a:spAutoFit/>
+          </a:bodyPr>
+          <a:lstStyle/>
+          <a:p>
+            <a:r>
+              <a:rPr lang="zh-TW" altLang="zh-TW" sz="1600" dirty="0">
+                <a:latin typeface="Times New Roman" panose="02020603050405020304" pitchFamily="18" charset="0"/>
+                <a:ea typeface="標楷體" panose="03000509000000000000" pitchFamily="65" charset="-120"/>
+                <a:cs typeface="Times New Roman" panose="02020603050405020304" pitchFamily="18" charset="0"/>
+              </a:rPr>
+              <a:t>ICC 規格定義 Profile 結構與 Matrix/TRC processing model，但不代表 ICC 指定唯一的 Profile-building 求解演算法。</a:t>
+            </a:r>
+            <a:endParaRPr lang="zh-TW" altLang="en-US" sz="1600" b="0" cap="none" spc="0" dirty="0">
+              <a:ln w="0"/>
+              <a:solidFill>
+                <a:schemeClr val="tx1"/>
+              </a:solidFill>
+              <a:effectLst>
+                <a:outerShdw blurRad="38100" dist="19050" dir="2700000" algn="tl" rotWithShape="0">
+                  <a:schemeClr val="dk1">
+                    <a:alpha val="40000"/>
+                  </a:schemeClr>
+                </a:outerShdw>
+              </a:effectLst>
+              <a:latin typeface="Times New Roman" panose="02020603050405020304" pitchFamily="18" charset="0"/>
+              <a:ea typeface="標楷體" panose="03000509000000000000" pitchFamily="65" charset="-120"/>
+              <a:cs typeface="Times New Roman" panose="02020603050405020304" pitchFamily="18" charset="0"/>
+            </a:endParaRPr>
+          </a:p>
+        </p:txBody>
+      </p:sp>
+      <p:sp>
+        <p:nvSpPr>
+          <p:cNvPr id="42" name="標題 1">
+            <a:extLst>
+              <a:ext uri="{FF2B5EF4-FFF2-40B4-BE49-F238E27FC236}">
+                <a16:creationId xmlns:a16="http://schemas.microsoft.com/office/drawing/2014/main" id="{C83C19D6-9797-57FB-F191-2DE6E0F0A8FD}"/>
+              </a:ext>
+            </a:extLst>
+          </p:cNvPr>
+          <p:cNvSpPr>
+            <a:spLocks noGrp="1"/>
+          </p:cNvSpPr>
+          <p:nvPr>
+            <p:ph type="title"/>
+          </p:nvPr>
+        </p:nvSpPr>
+        <p:spPr>
+          <a:xfrm>
+            <a:off x="609602" y="609600"/>
+            <a:ext cx="8077200" cy="533400"/>
+          </a:xfrm>
+        </p:spPr>
+        <p:txBody>
+          <a:bodyPr/>
+          <a:lstStyle/>
+          <a:p>
+            <a:r>
+              <a:rPr lang="zh-TW" altLang="en-US" dirty="0">
+                <a:latin typeface="Times New Roman" panose="02020603050405020304" pitchFamily="18" charset="0"/>
+                <a:ea typeface="標楷體" panose="03000509000000000000" pitchFamily="65" charset="-120"/>
+                <a:cs typeface="Times New Roman" panose="02020603050405020304" pitchFamily="18" charset="0"/>
+              </a:rPr>
+              <a:t>本次進度</a:t>
+            </a:r>
+            <a:r>
+              <a:rPr lang="en-US" altLang="zh-TW" dirty="0">
+                <a:latin typeface="Times New Roman" panose="02020603050405020304" pitchFamily="18" charset="0"/>
+                <a:ea typeface="標楷體" panose="03000509000000000000" pitchFamily="65" charset="-120"/>
+                <a:cs typeface="Times New Roman" panose="02020603050405020304" pitchFamily="18" charset="0"/>
+              </a:rPr>
+              <a:t>:</a:t>
+            </a:r>
+            <a:r>
+              <a:rPr lang="zh-TW" altLang="zh-TW" dirty="0"/>
+              <a:t>Matrix-based Display Profile</a:t>
+            </a:r>
+            <a:endParaRPr lang="zh-TW" altLang="en-US" dirty="0">
+              <a:latin typeface="Times New Roman" panose="02020603050405020304" pitchFamily="18" charset="0"/>
+              <a:ea typeface="標楷體" panose="03000509000000000000" pitchFamily="65" charset="-120"/>
+              <a:cs typeface="Times New Roman" panose="02020603050405020304" pitchFamily="18" charset="0"/>
+            </a:endParaRPr>
+          </a:p>
+        </p:txBody>
+      </p:sp>
+      <p:sp>
+        <p:nvSpPr>
+          <p:cNvPr id="44" name="文字版面配置區 6">
+            <a:extLst>
+              <a:ext uri="{FF2B5EF4-FFF2-40B4-BE49-F238E27FC236}">
+                <a16:creationId xmlns:a16="http://schemas.microsoft.com/office/drawing/2014/main" id="{8F934667-3617-262D-FBCC-C5AB7DADC727}"/>
+              </a:ext>
+            </a:extLst>
+          </p:cNvPr>
+          <p:cNvSpPr txBox="1"/>
+          <p:nvPr/>
+        </p:nvSpPr>
+        <p:spPr>
+          <a:xfrm>
+            <a:off x="497549" y="1284684"/>
+            <a:ext cx="8686796" cy="4700685"/>
           </a:xfrm>
           <a:prstGeom prst="rect">
             <a:avLst/>
@@ -9346,40 +11798,2205 @@
           <a:ln>
             <a:noFill/>
           </a:ln>
-          <a:effectLst>
-            <a:outerShdw blurRad="63500" sx="102000" sy="102000" algn="ctr" rotWithShape="0">
-              <a:prstClr val="black">
-                <a:alpha val="40000"/>
-              </a:prstClr>
-            </a:outerShdw>
-          </a:effectLst>
         </p:spPr>
-      </p:pic>
-      <p:pic>
-        <p:nvPicPr>
-          <p:cNvPr id="2097166" name="圖片 7"/>
-          <p:cNvPicPr>
-            <a:picLocks noChangeAspect="1"/>
-          </p:cNvPicPr>
+        <p:txBody>
+          <a:bodyPr spcFirstLastPara="1" wrap="square" lIns="91425" tIns="45700" rIns="91425" bIns="45700" anchor="t" anchorCtr="0">
+            <a:noAutofit/>
+          </a:bodyPr>
+          <a:lstStyle>
+            <a:defPPr marR="0" lvl="0" algn="l" rtl="0">
+              <a:lnSpc>
+                <a:spcPct val="100000"/>
+              </a:lnSpc>
+              <a:spcBef>
+                <a:spcPts val="0"/>
+              </a:spcBef>
+              <a:spcAft>
+                <a:spcPts val="0"/>
+              </a:spcAft>
+            </a:defPPr>
+            <a:lvl1pPr marL="457200" marR="0" lvl="0" indent="-406400" algn="l" rtl="0">
+              <a:lnSpc>
+                <a:spcPct val="100000"/>
+              </a:lnSpc>
+              <a:spcBef>
+                <a:spcPts val="560"/>
+              </a:spcBef>
+              <a:spcAft>
+                <a:spcPts val="0"/>
+              </a:spcAft>
+              <a:buClr>
+                <a:schemeClr val="accent2"/>
+              </a:buClr>
+              <a:buSzPts val="2800"/>
+              <a:buFont typeface="Noto Sans Symbols"/>
+              <a:buChar char="❖"/>
+              <a:defRPr sz="2800" b="0" i="0" u="none" strike="noStrike" cap="none">
+                <a:solidFill>
+                  <a:schemeClr val="dk1"/>
+                </a:solidFill>
+                <a:latin typeface="Times New Roman"/>
+                <a:ea typeface="Times New Roman"/>
+                <a:cs typeface="Times New Roman"/>
+                <a:sym typeface="Times New Roman"/>
+              </a:defRPr>
+            </a:lvl1pPr>
+            <a:lvl2pPr marL="914400" marR="0" lvl="1" indent="-381000" algn="l" rtl="0">
+              <a:lnSpc>
+                <a:spcPct val="100000"/>
+              </a:lnSpc>
+              <a:spcBef>
+                <a:spcPts val="480"/>
+              </a:spcBef>
+              <a:spcAft>
+                <a:spcPts val="0"/>
+              </a:spcAft>
+              <a:buClr>
+                <a:srgbClr val="FF5050"/>
+              </a:buClr>
+              <a:buSzPts val="2400"/>
+              <a:buFont typeface="Noto Sans Symbols"/>
+              <a:buChar char="▪"/>
+              <a:defRPr sz="2400" b="0" i="0" u="none" strike="noStrike" cap="none">
+                <a:solidFill>
+                  <a:schemeClr val="dk1"/>
+                </a:solidFill>
+                <a:latin typeface="Times New Roman"/>
+                <a:ea typeface="Times New Roman"/>
+                <a:cs typeface="Times New Roman"/>
+                <a:sym typeface="Times New Roman"/>
+              </a:defRPr>
+            </a:lvl2pPr>
+            <a:lvl3pPr marL="1371600" marR="0" lvl="2" indent="-355600" algn="l" rtl="0">
+              <a:lnSpc>
+                <a:spcPct val="100000"/>
+              </a:lnSpc>
+              <a:spcBef>
+                <a:spcPts val="400"/>
+              </a:spcBef>
+              <a:spcAft>
+                <a:spcPts val="0"/>
+              </a:spcAft>
+              <a:buClr>
+                <a:srgbClr val="6699FF"/>
+              </a:buClr>
+              <a:buSzPts val="2000"/>
+              <a:buFont typeface="Times New Roman"/>
+              <a:buChar char="•"/>
+              <a:defRPr sz="2000" b="0" i="0" u="none" strike="noStrike" cap="none">
+                <a:solidFill>
+                  <a:schemeClr val="dk1"/>
+                </a:solidFill>
+                <a:latin typeface="Times New Roman"/>
+                <a:ea typeface="Times New Roman"/>
+                <a:cs typeface="Times New Roman"/>
+                <a:sym typeface="Times New Roman"/>
+              </a:defRPr>
+            </a:lvl3pPr>
+            <a:lvl4pPr marL="1828800" marR="0" lvl="3" indent="-355600" algn="l" rtl="0">
+              <a:lnSpc>
+                <a:spcPct val="100000"/>
+              </a:lnSpc>
+              <a:spcBef>
+                <a:spcPts val="400"/>
+              </a:spcBef>
+              <a:spcAft>
+                <a:spcPts val="0"/>
+              </a:spcAft>
+              <a:buClr>
+                <a:srgbClr val="FF5050"/>
+              </a:buClr>
+              <a:buSzPts val="2000"/>
+              <a:buFont typeface="Times New Roman"/>
+              <a:buChar char="o"/>
+              <a:defRPr sz="2000" b="0" i="0" u="none" strike="noStrike" cap="none">
+                <a:solidFill>
+                  <a:schemeClr val="dk1"/>
+                </a:solidFill>
+                <a:latin typeface="Times New Roman"/>
+                <a:ea typeface="Times New Roman"/>
+                <a:cs typeface="Times New Roman"/>
+                <a:sym typeface="Times New Roman"/>
+              </a:defRPr>
+            </a:lvl4pPr>
+            <a:lvl5pPr marL="2286000" marR="0" lvl="4" indent="-355600" algn="l" rtl="0">
+              <a:lnSpc>
+                <a:spcPct val="100000"/>
+              </a:lnSpc>
+              <a:spcBef>
+                <a:spcPts val="400"/>
+              </a:spcBef>
+              <a:spcAft>
+                <a:spcPts val="0"/>
+              </a:spcAft>
+              <a:buClr>
+                <a:srgbClr val="FF5050"/>
+              </a:buClr>
+              <a:buSzPts val="2000"/>
+              <a:buFont typeface="Times New Roman"/>
+              <a:buChar char="o"/>
+              <a:defRPr sz="2000" b="0" i="0" u="none" strike="noStrike" cap="none">
+                <a:solidFill>
+                  <a:schemeClr val="dk1"/>
+                </a:solidFill>
+                <a:latin typeface="Times New Roman"/>
+                <a:ea typeface="Times New Roman"/>
+                <a:cs typeface="Times New Roman"/>
+                <a:sym typeface="Times New Roman"/>
+              </a:defRPr>
+            </a:lvl5pPr>
+            <a:lvl6pPr marL="2743200" marR="0" lvl="5" indent="-355600" algn="l" rtl="0">
+              <a:lnSpc>
+                <a:spcPct val="100000"/>
+              </a:lnSpc>
+              <a:spcBef>
+                <a:spcPts val="400"/>
+              </a:spcBef>
+              <a:spcAft>
+                <a:spcPts val="0"/>
+              </a:spcAft>
+              <a:buClr>
+                <a:srgbClr val="FF5050"/>
+              </a:buClr>
+              <a:buSzPts val="2000"/>
+              <a:buFont typeface="Times New Roman"/>
+              <a:buChar char="o"/>
+              <a:defRPr sz="2000" b="0" i="0" u="none" strike="noStrike" cap="none">
+                <a:solidFill>
+                  <a:schemeClr val="dk1"/>
+                </a:solidFill>
+                <a:latin typeface="Times New Roman"/>
+                <a:ea typeface="Times New Roman"/>
+                <a:cs typeface="Times New Roman"/>
+                <a:sym typeface="Times New Roman"/>
+              </a:defRPr>
+            </a:lvl6pPr>
+            <a:lvl7pPr marL="3200400" marR="0" lvl="6" indent="-355600" algn="l" rtl="0">
+              <a:lnSpc>
+                <a:spcPct val="100000"/>
+              </a:lnSpc>
+              <a:spcBef>
+                <a:spcPts val="400"/>
+              </a:spcBef>
+              <a:spcAft>
+                <a:spcPts val="0"/>
+              </a:spcAft>
+              <a:buClr>
+                <a:srgbClr val="FF5050"/>
+              </a:buClr>
+              <a:buSzPts val="2000"/>
+              <a:buFont typeface="Times New Roman"/>
+              <a:buChar char="o"/>
+              <a:defRPr sz="2000" b="0" i="0" u="none" strike="noStrike" cap="none">
+                <a:solidFill>
+                  <a:schemeClr val="dk1"/>
+                </a:solidFill>
+                <a:latin typeface="Times New Roman"/>
+                <a:ea typeface="Times New Roman"/>
+                <a:cs typeface="Times New Roman"/>
+                <a:sym typeface="Times New Roman"/>
+              </a:defRPr>
+            </a:lvl7pPr>
+            <a:lvl8pPr marL="3657600" marR="0" lvl="7" indent="-355600" algn="l" rtl="0">
+              <a:lnSpc>
+                <a:spcPct val="100000"/>
+              </a:lnSpc>
+              <a:spcBef>
+                <a:spcPts val="400"/>
+              </a:spcBef>
+              <a:spcAft>
+                <a:spcPts val="0"/>
+              </a:spcAft>
+              <a:buClr>
+                <a:srgbClr val="FF5050"/>
+              </a:buClr>
+              <a:buSzPts val="2000"/>
+              <a:buFont typeface="Times New Roman"/>
+              <a:buChar char="o"/>
+              <a:defRPr sz="2000" b="0" i="0" u="none" strike="noStrike" cap="none">
+                <a:solidFill>
+                  <a:schemeClr val="dk1"/>
+                </a:solidFill>
+                <a:latin typeface="Times New Roman"/>
+                <a:ea typeface="Times New Roman"/>
+                <a:cs typeface="Times New Roman"/>
+                <a:sym typeface="Times New Roman"/>
+              </a:defRPr>
+            </a:lvl8pPr>
+            <a:lvl9pPr marL="4114800" marR="0" lvl="8" indent="-355600" algn="l" rtl="0">
+              <a:lnSpc>
+                <a:spcPct val="100000"/>
+              </a:lnSpc>
+              <a:spcBef>
+                <a:spcPts val="400"/>
+              </a:spcBef>
+              <a:spcAft>
+                <a:spcPts val="0"/>
+              </a:spcAft>
+              <a:buClr>
+                <a:srgbClr val="FF5050"/>
+              </a:buClr>
+              <a:buSzPts val="2000"/>
+              <a:buFont typeface="Times New Roman"/>
+              <a:buChar char="o"/>
+              <a:defRPr sz="2000" b="0" i="0" u="none" strike="noStrike" cap="none">
+                <a:solidFill>
+                  <a:schemeClr val="dk1"/>
+                </a:solidFill>
+                <a:latin typeface="Times New Roman"/>
+                <a:ea typeface="Times New Roman"/>
+                <a:cs typeface="Times New Roman"/>
+                <a:sym typeface="Times New Roman"/>
+              </a:defRPr>
+            </a:lvl9pPr>
+          </a:lstStyle>
+          <a:p>
+            <a:pPr marL="457200" lvl="1" indent="-406400">
+              <a:spcBef>
+                <a:spcPts val="560"/>
+              </a:spcBef>
+              <a:buClr>
+                <a:schemeClr val="accent2"/>
+              </a:buClr>
+              <a:buSzPts val="2800"/>
+              <a:buFont typeface="Noto Sans Symbols"/>
+              <a:buChar char="❖"/>
+            </a:pPr>
+            <a:r>
+              <a:rPr lang="zh-TW" altLang="en-US" sz="2000" dirty="0"/>
+              <a:t> </a:t>
+            </a:r>
+            <a:endParaRPr lang="zh-TW" altLang="en-US" sz="1800" dirty="0">
+              <a:solidFill>
+                <a:srgbClr val="333333"/>
+              </a:solidFill>
+              <a:latin typeface="Times New Roman" panose="02020603050405020304" pitchFamily="18" charset="0"/>
+              <a:ea typeface="標楷體" panose="03000509000000000000" pitchFamily="65" charset="-120"/>
+              <a:cs typeface="Times New Roman" panose="02020603050405020304" pitchFamily="18" charset="0"/>
+            </a:endParaRPr>
+          </a:p>
+        </p:txBody>
+      </p:sp>
+    </p:spTree>
+    <p:extLst>
+      <p:ext uri="{BB962C8B-B14F-4D97-AF65-F5344CB8AC3E}">
+        <p14:creationId xmlns:p14="http://schemas.microsoft.com/office/powerpoint/2010/main" val="1763089616"/>
+      </p:ext>
+    </p:extLst>
+  </p:cSld>
+  <p:clrMapOvr>
+    <a:masterClrMapping/>
+  </p:clrMapOvr>
+</p:sld>
+</file>
+
+<file path=ppt/slides/slide8.xml><?xml version="1.0" encoding="utf-8"?>
+<p:sld xmlns:a="http://schemas.openxmlformats.org/drawingml/2006/main" xmlns:r="http://schemas.openxmlformats.org/officeDocument/2006/relationships" xmlns:p="http://schemas.openxmlformats.org/presentationml/2006/main">
+  <p:cSld>
+    <p:spTree>
+      <p:nvGrpSpPr>
+        <p:cNvPr id="1" name="">
+          <a:extLst>
+            <a:ext uri="{FF2B5EF4-FFF2-40B4-BE49-F238E27FC236}">
+              <a16:creationId xmlns:a16="http://schemas.microsoft.com/office/drawing/2014/main" id="{C07BEAB9-4E35-7AB7-EE54-74E82B9599A8}"/>
+            </a:ext>
+          </a:extLst>
+        </p:cNvPr>
+        <p:cNvGrpSpPr/>
+        <p:nvPr/>
+      </p:nvGrpSpPr>
+      <p:grpSpPr>
+        <a:xfrm>
+          <a:off x="0" y="0"/>
+          <a:ext cx="0" cy="0"/>
+          <a:chOff x="0" y="0"/>
+          <a:chExt cx="0" cy="0"/>
+        </a:xfrm>
+      </p:grpSpPr>
+      <p:sp>
+        <p:nvSpPr>
+          <p:cNvPr id="10" name="文字版面配置區 6">
+            <a:extLst>
+              <a:ext uri="{FF2B5EF4-FFF2-40B4-BE49-F238E27FC236}">
+                <a16:creationId xmlns:a16="http://schemas.microsoft.com/office/drawing/2014/main" id="{8CC25041-484B-028D-E365-35F32AD88DA6}"/>
+              </a:ext>
+            </a:extLst>
+          </p:cNvPr>
+          <p:cNvSpPr txBox="1"/>
           <p:nvPr/>
-        </p:nvPicPr>
-        <p:blipFill>
-          <a:blip r:embed="rId5"/>
-          <a:stretch>
-            <a:fillRect/>
-          </a:stretch>
-        </p:blipFill>
+        </p:nvSpPr>
         <p:spPr>
           <a:xfrm>
-            <a:off x="2493650" y="4226628"/>
-            <a:ext cx="4266522" cy="930565"/>
+            <a:off x="497549" y="1284684"/>
+            <a:ext cx="8686796" cy="4700685"/>
           </a:xfrm>
           <a:prstGeom prst="rect">
             <a:avLst/>
           </a:prstGeom>
+          <a:noFill/>
+          <a:ln>
+            <a:noFill/>
+          </a:ln>
         </p:spPr>
-      </p:pic>
+        <p:txBody>
+          <a:bodyPr spcFirstLastPara="1" wrap="square" lIns="91425" tIns="45700" rIns="91425" bIns="45700" anchor="t" anchorCtr="0">
+            <a:noAutofit/>
+          </a:bodyPr>
+          <a:lstStyle>
+            <a:defPPr marR="0" lvl="0" algn="l" rtl="0">
+              <a:lnSpc>
+                <a:spcPct val="100000"/>
+              </a:lnSpc>
+              <a:spcBef>
+                <a:spcPts val="0"/>
+              </a:spcBef>
+              <a:spcAft>
+                <a:spcPts val="0"/>
+              </a:spcAft>
+            </a:defPPr>
+            <a:lvl1pPr marL="457200" marR="0" lvl="0" indent="-406400" algn="l" rtl="0">
+              <a:lnSpc>
+                <a:spcPct val="100000"/>
+              </a:lnSpc>
+              <a:spcBef>
+                <a:spcPts val="560"/>
+              </a:spcBef>
+              <a:spcAft>
+                <a:spcPts val="0"/>
+              </a:spcAft>
+              <a:buClr>
+                <a:schemeClr val="accent2"/>
+              </a:buClr>
+              <a:buSzPts val="2800"/>
+              <a:buFont typeface="Noto Sans Symbols"/>
+              <a:buChar char="❖"/>
+              <a:defRPr sz="2800" b="0" i="0" u="none" strike="noStrike" cap="none">
+                <a:solidFill>
+                  <a:schemeClr val="dk1"/>
+                </a:solidFill>
+                <a:latin typeface="Times New Roman"/>
+                <a:ea typeface="Times New Roman"/>
+                <a:cs typeface="Times New Roman"/>
+                <a:sym typeface="Times New Roman"/>
+              </a:defRPr>
+            </a:lvl1pPr>
+            <a:lvl2pPr marL="914400" marR="0" lvl="1" indent="-381000" algn="l" rtl="0">
+              <a:lnSpc>
+                <a:spcPct val="100000"/>
+              </a:lnSpc>
+              <a:spcBef>
+                <a:spcPts val="480"/>
+              </a:spcBef>
+              <a:spcAft>
+                <a:spcPts val="0"/>
+              </a:spcAft>
+              <a:buClr>
+                <a:srgbClr val="FF5050"/>
+              </a:buClr>
+              <a:buSzPts val="2400"/>
+              <a:buFont typeface="Noto Sans Symbols"/>
+              <a:buChar char="▪"/>
+              <a:defRPr sz="2400" b="0" i="0" u="none" strike="noStrike" cap="none">
+                <a:solidFill>
+                  <a:schemeClr val="dk1"/>
+                </a:solidFill>
+                <a:latin typeface="Times New Roman"/>
+                <a:ea typeface="Times New Roman"/>
+                <a:cs typeface="Times New Roman"/>
+                <a:sym typeface="Times New Roman"/>
+              </a:defRPr>
+            </a:lvl2pPr>
+            <a:lvl3pPr marL="1371600" marR="0" lvl="2" indent="-355600" algn="l" rtl="0">
+              <a:lnSpc>
+                <a:spcPct val="100000"/>
+              </a:lnSpc>
+              <a:spcBef>
+                <a:spcPts val="400"/>
+              </a:spcBef>
+              <a:spcAft>
+                <a:spcPts val="0"/>
+              </a:spcAft>
+              <a:buClr>
+                <a:srgbClr val="6699FF"/>
+              </a:buClr>
+              <a:buSzPts val="2000"/>
+              <a:buFont typeface="Times New Roman"/>
+              <a:buChar char="•"/>
+              <a:defRPr sz="2000" b="0" i="0" u="none" strike="noStrike" cap="none">
+                <a:solidFill>
+                  <a:schemeClr val="dk1"/>
+                </a:solidFill>
+                <a:latin typeface="Times New Roman"/>
+                <a:ea typeface="Times New Roman"/>
+                <a:cs typeface="Times New Roman"/>
+                <a:sym typeface="Times New Roman"/>
+              </a:defRPr>
+            </a:lvl3pPr>
+            <a:lvl4pPr marL="1828800" marR="0" lvl="3" indent="-355600" algn="l" rtl="0">
+              <a:lnSpc>
+                <a:spcPct val="100000"/>
+              </a:lnSpc>
+              <a:spcBef>
+                <a:spcPts val="400"/>
+              </a:spcBef>
+              <a:spcAft>
+                <a:spcPts val="0"/>
+              </a:spcAft>
+              <a:buClr>
+                <a:srgbClr val="FF5050"/>
+              </a:buClr>
+              <a:buSzPts val="2000"/>
+              <a:buFont typeface="Times New Roman"/>
+              <a:buChar char="o"/>
+              <a:defRPr sz="2000" b="0" i="0" u="none" strike="noStrike" cap="none">
+                <a:solidFill>
+                  <a:schemeClr val="dk1"/>
+                </a:solidFill>
+                <a:latin typeface="Times New Roman"/>
+                <a:ea typeface="Times New Roman"/>
+                <a:cs typeface="Times New Roman"/>
+                <a:sym typeface="Times New Roman"/>
+              </a:defRPr>
+            </a:lvl4pPr>
+            <a:lvl5pPr marL="2286000" marR="0" lvl="4" indent="-355600" algn="l" rtl="0">
+              <a:lnSpc>
+                <a:spcPct val="100000"/>
+              </a:lnSpc>
+              <a:spcBef>
+                <a:spcPts val="400"/>
+              </a:spcBef>
+              <a:spcAft>
+                <a:spcPts val="0"/>
+              </a:spcAft>
+              <a:buClr>
+                <a:srgbClr val="FF5050"/>
+              </a:buClr>
+              <a:buSzPts val="2000"/>
+              <a:buFont typeface="Times New Roman"/>
+              <a:buChar char="o"/>
+              <a:defRPr sz="2000" b="0" i="0" u="none" strike="noStrike" cap="none">
+                <a:solidFill>
+                  <a:schemeClr val="dk1"/>
+                </a:solidFill>
+                <a:latin typeface="Times New Roman"/>
+                <a:ea typeface="Times New Roman"/>
+                <a:cs typeface="Times New Roman"/>
+                <a:sym typeface="Times New Roman"/>
+              </a:defRPr>
+            </a:lvl5pPr>
+            <a:lvl6pPr marL="2743200" marR="0" lvl="5" indent="-355600" algn="l" rtl="0">
+              <a:lnSpc>
+                <a:spcPct val="100000"/>
+              </a:lnSpc>
+              <a:spcBef>
+                <a:spcPts val="400"/>
+              </a:spcBef>
+              <a:spcAft>
+                <a:spcPts val="0"/>
+              </a:spcAft>
+              <a:buClr>
+                <a:srgbClr val="FF5050"/>
+              </a:buClr>
+              <a:buSzPts val="2000"/>
+              <a:buFont typeface="Times New Roman"/>
+              <a:buChar char="o"/>
+              <a:defRPr sz="2000" b="0" i="0" u="none" strike="noStrike" cap="none">
+                <a:solidFill>
+                  <a:schemeClr val="dk1"/>
+                </a:solidFill>
+                <a:latin typeface="Times New Roman"/>
+                <a:ea typeface="Times New Roman"/>
+                <a:cs typeface="Times New Roman"/>
+                <a:sym typeface="Times New Roman"/>
+              </a:defRPr>
+            </a:lvl6pPr>
+            <a:lvl7pPr marL="3200400" marR="0" lvl="6" indent="-355600" algn="l" rtl="0">
+              <a:lnSpc>
+                <a:spcPct val="100000"/>
+              </a:lnSpc>
+              <a:spcBef>
+                <a:spcPts val="400"/>
+              </a:spcBef>
+              <a:spcAft>
+                <a:spcPts val="0"/>
+              </a:spcAft>
+              <a:buClr>
+                <a:srgbClr val="FF5050"/>
+              </a:buClr>
+              <a:buSzPts val="2000"/>
+              <a:buFont typeface="Times New Roman"/>
+              <a:buChar char="o"/>
+              <a:defRPr sz="2000" b="0" i="0" u="none" strike="noStrike" cap="none">
+                <a:solidFill>
+                  <a:schemeClr val="dk1"/>
+                </a:solidFill>
+                <a:latin typeface="Times New Roman"/>
+                <a:ea typeface="Times New Roman"/>
+                <a:cs typeface="Times New Roman"/>
+                <a:sym typeface="Times New Roman"/>
+              </a:defRPr>
+            </a:lvl7pPr>
+            <a:lvl8pPr marL="3657600" marR="0" lvl="7" indent="-355600" algn="l" rtl="0">
+              <a:lnSpc>
+                <a:spcPct val="100000"/>
+              </a:lnSpc>
+              <a:spcBef>
+                <a:spcPts val="400"/>
+              </a:spcBef>
+              <a:spcAft>
+                <a:spcPts val="0"/>
+              </a:spcAft>
+              <a:buClr>
+                <a:srgbClr val="FF5050"/>
+              </a:buClr>
+              <a:buSzPts val="2000"/>
+              <a:buFont typeface="Times New Roman"/>
+              <a:buChar char="o"/>
+              <a:defRPr sz="2000" b="0" i="0" u="none" strike="noStrike" cap="none">
+                <a:solidFill>
+                  <a:schemeClr val="dk1"/>
+                </a:solidFill>
+                <a:latin typeface="Times New Roman"/>
+                <a:ea typeface="Times New Roman"/>
+                <a:cs typeface="Times New Roman"/>
+                <a:sym typeface="Times New Roman"/>
+              </a:defRPr>
+            </a:lvl8pPr>
+            <a:lvl9pPr marL="4114800" marR="0" lvl="8" indent="-355600" algn="l" rtl="0">
+              <a:lnSpc>
+                <a:spcPct val="100000"/>
+              </a:lnSpc>
+              <a:spcBef>
+                <a:spcPts val="400"/>
+              </a:spcBef>
+              <a:spcAft>
+                <a:spcPts val="0"/>
+              </a:spcAft>
+              <a:buClr>
+                <a:srgbClr val="FF5050"/>
+              </a:buClr>
+              <a:buSzPts val="2000"/>
+              <a:buFont typeface="Times New Roman"/>
+              <a:buChar char="o"/>
+              <a:defRPr sz="2000" b="0" i="0" u="none" strike="noStrike" cap="none">
+                <a:solidFill>
+                  <a:schemeClr val="dk1"/>
+                </a:solidFill>
+                <a:latin typeface="Times New Roman"/>
+                <a:ea typeface="Times New Roman"/>
+                <a:cs typeface="Times New Roman"/>
+                <a:sym typeface="Times New Roman"/>
+              </a:defRPr>
+            </a:lvl9pPr>
+          </a:lstStyle>
+          <a:p>
+            <a:pPr marL="457200" lvl="1" indent="-406400" algn="just">
+              <a:lnSpc>
+                <a:spcPct val="150000"/>
+              </a:lnSpc>
+              <a:spcBef>
+                <a:spcPts val="560"/>
+              </a:spcBef>
+              <a:buClr>
+                <a:schemeClr val="accent2"/>
+              </a:buClr>
+              <a:buSzPts val="2800"/>
+              <a:buFont typeface="Noto Sans Symbols"/>
+              <a:buChar char="❖"/>
+            </a:pPr>
+            <a:r>
+              <a:rPr lang="en-US" altLang="zh-TW" sz="2000" dirty="0">
+                <a:solidFill>
+                  <a:schemeClr val="tx1"/>
+                </a:solidFill>
+                <a:latin typeface="Times New Roman" panose="02020603050405020304" pitchFamily="18" charset="0"/>
+                <a:ea typeface="標楷體" panose="03000509000000000000" pitchFamily="65" charset="-120"/>
+                <a:cs typeface="Times New Roman" panose="02020603050405020304" pitchFamily="18" charset="0"/>
+              </a:rPr>
+              <a:t>TRC(Tone Response Curve)</a:t>
+            </a:r>
+            <a:endParaRPr lang="en-US" altLang="zh-TW" dirty="0">
+              <a:solidFill>
+                <a:schemeClr val="tx1"/>
+              </a:solidFill>
+              <a:latin typeface="Times New Roman" panose="02020603050405020304" pitchFamily="18" charset="0"/>
+              <a:ea typeface="標楷體" panose="03000509000000000000" pitchFamily="65" charset="-120"/>
+              <a:cs typeface="Times New Roman" panose="02020603050405020304" pitchFamily="18" charset="0"/>
+            </a:endParaRPr>
+          </a:p>
+          <a:p>
+            <a:pPr lvl="1" algn="just">
+              <a:lnSpc>
+                <a:spcPct val="150000"/>
+              </a:lnSpc>
+            </a:pPr>
+            <a:r>
+              <a:rPr lang="zh-TW" altLang="zh-TW" sz="1600" dirty="0">
+                <a:solidFill>
+                  <a:schemeClr val="tx1"/>
+                </a:solidFill>
+                <a:latin typeface="Times New Roman" panose="02020603050405020304" pitchFamily="18" charset="0"/>
+                <a:ea typeface="標楷體" panose="03000509000000000000" pitchFamily="65" charset="-120"/>
+                <a:cs typeface="Times New Roman" panose="02020603050405020304" pitchFamily="18" charset="0"/>
+              </a:rPr>
+              <a:t>把顯示器實際使用的非線性 RGB code value，轉換成與 PCS</a:t>
+            </a:r>
+            <a:r>
+              <a:rPr lang="zh-TW" altLang="en-US" sz="1600" dirty="0">
+                <a:solidFill>
+                  <a:schemeClr val="tx1"/>
+                </a:solidFill>
+                <a:latin typeface="Times New Roman" panose="02020603050405020304" pitchFamily="18" charset="0"/>
+                <a:ea typeface="標楷體" panose="03000509000000000000" pitchFamily="65" charset="-120"/>
+                <a:cs typeface="Times New Roman" panose="02020603050405020304" pitchFamily="18" charset="0"/>
+              </a:rPr>
+              <a:t> </a:t>
+            </a:r>
+            <a:r>
+              <a:rPr lang="zh-TW" altLang="zh-TW" sz="1600" dirty="0">
+                <a:solidFill>
+                  <a:schemeClr val="tx1"/>
+                </a:solidFill>
+                <a:latin typeface="Times New Roman" panose="02020603050405020304" pitchFamily="18" charset="0"/>
+                <a:ea typeface="標楷體" panose="03000509000000000000" pitchFamily="65" charset="-120"/>
+                <a:cs typeface="Times New Roman" panose="02020603050405020304" pitchFamily="18" charset="0"/>
+              </a:rPr>
+              <a:t>XYZ 的 Y（luminance）關係相符的 linear RGB 表示。</a:t>
+            </a:r>
+            <a:endParaRPr lang="en-US" altLang="zh-TW" sz="1600" dirty="0">
+              <a:solidFill>
+                <a:schemeClr val="tx1"/>
+              </a:solidFill>
+              <a:latin typeface="Times New Roman" panose="02020603050405020304" pitchFamily="18" charset="0"/>
+              <a:ea typeface="標楷體" panose="03000509000000000000" pitchFamily="65" charset="-120"/>
+              <a:cs typeface="Times New Roman" panose="02020603050405020304" pitchFamily="18" charset="0"/>
+            </a:endParaRPr>
+          </a:p>
+          <a:p>
+            <a:pPr lvl="1" algn="just"/>
+            <a:r>
+              <a:rPr lang="zh-TW" altLang="en-US" sz="1600" dirty="0">
+                <a:solidFill>
+                  <a:schemeClr val="tx1"/>
+                </a:solidFill>
+                <a:latin typeface="Times New Roman" panose="02020603050405020304" pitchFamily="18" charset="0"/>
+                <a:ea typeface="標楷體" panose="03000509000000000000" pitchFamily="65" charset="-120"/>
+                <a:cs typeface="Times New Roman" panose="02020603050405020304" pitchFamily="18" charset="0"/>
+              </a:rPr>
+              <a:t>例如：</a:t>
+            </a:r>
+            <a:endParaRPr lang="en-US" altLang="zh-TW" sz="2000" dirty="0">
+              <a:solidFill>
+                <a:schemeClr val="tx1"/>
+              </a:solidFill>
+              <a:latin typeface="Times New Roman" panose="02020603050405020304" pitchFamily="18" charset="0"/>
+              <a:ea typeface="標楷體" panose="03000509000000000000" pitchFamily="65" charset="-120"/>
+              <a:cs typeface="Times New Roman" panose="02020603050405020304" pitchFamily="18" charset="0"/>
+            </a:endParaRPr>
+          </a:p>
+          <a:p>
+            <a:pPr marL="533400" lvl="1" indent="0">
+              <a:lnSpc>
+                <a:spcPct val="150000"/>
+              </a:lnSpc>
+              <a:buNone/>
+            </a:pPr>
+            <a:endParaRPr lang="zh-TW" altLang="en-US" sz="1800" dirty="0">
+              <a:solidFill>
+                <a:schemeClr val="tx1"/>
+              </a:solidFill>
+              <a:latin typeface="Times New Roman" panose="02020603050405020304" pitchFamily="18" charset="0"/>
+              <a:ea typeface="標楷體" panose="03000509000000000000" pitchFamily="65" charset="-120"/>
+              <a:cs typeface="Times New Roman" panose="02020603050405020304" pitchFamily="18" charset="0"/>
+            </a:endParaRPr>
+          </a:p>
+        </p:txBody>
+      </p:sp>
+      <p:grpSp>
+        <p:nvGrpSpPr>
+          <p:cNvPr id="34" name="群組 33">
+            <a:extLst>
+              <a:ext uri="{FF2B5EF4-FFF2-40B4-BE49-F238E27FC236}">
+                <a16:creationId xmlns:a16="http://schemas.microsoft.com/office/drawing/2014/main" id="{C0E10B67-4895-DEEA-0A4E-8D187E08F60B}"/>
+              </a:ext>
+            </a:extLst>
+          </p:cNvPr>
+          <p:cNvGrpSpPr/>
+          <p:nvPr/>
+        </p:nvGrpSpPr>
+        <p:grpSpPr>
+          <a:xfrm>
+            <a:off x="1208421" y="3799390"/>
+            <a:ext cx="7344475" cy="868102"/>
+            <a:chOff x="1208421" y="3799390"/>
+            <a:chExt cx="7344475" cy="868102"/>
+          </a:xfrm>
+        </p:grpSpPr>
+        <p:sp>
+          <p:nvSpPr>
+            <p:cNvPr id="4" name="矩形 3">
+              <a:extLst>
+                <a:ext uri="{FF2B5EF4-FFF2-40B4-BE49-F238E27FC236}">
+                  <a16:creationId xmlns:a16="http://schemas.microsoft.com/office/drawing/2014/main" id="{3EAD8FDE-BAC0-876F-4587-8CBAB5D895F9}"/>
+                </a:ext>
+              </a:extLst>
+            </p:cNvPr>
+            <p:cNvSpPr/>
+            <p:nvPr/>
+          </p:nvSpPr>
+          <p:spPr>
+            <a:xfrm>
+              <a:off x="1208421" y="3799390"/>
+              <a:ext cx="1562582" cy="868102"/>
+            </a:xfrm>
+            <a:prstGeom prst="rect">
+              <a:avLst/>
+            </a:prstGeom>
+            <a:solidFill>
+              <a:schemeClr val="bg1"/>
+            </a:solidFill>
+            <a:ln>
+              <a:solidFill>
+                <a:schemeClr val="tx1"/>
+              </a:solidFill>
+            </a:ln>
+          </p:spPr>
+          <p:style>
+            <a:lnRef idx="2">
+              <a:schemeClr val="accent1">
+                <a:shade val="15000"/>
+              </a:schemeClr>
+            </a:lnRef>
+            <a:fillRef idx="1">
+              <a:schemeClr val="accent1"/>
+            </a:fillRef>
+            <a:effectRef idx="0">
+              <a:schemeClr val="accent1"/>
+            </a:effectRef>
+            <a:fontRef idx="minor">
+              <a:schemeClr val="lt1"/>
+            </a:fontRef>
+          </p:style>
+          <p:txBody>
+            <a:bodyPr rtlCol="0" anchor="ctr"/>
+            <a:lstStyle/>
+            <a:p>
+              <a:pPr algn="ctr"/>
+              <a:r>
+                <a:rPr lang="zh-TW" altLang="zh-TW" dirty="0">
+                  <a:solidFill>
+                    <a:schemeClr val="tx1"/>
+                  </a:solidFill>
+                  <a:latin typeface="Times New Roman" panose="02020603050405020304" pitchFamily="18" charset="0"/>
+                  <a:ea typeface="標楷體" panose="03000509000000000000" pitchFamily="65" charset="-120"/>
+                  <a:cs typeface="Times New Roman" panose="02020603050405020304" pitchFamily="18" charset="0"/>
+                </a:rPr>
+                <a:t>R′=0.5</a:t>
+              </a:r>
+              <a:r>
+                <a:rPr lang="zh-TW" altLang="en-US" dirty="0">
+                  <a:solidFill>
+                    <a:schemeClr val="tx1"/>
+                  </a:solidFill>
+                  <a:latin typeface="Times New Roman" panose="02020603050405020304" pitchFamily="18" charset="0"/>
+                  <a:ea typeface="標楷體" panose="03000509000000000000" pitchFamily="65" charset="-120"/>
+                  <a:cs typeface="Times New Roman" panose="02020603050405020304" pitchFamily="18" charset="0"/>
+                </a:rPr>
+                <a:t> </a:t>
+              </a:r>
+              <a:r>
+                <a:rPr lang="en-US" altLang="zh-TW" dirty="0">
+                  <a:solidFill>
+                    <a:schemeClr val="tx1"/>
+                  </a:solidFill>
+                  <a:latin typeface="Times New Roman" panose="02020603050405020304" pitchFamily="18" charset="0"/>
+                  <a:ea typeface="標楷體" panose="03000509000000000000" pitchFamily="65" charset="-120"/>
+                  <a:cs typeface="Times New Roman" panose="02020603050405020304" pitchFamily="18" charset="0"/>
+                </a:rPr>
+                <a:t>(127/255)</a:t>
+              </a:r>
+              <a:endParaRPr lang="zh-TW" altLang="en-US" dirty="0">
+                <a:solidFill>
+                  <a:schemeClr val="tx1"/>
+                </a:solidFill>
+                <a:latin typeface="Times New Roman" panose="02020603050405020304" pitchFamily="18" charset="0"/>
+                <a:ea typeface="標楷體" panose="03000509000000000000" pitchFamily="65" charset="-120"/>
+                <a:cs typeface="Times New Roman" panose="02020603050405020304" pitchFamily="18" charset="0"/>
+              </a:endParaRPr>
+            </a:p>
+          </p:txBody>
+        </p:sp>
+        <p:sp>
+          <p:nvSpPr>
+            <p:cNvPr id="6" name="矩形 5">
+              <a:extLst>
+                <a:ext uri="{FF2B5EF4-FFF2-40B4-BE49-F238E27FC236}">
+                  <a16:creationId xmlns:a16="http://schemas.microsoft.com/office/drawing/2014/main" id="{F211FECE-805D-4DE7-5329-317233CD1CB4}"/>
+                </a:ext>
+              </a:extLst>
+            </p:cNvPr>
+            <p:cNvSpPr/>
+            <p:nvPr/>
+          </p:nvSpPr>
+          <p:spPr>
+            <a:xfrm>
+              <a:off x="4302917" y="3799390"/>
+              <a:ext cx="1562582" cy="868102"/>
+            </a:xfrm>
+            <a:prstGeom prst="rect">
+              <a:avLst/>
+            </a:prstGeom>
+            <a:solidFill>
+              <a:schemeClr val="bg1"/>
+            </a:solidFill>
+            <a:ln>
+              <a:solidFill>
+                <a:schemeClr val="tx1"/>
+              </a:solidFill>
+            </a:ln>
+          </p:spPr>
+          <p:style>
+            <a:lnRef idx="2">
+              <a:schemeClr val="accent1">
+                <a:shade val="15000"/>
+              </a:schemeClr>
+            </a:lnRef>
+            <a:fillRef idx="1">
+              <a:schemeClr val="accent1"/>
+            </a:fillRef>
+            <a:effectRef idx="0">
+              <a:schemeClr val="accent1"/>
+            </a:effectRef>
+            <a:fontRef idx="minor">
+              <a:schemeClr val="lt1"/>
+            </a:fontRef>
+          </p:style>
+          <p:txBody>
+            <a:bodyPr rtlCol="0" anchor="ctr"/>
+            <a:lstStyle/>
+            <a:p>
+              <a:pPr algn="ctr"/>
+              <a:r>
+                <a:rPr lang="zh-TW" altLang="zh-TW" dirty="0">
+                  <a:solidFill>
+                    <a:schemeClr val="tx1"/>
+                  </a:solidFill>
+                  <a:latin typeface="Times New Roman" panose="02020603050405020304" pitchFamily="18" charset="0"/>
+                  <a:ea typeface="標楷體" panose="03000509000000000000" pitchFamily="65" charset="-120"/>
+                  <a:cs typeface="Times New Roman" panose="02020603050405020304" pitchFamily="18" charset="0"/>
+                </a:rPr>
+                <a:t>R=(R′)</a:t>
+              </a:r>
+              <a:r>
+                <a:rPr lang="en-US" altLang="zh-TW" baseline="30000" dirty="0">
+                  <a:solidFill>
+                    <a:schemeClr val="tx1"/>
+                  </a:solidFill>
+                  <a:latin typeface="Times New Roman" panose="02020603050405020304" pitchFamily="18" charset="0"/>
+                  <a:ea typeface="標楷體" panose="03000509000000000000" pitchFamily="65" charset="-120"/>
+                  <a:cs typeface="Times New Roman" panose="02020603050405020304" pitchFamily="18" charset="0"/>
+                </a:rPr>
+                <a:t>2.2</a:t>
+              </a:r>
+            </a:p>
+            <a:p>
+              <a:pPr algn="ctr"/>
+              <a:r>
+                <a:rPr lang="zh-TW" altLang="zh-TW" dirty="0">
+                  <a:solidFill>
+                    <a:schemeClr val="tx1"/>
+                  </a:solidFill>
+                  <a:latin typeface="Times New Roman" panose="02020603050405020304" pitchFamily="18" charset="0"/>
+                  <a:ea typeface="標楷體" panose="03000509000000000000" pitchFamily="65" charset="-120"/>
+                  <a:cs typeface="Times New Roman" panose="02020603050405020304" pitchFamily="18" charset="0"/>
+                </a:rPr>
+                <a:t>0.218 ≈ 0.5</a:t>
+              </a:r>
+              <a:r>
+                <a:rPr lang="zh-TW" altLang="zh-TW" baseline="30000" dirty="0">
+                  <a:solidFill>
+                    <a:schemeClr val="tx1"/>
+                  </a:solidFill>
+                  <a:latin typeface="Times New Roman" panose="02020603050405020304" pitchFamily="18" charset="0"/>
+                  <a:ea typeface="標楷體" panose="03000509000000000000" pitchFamily="65" charset="-120"/>
+                  <a:cs typeface="Times New Roman" panose="02020603050405020304" pitchFamily="18" charset="0"/>
+                </a:rPr>
+                <a:t>2.2</a:t>
+              </a:r>
+              <a:endParaRPr lang="zh-TW" altLang="en-US" baseline="30000" dirty="0">
+                <a:solidFill>
+                  <a:schemeClr val="tx1"/>
+                </a:solidFill>
+                <a:latin typeface="Times New Roman" panose="02020603050405020304" pitchFamily="18" charset="0"/>
+                <a:ea typeface="標楷體" panose="03000509000000000000" pitchFamily="65" charset="-120"/>
+                <a:cs typeface="Times New Roman" panose="02020603050405020304" pitchFamily="18" charset="0"/>
+              </a:endParaRPr>
+            </a:p>
+          </p:txBody>
+        </p:sp>
+        <p:sp>
+          <p:nvSpPr>
+            <p:cNvPr id="7" name="矩形 6">
+              <a:extLst>
+                <a:ext uri="{FF2B5EF4-FFF2-40B4-BE49-F238E27FC236}">
+                  <a16:creationId xmlns:a16="http://schemas.microsoft.com/office/drawing/2014/main" id="{0DFB61CE-E671-9B90-DDBA-64DE2605725B}"/>
+                </a:ext>
+              </a:extLst>
+            </p:cNvPr>
+            <p:cNvSpPr/>
+            <p:nvPr/>
+          </p:nvSpPr>
+          <p:spPr>
+            <a:xfrm>
+              <a:off x="6990314" y="3799390"/>
+              <a:ext cx="1562582" cy="868102"/>
+            </a:xfrm>
+            <a:prstGeom prst="rect">
+              <a:avLst/>
+            </a:prstGeom>
+            <a:solidFill>
+              <a:schemeClr val="bg1"/>
+            </a:solidFill>
+            <a:ln>
+              <a:solidFill>
+                <a:schemeClr val="tx1"/>
+              </a:solidFill>
+            </a:ln>
+          </p:spPr>
+          <p:style>
+            <a:lnRef idx="2">
+              <a:schemeClr val="accent1">
+                <a:shade val="15000"/>
+              </a:schemeClr>
+            </a:lnRef>
+            <a:fillRef idx="1">
+              <a:schemeClr val="accent1"/>
+            </a:fillRef>
+            <a:effectRef idx="0">
+              <a:schemeClr val="accent1"/>
+            </a:effectRef>
+            <a:fontRef idx="minor">
+              <a:schemeClr val="lt1"/>
+            </a:fontRef>
+          </p:style>
+          <p:txBody>
+            <a:bodyPr rtlCol="0" anchor="ctr"/>
+            <a:lstStyle/>
+            <a:p>
+              <a:pPr algn="ctr"/>
+              <a:r>
+                <a:rPr lang="zh-TW" altLang="zh-TW" dirty="0">
+                  <a:solidFill>
+                    <a:schemeClr val="tx1"/>
+                  </a:solidFill>
+                  <a:latin typeface="Times New Roman" panose="02020603050405020304" pitchFamily="18" charset="0"/>
+                  <a:ea typeface="標楷體" panose="03000509000000000000" pitchFamily="65" charset="-120"/>
+                  <a:cs typeface="Times New Roman" panose="02020603050405020304" pitchFamily="18" charset="0"/>
+                </a:rPr>
+                <a:t>R=0</a:t>
+              </a:r>
+              <a:r>
+                <a:rPr lang="en-US" altLang="zh-TW" dirty="0">
+                  <a:solidFill>
+                    <a:schemeClr val="tx1"/>
+                  </a:solidFill>
+                  <a:latin typeface="Times New Roman" panose="02020603050405020304" pitchFamily="18" charset="0"/>
+                  <a:ea typeface="標楷體" panose="03000509000000000000" pitchFamily="65" charset="-120"/>
+                  <a:cs typeface="Times New Roman" panose="02020603050405020304" pitchFamily="18" charset="0"/>
+                </a:rPr>
+                <a:t>.218</a:t>
+              </a:r>
+              <a:endParaRPr lang="zh-TW" altLang="en-US" dirty="0">
+                <a:solidFill>
+                  <a:schemeClr val="tx1"/>
+                </a:solidFill>
+                <a:latin typeface="Times New Roman" panose="02020603050405020304" pitchFamily="18" charset="0"/>
+                <a:ea typeface="標楷體" panose="03000509000000000000" pitchFamily="65" charset="-120"/>
+                <a:cs typeface="Times New Roman" panose="02020603050405020304" pitchFamily="18" charset="0"/>
+              </a:endParaRPr>
+            </a:p>
+          </p:txBody>
+        </p:sp>
+        <p:cxnSp>
+          <p:nvCxnSpPr>
+            <p:cNvPr id="13" name="直線單箭頭接點 12">
+              <a:extLst>
+                <a:ext uri="{FF2B5EF4-FFF2-40B4-BE49-F238E27FC236}">
+                  <a16:creationId xmlns:a16="http://schemas.microsoft.com/office/drawing/2014/main" id="{8755CBCD-89A6-A4CF-B535-C3D84BCDE39D}"/>
+                </a:ext>
+              </a:extLst>
+            </p:cNvPr>
+            <p:cNvCxnSpPr>
+              <a:stCxn id="4" idx="3"/>
+              <a:endCxn id="6" idx="1"/>
+            </p:cNvCxnSpPr>
+            <p:nvPr/>
+          </p:nvCxnSpPr>
+          <p:spPr>
+            <a:xfrm>
+              <a:off x="2771003" y="4233441"/>
+              <a:ext cx="1531914" cy="0"/>
+            </a:xfrm>
+            <a:prstGeom prst="straightConnector1">
+              <a:avLst/>
+            </a:prstGeom>
+            <a:ln w="19050" cap="flat" cmpd="sng" algn="ctr">
+              <a:solidFill>
+                <a:schemeClr val="dk1"/>
+              </a:solidFill>
+              <a:prstDash val="solid"/>
+              <a:round/>
+              <a:headEnd type="none" w="med" len="med"/>
+              <a:tailEnd type="arrow" w="med" len="med"/>
+            </a:ln>
+          </p:spPr>
+          <p:style>
+            <a:lnRef idx="0">
+              <a:scrgbClr r="0" g="0" b="0"/>
+            </a:lnRef>
+            <a:fillRef idx="0">
+              <a:scrgbClr r="0" g="0" b="0"/>
+            </a:fillRef>
+            <a:effectRef idx="0">
+              <a:scrgbClr r="0" g="0" b="0"/>
+            </a:effectRef>
+            <a:fontRef idx="minor">
+              <a:schemeClr val="tx1"/>
+            </a:fontRef>
+          </p:style>
+        </p:cxnSp>
+        <p:cxnSp>
+          <p:nvCxnSpPr>
+            <p:cNvPr id="14" name="直線單箭頭接點 13">
+              <a:extLst>
+                <a:ext uri="{FF2B5EF4-FFF2-40B4-BE49-F238E27FC236}">
+                  <a16:creationId xmlns:a16="http://schemas.microsoft.com/office/drawing/2014/main" id="{43C321DC-EFCF-71ED-6AA0-C27F2B92914D}"/>
+                </a:ext>
+              </a:extLst>
+            </p:cNvPr>
+            <p:cNvCxnSpPr>
+              <a:cxnSpLocks/>
+              <a:stCxn id="6" idx="3"/>
+              <a:endCxn id="7" idx="1"/>
+            </p:cNvCxnSpPr>
+            <p:nvPr/>
+          </p:nvCxnSpPr>
+          <p:spPr>
+            <a:xfrm>
+              <a:off x="5865499" y="4233441"/>
+              <a:ext cx="1124815" cy="0"/>
+            </a:xfrm>
+            <a:prstGeom prst="straightConnector1">
+              <a:avLst/>
+            </a:prstGeom>
+            <a:ln w="19050" cap="flat" cmpd="sng" algn="ctr">
+              <a:solidFill>
+                <a:schemeClr val="dk1"/>
+              </a:solidFill>
+              <a:prstDash val="solid"/>
+              <a:round/>
+              <a:headEnd type="none" w="med" len="med"/>
+              <a:tailEnd type="arrow" w="med" len="med"/>
+            </a:ln>
+          </p:spPr>
+          <p:style>
+            <a:lnRef idx="0">
+              <a:scrgbClr r="0" g="0" b="0"/>
+            </a:lnRef>
+            <a:fillRef idx="0">
+              <a:scrgbClr r="0" g="0" b="0"/>
+            </a:fillRef>
+            <a:effectRef idx="0">
+              <a:scrgbClr r="0" g="0" b="0"/>
+            </a:effectRef>
+            <a:fontRef idx="minor">
+              <a:schemeClr val="tx1"/>
+            </a:fontRef>
+          </p:style>
+        </p:cxnSp>
+        <p:sp>
+          <p:nvSpPr>
+            <p:cNvPr id="22" name="矩形 21">
+              <a:extLst>
+                <a:ext uri="{FF2B5EF4-FFF2-40B4-BE49-F238E27FC236}">
+                  <a16:creationId xmlns:a16="http://schemas.microsoft.com/office/drawing/2014/main" id="{9A9DF41D-9E06-E236-CA43-60889F6EE310}"/>
+                </a:ext>
+              </a:extLst>
+            </p:cNvPr>
+            <p:cNvSpPr/>
+            <p:nvPr/>
+          </p:nvSpPr>
+          <p:spPr>
+            <a:xfrm>
+              <a:off x="2880370" y="3847139"/>
+              <a:ext cx="1313180" cy="338554"/>
+            </a:xfrm>
+            <a:prstGeom prst="rect">
+              <a:avLst/>
+            </a:prstGeom>
+            <a:noFill/>
+          </p:spPr>
+          <p:txBody>
+            <a:bodyPr wrap="none" lIns="91440" tIns="45720" rIns="91440" bIns="45720">
+              <a:spAutoFit/>
+            </a:bodyPr>
+            <a:lstStyle/>
+            <a:p>
+              <a:pPr algn="ctr"/>
+              <a:r>
+                <a:rPr lang="zh-TW" altLang="zh-TW" sz="1600" dirty="0">
+                  <a:latin typeface="Times New Roman" panose="02020603050405020304" pitchFamily="18" charset="0"/>
+                  <a:ea typeface="標楷體" panose="03000509000000000000" pitchFamily="65" charset="-120"/>
+                  <a:cs typeface="Times New Roman" panose="02020603050405020304" pitchFamily="18" charset="0"/>
+                </a:rPr>
+                <a:t>Gamma = 2.2</a:t>
+              </a:r>
+              <a:endParaRPr lang="zh-TW" altLang="en-US" sz="1600" b="0" cap="none" spc="0" dirty="0">
+                <a:ln w="0"/>
+                <a:solidFill>
+                  <a:schemeClr val="tx1"/>
+                </a:solidFill>
+                <a:effectLst>
+                  <a:outerShdw blurRad="38100" dist="19050" dir="2700000" algn="tl" rotWithShape="0">
+                    <a:schemeClr val="dk1">
+                      <a:alpha val="40000"/>
+                    </a:schemeClr>
+                  </a:outerShdw>
+                </a:effectLst>
+                <a:latin typeface="Times New Roman" panose="02020603050405020304" pitchFamily="18" charset="0"/>
+                <a:ea typeface="標楷體" panose="03000509000000000000" pitchFamily="65" charset="-120"/>
+                <a:cs typeface="Times New Roman" panose="02020603050405020304" pitchFamily="18" charset="0"/>
+              </a:endParaRPr>
+            </a:p>
+          </p:txBody>
+        </p:sp>
+      </p:grpSp>
+      <p:sp>
+        <p:nvSpPr>
+          <p:cNvPr id="33" name="標題 1">
+            <a:extLst>
+              <a:ext uri="{FF2B5EF4-FFF2-40B4-BE49-F238E27FC236}">
+                <a16:creationId xmlns:a16="http://schemas.microsoft.com/office/drawing/2014/main" id="{FE6A0969-18CA-A43C-E3E0-A72CA997A88D}"/>
+              </a:ext>
+            </a:extLst>
+          </p:cNvPr>
+          <p:cNvSpPr>
+            <a:spLocks noGrp="1"/>
+          </p:cNvSpPr>
+          <p:nvPr>
+            <p:ph type="title"/>
+          </p:nvPr>
+        </p:nvSpPr>
+        <p:spPr>
+          <a:xfrm>
+            <a:off x="609602" y="609600"/>
+            <a:ext cx="8077200" cy="533400"/>
+          </a:xfrm>
+        </p:spPr>
+        <p:txBody>
+          <a:bodyPr/>
+          <a:lstStyle/>
+          <a:p>
+            <a:r>
+              <a:rPr lang="zh-TW" altLang="en-US" dirty="0">
+                <a:latin typeface="Times New Roman" panose="02020603050405020304" pitchFamily="18" charset="0"/>
+                <a:ea typeface="標楷體" panose="03000509000000000000" pitchFamily="65" charset="-120"/>
+                <a:cs typeface="Times New Roman" panose="02020603050405020304" pitchFamily="18" charset="0"/>
+              </a:rPr>
+              <a:t>本次進度</a:t>
+            </a:r>
+            <a:r>
+              <a:rPr lang="en-US" altLang="zh-TW" dirty="0">
+                <a:latin typeface="Times New Roman" panose="02020603050405020304" pitchFamily="18" charset="0"/>
+                <a:ea typeface="標楷體" panose="03000509000000000000" pitchFamily="65" charset="-120"/>
+                <a:cs typeface="Times New Roman" panose="02020603050405020304" pitchFamily="18" charset="0"/>
+              </a:rPr>
+              <a:t>:</a:t>
+            </a:r>
+            <a:r>
+              <a:rPr lang="zh-TW" altLang="zh-TW" dirty="0"/>
+              <a:t>Matrix-based Display Profile</a:t>
+            </a:r>
+            <a:endParaRPr lang="zh-TW" altLang="en-US" dirty="0">
+              <a:latin typeface="Times New Roman" panose="02020603050405020304" pitchFamily="18" charset="0"/>
+              <a:ea typeface="標楷體" panose="03000509000000000000" pitchFamily="65" charset="-120"/>
+              <a:cs typeface="Times New Roman" panose="02020603050405020304" pitchFamily="18" charset="0"/>
+            </a:endParaRPr>
+          </a:p>
+        </p:txBody>
+      </p:sp>
     </p:spTree>
+    <p:extLst>
+      <p:ext uri="{BB962C8B-B14F-4D97-AF65-F5344CB8AC3E}">
+        <p14:creationId xmlns:p14="http://schemas.microsoft.com/office/powerpoint/2010/main" val="164110141"/>
+      </p:ext>
+    </p:extLst>
+  </p:cSld>
+  <p:clrMapOvr>
+    <a:masterClrMapping/>
+  </p:clrMapOvr>
+</p:sld>
+</file>
+
+<file path=ppt/slides/slide9.xml><?xml version="1.0" encoding="utf-8"?>
+<p:sld xmlns:a="http://schemas.openxmlformats.org/drawingml/2006/main" xmlns:r="http://schemas.openxmlformats.org/officeDocument/2006/relationships" xmlns:p="http://schemas.openxmlformats.org/presentationml/2006/main">
+  <p:cSld>
+    <p:spTree>
+      <p:nvGrpSpPr>
+        <p:cNvPr id="1" name="">
+          <a:extLst>
+            <a:ext uri="{FF2B5EF4-FFF2-40B4-BE49-F238E27FC236}">
+              <a16:creationId xmlns:a16="http://schemas.microsoft.com/office/drawing/2014/main" id="{D91FE357-957A-3182-12E7-90F219E152EF}"/>
+            </a:ext>
+          </a:extLst>
+        </p:cNvPr>
+        <p:cNvGrpSpPr/>
+        <p:nvPr/>
+      </p:nvGrpSpPr>
+      <p:grpSpPr>
+        <a:xfrm>
+          <a:off x="0" y="0"/>
+          <a:ext cx="0" cy="0"/>
+          <a:chOff x="0" y="0"/>
+          <a:chExt cx="0" cy="0"/>
+        </a:xfrm>
+      </p:grpSpPr>
+      <p:sp>
+        <p:nvSpPr>
+          <p:cNvPr id="5" name="標題 1">
+            <a:extLst>
+              <a:ext uri="{FF2B5EF4-FFF2-40B4-BE49-F238E27FC236}">
+                <a16:creationId xmlns:a16="http://schemas.microsoft.com/office/drawing/2014/main" id="{61298DEC-0097-A431-0637-9C6765567C9F}"/>
+              </a:ext>
+            </a:extLst>
+          </p:cNvPr>
+          <p:cNvSpPr>
+            <a:spLocks noGrp="1"/>
+          </p:cNvSpPr>
+          <p:nvPr>
+            <p:ph type="title"/>
+          </p:nvPr>
+        </p:nvSpPr>
+        <p:spPr>
+          <a:xfrm>
+            <a:off x="609602" y="609600"/>
+            <a:ext cx="8077200" cy="533400"/>
+          </a:xfrm>
+        </p:spPr>
+        <p:txBody>
+          <a:bodyPr/>
+          <a:lstStyle/>
+          <a:p>
+            <a:r>
+              <a:rPr lang="zh-TW" altLang="en-US" dirty="0">
+                <a:latin typeface="Times New Roman" panose="02020603050405020304" pitchFamily="18" charset="0"/>
+                <a:ea typeface="標楷體" panose="03000509000000000000" pitchFamily="65" charset="-120"/>
+                <a:cs typeface="Times New Roman" panose="02020603050405020304" pitchFamily="18" charset="0"/>
+              </a:rPr>
+              <a:t>本次進度</a:t>
+            </a:r>
+            <a:r>
+              <a:rPr lang="en-US" altLang="zh-TW" dirty="0">
+                <a:latin typeface="Times New Roman" panose="02020603050405020304" pitchFamily="18" charset="0"/>
+                <a:ea typeface="標楷體" panose="03000509000000000000" pitchFamily="65" charset="-120"/>
+                <a:cs typeface="Times New Roman" panose="02020603050405020304" pitchFamily="18" charset="0"/>
+              </a:rPr>
+              <a:t>:</a:t>
+            </a:r>
+            <a:r>
+              <a:rPr lang="zh-TW" altLang="zh-TW" dirty="0"/>
+              <a:t>Matrix-based Display Profile</a:t>
+            </a:r>
+            <a:endParaRPr lang="zh-TW" altLang="en-US" dirty="0">
+              <a:latin typeface="Times New Roman" panose="02020603050405020304" pitchFamily="18" charset="0"/>
+              <a:ea typeface="標楷體" panose="03000509000000000000" pitchFamily="65" charset="-120"/>
+              <a:cs typeface="Times New Roman" panose="02020603050405020304" pitchFamily="18" charset="0"/>
+            </a:endParaRPr>
+          </a:p>
+        </p:txBody>
+      </p:sp>
+      <p:sp>
+        <p:nvSpPr>
+          <p:cNvPr id="10" name="文字版面配置區 6">
+            <a:extLst>
+              <a:ext uri="{FF2B5EF4-FFF2-40B4-BE49-F238E27FC236}">
+                <a16:creationId xmlns:a16="http://schemas.microsoft.com/office/drawing/2014/main" id="{EFA1BA7D-6739-0930-E66B-C7B72485673A}"/>
+              </a:ext>
+            </a:extLst>
+          </p:cNvPr>
+          <p:cNvSpPr txBox="1"/>
+          <p:nvPr/>
+        </p:nvSpPr>
+        <p:spPr>
+          <a:xfrm>
+            <a:off x="497549" y="1284684"/>
+            <a:ext cx="8686796" cy="4700685"/>
+          </a:xfrm>
+          <a:prstGeom prst="rect">
+            <a:avLst/>
+          </a:prstGeom>
+          <a:noFill/>
+          <a:ln>
+            <a:noFill/>
+          </a:ln>
+        </p:spPr>
+        <p:txBody>
+          <a:bodyPr spcFirstLastPara="1" wrap="square" lIns="91425" tIns="45700" rIns="91425" bIns="45700" anchor="t" anchorCtr="0">
+            <a:noAutofit/>
+          </a:bodyPr>
+          <a:lstStyle>
+            <a:defPPr marR="0" lvl="0" algn="l" rtl="0">
+              <a:lnSpc>
+                <a:spcPct val="100000"/>
+              </a:lnSpc>
+              <a:spcBef>
+                <a:spcPts val="0"/>
+              </a:spcBef>
+              <a:spcAft>
+                <a:spcPts val="0"/>
+              </a:spcAft>
+            </a:defPPr>
+            <a:lvl1pPr marL="457200" marR="0" lvl="0" indent="-406400" algn="l" rtl="0">
+              <a:lnSpc>
+                <a:spcPct val="100000"/>
+              </a:lnSpc>
+              <a:spcBef>
+                <a:spcPts val="560"/>
+              </a:spcBef>
+              <a:spcAft>
+                <a:spcPts val="0"/>
+              </a:spcAft>
+              <a:buClr>
+                <a:schemeClr val="accent2"/>
+              </a:buClr>
+              <a:buSzPts val="2800"/>
+              <a:buFont typeface="Noto Sans Symbols"/>
+              <a:buChar char="❖"/>
+              <a:defRPr sz="2800" b="0" i="0" u="none" strike="noStrike" cap="none">
+                <a:solidFill>
+                  <a:schemeClr val="dk1"/>
+                </a:solidFill>
+                <a:latin typeface="Times New Roman"/>
+                <a:ea typeface="Times New Roman"/>
+                <a:cs typeface="Times New Roman"/>
+                <a:sym typeface="Times New Roman"/>
+              </a:defRPr>
+            </a:lvl1pPr>
+            <a:lvl2pPr marL="914400" marR="0" lvl="1" indent="-381000" algn="l" rtl="0">
+              <a:lnSpc>
+                <a:spcPct val="100000"/>
+              </a:lnSpc>
+              <a:spcBef>
+                <a:spcPts val="480"/>
+              </a:spcBef>
+              <a:spcAft>
+                <a:spcPts val="0"/>
+              </a:spcAft>
+              <a:buClr>
+                <a:srgbClr val="FF5050"/>
+              </a:buClr>
+              <a:buSzPts val="2400"/>
+              <a:buFont typeface="Noto Sans Symbols"/>
+              <a:buChar char="▪"/>
+              <a:defRPr sz="2400" b="0" i="0" u="none" strike="noStrike" cap="none">
+                <a:solidFill>
+                  <a:schemeClr val="dk1"/>
+                </a:solidFill>
+                <a:latin typeface="Times New Roman"/>
+                <a:ea typeface="Times New Roman"/>
+                <a:cs typeface="Times New Roman"/>
+                <a:sym typeface="Times New Roman"/>
+              </a:defRPr>
+            </a:lvl2pPr>
+            <a:lvl3pPr marL="1371600" marR="0" lvl="2" indent="-355600" algn="l" rtl="0">
+              <a:lnSpc>
+                <a:spcPct val="100000"/>
+              </a:lnSpc>
+              <a:spcBef>
+                <a:spcPts val="400"/>
+              </a:spcBef>
+              <a:spcAft>
+                <a:spcPts val="0"/>
+              </a:spcAft>
+              <a:buClr>
+                <a:srgbClr val="6699FF"/>
+              </a:buClr>
+              <a:buSzPts val="2000"/>
+              <a:buFont typeface="Times New Roman"/>
+              <a:buChar char="•"/>
+              <a:defRPr sz="2000" b="0" i="0" u="none" strike="noStrike" cap="none">
+                <a:solidFill>
+                  <a:schemeClr val="dk1"/>
+                </a:solidFill>
+                <a:latin typeface="Times New Roman"/>
+                <a:ea typeface="Times New Roman"/>
+                <a:cs typeface="Times New Roman"/>
+                <a:sym typeface="Times New Roman"/>
+              </a:defRPr>
+            </a:lvl3pPr>
+            <a:lvl4pPr marL="1828800" marR="0" lvl="3" indent="-355600" algn="l" rtl="0">
+              <a:lnSpc>
+                <a:spcPct val="100000"/>
+              </a:lnSpc>
+              <a:spcBef>
+                <a:spcPts val="400"/>
+              </a:spcBef>
+              <a:spcAft>
+                <a:spcPts val="0"/>
+              </a:spcAft>
+              <a:buClr>
+                <a:srgbClr val="FF5050"/>
+              </a:buClr>
+              <a:buSzPts val="2000"/>
+              <a:buFont typeface="Times New Roman"/>
+              <a:buChar char="o"/>
+              <a:defRPr sz="2000" b="0" i="0" u="none" strike="noStrike" cap="none">
+                <a:solidFill>
+                  <a:schemeClr val="dk1"/>
+                </a:solidFill>
+                <a:latin typeface="Times New Roman"/>
+                <a:ea typeface="Times New Roman"/>
+                <a:cs typeface="Times New Roman"/>
+                <a:sym typeface="Times New Roman"/>
+              </a:defRPr>
+            </a:lvl4pPr>
+            <a:lvl5pPr marL="2286000" marR="0" lvl="4" indent="-355600" algn="l" rtl="0">
+              <a:lnSpc>
+                <a:spcPct val="100000"/>
+              </a:lnSpc>
+              <a:spcBef>
+                <a:spcPts val="400"/>
+              </a:spcBef>
+              <a:spcAft>
+                <a:spcPts val="0"/>
+              </a:spcAft>
+              <a:buClr>
+                <a:srgbClr val="FF5050"/>
+              </a:buClr>
+              <a:buSzPts val="2000"/>
+              <a:buFont typeface="Times New Roman"/>
+              <a:buChar char="o"/>
+              <a:defRPr sz="2000" b="0" i="0" u="none" strike="noStrike" cap="none">
+                <a:solidFill>
+                  <a:schemeClr val="dk1"/>
+                </a:solidFill>
+                <a:latin typeface="Times New Roman"/>
+                <a:ea typeface="Times New Roman"/>
+                <a:cs typeface="Times New Roman"/>
+                <a:sym typeface="Times New Roman"/>
+              </a:defRPr>
+            </a:lvl5pPr>
+            <a:lvl6pPr marL="2743200" marR="0" lvl="5" indent="-355600" algn="l" rtl="0">
+              <a:lnSpc>
+                <a:spcPct val="100000"/>
+              </a:lnSpc>
+              <a:spcBef>
+                <a:spcPts val="400"/>
+              </a:spcBef>
+              <a:spcAft>
+                <a:spcPts val="0"/>
+              </a:spcAft>
+              <a:buClr>
+                <a:srgbClr val="FF5050"/>
+              </a:buClr>
+              <a:buSzPts val="2000"/>
+              <a:buFont typeface="Times New Roman"/>
+              <a:buChar char="o"/>
+              <a:defRPr sz="2000" b="0" i="0" u="none" strike="noStrike" cap="none">
+                <a:solidFill>
+                  <a:schemeClr val="dk1"/>
+                </a:solidFill>
+                <a:latin typeface="Times New Roman"/>
+                <a:ea typeface="Times New Roman"/>
+                <a:cs typeface="Times New Roman"/>
+                <a:sym typeface="Times New Roman"/>
+              </a:defRPr>
+            </a:lvl6pPr>
+            <a:lvl7pPr marL="3200400" marR="0" lvl="6" indent="-355600" algn="l" rtl="0">
+              <a:lnSpc>
+                <a:spcPct val="100000"/>
+              </a:lnSpc>
+              <a:spcBef>
+                <a:spcPts val="400"/>
+              </a:spcBef>
+              <a:spcAft>
+                <a:spcPts val="0"/>
+              </a:spcAft>
+              <a:buClr>
+                <a:srgbClr val="FF5050"/>
+              </a:buClr>
+              <a:buSzPts val="2000"/>
+              <a:buFont typeface="Times New Roman"/>
+              <a:buChar char="o"/>
+              <a:defRPr sz="2000" b="0" i="0" u="none" strike="noStrike" cap="none">
+                <a:solidFill>
+                  <a:schemeClr val="dk1"/>
+                </a:solidFill>
+                <a:latin typeface="Times New Roman"/>
+                <a:ea typeface="Times New Roman"/>
+                <a:cs typeface="Times New Roman"/>
+                <a:sym typeface="Times New Roman"/>
+              </a:defRPr>
+            </a:lvl7pPr>
+            <a:lvl8pPr marL="3657600" marR="0" lvl="7" indent="-355600" algn="l" rtl="0">
+              <a:lnSpc>
+                <a:spcPct val="100000"/>
+              </a:lnSpc>
+              <a:spcBef>
+                <a:spcPts val="400"/>
+              </a:spcBef>
+              <a:spcAft>
+                <a:spcPts val="0"/>
+              </a:spcAft>
+              <a:buClr>
+                <a:srgbClr val="FF5050"/>
+              </a:buClr>
+              <a:buSzPts val="2000"/>
+              <a:buFont typeface="Times New Roman"/>
+              <a:buChar char="o"/>
+              <a:defRPr sz="2000" b="0" i="0" u="none" strike="noStrike" cap="none">
+                <a:solidFill>
+                  <a:schemeClr val="dk1"/>
+                </a:solidFill>
+                <a:latin typeface="Times New Roman"/>
+                <a:ea typeface="Times New Roman"/>
+                <a:cs typeface="Times New Roman"/>
+                <a:sym typeface="Times New Roman"/>
+              </a:defRPr>
+            </a:lvl8pPr>
+            <a:lvl9pPr marL="4114800" marR="0" lvl="8" indent="-355600" algn="l" rtl="0">
+              <a:lnSpc>
+                <a:spcPct val="100000"/>
+              </a:lnSpc>
+              <a:spcBef>
+                <a:spcPts val="400"/>
+              </a:spcBef>
+              <a:spcAft>
+                <a:spcPts val="0"/>
+              </a:spcAft>
+              <a:buClr>
+                <a:srgbClr val="FF5050"/>
+              </a:buClr>
+              <a:buSzPts val="2000"/>
+              <a:buFont typeface="Times New Roman"/>
+              <a:buChar char="o"/>
+              <a:defRPr sz="2000" b="0" i="0" u="none" strike="noStrike" cap="none">
+                <a:solidFill>
+                  <a:schemeClr val="dk1"/>
+                </a:solidFill>
+                <a:latin typeface="Times New Roman"/>
+                <a:ea typeface="Times New Roman"/>
+                <a:cs typeface="Times New Roman"/>
+                <a:sym typeface="Times New Roman"/>
+              </a:defRPr>
+            </a:lvl9pPr>
+          </a:lstStyle>
+          <a:p>
+            <a:pPr marL="457200" lvl="1" indent="-406400">
+              <a:spcBef>
+                <a:spcPts val="560"/>
+              </a:spcBef>
+              <a:buClr>
+                <a:schemeClr val="accent2"/>
+              </a:buClr>
+              <a:buSzPts val="2800"/>
+              <a:buFont typeface="Noto Sans Symbols"/>
+              <a:buChar char="❖"/>
+            </a:pPr>
+            <a:r>
+              <a:rPr lang="en-US" altLang="zh-TW" dirty="0">
+                <a:solidFill>
+                  <a:schemeClr val="tx1"/>
+                </a:solidFill>
+                <a:latin typeface="Times New Roman" panose="02020603050405020304" pitchFamily="18" charset="0"/>
+                <a:ea typeface="標楷體" panose="03000509000000000000" pitchFamily="65" charset="-120"/>
+                <a:cs typeface="Times New Roman" panose="02020603050405020304" pitchFamily="18" charset="0"/>
+              </a:rPr>
+              <a:t>TRC(Tone Response Curve)</a:t>
+            </a:r>
+            <a:endParaRPr lang="en-US" altLang="zh-TW" dirty="0"/>
+          </a:p>
+          <a:p>
+            <a:pPr lvl="1">
+              <a:lnSpc>
+                <a:spcPts val="3000"/>
+              </a:lnSpc>
+            </a:pPr>
+            <a:r>
+              <a:rPr lang="zh-TW" altLang="en-US" sz="1600" dirty="0">
+                <a:solidFill>
+                  <a:srgbClr val="333333"/>
+                </a:solidFill>
+                <a:latin typeface="Times New Roman" panose="02020603050405020304" pitchFamily="18" charset="0"/>
+                <a:ea typeface="標楷體" panose="03000509000000000000" pitchFamily="65" charset="-120"/>
+                <a:cs typeface="Times New Roman" panose="02020603050405020304" pitchFamily="18" charset="0"/>
+              </a:rPr>
+              <a:t>舉例：</a:t>
+            </a:r>
+            <a:endParaRPr lang="en-US" altLang="zh-TW" sz="1600" dirty="0">
+              <a:solidFill>
+                <a:srgbClr val="333333"/>
+              </a:solidFill>
+              <a:latin typeface="Times New Roman" panose="02020603050405020304" pitchFamily="18" charset="0"/>
+              <a:ea typeface="標楷體" panose="03000509000000000000" pitchFamily="65" charset="-120"/>
+              <a:cs typeface="Times New Roman" panose="02020603050405020304" pitchFamily="18" charset="0"/>
+            </a:endParaRPr>
+          </a:p>
+          <a:p>
+            <a:pPr>
+              <a:lnSpc>
+                <a:spcPts val="3000"/>
+              </a:lnSpc>
+            </a:pPr>
+            <a:endParaRPr lang="en-US" altLang="zh-TW" sz="2000" dirty="0">
+              <a:latin typeface="Times New Roman" panose="02020603050405020304" pitchFamily="18" charset="0"/>
+              <a:ea typeface="標楷體" panose="03000509000000000000" pitchFamily="65" charset="-120"/>
+            </a:endParaRPr>
+          </a:p>
+          <a:p>
+            <a:pPr marL="533400" lvl="1" indent="0">
+              <a:lnSpc>
+                <a:spcPts val="3000"/>
+              </a:lnSpc>
+              <a:buNone/>
+            </a:pPr>
+            <a:endParaRPr lang="zh-TW" altLang="en-US" sz="1800" dirty="0">
+              <a:solidFill>
+                <a:srgbClr val="333333"/>
+              </a:solidFill>
+              <a:latin typeface="Times New Roman" panose="02020603050405020304" pitchFamily="18" charset="0"/>
+              <a:ea typeface="標楷體" panose="03000509000000000000" pitchFamily="65" charset="-120"/>
+              <a:cs typeface="Times New Roman" panose="02020603050405020304" pitchFamily="18" charset="0"/>
+            </a:endParaRPr>
+          </a:p>
+        </p:txBody>
+      </p:sp>
+      <p:graphicFrame>
+        <p:nvGraphicFramePr>
+          <p:cNvPr id="2" name="表格 1">
+            <a:extLst>
+              <a:ext uri="{FF2B5EF4-FFF2-40B4-BE49-F238E27FC236}">
+                <a16:creationId xmlns:a16="http://schemas.microsoft.com/office/drawing/2014/main" id="{CE5B8F78-8A22-D5AF-CA79-EE55EA23B193}"/>
+              </a:ext>
+            </a:extLst>
+          </p:cNvPr>
+          <p:cNvGraphicFramePr>
+            <a:graphicFrameLocks noGrp="1"/>
+          </p:cNvGraphicFramePr>
+          <p:nvPr>
+            <p:extLst>
+              <p:ext uri="{D42A27DB-BD31-4B8C-83A1-F6EECF244321}">
+                <p14:modId xmlns:p14="http://schemas.microsoft.com/office/powerpoint/2010/main" val="1328249219"/>
+              </p:ext>
+            </p:extLst>
+          </p:nvPr>
+        </p:nvGraphicFramePr>
+        <p:xfrm>
+          <a:off x="1114543" y="2567167"/>
+          <a:ext cx="2901873" cy="1219200"/>
+        </p:xfrm>
+        <a:graphic>
+          <a:graphicData uri="http://schemas.openxmlformats.org/drawingml/2006/table">
+            <a:tbl>
+              <a:tblPr>
+                <a:tableStyleId>{5940675A-B579-460E-94D1-54222C63F5DA}</a:tableStyleId>
+              </a:tblPr>
+              <a:tblGrid>
+                <a:gridCol w="967291">
+                  <a:extLst>
+                    <a:ext uri="{9D8B030D-6E8A-4147-A177-3AD203B41FA5}">
+                      <a16:colId xmlns:a16="http://schemas.microsoft.com/office/drawing/2014/main" val="3590102437"/>
+                    </a:ext>
+                  </a:extLst>
+                </a:gridCol>
+                <a:gridCol w="967291">
+                  <a:extLst>
+                    <a:ext uri="{9D8B030D-6E8A-4147-A177-3AD203B41FA5}">
+                      <a16:colId xmlns:a16="http://schemas.microsoft.com/office/drawing/2014/main" val="3666544339"/>
+                    </a:ext>
+                  </a:extLst>
+                </a:gridCol>
+                <a:gridCol w="967291">
+                  <a:extLst>
+                    <a:ext uri="{9D8B030D-6E8A-4147-A177-3AD203B41FA5}">
+                      <a16:colId xmlns:a16="http://schemas.microsoft.com/office/drawing/2014/main" val="455476819"/>
+                    </a:ext>
+                  </a:extLst>
+                </a:gridCol>
+              </a:tblGrid>
+              <a:tr h="298410">
+                <a:tc>
+                  <a:txBody>
+                    <a:bodyPr/>
+                    <a:lstStyle/>
+                    <a:p>
+                      <a:pPr>
+                        <a:buNone/>
+                      </a:pPr>
+                      <a:r>
+                        <a:rPr lang="zh-TW"/>
+                        <a:t>原色</a:t>
+                      </a:r>
+                    </a:p>
+                  </a:txBody>
+                  <a:tcPr anchor="ctr"/>
+                </a:tc>
+                <a:tc>
+                  <a:txBody>
+                    <a:bodyPr/>
+                    <a:lstStyle/>
+                    <a:p>
+                      <a:pPr algn="r">
+                        <a:buNone/>
+                      </a:pPr>
+                      <a:r>
+                        <a:rPr lang="zh-TW"/>
+                        <a:t>x</a:t>
+                      </a:r>
+                    </a:p>
+                  </a:txBody>
+                  <a:tcPr anchor="ctr"/>
+                </a:tc>
+                <a:tc>
+                  <a:txBody>
+                    <a:bodyPr/>
+                    <a:lstStyle/>
+                    <a:p>
+                      <a:pPr algn="r">
+                        <a:buNone/>
+                      </a:pPr>
+                      <a:r>
+                        <a:rPr lang="zh-TW"/>
+                        <a:t>y</a:t>
+                      </a:r>
+                    </a:p>
+                  </a:txBody>
+                  <a:tcPr anchor="ctr"/>
+                </a:tc>
+                <a:extLst>
+                  <a:ext uri="{0D108BD9-81ED-4DB2-BD59-A6C34878D82A}">
+                    <a16:rowId xmlns:a16="http://schemas.microsoft.com/office/drawing/2014/main" val="4117724251"/>
+                  </a:ext>
+                </a:extLst>
+              </a:tr>
+              <a:tr h="298410">
+                <a:tc>
+                  <a:txBody>
+                    <a:bodyPr/>
+                    <a:lstStyle/>
+                    <a:p>
+                      <a:pPr>
+                        <a:buNone/>
+                      </a:pPr>
+                      <a:r>
+                        <a:rPr lang="zh-TW"/>
+                        <a:t>R</a:t>
+                      </a:r>
+                    </a:p>
+                  </a:txBody>
+                  <a:tcPr anchor="ctr"/>
+                </a:tc>
+                <a:tc>
+                  <a:txBody>
+                    <a:bodyPr/>
+                    <a:lstStyle/>
+                    <a:p>
+                      <a:pPr algn="r">
+                        <a:buNone/>
+                      </a:pPr>
+                      <a:r>
+                        <a:rPr lang="zh-TW"/>
+                        <a:t>0.6400</a:t>
+                      </a:r>
+                    </a:p>
+                  </a:txBody>
+                  <a:tcPr anchor="ctr"/>
+                </a:tc>
+                <a:tc>
+                  <a:txBody>
+                    <a:bodyPr/>
+                    <a:lstStyle/>
+                    <a:p>
+                      <a:pPr algn="r">
+                        <a:buNone/>
+                      </a:pPr>
+                      <a:r>
+                        <a:rPr lang="zh-TW"/>
+                        <a:t>0.3300</a:t>
+                      </a:r>
+                    </a:p>
+                  </a:txBody>
+                  <a:tcPr anchor="ctr"/>
+                </a:tc>
+                <a:extLst>
+                  <a:ext uri="{0D108BD9-81ED-4DB2-BD59-A6C34878D82A}">
+                    <a16:rowId xmlns:a16="http://schemas.microsoft.com/office/drawing/2014/main" val="2141619666"/>
+                  </a:ext>
+                </a:extLst>
+              </a:tr>
+              <a:tr h="298410">
+                <a:tc>
+                  <a:txBody>
+                    <a:bodyPr/>
+                    <a:lstStyle/>
+                    <a:p>
+                      <a:pPr>
+                        <a:buNone/>
+                      </a:pPr>
+                      <a:r>
+                        <a:rPr lang="zh-TW"/>
+                        <a:t>G</a:t>
+                      </a:r>
+                    </a:p>
+                  </a:txBody>
+                  <a:tcPr anchor="ctr"/>
+                </a:tc>
+                <a:tc>
+                  <a:txBody>
+                    <a:bodyPr/>
+                    <a:lstStyle/>
+                    <a:p>
+                      <a:pPr algn="r">
+                        <a:buNone/>
+                      </a:pPr>
+                      <a:r>
+                        <a:rPr lang="zh-TW"/>
+                        <a:t>0.3000</a:t>
+                      </a:r>
+                    </a:p>
+                  </a:txBody>
+                  <a:tcPr anchor="ctr"/>
+                </a:tc>
+                <a:tc>
+                  <a:txBody>
+                    <a:bodyPr/>
+                    <a:lstStyle/>
+                    <a:p>
+                      <a:pPr algn="r">
+                        <a:buNone/>
+                      </a:pPr>
+                      <a:r>
+                        <a:rPr lang="zh-TW"/>
+                        <a:t>0.6000</a:t>
+                      </a:r>
+                    </a:p>
+                  </a:txBody>
+                  <a:tcPr anchor="ctr"/>
+                </a:tc>
+                <a:extLst>
+                  <a:ext uri="{0D108BD9-81ED-4DB2-BD59-A6C34878D82A}">
+                    <a16:rowId xmlns:a16="http://schemas.microsoft.com/office/drawing/2014/main" val="3809134920"/>
+                  </a:ext>
+                </a:extLst>
+              </a:tr>
+              <a:tr h="298410">
+                <a:tc>
+                  <a:txBody>
+                    <a:bodyPr/>
+                    <a:lstStyle/>
+                    <a:p>
+                      <a:pPr>
+                        <a:buNone/>
+                      </a:pPr>
+                      <a:r>
+                        <a:rPr lang="zh-TW"/>
+                        <a:t>B</a:t>
+                      </a:r>
+                    </a:p>
+                  </a:txBody>
+                  <a:tcPr anchor="ctr"/>
+                </a:tc>
+                <a:tc>
+                  <a:txBody>
+                    <a:bodyPr/>
+                    <a:lstStyle/>
+                    <a:p>
+                      <a:pPr algn="r">
+                        <a:buNone/>
+                      </a:pPr>
+                      <a:r>
+                        <a:rPr lang="zh-TW"/>
+                        <a:t>0.1500</a:t>
+                      </a:r>
+                    </a:p>
+                  </a:txBody>
+                  <a:tcPr anchor="ctr"/>
+                </a:tc>
+                <a:tc>
+                  <a:txBody>
+                    <a:bodyPr/>
+                    <a:lstStyle/>
+                    <a:p>
+                      <a:pPr algn="r">
+                        <a:buNone/>
+                      </a:pPr>
+                      <a:r>
+                        <a:rPr lang="zh-TW" dirty="0"/>
+                        <a:t>0.0600</a:t>
+                      </a:r>
+                    </a:p>
+                  </a:txBody>
+                  <a:tcPr anchor="ctr"/>
+                </a:tc>
+                <a:extLst>
+                  <a:ext uri="{0D108BD9-81ED-4DB2-BD59-A6C34878D82A}">
+                    <a16:rowId xmlns:a16="http://schemas.microsoft.com/office/drawing/2014/main" val="1932515259"/>
+                  </a:ext>
+                </a:extLst>
+              </a:tr>
+            </a:tbl>
+          </a:graphicData>
+        </a:graphic>
+      </p:graphicFrame>
+      <p:grpSp>
+        <p:nvGrpSpPr>
+          <p:cNvPr id="8" name="群組 7">
+            <a:extLst>
+              <a:ext uri="{FF2B5EF4-FFF2-40B4-BE49-F238E27FC236}">
+                <a16:creationId xmlns:a16="http://schemas.microsoft.com/office/drawing/2014/main" id="{786F443D-0782-D5C7-CFA3-08A5D4B6BFEC}"/>
+              </a:ext>
+            </a:extLst>
+          </p:cNvPr>
+          <p:cNvGrpSpPr/>
+          <p:nvPr/>
+        </p:nvGrpSpPr>
+        <p:grpSpPr>
+          <a:xfrm>
+            <a:off x="4548850" y="2882096"/>
+            <a:ext cx="1481394" cy="717630"/>
+            <a:chOff x="4444678" y="2812648"/>
+            <a:chExt cx="1481394" cy="717630"/>
+          </a:xfrm>
+        </p:grpSpPr>
+        <p:sp>
+          <p:nvSpPr>
+            <p:cNvPr id="7" name="矩形 6">
+              <a:extLst>
+                <a:ext uri="{FF2B5EF4-FFF2-40B4-BE49-F238E27FC236}">
+                  <a16:creationId xmlns:a16="http://schemas.microsoft.com/office/drawing/2014/main" id="{BB4D6CD5-7B46-9599-FFCA-74970E1E73B5}"/>
+                </a:ext>
+              </a:extLst>
+            </p:cNvPr>
+            <p:cNvSpPr/>
+            <p:nvPr/>
+          </p:nvSpPr>
+          <p:spPr>
+            <a:xfrm>
+              <a:off x="4444678" y="2812648"/>
+              <a:ext cx="1348616" cy="717630"/>
+            </a:xfrm>
+            <a:prstGeom prst="rect">
+              <a:avLst/>
+            </a:prstGeom>
+            <a:solidFill>
+              <a:schemeClr val="bg1"/>
+            </a:solidFill>
+            <a:ln>
+              <a:solidFill>
+                <a:schemeClr val="tx1"/>
+              </a:solidFill>
+            </a:ln>
+          </p:spPr>
+          <p:style>
+            <a:lnRef idx="2">
+              <a:schemeClr val="accent1">
+                <a:shade val="15000"/>
+              </a:schemeClr>
+            </a:lnRef>
+            <a:fillRef idx="1">
+              <a:schemeClr val="accent1"/>
+            </a:fillRef>
+            <a:effectRef idx="0">
+              <a:schemeClr val="accent1"/>
+            </a:effectRef>
+            <a:fontRef idx="minor">
+              <a:schemeClr val="lt1"/>
+            </a:fontRef>
+          </p:style>
+          <p:txBody>
+            <a:bodyPr rtlCol="0" anchor="ctr"/>
+            <a:lstStyle/>
+            <a:p>
+              <a:pPr algn="ctr"/>
+              <a:endParaRPr lang="zh-TW" altLang="en-US"/>
+            </a:p>
+          </p:txBody>
+        </p:sp>
+        <p:sp>
+          <p:nvSpPr>
+            <p:cNvPr id="6" name="文字方塊 5">
+              <a:extLst>
+                <a:ext uri="{FF2B5EF4-FFF2-40B4-BE49-F238E27FC236}">
+                  <a16:creationId xmlns:a16="http://schemas.microsoft.com/office/drawing/2014/main" id="{0DA94BC5-0762-F6E2-2F57-D278DFAB1094}"/>
+                </a:ext>
+              </a:extLst>
+            </p:cNvPr>
+            <p:cNvSpPr txBox="1"/>
+            <p:nvPr/>
+          </p:nvSpPr>
+          <p:spPr>
+            <a:xfrm>
+              <a:off x="4577456" y="2905780"/>
+              <a:ext cx="1348616" cy="523220"/>
+            </a:xfrm>
+            <a:prstGeom prst="rect">
+              <a:avLst/>
+            </a:prstGeom>
+            <a:noFill/>
+          </p:spPr>
+          <p:txBody>
+            <a:bodyPr wrap="square">
+              <a:spAutoFit/>
+            </a:bodyPr>
+            <a:lstStyle/>
+            <a:p>
+              <a:r>
+                <a:rPr lang="zh-TW" altLang="zh-TW" dirty="0"/>
+                <a:t>x</a:t>
+              </a:r>
+              <a:r>
+                <a:rPr lang="zh-TW" altLang="zh-TW" baseline="-25000" dirty="0"/>
+                <a:t>W</a:t>
+              </a:r>
+              <a:r>
+                <a:rPr lang="zh-TW" altLang="zh-TW" dirty="0"/>
+                <a:t>​=0.3127</a:t>
+              </a:r>
+              <a:endParaRPr lang="en-US" altLang="zh-TW" dirty="0"/>
+            </a:p>
+            <a:p>
+              <a:r>
+                <a:rPr lang="zh-TW" altLang="zh-TW" dirty="0"/>
+                <a:t>y</a:t>
+              </a:r>
+              <a:r>
+                <a:rPr lang="zh-TW" altLang="zh-TW" baseline="-25000" dirty="0"/>
+                <a:t>W</a:t>
+              </a:r>
+              <a:r>
+                <a:rPr lang="zh-TW" altLang="zh-TW" dirty="0"/>
+                <a:t>​=0.3290</a:t>
+              </a:r>
+              <a:endParaRPr lang="zh-TW" altLang="en-US" dirty="0"/>
+            </a:p>
+          </p:txBody>
+        </p:sp>
+      </p:grpSp>
+      <p:sp>
+        <p:nvSpPr>
+          <p:cNvPr id="9" name="矩形 8">
+            <a:extLst>
+              <a:ext uri="{FF2B5EF4-FFF2-40B4-BE49-F238E27FC236}">
+                <a16:creationId xmlns:a16="http://schemas.microsoft.com/office/drawing/2014/main" id="{8BDB7050-E618-11BA-974C-7035CB7FA24D}"/>
+              </a:ext>
+            </a:extLst>
+          </p:cNvPr>
+          <p:cNvSpPr/>
+          <p:nvPr/>
+        </p:nvSpPr>
+        <p:spPr>
+          <a:xfrm>
+            <a:off x="1960185" y="3786367"/>
+            <a:ext cx="1210588" cy="338554"/>
+          </a:xfrm>
+          <a:prstGeom prst="rect">
+            <a:avLst/>
+          </a:prstGeom>
+          <a:noFill/>
+        </p:spPr>
+        <p:txBody>
+          <a:bodyPr wrap="none" lIns="91440" tIns="45720" rIns="91440" bIns="45720">
+            <a:spAutoFit/>
+          </a:bodyPr>
+          <a:lstStyle/>
+          <a:p>
+            <a:pPr algn="ctr"/>
+            <a:r>
+              <a:rPr lang="zh-TW" altLang="en-US" sz="1600" b="0" cap="none" spc="0" dirty="0">
+                <a:ln w="0"/>
+                <a:solidFill>
+                  <a:schemeClr val="tx1"/>
+                </a:solidFill>
+                <a:effectLst>
+                  <a:outerShdw blurRad="38100" dist="19050" dir="2700000" algn="tl" rotWithShape="0">
+                    <a:schemeClr val="dk1">
+                      <a:alpha val="40000"/>
+                    </a:schemeClr>
+                  </a:outerShdw>
+                </a:effectLst>
+              </a:rPr>
+              <a:t>量測到的值</a:t>
+            </a:r>
+          </a:p>
+        </p:txBody>
+      </p:sp>
+      <p:sp>
+        <p:nvSpPr>
+          <p:cNvPr id="12" name="矩形 11">
+            <a:extLst>
+              <a:ext uri="{FF2B5EF4-FFF2-40B4-BE49-F238E27FC236}">
+                <a16:creationId xmlns:a16="http://schemas.microsoft.com/office/drawing/2014/main" id="{2552E5AB-ED3F-D175-A499-49FB40687585}"/>
+              </a:ext>
+            </a:extLst>
+          </p:cNvPr>
+          <p:cNvSpPr/>
+          <p:nvPr/>
+        </p:nvSpPr>
+        <p:spPr>
+          <a:xfrm>
+            <a:off x="4651442" y="3635026"/>
+            <a:ext cx="1005403" cy="338554"/>
+          </a:xfrm>
+          <a:prstGeom prst="rect">
+            <a:avLst/>
+          </a:prstGeom>
+          <a:noFill/>
+        </p:spPr>
+        <p:txBody>
+          <a:bodyPr wrap="none" lIns="91440" tIns="45720" rIns="91440" bIns="45720">
+            <a:spAutoFit/>
+          </a:bodyPr>
+          <a:lstStyle/>
+          <a:p>
+            <a:pPr algn="ctr"/>
+            <a:r>
+              <a:rPr lang="zh-TW" altLang="en-US" sz="1600" dirty="0">
+                <a:ln w="0"/>
+                <a:solidFill>
+                  <a:schemeClr val="tx1"/>
+                </a:solidFill>
+                <a:effectLst>
+                  <a:outerShdw blurRad="38100" dist="19050" dir="2700000" algn="tl" rotWithShape="0">
+                    <a:schemeClr val="dk1">
+                      <a:alpha val="40000"/>
+                    </a:schemeClr>
+                  </a:outerShdw>
+                </a:effectLst>
+              </a:rPr>
+              <a:t>目標色彩</a:t>
+            </a:r>
+            <a:endParaRPr lang="zh-TW" altLang="en-US" sz="1600" b="0" cap="none" spc="0" dirty="0">
+              <a:ln w="0"/>
+              <a:solidFill>
+                <a:schemeClr val="tx1"/>
+              </a:solidFill>
+              <a:effectLst>
+                <a:outerShdw blurRad="38100" dist="19050" dir="2700000" algn="tl" rotWithShape="0">
+                  <a:schemeClr val="dk1">
+                    <a:alpha val="40000"/>
+                  </a:schemeClr>
+                </a:outerShdw>
+              </a:effectLst>
+            </a:endParaRPr>
+          </a:p>
+        </p:txBody>
+      </p:sp>
+    </p:spTree>
+    <p:extLst>
+      <p:ext uri="{BB962C8B-B14F-4D97-AF65-F5344CB8AC3E}">
+        <p14:creationId xmlns:p14="http://schemas.microsoft.com/office/powerpoint/2010/main" val="3699173038"/>
+      </p:ext>
+    </p:extLst>
   </p:cSld>
   <p:clrMapOvr>
     <a:masterClrMapping/>

--- a/ICCPROFILE.pptx
+++ b/ICCPROFILE.pptx
@@ -5,7 +5,7 @@
     <p:sldMasterId id="2147483658" r:id="rId1"/>
   </p:sldMasterIdLst>
   <p:notesMasterIdLst>
-    <p:notesMasterId r:id="rId13"/>
+    <p:notesMasterId r:id="rId18"/>
   </p:notesMasterIdLst>
   <p:sldIdLst>
     <p:sldId id="277" r:id="rId2"/>
@@ -16,9 +16,14 @@
     <p:sldId id="1998" r:id="rId7"/>
     <p:sldId id="1999" r:id="rId8"/>
     <p:sldId id="2001" r:id="rId9"/>
-    <p:sldId id="2002" r:id="rId10"/>
-    <p:sldId id="2003" r:id="rId11"/>
-    <p:sldId id="286" r:id="rId12"/>
+    <p:sldId id="2009" r:id="rId10"/>
+    <p:sldId id="2004" r:id="rId11"/>
+    <p:sldId id="2002" r:id="rId12"/>
+    <p:sldId id="2005" r:id="rId13"/>
+    <p:sldId id="2006" r:id="rId14"/>
+    <p:sldId id="2008" r:id="rId15"/>
+    <p:sldId id="2007" r:id="rId16"/>
+    <p:sldId id="286" r:id="rId17"/>
   </p:sldIdLst>
   <p:sldSz cx="9906000" cy="6858000" type="A4"/>
   <p:notesSz cx="7315200" cy="9601200"/>
@@ -268,8 +273,13 @@
             <p14:sldId id="1998"/>
             <p14:sldId id="1999"/>
             <p14:sldId id="2001"/>
+            <p14:sldId id="2009"/>
+            <p14:sldId id="2004"/>
             <p14:sldId id="2002"/>
-            <p14:sldId id="2003"/>
+            <p14:sldId id="2005"/>
+            <p14:sldId id="2006"/>
+            <p14:sldId id="2008"/>
+            <p14:sldId id="2007"/>
           </p14:sldIdLst>
         </p14:section>
         <p14:section name="End" id="{33EEDC85-A799-4CB3-BF13-F4955B8630BE}">
@@ -1619,7 +1629,7 @@
         <p:cNvPr id="1" name="">
           <a:extLst>
             <a:ext uri="{FF2B5EF4-FFF2-40B4-BE49-F238E27FC236}">
-              <a16:creationId xmlns:a16="http://schemas.microsoft.com/office/drawing/2014/main" id="{D83B1E6A-07EA-2C49-E94E-89150806B35A}"/>
+              <a16:creationId xmlns:a16="http://schemas.microsoft.com/office/drawing/2014/main" id="{FAD0D45F-F38B-49A2-8C8F-14926914CC28}"/>
             </a:ext>
           </a:extLst>
         </p:cNvPr>
@@ -1639,7 +1649,7 @@
           <p:cNvPr id="2" name="投影片影像版面配置區 1">
             <a:extLst>
               <a:ext uri="{FF2B5EF4-FFF2-40B4-BE49-F238E27FC236}">
-                <a16:creationId xmlns:a16="http://schemas.microsoft.com/office/drawing/2014/main" id="{D368E216-B8FB-E497-CE96-7A22127E4773}"/>
+                <a16:creationId xmlns:a16="http://schemas.microsoft.com/office/drawing/2014/main" id="{234F0A6A-94F7-7995-8ECF-F68B5CE49049}"/>
               </a:ext>
             </a:extLst>
           </p:cNvPr>
@@ -1657,7 +1667,555 @@
           <p:cNvPr id="3" name="備忘稿版面配置區 2">
             <a:extLst>
               <a:ext uri="{FF2B5EF4-FFF2-40B4-BE49-F238E27FC236}">
-                <a16:creationId xmlns:a16="http://schemas.microsoft.com/office/drawing/2014/main" id="{37CFCF3B-751C-7B04-59E2-90C7F3AAC38C}"/>
+                <a16:creationId xmlns:a16="http://schemas.microsoft.com/office/drawing/2014/main" id="{932FABDB-0222-8C9C-05B9-612F47001CA2}"/>
+              </a:ext>
+            </a:extLst>
+          </p:cNvPr>
+          <p:cNvSpPr>
+            <a:spLocks noGrp="1"/>
+          </p:cNvSpPr>
+          <p:nvPr>
+            <p:ph type="body" idx="1"/>
+          </p:nvPr>
+        </p:nvSpPr>
+        <p:spPr/>
+        <p:txBody>
+          <a:bodyPr/>
+          <a:lstStyle/>
+          <a:p>
+            <a:r>
+              <a:rPr lang="zh-TW" altLang="zh-TW" dirty="0"/>
+              <a:t>將已經經過 TRC 線性化的 R、G、B 三個線性通道，混合成 PCS XYZ。</a:t>
+            </a:r>
+            <a:endParaRPr lang="zh-TW" altLang="en-US" dirty="0"/>
+          </a:p>
+        </p:txBody>
+      </p:sp>
+      <p:sp>
+        <p:nvSpPr>
+          <p:cNvPr id="4" name="投影片編號版面配置區 3">
+            <a:extLst>
+              <a:ext uri="{FF2B5EF4-FFF2-40B4-BE49-F238E27FC236}">
+                <a16:creationId xmlns:a16="http://schemas.microsoft.com/office/drawing/2014/main" id="{2F7F6B0B-7B7C-0DA4-61A6-E33A47364222}"/>
+              </a:ext>
+            </a:extLst>
+          </p:cNvPr>
+          <p:cNvSpPr>
+            <a:spLocks noGrp="1"/>
+          </p:cNvSpPr>
+          <p:nvPr>
+            <p:ph type="sldNum" idx="12"/>
+          </p:nvPr>
+        </p:nvSpPr>
+        <p:spPr/>
+        <p:txBody>
+          <a:bodyPr/>
+          <a:lstStyle/>
+          <a:p>
+            <a:pPr marL="0" marR="0" lvl="0" indent="0" algn="r" rtl="0">
+              <a:spcBef>
+                <a:spcPts val="0"/>
+              </a:spcBef>
+              <a:spcAft>
+                <a:spcPts val="0"/>
+              </a:spcAft>
+              <a:buNone/>
+            </a:pPr>
+            <a:fld id="{00000000-1234-1234-1234-123412341234}" type="slidenum">
+              <a:rPr lang="en-US" sz="2000" b="0" i="0" u="none" strike="noStrike" cap="none" smtClean="0">
+                <a:solidFill>
+                  <a:schemeClr val="dk1"/>
+                </a:solidFill>
+                <a:latin typeface="Times New Roman"/>
+                <a:ea typeface="Times New Roman"/>
+                <a:cs typeface="Times New Roman"/>
+                <a:sym typeface="Times New Roman"/>
+              </a:rPr>
+              <a:t>10</a:t>
+            </a:fld>
+            <a:endParaRPr lang="en-US" sz="2000" b="0" i="0" u="none" strike="noStrike" cap="none" dirty="0">
+              <a:solidFill>
+                <a:schemeClr val="dk1"/>
+              </a:solidFill>
+              <a:latin typeface="Times New Roman"/>
+              <a:ea typeface="Times New Roman"/>
+              <a:cs typeface="Times New Roman"/>
+              <a:sym typeface="Times New Roman"/>
+            </a:endParaRPr>
+          </a:p>
+        </p:txBody>
+      </p:sp>
+    </p:spTree>
+    <p:extLst>
+      <p:ext uri="{BB962C8B-B14F-4D97-AF65-F5344CB8AC3E}">
+        <p14:creationId xmlns:p14="http://schemas.microsoft.com/office/powerpoint/2010/main" val="2043873156"/>
+      </p:ext>
+    </p:extLst>
+  </p:cSld>
+  <p:clrMapOvr>
+    <a:masterClrMapping/>
+  </p:clrMapOvr>
+</p:notes>
+</file>
+
+<file path=ppt/notesSlides/notesSlide11.xml><?xml version="1.0" encoding="utf-8"?>
+<p:notes xmlns:a="http://schemas.openxmlformats.org/drawingml/2006/main" xmlns:r="http://schemas.openxmlformats.org/officeDocument/2006/relationships" xmlns:p="http://schemas.openxmlformats.org/presentationml/2006/main">
+  <p:cSld>
+    <p:spTree>
+      <p:nvGrpSpPr>
+        <p:cNvPr id="1" name="">
+          <a:extLst>
+            <a:ext uri="{FF2B5EF4-FFF2-40B4-BE49-F238E27FC236}">
+              <a16:creationId xmlns:a16="http://schemas.microsoft.com/office/drawing/2014/main" id="{D5BDCB87-D510-3E12-0B70-9F66CF2E4F53}"/>
+            </a:ext>
+          </a:extLst>
+        </p:cNvPr>
+        <p:cNvGrpSpPr/>
+        <p:nvPr/>
+      </p:nvGrpSpPr>
+      <p:grpSpPr>
+        <a:xfrm>
+          <a:off x="0" y="0"/>
+          <a:ext cx="0" cy="0"/>
+          <a:chOff x="0" y="0"/>
+          <a:chExt cx="0" cy="0"/>
+        </a:xfrm>
+      </p:grpSpPr>
+      <p:sp>
+        <p:nvSpPr>
+          <p:cNvPr id="2" name="投影片影像版面配置區 1">
+            <a:extLst>
+              <a:ext uri="{FF2B5EF4-FFF2-40B4-BE49-F238E27FC236}">
+                <a16:creationId xmlns:a16="http://schemas.microsoft.com/office/drawing/2014/main" id="{9C2220D8-AB85-841B-EEFB-AA26789AEC0A}"/>
+              </a:ext>
+            </a:extLst>
+          </p:cNvPr>
+          <p:cNvSpPr>
+            <a:spLocks noGrp="1" noRot="1" noChangeAspect="1"/>
+          </p:cNvSpPr>
+          <p:nvPr>
+            <p:ph type="sldImg"/>
+          </p:nvPr>
+        </p:nvSpPr>
+        <p:spPr/>
+      </p:sp>
+      <mc:AlternateContent xmlns:mc="http://schemas.openxmlformats.org/markup-compatibility/2006">
+        <mc:Choice xmlns:a14="http://schemas.microsoft.com/office/drawing/2010/main" Requires="a14">
+          <p:sp>
+            <p:nvSpPr>
+              <p:cNvPr id="3" name="備忘稿版面配置區 2">
+                <a:extLst>
+                  <a:ext uri="{FF2B5EF4-FFF2-40B4-BE49-F238E27FC236}">
+                    <a16:creationId xmlns:a16="http://schemas.microsoft.com/office/drawing/2014/main" id="{7E014429-932D-C388-46B7-D1B69AE89375}"/>
+                  </a:ext>
+                </a:extLst>
+              </p:cNvPr>
+              <p:cNvSpPr>
+                <a:spLocks noGrp="1"/>
+              </p:cNvSpPr>
+              <p:nvPr>
+                <p:ph type="body" idx="1"/>
+              </p:nvPr>
+            </p:nvSpPr>
+            <p:spPr/>
+            <p:txBody>
+              <a:bodyPr/>
+              <a:lstStyle/>
+              <a:p>
+                <a:r>
+                  <a:rPr lang="zh-TW" altLang="zh-TW" dirty="0"/>
+                  <a:t>此 </a:t>
+                </a:r>
+                <a14:m>
+                  <m:oMath xmlns:m="http://schemas.openxmlformats.org/officeDocument/2006/math">
+                    <m:r>
+                      <a:rPr lang="zh-TW" altLang="en-US" sz="1200" b="0" i="1" u="none" strike="noStrike" cap="none">
+                        <a:solidFill>
+                          <a:schemeClr val="dk1"/>
+                        </a:solidFill>
+                        <a:latin typeface="Times New Roman"/>
+                        <a:ea typeface="Times New Roman"/>
+                        <a:cs typeface="Times New Roman"/>
+                        <a:sym typeface="Times New Roman"/>
+                      </a:rPr>
+                      <m:t>𝑌</m:t>
+                    </m:r>
+                    <m:r>
+                      <a:rPr lang="en-US" altLang="zh-TW" sz="1200" b="0" i="0" u="none" strike="noStrike" cap="none">
+                        <a:solidFill>
+                          <a:schemeClr val="dk1"/>
+                        </a:solidFill>
+                        <a:latin typeface="Times New Roman"/>
+                        <a:ea typeface="Times New Roman"/>
+                        <a:cs typeface="Times New Roman"/>
+                        <a:sym typeface="Times New Roman"/>
+                      </a:rPr>
+                      <m:t>=1</m:t>
+                    </m:r>
+                  </m:oMath>
+                </a14:m>
+                <a:r>
+                  <a:rPr lang="zh-TW" altLang="zh-TW" dirty="0"/>
+                  <a:t>為相對正規化值，不代表顯示器實際</a:t>
+                </a:r>
+                <a:r>
+                  <a:rPr lang="zh-TW" altLang="en-US" dirty="0"/>
+                  <a:t>亮度</a:t>
+                </a:r>
+              </a:p>
+            </p:txBody>
+          </p:sp>
+        </mc:Choice>
+        <mc:Fallback>
+          <p:sp>
+            <p:nvSpPr>
+              <p:cNvPr id="3" name="備忘稿版面配置區 2">
+                <a:extLst>
+                  <a:ext uri="{FF2B5EF4-FFF2-40B4-BE49-F238E27FC236}">
+                    <a16:creationId xmlns:a16="http://schemas.microsoft.com/office/drawing/2014/main" id="{7E014429-932D-C388-46B7-D1B69AE89375}"/>
+                  </a:ext>
+                </a:extLst>
+              </p:cNvPr>
+              <p:cNvSpPr>
+                <a:spLocks noGrp="1"/>
+              </p:cNvSpPr>
+              <p:nvPr>
+                <p:ph type="body" idx="1"/>
+              </p:nvPr>
+            </p:nvSpPr>
+            <p:spPr/>
+            <p:txBody>
+              <a:bodyPr/>
+              <a:lstStyle/>
+              <a:p>
+                <a:r>
+                  <a:rPr lang="zh-TW" altLang="zh-TW" dirty="0"/>
+                  <a:t>此 </a:t>
+                </a:r>
+                <a:r>
+                  <a:rPr lang="zh-TW" altLang="en-US" sz="1200" b="0" i="0" u="none" strike="noStrike" cap="none">
+                    <a:solidFill>
+                      <a:schemeClr val="dk1"/>
+                    </a:solidFill>
+                    <a:latin typeface="Times New Roman"/>
+                    <a:ea typeface="Times New Roman"/>
+                    <a:cs typeface="Times New Roman"/>
+                    <a:sym typeface="Times New Roman"/>
+                  </a:rPr>
+                  <a:t>𝑌</a:t>
+                </a:r>
+                <a:r>
+                  <a:rPr lang="en-US" altLang="zh-TW" sz="1200" b="0" i="0" u="none" strike="noStrike" cap="none">
+                    <a:solidFill>
+                      <a:schemeClr val="dk1"/>
+                    </a:solidFill>
+                    <a:latin typeface="Times New Roman"/>
+                    <a:ea typeface="Times New Roman"/>
+                    <a:cs typeface="Times New Roman"/>
+                    <a:sym typeface="Times New Roman"/>
+                  </a:rPr>
+                  <a:t>=1</a:t>
+                </a:r>
+                <a:r>
+                  <a:rPr lang="zh-TW" altLang="zh-TW" dirty="0"/>
+                  <a:t>為相對正規化值，不代表顯示器實際</a:t>
+                </a:r>
+                <a:r>
+                  <a:rPr lang="zh-TW" altLang="en-US" dirty="0"/>
+                  <a:t>亮度</a:t>
+                </a:r>
+              </a:p>
+            </p:txBody>
+          </p:sp>
+        </mc:Fallback>
+      </mc:AlternateContent>
+      <p:sp>
+        <p:nvSpPr>
+          <p:cNvPr id="4" name="投影片編號版面配置區 3">
+            <a:extLst>
+              <a:ext uri="{FF2B5EF4-FFF2-40B4-BE49-F238E27FC236}">
+                <a16:creationId xmlns:a16="http://schemas.microsoft.com/office/drawing/2014/main" id="{ECE301C6-59CB-7CC2-23BD-00E11BDD5D3D}"/>
+              </a:ext>
+            </a:extLst>
+          </p:cNvPr>
+          <p:cNvSpPr>
+            <a:spLocks noGrp="1"/>
+          </p:cNvSpPr>
+          <p:nvPr>
+            <p:ph type="sldNum" idx="12"/>
+          </p:nvPr>
+        </p:nvSpPr>
+        <p:spPr/>
+        <p:txBody>
+          <a:bodyPr/>
+          <a:lstStyle/>
+          <a:p>
+            <a:pPr marL="0" marR="0" lvl="0" indent="0" algn="r" rtl="0">
+              <a:spcBef>
+                <a:spcPts val="0"/>
+              </a:spcBef>
+              <a:spcAft>
+                <a:spcPts val="0"/>
+              </a:spcAft>
+              <a:buNone/>
+            </a:pPr>
+            <a:fld id="{00000000-1234-1234-1234-123412341234}" type="slidenum">
+              <a:rPr lang="en-US" sz="2000" b="0" i="0" u="none" strike="noStrike" cap="none" smtClean="0">
+                <a:solidFill>
+                  <a:schemeClr val="dk1"/>
+                </a:solidFill>
+                <a:latin typeface="Times New Roman"/>
+                <a:ea typeface="Times New Roman"/>
+                <a:cs typeface="Times New Roman"/>
+                <a:sym typeface="Times New Roman"/>
+              </a:rPr>
+              <a:t>11</a:t>
+            </a:fld>
+            <a:endParaRPr lang="en-US" sz="2000" b="0" i="0" u="none" strike="noStrike" cap="none" dirty="0">
+              <a:solidFill>
+                <a:schemeClr val="dk1"/>
+              </a:solidFill>
+              <a:latin typeface="Times New Roman"/>
+              <a:ea typeface="Times New Roman"/>
+              <a:cs typeface="Times New Roman"/>
+              <a:sym typeface="Times New Roman"/>
+            </a:endParaRPr>
+          </a:p>
+        </p:txBody>
+      </p:sp>
+    </p:spTree>
+    <p:extLst>
+      <p:ext uri="{BB962C8B-B14F-4D97-AF65-F5344CB8AC3E}">
+        <p14:creationId xmlns:p14="http://schemas.microsoft.com/office/powerpoint/2010/main" val="3964529647"/>
+      </p:ext>
+    </p:extLst>
+  </p:cSld>
+  <p:clrMapOvr>
+    <a:masterClrMapping/>
+  </p:clrMapOvr>
+</p:notes>
+</file>
+
+<file path=ppt/notesSlides/notesSlide12.xml><?xml version="1.0" encoding="utf-8"?>
+<p:notes xmlns:a="http://schemas.openxmlformats.org/drawingml/2006/main" xmlns:r="http://schemas.openxmlformats.org/officeDocument/2006/relationships" xmlns:p="http://schemas.openxmlformats.org/presentationml/2006/main">
+  <p:cSld>
+    <p:spTree>
+      <p:nvGrpSpPr>
+        <p:cNvPr id="1" name="">
+          <a:extLst>
+            <a:ext uri="{FF2B5EF4-FFF2-40B4-BE49-F238E27FC236}">
+              <a16:creationId xmlns:a16="http://schemas.microsoft.com/office/drawing/2014/main" id="{20A72D9A-17ED-75CA-795D-509CF0D875D8}"/>
+            </a:ext>
+          </a:extLst>
+        </p:cNvPr>
+        <p:cNvGrpSpPr/>
+        <p:nvPr/>
+      </p:nvGrpSpPr>
+      <p:grpSpPr>
+        <a:xfrm>
+          <a:off x="0" y="0"/>
+          <a:ext cx="0" cy="0"/>
+          <a:chOff x="0" y="0"/>
+          <a:chExt cx="0" cy="0"/>
+        </a:xfrm>
+      </p:grpSpPr>
+      <p:sp>
+        <p:nvSpPr>
+          <p:cNvPr id="2" name="投影片影像版面配置區 1">
+            <a:extLst>
+              <a:ext uri="{FF2B5EF4-FFF2-40B4-BE49-F238E27FC236}">
+                <a16:creationId xmlns:a16="http://schemas.microsoft.com/office/drawing/2014/main" id="{269CEF18-87E4-2E84-A1BF-D6C3FDCAD952}"/>
+              </a:ext>
+            </a:extLst>
+          </p:cNvPr>
+          <p:cNvSpPr>
+            <a:spLocks noGrp="1" noRot="1" noChangeAspect="1"/>
+          </p:cNvSpPr>
+          <p:nvPr>
+            <p:ph type="sldImg"/>
+          </p:nvPr>
+        </p:nvSpPr>
+        <p:spPr/>
+      </p:sp>
+      <p:sp>
+        <p:nvSpPr>
+          <p:cNvPr id="3" name="備忘稿版面配置區 2">
+            <a:extLst>
+              <a:ext uri="{FF2B5EF4-FFF2-40B4-BE49-F238E27FC236}">
+                <a16:creationId xmlns:a16="http://schemas.microsoft.com/office/drawing/2014/main" id="{F6A84E15-D033-5994-8FD9-2EF38E9D985D}"/>
+              </a:ext>
+            </a:extLst>
+          </p:cNvPr>
+          <p:cNvSpPr>
+            <a:spLocks noGrp="1"/>
+          </p:cNvSpPr>
+          <p:nvPr>
+            <p:ph type="body" idx="1"/>
+          </p:nvPr>
+        </p:nvSpPr>
+        <p:spPr/>
+        <p:txBody>
+          <a:bodyPr/>
+          <a:lstStyle/>
+          <a:p>
+            <a:r>
+              <a:rPr lang="zh-TW" altLang="en-US" dirty="0"/>
+              <a:t>接著我們將</a:t>
+            </a:r>
+            <a:r>
+              <a:rPr lang="en-US" altLang="zh-TW" dirty="0"/>
+              <a:t>RGB</a:t>
+            </a:r>
+            <a:r>
+              <a:rPr lang="zh-TW" altLang="en-US" dirty="0"/>
+              <a:t>合成為</a:t>
+            </a:r>
+            <a:r>
+              <a:rPr lang="en-US" altLang="zh-TW" dirty="0"/>
+              <a:t>3*3</a:t>
+            </a:r>
+            <a:r>
+              <a:rPr lang="zh-TW" altLang="en-US" dirty="0"/>
+              <a:t>矩陣</a:t>
+            </a:r>
+            <a:r>
+              <a:rPr lang="en-US" altLang="zh-TW" dirty="0"/>
+              <a:t>P</a:t>
+            </a:r>
+            <a:r>
+              <a:rPr lang="zh-TW" altLang="en-US" dirty="0"/>
+              <a:t>，此時</a:t>
+            </a:r>
+            <a:r>
+              <a:rPr lang="en-US" altLang="zh-TW" dirty="0"/>
+              <a:t>P</a:t>
+            </a:r>
+            <a:r>
+              <a:rPr lang="zh-TW" altLang="en-US" dirty="0"/>
+              <a:t>便代表</a:t>
+            </a:r>
+            <a:r>
+              <a:rPr lang="zh-TW" altLang="zh-TW" dirty="0"/>
+              <a:t>三原色各自的色度方向</a:t>
+            </a:r>
+            <a:endParaRPr lang="zh-TW" altLang="en-US" dirty="0"/>
+          </a:p>
+        </p:txBody>
+      </p:sp>
+      <p:sp>
+        <p:nvSpPr>
+          <p:cNvPr id="4" name="投影片編號版面配置區 3">
+            <a:extLst>
+              <a:ext uri="{FF2B5EF4-FFF2-40B4-BE49-F238E27FC236}">
+                <a16:creationId xmlns:a16="http://schemas.microsoft.com/office/drawing/2014/main" id="{9C3150AD-26DE-59A4-DABA-A8A92E906A36}"/>
+              </a:ext>
+            </a:extLst>
+          </p:cNvPr>
+          <p:cNvSpPr>
+            <a:spLocks noGrp="1"/>
+          </p:cNvSpPr>
+          <p:nvPr>
+            <p:ph type="sldNum" idx="12"/>
+          </p:nvPr>
+        </p:nvSpPr>
+        <p:spPr/>
+        <p:txBody>
+          <a:bodyPr/>
+          <a:lstStyle/>
+          <a:p>
+            <a:pPr marL="0" marR="0" lvl="0" indent="0" algn="r" rtl="0">
+              <a:spcBef>
+                <a:spcPts val="0"/>
+              </a:spcBef>
+              <a:spcAft>
+                <a:spcPts val="0"/>
+              </a:spcAft>
+              <a:buNone/>
+            </a:pPr>
+            <a:fld id="{00000000-1234-1234-1234-123412341234}" type="slidenum">
+              <a:rPr lang="en-US" sz="2000" b="0" i="0" u="none" strike="noStrike" cap="none" smtClean="0">
+                <a:solidFill>
+                  <a:schemeClr val="dk1"/>
+                </a:solidFill>
+                <a:latin typeface="Times New Roman"/>
+                <a:ea typeface="Times New Roman"/>
+                <a:cs typeface="Times New Roman"/>
+                <a:sym typeface="Times New Roman"/>
+              </a:rPr>
+              <a:t>12</a:t>
+            </a:fld>
+            <a:endParaRPr lang="en-US" sz="2000" b="0" i="0" u="none" strike="noStrike" cap="none" dirty="0">
+              <a:solidFill>
+                <a:schemeClr val="dk1"/>
+              </a:solidFill>
+              <a:latin typeface="Times New Roman"/>
+              <a:ea typeface="Times New Roman"/>
+              <a:cs typeface="Times New Roman"/>
+              <a:sym typeface="Times New Roman"/>
+            </a:endParaRPr>
+          </a:p>
+        </p:txBody>
+      </p:sp>
+    </p:spTree>
+    <p:extLst>
+      <p:ext uri="{BB962C8B-B14F-4D97-AF65-F5344CB8AC3E}">
+        <p14:creationId xmlns:p14="http://schemas.microsoft.com/office/powerpoint/2010/main" val="958879641"/>
+      </p:ext>
+    </p:extLst>
+  </p:cSld>
+  <p:clrMapOvr>
+    <a:masterClrMapping/>
+  </p:clrMapOvr>
+</p:notes>
+</file>
+
+<file path=ppt/notesSlides/notesSlide13.xml><?xml version="1.0" encoding="utf-8"?>
+<p:notes xmlns:a="http://schemas.openxmlformats.org/drawingml/2006/main" xmlns:r="http://schemas.openxmlformats.org/officeDocument/2006/relationships" xmlns:p="http://schemas.openxmlformats.org/presentationml/2006/main">
+  <p:cSld>
+    <p:spTree>
+      <p:nvGrpSpPr>
+        <p:cNvPr id="1" name="">
+          <a:extLst>
+            <a:ext uri="{FF2B5EF4-FFF2-40B4-BE49-F238E27FC236}">
+              <a16:creationId xmlns:a16="http://schemas.microsoft.com/office/drawing/2014/main" id="{9AFA681A-88EB-5E43-27F0-EA34E562E0AD}"/>
+            </a:ext>
+          </a:extLst>
+        </p:cNvPr>
+        <p:cNvGrpSpPr/>
+        <p:nvPr/>
+      </p:nvGrpSpPr>
+      <p:grpSpPr>
+        <a:xfrm>
+          <a:off x="0" y="0"/>
+          <a:ext cx="0" cy="0"/>
+          <a:chOff x="0" y="0"/>
+          <a:chExt cx="0" cy="0"/>
+        </a:xfrm>
+      </p:grpSpPr>
+      <p:sp>
+        <p:nvSpPr>
+          <p:cNvPr id="2" name="投影片影像版面配置區 1">
+            <a:extLst>
+              <a:ext uri="{FF2B5EF4-FFF2-40B4-BE49-F238E27FC236}">
+                <a16:creationId xmlns:a16="http://schemas.microsoft.com/office/drawing/2014/main" id="{26C04ECA-D873-1236-C2C8-8A052C1F5FCB}"/>
+              </a:ext>
+            </a:extLst>
+          </p:cNvPr>
+          <p:cNvSpPr>
+            <a:spLocks noGrp="1" noRot="1" noChangeAspect="1"/>
+          </p:cNvSpPr>
+          <p:nvPr>
+            <p:ph type="sldImg"/>
+          </p:nvPr>
+        </p:nvSpPr>
+        <p:spPr/>
+      </p:sp>
+      <p:sp>
+        <p:nvSpPr>
+          <p:cNvPr id="3" name="備忘稿版面配置區 2">
+            <a:extLst>
+              <a:ext uri="{FF2B5EF4-FFF2-40B4-BE49-F238E27FC236}">
+                <a16:creationId xmlns:a16="http://schemas.microsoft.com/office/drawing/2014/main" id="{BEBD2639-D696-3DD9-3C32-292A4F25C5F9}"/>
               </a:ext>
             </a:extLst>
           </p:cNvPr>
@@ -1682,7 +2240,7 @@
           <p:cNvPr id="4" name="投影片編號版面配置區 3">
             <a:extLst>
               <a:ext uri="{FF2B5EF4-FFF2-40B4-BE49-F238E27FC236}">
-                <a16:creationId xmlns:a16="http://schemas.microsoft.com/office/drawing/2014/main" id="{C74B9077-19CE-89B0-AB98-4BB2D2D042E5}"/>
+                <a16:creationId xmlns:a16="http://schemas.microsoft.com/office/drawing/2014/main" id="{D2C49B69-3433-A410-E980-5AC38B157779}"/>
               </a:ext>
             </a:extLst>
           </p:cNvPr>
@@ -1717,7 +2275,7 @@
                 <a:cs typeface="Times New Roman"/>
                 <a:sym typeface="Times New Roman"/>
               </a:rPr>
-              <a:t>10</a:t>
+              <a:t>13</a:t>
             </a:fld>
             <a:endParaRPr lang="en-US" sz="2000" b="0" i="0" u="none" strike="noStrike" cap="none" dirty="0">
               <a:solidFill>
@@ -1734,7 +2292,7 @@
     </p:spTree>
     <p:extLst>
       <p:ext uri="{BB962C8B-B14F-4D97-AF65-F5344CB8AC3E}">
-        <p14:creationId xmlns:p14="http://schemas.microsoft.com/office/powerpoint/2010/main" val="431712648"/>
+        <p14:creationId xmlns:p14="http://schemas.microsoft.com/office/powerpoint/2010/main" val="1822601194"/>
       </p:ext>
     </p:extLst>
   </p:cSld>
@@ -1744,7 +2302,273 @@
 </p:notes>
 </file>
 
-<file path=ppt/notesSlides/notesSlide11.xml><?xml version="1.0" encoding="utf-8"?>
+<file path=ppt/notesSlides/notesSlide14.xml><?xml version="1.0" encoding="utf-8"?>
+<p:notes xmlns:a="http://schemas.openxmlformats.org/drawingml/2006/main" xmlns:r="http://schemas.openxmlformats.org/officeDocument/2006/relationships" xmlns:p="http://schemas.openxmlformats.org/presentationml/2006/main">
+  <p:cSld>
+    <p:spTree>
+      <p:nvGrpSpPr>
+        <p:cNvPr id="1" name="">
+          <a:extLst>
+            <a:ext uri="{FF2B5EF4-FFF2-40B4-BE49-F238E27FC236}">
+              <a16:creationId xmlns:a16="http://schemas.microsoft.com/office/drawing/2014/main" id="{248C1817-9E04-5A55-E8CC-FD3FF3F825B3}"/>
+            </a:ext>
+          </a:extLst>
+        </p:cNvPr>
+        <p:cNvGrpSpPr/>
+        <p:nvPr/>
+      </p:nvGrpSpPr>
+      <p:grpSpPr>
+        <a:xfrm>
+          <a:off x="0" y="0"/>
+          <a:ext cx="0" cy="0"/>
+          <a:chOff x="0" y="0"/>
+          <a:chExt cx="0" cy="0"/>
+        </a:xfrm>
+      </p:grpSpPr>
+      <p:sp>
+        <p:nvSpPr>
+          <p:cNvPr id="2" name="投影片影像版面配置區 1">
+            <a:extLst>
+              <a:ext uri="{FF2B5EF4-FFF2-40B4-BE49-F238E27FC236}">
+                <a16:creationId xmlns:a16="http://schemas.microsoft.com/office/drawing/2014/main" id="{7299D6F9-1619-B844-57EE-48AA0121A278}"/>
+              </a:ext>
+            </a:extLst>
+          </p:cNvPr>
+          <p:cNvSpPr>
+            <a:spLocks noGrp="1" noRot="1" noChangeAspect="1"/>
+          </p:cNvSpPr>
+          <p:nvPr>
+            <p:ph type="sldImg"/>
+          </p:nvPr>
+        </p:nvSpPr>
+        <p:spPr/>
+      </p:sp>
+      <p:sp>
+        <p:nvSpPr>
+          <p:cNvPr id="3" name="備忘稿版面配置區 2">
+            <a:extLst>
+              <a:ext uri="{FF2B5EF4-FFF2-40B4-BE49-F238E27FC236}">
+                <a16:creationId xmlns:a16="http://schemas.microsoft.com/office/drawing/2014/main" id="{17B0488B-586D-2F37-7E25-09C139D9BBCE}"/>
+              </a:ext>
+            </a:extLst>
+          </p:cNvPr>
+          <p:cNvSpPr>
+            <a:spLocks noGrp="1"/>
+          </p:cNvSpPr>
+          <p:nvPr>
+            <p:ph type="body" idx="1"/>
+          </p:nvPr>
+        </p:nvSpPr>
+        <p:spPr/>
+        <p:txBody>
+          <a:bodyPr/>
+          <a:lstStyle/>
+          <a:p>
+            <a:endParaRPr lang="zh-TW" altLang="en-US" dirty="0"/>
+          </a:p>
+        </p:txBody>
+      </p:sp>
+      <p:sp>
+        <p:nvSpPr>
+          <p:cNvPr id="4" name="投影片編號版面配置區 3">
+            <a:extLst>
+              <a:ext uri="{FF2B5EF4-FFF2-40B4-BE49-F238E27FC236}">
+                <a16:creationId xmlns:a16="http://schemas.microsoft.com/office/drawing/2014/main" id="{3341146E-6544-F922-461C-1EB94C558E3D}"/>
+              </a:ext>
+            </a:extLst>
+          </p:cNvPr>
+          <p:cNvSpPr>
+            <a:spLocks noGrp="1"/>
+          </p:cNvSpPr>
+          <p:nvPr>
+            <p:ph type="sldNum" idx="12"/>
+          </p:nvPr>
+        </p:nvSpPr>
+        <p:spPr/>
+        <p:txBody>
+          <a:bodyPr/>
+          <a:lstStyle/>
+          <a:p>
+            <a:pPr marL="0" marR="0" lvl="0" indent="0" algn="r" rtl="0">
+              <a:spcBef>
+                <a:spcPts val="0"/>
+              </a:spcBef>
+              <a:spcAft>
+                <a:spcPts val="0"/>
+              </a:spcAft>
+              <a:buNone/>
+            </a:pPr>
+            <a:fld id="{00000000-1234-1234-1234-123412341234}" type="slidenum">
+              <a:rPr lang="en-US" sz="2000" b="0" i="0" u="none" strike="noStrike" cap="none" smtClean="0">
+                <a:solidFill>
+                  <a:schemeClr val="dk1"/>
+                </a:solidFill>
+                <a:latin typeface="Times New Roman"/>
+                <a:ea typeface="Times New Roman"/>
+                <a:cs typeface="Times New Roman"/>
+                <a:sym typeface="Times New Roman"/>
+              </a:rPr>
+              <a:t>14</a:t>
+            </a:fld>
+            <a:endParaRPr lang="en-US" sz="2000" b="0" i="0" u="none" strike="noStrike" cap="none" dirty="0">
+              <a:solidFill>
+                <a:schemeClr val="dk1"/>
+              </a:solidFill>
+              <a:latin typeface="Times New Roman"/>
+              <a:ea typeface="Times New Roman"/>
+              <a:cs typeface="Times New Roman"/>
+              <a:sym typeface="Times New Roman"/>
+            </a:endParaRPr>
+          </a:p>
+        </p:txBody>
+      </p:sp>
+    </p:spTree>
+    <p:extLst>
+      <p:ext uri="{BB962C8B-B14F-4D97-AF65-F5344CB8AC3E}">
+        <p14:creationId xmlns:p14="http://schemas.microsoft.com/office/powerpoint/2010/main" val="1390530520"/>
+      </p:ext>
+    </p:extLst>
+  </p:cSld>
+  <p:clrMapOvr>
+    <a:masterClrMapping/>
+  </p:clrMapOvr>
+</p:notes>
+</file>
+
+<file path=ppt/notesSlides/notesSlide15.xml><?xml version="1.0" encoding="utf-8"?>
+<p:notes xmlns:a="http://schemas.openxmlformats.org/drawingml/2006/main" xmlns:r="http://schemas.openxmlformats.org/officeDocument/2006/relationships" xmlns:p="http://schemas.openxmlformats.org/presentationml/2006/main">
+  <p:cSld>
+    <p:spTree>
+      <p:nvGrpSpPr>
+        <p:cNvPr id="1" name="">
+          <a:extLst>
+            <a:ext uri="{FF2B5EF4-FFF2-40B4-BE49-F238E27FC236}">
+              <a16:creationId xmlns:a16="http://schemas.microsoft.com/office/drawing/2014/main" id="{9F75C3F7-F131-3F7D-0332-B853C81F541B}"/>
+            </a:ext>
+          </a:extLst>
+        </p:cNvPr>
+        <p:cNvGrpSpPr/>
+        <p:nvPr/>
+      </p:nvGrpSpPr>
+      <p:grpSpPr>
+        <a:xfrm>
+          <a:off x="0" y="0"/>
+          <a:ext cx="0" cy="0"/>
+          <a:chOff x="0" y="0"/>
+          <a:chExt cx="0" cy="0"/>
+        </a:xfrm>
+      </p:grpSpPr>
+      <p:sp>
+        <p:nvSpPr>
+          <p:cNvPr id="2" name="投影片影像版面配置區 1">
+            <a:extLst>
+              <a:ext uri="{FF2B5EF4-FFF2-40B4-BE49-F238E27FC236}">
+                <a16:creationId xmlns:a16="http://schemas.microsoft.com/office/drawing/2014/main" id="{F8E069C7-B926-F35E-EA2C-86335228DDDA}"/>
+              </a:ext>
+            </a:extLst>
+          </p:cNvPr>
+          <p:cNvSpPr>
+            <a:spLocks noGrp="1" noRot="1" noChangeAspect="1"/>
+          </p:cNvSpPr>
+          <p:nvPr>
+            <p:ph type="sldImg"/>
+          </p:nvPr>
+        </p:nvSpPr>
+        <p:spPr/>
+      </p:sp>
+      <p:sp>
+        <p:nvSpPr>
+          <p:cNvPr id="3" name="備忘稿版面配置區 2">
+            <a:extLst>
+              <a:ext uri="{FF2B5EF4-FFF2-40B4-BE49-F238E27FC236}">
+                <a16:creationId xmlns:a16="http://schemas.microsoft.com/office/drawing/2014/main" id="{55E942C1-E03C-D970-B419-17F1785ADDD6}"/>
+              </a:ext>
+            </a:extLst>
+          </p:cNvPr>
+          <p:cNvSpPr>
+            <a:spLocks noGrp="1"/>
+          </p:cNvSpPr>
+          <p:nvPr>
+            <p:ph type="body" idx="1"/>
+          </p:nvPr>
+        </p:nvSpPr>
+        <p:spPr/>
+        <p:txBody>
+          <a:bodyPr/>
+          <a:lstStyle/>
+          <a:p>
+            <a:endParaRPr lang="zh-TW" altLang="en-US" dirty="0"/>
+          </a:p>
+        </p:txBody>
+      </p:sp>
+      <p:sp>
+        <p:nvSpPr>
+          <p:cNvPr id="4" name="投影片編號版面配置區 3">
+            <a:extLst>
+              <a:ext uri="{FF2B5EF4-FFF2-40B4-BE49-F238E27FC236}">
+                <a16:creationId xmlns:a16="http://schemas.microsoft.com/office/drawing/2014/main" id="{31B50614-590C-CC48-8F4F-397D496E53D9}"/>
+              </a:ext>
+            </a:extLst>
+          </p:cNvPr>
+          <p:cNvSpPr>
+            <a:spLocks noGrp="1"/>
+          </p:cNvSpPr>
+          <p:nvPr>
+            <p:ph type="sldNum" idx="12"/>
+          </p:nvPr>
+        </p:nvSpPr>
+        <p:spPr/>
+        <p:txBody>
+          <a:bodyPr/>
+          <a:lstStyle/>
+          <a:p>
+            <a:pPr marL="0" marR="0" lvl="0" indent="0" algn="r" rtl="0">
+              <a:spcBef>
+                <a:spcPts val="0"/>
+              </a:spcBef>
+              <a:spcAft>
+                <a:spcPts val="0"/>
+              </a:spcAft>
+              <a:buNone/>
+            </a:pPr>
+            <a:fld id="{00000000-1234-1234-1234-123412341234}" type="slidenum">
+              <a:rPr lang="en-US" sz="2000" b="0" i="0" u="none" strike="noStrike" cap="none" smtClean="0">
+                <a:solidFill>
+                  <a:schemeClr val="dk1"/>
+                </a:solidFill>
+                <a:latin typeface="Times New Roman"/>
+                <a:ea typeface="Times New Roman"/>
+                <a:cs typeface="Times New Roman"/>
+                <a:sym typeface="Times New Roman"/>
+              </a:rPr>
+              <a:t>15</a:t>
+            </a:fld>
+            <a:endParaRPr lang="en-US" sz="2000" b="0" i="0" u="none" strike="noStrike" cap="none" dirty="0">
+              <a:solidFill>
+                <a:schemeClr val="dk1"/>
+              </a:solidFill>
+              <a:latin typeface="Times New Roman"/>
+              <a:ea typeface="Times New Roman"/>
+              <a:cs typeface="Times New Roman"/>
+              <a:sym typeface="Times New Roman"/>
+            </a:endParaRPr>
+          </a:p>
+        </p:txBody>
+      </p:sp>
+    </p:spTree>
+    <p:extLst>
+      <p:ext uri="{BB962C8B-B14F-4D97-AF65-F5344CB8AC3E}">
+        <p14:creationId xmlns:p14="http://schemas.microsoft.com/office/powerpoint/2010/main" val="1729299408"/>
+      </p:ext>
+    </p:extLst>
+  </p:cSld>
+  <p:clrMapOvr>
+    <a:masterClrMapping/>
+  </p:clrMapOvr>
+</p:notes>
+</file>
+
+<file path=ppt/notesSlides/notesSlide16.xml><?xml version="1.0" encoding="utf-8"?>
 <p:notes xmlns:a="http://schemas.openxmlformats.org/drawingml/2006/main" xmlns:r="http://schemas.openxmlformats.org/officeDocument/2006/relationships" xmlns:p="http://schemas.openxmlformats.org/presentationml/2006/main">
   <p:cSld>
     <p:spTree>
@@ -1812,7 +2636,7 @@
           <a:p>
             <a:fld id="{F5753A29-9D77-4C26-8BEC-432FE5D4B0A4}" type="slidenum">
               <a:rPr lang="en-US" altLang="zh-TW" smtClean="0"/>
-              <a:t>11</a:t>
+              <a:t>16</a:t>
             </a:fld>
             <a:endParaRPr lang="en-US" altLang="zh-TW" dirty="0"/>
           </a:p>
@@ -2938,7 +3762,7 @@
         <p:cNvPr id="1" name="">
           <a:extLst>
             <a:ext uri="{FF2B5EF4-FFF2-40B4-BE49-F238E27FC236}">
-              <a16:creationId xmlns:a16="http://schemas.microsoft.com/office/drawing/2014/main" id="{D5BDCB87-D510-3E12-0B70-9F66CF2E4F53}"/>
+              <a16:creationId xmlns:a16="http://schemas.microsoft.com/office/drawing/2014/main" id="{FBDEAE93-D8A3-3EE5-007C-F218E56D2A4B}"/>
             </a:ext>
           </a:extLst>
         </p:cNvPr>
@@ -2958,7 +3782,7 @@
           <p:cNvPr id="2" name="投影片影像版面配置區 1">
             <a:extLst>
               <a:ext uri="{FF2B5EF4-FFF2-40B4-BE49-F238E27FC236}">
-                <a16:creationId xmlns:a16="http://schemas.microsoft.com/office/drawing/2014/main" id="{9C2220D8-AB85-841B-EEFB-AA26789AEC0A}"/>
+                <a16:creationId xmlns:a16="http://schemas.microsoft.com/office/drawing/2014/main" id="{1C3FFCF8-B18E-236B-EFEE-9715F350570A}"/>
               </a:ext>
             </a:extLst>
           </p:cNvPr>
@@ -2976,7 +3800,7 @@
           <p:cNvPr id="3" name="備忘稿版面配置區 2">
             <a:extLst>
               <a:ext uri="{FF2B5EF4-FFF2-40B4-BE49-F238E27FC236}">
-                <a16:creationId xmlns:a16="http://schemas.microsoft.com/office/drawing/2014/main" id="{7E014429-932D-C388-46B7-D1B69AE89375}"/>
+                <a16:creationId xmlns:a16="http://schemas.microsoft.com/office/drawing/2014/main" id="{D7E435E3-71C9-D808-9B63-4321E5212AED}"/>
               </a:ext>
             </a:extLst>
           </p:cNvPr>
@@ -2992,6 +3816,47 @@
           <a:bodyPr/>
           <a:lstStyle/>
           <a:p>
+            <a:r>
+              <a:rPr lang="zh-TW" altLang="en-US" dirty="0"/>
+              <a:t>僅限在</a:t>
+            </a:r>
+            <a:r>
+              <a:rPr lang="zh-TW" altLang="zh-TW" b="0" dirty="0"/>
+              <a:t>ICC v4 Display </a:t>
+            </a:r>
+            <a:r>
+              <a:rPr lang="zh-TW" altLang="en-US" b="0" dirty="0"/>
+              <a:t>中</a:t>
+            </a:r>
+            <a:endParaRPr lang="en-US" altLang="zh-TW" b="0" dirty="0"/>
+          </a:p>
+          <a:p>
+            <a:r>
+              <a:rPr lang="en-US" altLang="zh-TW" sz="1200" dirty="0" err="1">
+                <a:solidFill>
+                  <a:schemeClr val="tx1"/>
+                </a:solidFill>
+                <a:latin typeface="Times New Roman" panose="02020603050405020304" pitchFamily="18" charset="0"/>
+                <a:ea typeface="標楷體" panose="03000509000000000000" pitchFamily="65" charset="-120"/>
+                <a:cs typeface="Times New Roman" panose="02020603050405020304" pitchFamily="18" charset="0"/>
+              </a:rPr>
+              <a:t>Wtpt</a:t>
+            </a:r>
+            <a:r>
+              <a:rPr lang="zh-TW" altLang="en-US" sz="1200" dirty="0">
+                <a:solidFill>
+                  <a:schemeClr val="tx1"/>
+                </a:solidFill>
+                <a:latin typeface="Times New Roman" panose="02020603050405020304" pitchFamily="18" charset="0"/>
+                <a:ea typeface="標楷體" panose="03000509000000000000" pitchFamily="65" charset="-120"/>
+                <a:cs typeface="Times New Roman" panose="02020603050405020304" pitchFamily="18" charset="0"/>
+              </a:rPr>
+              <a:t>：</a:t>
+            </a:r>
+            <a:r>
+              <a:rPr lang="zh-TW" altLang="zh-TW" dirty="0"/>
+              <a:t>告訴 CMM：這個 Profile 的 white reference 是什麼，讓 CMM 可以把色彩用相對於 white 的尺度來表示。</a:t>
+            </a:r>
             <a:endParaRPr lang="zh-TW" altLang="en-US" dirty="0"/>
           </a:p>
         </p:txBody>
@@ -3001,7 +3866,7 @@
           <p:cNvPr id="4" name="投影片編號版面配置區 3">
             <a:extLst>
               <a:ext uri="{FF2B5EF4-FFF2-40B4-BE49-F238E27FC236}">
-                <a16:creationId xmlns:a16="http://schemas.microsoft.com/office/drawing/2014/main" id="{ECE301C6-59CB-7CC2-23BD-00E11BDD5D3D}"/>
+                <a16:creationId xmlns:a16="http://schemas.microsoft.com/office/drawing/2014/main" id="{355E2071-01B2-BE21-6908-4B8530BFA782}"/>
               </a:ext>
             </a:extLst>
           </p:cNvPr>
@@ -3053,7 +3918,7 @@
     </p:spTree>
     <p:extLst>
       <p:ext uri="{BB962C8B-B14F-4D97-AF65-F5344CB8AC3E}">
-        <p14:creationId xmlns:p14="http://schemas.microsoft.com/office/powerpoint/2010/main" val="3964529647"/>
+        <p14:creationId xmlns:p14="http://schemas.microsoft.com/office/powerpoint/2010/main" val="799577361"/>
       </p:ext>
     </p:extLst>
   </p:cSld>
@@ -8048,7 +8913,7 @@
         <p:cNvPr id="1" name="">
           <a:extLst>
             <a:ext uri="{FF2B5EF4-FFF2-40B4-BE49-F238E27FC236}">
-              <a16:creationId xmlns:a16="http://schemas.microsoft.com/office/drawing/2014/main" id="{CB3F1D18-D49B-24B7-7AE4-1C148C1CF218}"/>
+              <a16:creationId xmlns:a16="http://schemas.microsoft.com/office/drawing/2014/main" id="{B6656493-F3A6-959B-6C6E-441F9AE0B2F9}"/>
             </a:ext>
           </a:extLst>
         </p:cNvPr>
@@ -8068,7 +8933,7 @@
           <p:cNvPr id="5" name="標題 1">
             <a:extLst>
               <a:ext uri="{FF2B5EF4-FFF2-40B4-BE49-F238E27FC236}">
-                <a16:creationId xmlns:a16="http://schemas.microsoft.com/office/drawing/2014/main" id="{509D26C7-0D1B-6B5F-78B0-58B9AB2272BC}"/>
+                <a16:creationId xmlns:a16="http://schemas.microsoft.com/office/drawing/2014/main" id="{3320CFA9-28E3-D7FB-2C57-16F39BE2132B}"/>
               </a:ext>
             </a:extLst>
           </p:cNvPr>
@@ -8122,7 +8987,7 @@
           <p:cNvPr id="10" name="文字版面配置區 6">
             <a:extLst>
               <a:ext uri="{FF2B5EF4-FFF2-40B4-BE49-F238E27FC236}">
-                <a16:creationId xmlns:a16="http://schemas.microsoft.com/office/drawing/2014/main" id="{ED0EFAE0-FF23-F1C1-C216-8C274B22FF64}"/>
+                <a16:creationId xmlns:a16="http://schemas.microsoft.com/office/drawing/2014/main" id="{007B1E75-D27A-48F9-546B-3DE6D9FA6FD9}"/>
               </a:ext>
             </a:extLst>
           </p:cNvPr>
@@ -8406,19 +9271,30 @@
               <a:buChar char="❖"/>
             </a:pPr>
             <a:r>
-              <a:rPr lang="en-US" altLang="zh-TW" sz="2000" dirty="0"/>
-              <a:t>0</a:t>
-            </a:r>
-            <a:endParaRPr lang="en-US" altLang="zh-TW" dirty="0"/>
+              <a:rPr lang="zh-TW" altLang="zh-TW" sz="2000" dirty="0"/>
+              <a:t>Matrix</a:t>
+            </a:r>
+            <a:endParaRPr lang="en-US" altLang="zh-TW" sz="2000" dirty="0"/>
           </a:p>
           <a:p>
-            <a:pPr lvl="1">
-              <a:lnSpc>
-                <a:spcPts val="3000"/>
-              </a:lnSpc>
-            </a:pPr>
-            <a:r>
-              <a:rPr lang="en-US" altLang="zh-TW" sz="1600" dirty="0">
+            <a:pPr lvl="1"/>
+            <a:r>
+              <a:rPr lang="zh-TW" altLang="zh-TW" sz="1600" dirty="0"/>
+              <a:t>ICC 官方說：</a:t>
+            </a:r>
+            <a:br>
+              <a:rPr lang="en-US" altLang="zh-TW" sz="1600" dirty="0"/>
+            </a:br>
+            <a:r>
+              <a:rPr lang="zh-TW" altLang="zh-TW" sz="1600" dirty="0"/>
+              <a:t>The 3 × 3 matrix converts these linearized values into XYZ values</a:t>
+            </a:r>
+            <a:endParaRPr lang="en-US" altLang="zh-TW" sz="1600" dirty="0"/>
+          </a:p>
+          <a:p>
+            <a:pPr lvl="1"/>
+            <a:r>
+              <a:rPr lang="zh-TW" altLang="en-US" sz="1600" dirty="0">
                 <a:solidFill>
                   <a:srgbClr val="333333"/>
                 </a:solidFill>
@@ -8426,8 +9302,26 @@
                 <a:ea typeface="標楷體" panose="03000509000000000000" pitchFamily="65" charset="-120"/>
                 <a:cs typeface="Times New Roman" panose="02020603050405020304" pitchFamily="18" charset="0"/>
               </a:rPr>
-              <a:t>0</a:t>
-            </a:r>
+              <a:t>公式：</a:t>
+            </a:r>
+            <a:br>
+              <a:rPr lang="en-US" altLang="zh-TW" sz="1600" dirty="0">
+                <a:solidFill>
+                  <a:srgbClr val="333333"/>
+                </a:solidFill>
+                <a:latin typeface="Times New Roman" panose="02020603050405020304" pitchFamily="18" charset="0"/>
+                <a:ea typeface="標楷體" panose="03000509000000000000" pitchFamily="65" charset="-120"/>
+                <a:cs typeface="Times New Roman" panose="02020603050405020304" pitchFamily="18" charset="0"/>
+              </a:rPr>
+            </a:br>
+            <a:endParaRPr lang="en-US" altLang="zh-TW" sz="1600" dirty="0">
+              <a:solidFill>
+                <a:srgbClr val="333333"/>
+              </a:solidFill>
+              <a:latin typeface="Times New Roman" panose="02020603050405020304" pitchFamily="18" charset="0"/>
+              <a:ea typeface="標楷體" panose="03000509000000000000" pitchFamily="65" charset="-120"/>
+              <a:cs typeface="Times New Roman" panose="02020603050405020304" pitchFamily="18" charset="0"/>
+            </a:endParaRPr>
           </a:p>
           <a:p>
             <a:pPr>
@@ -8458,10 +9352,173 @@
           </a:p>
         </p:txBody>
       </p:sp>
+      <p:pic>
+        <p:nvPicPr>
+          <p:cNvPr id="3" name="圖片 2">
+            <a:extLst>
+              <a:ext uri="{FF2B5EF4-FFF2-40B4-BE49-F238E27FC236}">
+                <a16:creationId xmlns:a16="http://schemas.microsoft.com/office/drawing/2014/main" id="{23069008-8ABC-1FFF-7B64-71606DE2A007}"/>
+              </a:ext>
+            </a:extLst>
+          </p:cNvPr>
+          <p:cNvPicPr>
+            <a:picLocks noChangeAspect="1"/>
+          </p:cNvPicPr>
+          <p:nvPr/>
+        </p:nvPicPr>
+        <p:blipFill>
+          <a:blip r:embed="rId3"/>
+          <a:stretch>
+            <a:fillRect/>
+          </a:stretch>
+        </p:blipFill>
+        <p:spPr>
+          <a:xfrm>
+            <a:off x="1927184" y="3429000"/>
+            <a:ext cx="5674449" cy="1107488"/>
+          </a:xfrm>
+          <a:prstGeom prst="rect">
+            <a:avLst/>
+          </a:prstGeom>
+        </p:spPr>
+      </p:pic>
+      <mc:AlternateContent xmlns:mc="http://schemas.openxmlformats.org/markup-compatibility/2006">
+        <mc:Choice xmlns:a14="http://schemas.microsoft.com/office/drawing/2010/main" Requires="a14">
+          <p:sp>
+            <p:nvSpPr>
+              <p:cNvPr id="4" name="文字方塊 3">
+                <a:extLst>
+                  <a:ext uri="{FF2B5EF4-FFF2-40B4-BE49-F238E27FC236}">
+                    <a16:creationId xmlns:a16="http://schemas.microsoft.com/office/drawing/2014/main" id="{9B67E9F5-F957-9B0C-67F6-EB71457FB492}"/>
+                  </a:ext>
+                </a:extLst>
+              </p:cNvPr>
+              <p:cNvSpPr txBox="1"/>
+              <p:nvPr/>
+            </p:nvSpPr>
+            <p:spPr>
+              <a:xfrm>
+                <a:off x="1927184" y="2766273"/>
+                <a:ext cx="2019784" cy="307777"/>
+              </a:xfrm>
+              <a:prstGeom prst="rect">
+                <a:avLst/>
+              </a:prstGeom>
+              <a:noFill/>
+            </p:spPr>
+            <p:txBody>
+              <a:bodyPr wrap="none" lIns="0" tIns="0" rIns="0" bIns="0" rtlCol="0">
+                <a:spAutoFit/>
+              </a:bodyPr>
+              <a:lstStyle/>
+              <a:p>
+                <a14:m>
+                  <m:oMathPara xmlns:m="http://schemas.openxmlformats.org/officeDocument/2006/math">
+                    <m:oMath>
+                      <m:r>
+                        <m:rPr>
+                          <m:nor/>
+                        </m:rPr>
+                        <a:rPr lang="en-US" altLang="zh-TW" sz="2000"/>
+                        <m:t>XYZ</m:t>
+                      </m:r>
+                      <m:r>
+                        <a:rPr lang="zh-TW" altLang="en-US" sz="2000" i="1" smtClean="0">
+                          <a:latin typeface="Cambria Math" panose="02040503050406030204" pitchFamily="18" charset="0"/>
+                        </a:rPr>
+                        <m:t> </m:t>
+                      </m:r>
+                      <m:r>
+                        <m:rPr>
+                          <m:nor/>
+                        </m:rPr>
+                        <a:rPr lang="en-US" altLang="zh-TW" sz="2000"/>
+                        <m:t>=</m:t>
+                      </m:r>
+                      <m:r>
+                        <a:rPr lang="zh-TW" altLang="en-US" sz="2000" i="1" smtClean="0">
+                          <a:latin typeface="Cambria Math" panose="02040503050406030204" pitchFamily="18" charset="0"/>
+                        </a:rPr>
+                        <m:t> </m:t>
+                      </m:r>
+                      <m:r>
+                        <m:rPr>
+                          <m:nor/>
+                        </m:rPr>
+                        <a:rPr lang="en-US" altLang="zh-TW" sz="2000"/>
+                        <m:t>MRGB</m:t>
+                      </m:r>
+                      <m:r>
+                        <m:rPr>
+                          <m:nor/>
+                        </m:rPr>
+                        <a:rPr lang="en-US" altLang="zh-TW" sz="2000" baseline="-25000" smtClean="0"/>
+                        <m:t>linear</m:t>
+                      </m:r>
+                      <m:r>
+                        <m:rPr>
+                          <m:nor/>
+                        </m:rPr>
+                        <a:rPr lang="en-US" altLang="zh-TW" sz="2000"/>
+                        <m:t>​</m:t>
+                      </m:r>
+                    </m:oMath>
+                  </m:oMathPara>
+                </a14:m>
+                <a:endParaRPr lang="zh-TW" altLang="en-US" sz="2000" dirty="0"/>
+              </a:p>
+            </p:txBody>
+          </p:sp>
+        </mc:Choice>
+        <mc:Fallback>
+          <p:sp>
+            <p:nvSpPr>
+              <p:cNvPr id="4" name="文字方塊 3">
+                <a:extLst>
+                  <a:ext uri="{FF2B5EF4-FFF2-40B4-BE49-F238E27FC236}">
+                    <a16:creationId xmlns:a16="http://schemas.microsoft.com/office/drawing/2014/main" id="{9B67E9F5-F957-9B0C-67F6-EB71457FB492}"/>
+                  </a:ext>
+                </a:extLst>
+              </p:cNvPr>
+              <p:cNvSpPr txBox="1">
+                <a:spLocks noRot="1" noChangeAspect="1" noMove="1" noResize="1" noEditPoints="1" noAdjustHandles="1" noChangeArrowheads="1" noChangeShapeType="1" noTextEdit="1"/>
+              </p:cNvSpPr>
+              <p:nvPr/>
+            </p:nvSpPr>
+            <p:spPr>
+              <a:xfrm>
+                <a:off x="1927184" y="2766273"/>
+                <a:ext cx="2019784" cy="307777"/>
+              </a:xfrm>
+              <a:prstGeom prst="rect">
+                <a:avLst/>
+              </a:prstGeom>
+              <a:blipFill>
+                <a:blip r:embed="rId4"/>
+                <a:stretch>
+                  <a:fillRect l="-2417" r="-1208" b="-20000"/>
+                </a:stretch>
+              </a:blipFill>
+            </p:spPr>
+            <p:txBody>
+              <a:bodyPr/>
+              <a:lstStyle/>
+              <a:p>
+                <a:r>
+                  <a:rPr lang="zh-TW" altLang="en-US">
+                    <a:noFill/>
+                  </a:rPr>
+                  <a:t> </a:t>
+                </a:r>
+              </a:p>
+            </p:txBody>
+          </p:sp>
+        </mc:Fallback>
+      </mc:AlternateContent>
     </p:spTree>
     <p:extLst>
       <p:ext uri="{BB962C8B-B14F-4D97-AF65-F5344CB8AC3E}">
-        <p14:creationId xmlns:p14="http://schemas.microsoft.com/office/powerpoint/2010/main" val="3423728179"/>
+        <p14:creationId xmlns:p14="http://schemas.microsoft.com/office/powerpoint/2010/main" val="1589577729"/>
       </p:ext>
     </p:extLst>
   </p:cSld>
@@ -8472,6 +9529,5068 @@
 </file>
 
 <file path=ppt/slides/slide11.xml><?xml version="1.0" encoding="utf-8"?>
+<p:sld xmlns:a="http://schemas.openxmlformats.org/drawingml/2006/main" xmlns:r="http://schemas.openxmlformats.org/officeDocument/2006/relationships" xmlns:p="http://schemas.openxmlformats.org/presentationml/2006/main">
+  <p:cSld>
+    <p:spTree>
+      <p:nvGrpSpPr>
+        <p:cNvPr id="1" name="">
+          <a:extLst>
+            <a:ext uri="{FF2B5EF4-FFF2-40B4-BE49-F238E27FC236}">
+              <a16:creationId xmlns:a16="http://schemas.microsoft.com/office/drawing/2014/main" id="{D91FE357-957A-3182-12E7-90F219E152EF}"/>
+            </a:ext>
+          </a:extLst>
+        </p:cNvPr>
+        <p:cNvGrpSpPr/>
+        <p:nvPr/>
+      </p:nvGrpSpPr>
+      <p:grpSpPr>
+        <a:xfrm>
+          <a:off x="0" y="0"/>
+          <a:ext cx="0" cy="0"/>
+          <a:chOff x="0" y="0"/>
+          <a:chExt cx="0" cy="0"/>
+        </a:xfrm>
+      </p:grpSpPr>
+      <p:sp>
+        <p:nvSpPr>
+          <p:cNvPr id="5" name="標題 1">
+            <a:extLst>
+              <a:ext uri="{FF2B5EF4-FFF2-40B4-BE49-F238E27FC236}">
+                <a16:creationId xmlns:a16="http://schemas.microsoft.com/office/drawing/2014/main" id="{61298DEC-0097-A431-0637-9C6765567C9F}"/>
+              </a:ext>
+            </a:extLst>
+          </p:cNvPr>
+          <p:cNvSpPr>
+            <a:spLocks noGrp="1"/>
+          </p:cNvSpPr>
+          <p:nvPr>
+            <p:ph type="title"/>
+          </p:nvPr>
+        </p:nvSpPr>
+        <p:spPr>
+          <a:xfrm>
+            <a:off x="609602" y="609600"/>
+            <a:ext cx="8077200" cy="533400"/>
+          </a:xfrm>
+        </p:spPr>
+        <p:txBody>
+          <a:bodyPr/>
+          <a:lstStyle/>
+          <a:p>
+            <a:r>
+              <a:rPr lang="zh-TW" altLang="en-US" dirty="0">
+                <a:latin typeface="Times New Roman" panose="02020603050405020304" pitchFamily="18" charset="0"/>
+                <a:ea typeface="標楷體" panose="03000509000000000000" pitchFamily="65" charset="-120"/>
+                <a:cs typeface="Times New Roman" panose="02020603050405020304" pitchFamily="18" charset="0"/>
+              </a:rPr>
+              <a:t>本次進度</a:t>
+            </a:r>
+            <a:r>
+              <a:rPr lang="en-US" altLang="zh-TW" dirty="0">
+                <a:latin typeface="Times New Roman" panose="02020603050405020304" pitchFamily="18" charset="0"/>
+                <a:ea typeface="標楷體" panose="03000509000000000000" pitchFamily="65" charset="-120"/>
+                <a:cs typeface="Times New Roman" panose="02020603050405020304" pitchFamily="18" charset="0"/>
+              </a:rPr>
+              <a:t>:</a:t>
+            </a:r>
+            <a:r>
+              <a:rPr lang="zh-TW" altLang="zh-TW" dirty="0">
+                <a:latin typeface="Times New Roman" panose="02020603050405020304" pitchFamily="18" charset="0"/>
+                <a:ea typeface="標楷體" panose="03000509000000000000" pitchFamily="65" charset="-120"/>
+                <a:cs typeface="Times New Roman" panose="02020603050405020304" pitchFamily="18" charset="0"/>
+              </a:rPr>
+              <a:t>Matrix-based Display Profile</a:t>
+            </a:r>
+            <a:endParaRPr lang="zh-TW" altLang="en-US" dirty="0">
+              <a:latin typeface="Times New Roman" panose="02020603050405020304" pitchFamily="18" charset="0"/>
+              <a:ea typeface="標楷體" panose="03000509000000000000" pitchFamily="65" charset="-120"/>
+              <a:cs typeface="Times New Roman" panose="02020603050405020304" pitchFamily="18" charset="0"/>
+            </a:endParaRPr>
+          </a:p>
+        </p:txBody>
+      </p:sp>
+      <p:graphicFrame>
+        <p:nvGraphicFramePr>
+          <p:cNvPr id="2" name="表格 1">
+            <a:extLst>
+              <a:ext uri="{FF2B5EF4-FFF2-40B4-BE49-F238E27FC236}">
+                <a16:creationId xmlns:a16="http://schemas.microsoft.com/office/drawing/2014/main" id="{CE5B8F78-8A22-D5AF-CA79-EE55EA23B193}"/>
+              </a:ext>
+            </a:extLst>
+          </p:cNvPr>
+          <p:cNvGraphicFramePr>
+            <a:graphicFrameLocks noGrp="1"/>
+          </p:cNvGraphicFramePr>
+          <p:nvPr>
+            <p:extLst>
+              <p:ext uri="{D42A27DB-BD31-4B8C-83A1-F6EECF244321}">
+                <p14:modId xmlns:p14="http://schemas.microsoft.com/office/powerpoint/2010/main" val="1008160804"/>
+              </p:ext>
+            </p:extLst>
+          </p:nvPr>
+        </p:nvGraphicFramePr>
+        <p:xfrm>
+          <a:off x="721004" y="2041972"/>
+          <a:ext cx="3142188" cy="1219200"/>
+        </p:xfrm>
+        <a:graphic>
+          <a:graphicData uri="http://schemas.openxmlformats.org/drawingml/2006/table">
+            <a:tbl>
+              <a:tblPr>
+                <a:tableStyleId>{5940675A-B579-460E-94D1-54222C63F5DA}</a:tableStyleId>
+              </a:tblPr>
+              <a:tblGrid>
+                <a:gridCol w="1047396">
+                  <a:extLst>
+                    <a:ext uri="{9D8B030D-6E8A-4147-A177-3AD203B41FA5}">
+                      <a16:colId xmlns:a16="http://schemas.microsoft.com/office/drawing/2014/main" val="3590102437"/>
+                    </a:ext>
+                  </a:extLst>
+                </a:gridCol>
+                <a:gridCol w="1047396">
+                  <a:extLst>
+                    <a:ext uri="{9D8B030D-6E8A-4147-A177-3AD203B41FA5}">
+                      <a16:colId xmlns:a16="http://schemas.microsoft.com/office/drawing/2014/main" val="3666544339"/>
+                    </a:ext>
+                  </a:extLst>
+                </a:gridCol>
+                <a:gridCol w="1047396">
+                  <a:extLst>
+                    <a:ext uri="{9D8B030D-6E8A-4147-A177-3AD203B41FA5}">
+                      <a16:colId xmlns:a16="http://schemas.microsoft.com/office/drawing/2014/main" val="455476819"/>
+                    </a:ext>
+                  </a:extLst>
+                </a:gridCol>
+              </a:tblGrid>
+              <a:tr h="298410">
+                <a:tc>
+                  <a:txBody>
+                    <a:bodyPr/>
+                    <a:lstStyle/>
+                    <a:p>
+                      <a:pPr>
+                        <a:buNone/>
+                      </a:pPr>
+                      <a:r>
+                        <a:rPr lang="zh-TW"/>
+                        <a:t>原色</a:t>
+                      </a:r>
+                    </a:p>
+                  </a:txBody>
+                  <a:tcPr anchor="ctr"/>
+                </a:tc>
+                <a:tc>
+                  <a:txBody>
+                    <a:bodyPr/>
+                    <a:lstStyle/>
+                    <a:p>
+                      <a:pPr algn="r">
+                        <a:buNone/>
+                      </a:pPr>
+                      <a:r>
+                        <a:rPr lang="zh-TW"/>
+                        <a:t>x</a:t>
+                      </a:r>
+                    </a:p>
+                  </a:txBody>
+                  <a:tcPr anchor="ctr"/>
+                </a:tc>
+                <a:tc>
+                  <a:txBody>
+                    <a:bodyPr/>
+                    <a:lstStyle/>
+                    <a:p>
+                      <a:pPr algn="r">
+                        <a:buNone/>
+                      </a:pPr>
+                      <a:r>
+                        <a:rPr lang="zh-TW"/>
+                        <a:t>y</a:t>
+                      </a:r>
+                    </a:p>
+                  </a:txBody>
+                  <a:tcPr anchor="ctr"/>
+                </a:tc>
+                <a:extLst>
+                  <a:ext uri="{0D108BD9-81ED-4DB2-BD59-A6C34878D82A}">
+                    <a16:rowId xmlns:a16="http://schemas.microsoft.com/office/drawing/2014/main" val="4117724251"/>
+                  </a:ext>
+                </a:extLst>
+              </a:tr>
+              <a:tr h="298410">
+                <a:tc>
+                  <a:txBody>
+                    <a:bodyPr/>
+                    <a:lstStyle/>
+                    <a:p>
+                      <a:pPr>
+                        <a:buNone/>
+                      </a:pPr>
+                      <a:r>
+                        <a:rPr lang="zh-TW" dirty="0"/>
+                        <a:t>R</a:t>
+                      </a:r>
+                      <a:r>
+                        <a:rPr lang="zh-TW" altLang="en-US" dirty="0"/>
+                        <a:t> </a:t>
+                      </a:r>
+                      <a:r>
+                        <a:rPr lang="en-US" altLang="zh-TW" dirty="0"/>
+                        <a:t>(255,0,0)</a:t>
+                      </a:r>
+                      <a:endParaRPr lang="zh-TW" dirty="0"/>
+                    </a:p>
+                  </a:txBody>
+                  <a:tcPr anchor="ctr"/>
+                </a:tc>
+                <a:tc>
+                  <a:txBody>
+                    <a:bodyPr/>
+                    <a:lstStyle/>
+                    <a:p>
+                      <a:pPr algn="r">
+                        <a:buNone/>
+                      </a:pPr>
+                      <a:r>
+                        <a:rPr lang="zh-TW" dirty="0"/>
+                        <a:t>0.6400</a:t>
+                      </a:r>
+                    </a:p>
+                  </a:txBody>
+                  <a:tcPr anchor="ctr"/>
+                </a:tc>
+                <a:tc>
+                  <a:txBody>
+                    <a:bodyPr/>
+                    <a:lstStyle/>
+                    <a:p>
+                      <a:pPr algn="r">
+                        <a:buNone/>
+                      </a:pPr>
+                      <a:r>
+                        <a:rPr lang="zh-TW"/>
+                        <a:t>0.3300</a:t>
+                      </a:r>
+                    </a:p>
+                  </a:txBody>
+                  <a:tcPr anchor="ctr"/>
+                </a:tc>
+                <a:extLst>
+                  <a:ext uri="{0D108BD9-81ED-4DB2-BD59-A6C34878D82A}">
+                    <a16:rowId xmlns:a16="http://schemas.microsoft.com/office/drawing/2014/main" val="2141619666"/>
+                  </a:ext>
+                </a:extLst>
+              </a:tr>
+              <a:tr h="298410">
+                <a:tc>
+                  <a:txBody>
+                    <a:bodyPr/>
+                    <a:lstStyle/>
+                    <a:p>
+                      <a:pPr>
+                        <a:buNone/>
+                      </a:pPr>
+                      <a:r>
+                        <a:rPr lang="zh-TW" dirty="0"/>
+                        <a:t>G</a:t>
+                      </a:r>
+                      <a:r>
+                        <a:rPr lang="en-US" altLang="zh-TW" dirty="0"/>
+                        <a:t> (0,255,0)</a:t>
+                      </a:r>
+                      <a:endParaRPr lang="zh-TW" dirty="0"/>
+                    </a:p>
+                  </a:txBody>
+                  <a:tcPr anchor="ctr"/>
+                </a:tc>
+                <a:tc>
+                  <a:txBody>
+                    <a:bodyPr/>
+                    <a:lstStyle/>
+                    <a:p>
+                      <a:pPr algn="r">
+                        <a:buNone/>
+                      </a:pPr>
+                      <a:r>
+                        <a:rPr lang="zh-TW"/>
+                        <a:t>0.3000</a:t>
+                      </a:r>
+                    </a:p>
+                  </a:txBody>
+                  <a:tcPr anchor="ctr"/>
+                </a:tc>
+                <a:tc>
+                  <a:txBody>
+                    <a:bodyPr/>
+                    <a:lstStyle/>
+                    <a:p>
+                      <a:pPr algn="r">
+                        <a:buNone/>
+                      </a:pPr>
+                      <a:r>
+                        <a:rPr lang="zh-TW"/>
+                        <a:t>0.6000</a:t>
+                      </a:r>
+                    </a:p>
+                  </a:txBody>
+                  <a:tcPr anchor="ctr"/>
+                </a:tc>
+                <a:extLst>
+                  <a:ext uri="{0D108BD9-81ED-4DB2-BD59-A6C34878D82A}">
+                    <a16:rowId xmlns:a16="http://schemas.microsoft.com/office/drawing/2014/main" val="3809134920"/>
+                  </a:ext>
+                </a:extLst>
+              </a:tr>
+              <a:tr h="298410">
+                <a:tc>
+                  <a:txBody>
+                    <a:bodyPr/>
+                    <a:lstStyle/>
+                    <a:p>
+                      <a:pPr>
+                        <a:buNone/>
+                      </a:pPr>
+                      <a:r>
+                        <a:rPr lang="zh-TW" dirty="0"/>
+                        <a:t>B</a:t>
+                      </a:r>
+                      <a:r>
+                        <a:rPr lang="en-US" altLang="zh-TW" dirty="0"/>
+                        <a:t> (0,0,255)</a:t>
+                      </a:r>
+                      <a:endParaRPr lang="zh-TW" dirty="0"/>
+                    </a:p>
+                  </a:txBody>
+                  <a:tcPr anchor="ctr"/>
+                </a:tc>
+                <a:tc>
+                  <a:txBody>
+                    <a:bodyPr/>
+                    <a:lstStyle/>
+                    <a:p>
+                      <a:pPr algn="r">
+                        <a:buNone/>
+                      </a:pPr>
+                      <a:r>
+                        <a:rPr lang="zh-TW"/>
+                        <a:t>0.1500</a:t>
+                      </a:r>
+                    </a:p>
+                  </a:txBody>
+                  <a:tcPr anchor="ctr"/>
+                </a:tc>
+                <a:tc>
+                  <a:txBody>
+                    <a:bodyPr/>
+                    <a:lstStyle/>
+                    <a:p>
+                      <a:pPr algn="r">
+                        <a:buNone/>
+                      </a:pPr>
+                      <a:r>
+                        <a:rPr lang="zh-TW" dirty="0"/>
+                        <a:t>0.0600</a:t>
+                      </a:r>
+                    </a:p>
+                  </a:txBody>
+                  <a:tcPr anchor="ctr"/>
+                </a:tc>
+                <a:extLst>
+                  <a:ext uri="{0D108BD9-81ED-4DB2-BD59-A6C34878D82A}">
+                    <a16:rowId xmlns:a16="http://schemas.microsoft.com/office/drawing/2014/main" val="1932515259"/>
+                  </a:ext>
+                </a:extLst>
+              </a:tr>
+            </a:tbl>
+          </a:graphicData>
+        </a:graphic>
+      </p:graphicFrame>
+      <p:sp>
+        <p:nvSpPr>
+          <p:cNvPr id="9" name="矩形 8">
+            <a:extLst>
+              <a:ext uri="{FF2B5EF4-FFF2-40B4-BE49-F238E27FC236}">
+                <a16:creationId xmlns:a16="http://schemas.microsoft.com/office/drawing/2014/main" id="{8BDB7050-E618-11BA-974C-7035CB7FA24D}"/>
+              </a:ext>
+            </a:extLst>
+          </p:cNvPr>
+          <p:cNvSpPr/>
+          <p:nvPr/>
+        </p:nvSpPr>
+        <p:spPr>
+          <a:xfrm>
+            <a:off x="1566646" y="3261172"/>
+            <a:ext cx="1210588" cy="338554"/>
+          </a:xfrm>
+          <a:prstGeom prst="rect">
+            <a:avLst/>
+          </a:prstGeom>
+          <a:noFill/>
+        </p:spPr>
+        <p:txBody>
+          <a:bodyPr wrap="none" lIns="91440" tIns="45720" rIns="91440" bIns="45720">
+            <a:spAutoFit/>
+          </a:bodyPr>
+          <a:lstStyle/>
+          <a:p>
+            <a:pPr algn="ctr"/>
+            <a:r>
+              <a:rPr lang="zh-TW" altLang="en-US" sz="1600" b="0" cap="none" spc="0" dirty="0">
+                <a:ln w="0"/>
+                <a:solidFill>
+                  <a:schemeClr val="tx1"/>
+                </a:solidFill>
+                <a:effectLst>
+                  <a:outerShdw blurRad="38100" dist="19050" dir="2700000" algn="tl" rotWithShape="0">
+                    <a:schemeClr val="dk1">
+                      <a:alpha val="40000"/>
+                    </a:schemeClr>
+                  </a:outerShdw>
+                </a:effectLst>
+                <a:latin typeface="Times New Roman" panose="02020603050405020304" pitchFamily="18" charset="0"/>
+                <a:ea typeface="標楷體" panose="03000509000000000000" pitchFamily="65" charset="-120"/>
+                <a:cs typeface="Times New Roman" panose="02020603050405020304" pitchFamily="18" charset="0"/>
+              </a:rPr>
+              <a:t>量測到的值</a:t>
+            </a:r>
+          </a:p>
+        </p:txBody>
+      </p:sp>
+      <p:grpSp>
+        <p:nvGrpSpPr>
+          <p:cNvPr id="15" name="群組 14">
+            <a:extLst>
+              <a:ext uri="{FF2B5EF4-FFF2-40B4-BE49-F238E27FC236}">
+                <a16:creationId xmlns:a16="http://schemas.microsoft.com/office/drawing/2014/main" id="{9BD8A25A-99B7-8869-62AF-2D36C98876FA}"/>
+              </a:ext>
+            </a:extLst>
+          </p:cNvPr>
+          <p:cNvGrpSpPr/>
+          <p:nvPr/>
+        </p:nvGrpSpPr>
+        <p:grpSpPr>
+          <a:xfrm>
+            <a:off x="1566646" y="4235611"/>
+            <a:ext cx="1481394" cy="1337705"/>
+            <a:chOff x="4548850" y="2882096"/>
+            <a:chExt cx="1481394" cy="1337705"/>
+          </a:xfrm>
+        </p:grpSpPr>
+        <p:grpSp>
+          <p:nvGrpSpPr>
+            <p:cNvPr id="8" name="群組 7">
+              <a:extLst>
+                <a:ext uri="{FF2B5EF4-FFF2-40B4-BE49-F238E27FC236}">
+                  <a16:creationId xmlns:a16="http://schemas.microsoft.com/office/drawing/2014/main" id="{786F443D-0782-D5C7-CFA3-08A5D4B6BFEC}"/>
+                </a:ext>
+              </a:extLst>
+            </p:cNvPr>
+            <p:cNvGrpSpPr/>
+            <p:nvPr/>
+          </p:nvGrpSpPr>
+          <p:grpSpPr>
+            <a:xfrm>
+              <a:off x="4548850" y="2882096"/>
+              <a:ext cx="1481394" cy="717630"/>
+              <a:chOff x="4444678" y="2812648"/>
+              <a:chExt cx="1481394" cy="717630"/>
+            </a:xfrm>
+          </p:grpSpPr>
+          <p:sp>
+            <p:nvSpPr>
+              <p:cNvPr id="7" name="矩形 6">
+                <a:extLst>
+                  <a:ext uri="{FF2B5EF4-FFF2-40B4-BE49-F238E27FC236}">
+                    <a16:creationId xmlns:a16="http://schemas.microsoft.com/office/drawing/2014/main" id="{BB4D6CD5-7B46-9599-FFCA-74970E1E73B5}"/>
+                  </a:ext>
+                </a:extLst>
+              </p:cNvPr>
+              <p:cNvSpPr/>
+              <p:nvPr/>
+            </p:nvSpPr>
+            <p:spPr>
+              <a:xfrm>
+                <a:off x="4444678" y="2812648"/>
+                <a:ext cx="1348616" cy="717630"/>
+              </a:xfrm>
+              <a:prstGeom prst="rect">
+                <a:avLst/>
+              </a:prstGeom>
+              <a:solidFill>
+                <a:schemeClr val="bg1"/>
+              </a:solidFill>
+              <a:ln>
+                <a:solidFill>
+                  <a:schemeClr val="tx1"/>
+                </a:solidFill>
+              </a:ln>
+            </p:spPr>
+            <p:style>
+              <a:lnRef idx="2">
+                <a:schemeClr val="accent1">
+                  <a:shade val="15000"/>
+                </a:schemeClr>
+              </a:lnRef>
+              <a:fillRef idx="1">
+                <a:schemeClr val="accent1"/>
+              </a:fillRef>
+              <a:effectRef idx="0">
+                <a:schemeClr val="accent1"/>
+              </a:effectRef>
+              <a:fontRef idx="minor">
+                <a:schemeClr val="lt1"/>
+              </a:fontRef>
+            </p:style>
+            <p:txBody>
+              <a:bodyPr rtlCol="0" anchor="ctr"/>
+              <a:lstStyle/>
+              <a:p>
+                <a:pPr algn="ctr"/>
+                <a:endParaRPr lang="zh-TW" altLang="en-US">
+                  <a:latin typeface="Times New Roman" panose="02020603050405020304" pitchFamily="18" charset="0"/>
+                  <a:ea typeface="標楷體" panose="03000509000000000000" pitchFamily="65" charset="-120"/>
+                  <a:cs typeface="Times New Roman" panose="02020603050405020304" pitchFamily="18" charset="0"/>
+                </a:endParaRPr>
+              </a:p>
+            </p:txBody>
+          </p:sp>
+          <p:sp>
+            <p:nvSpPr>
+              <p:cNvPr id="6" name="文字方塊 5">
+                <a:extLst>
+                  <a:ext uri="{FF2B5EF4-FFF2-40B4-BE49-F238E27FC236}">
+                    <a16:creationId xmlns:a16="http://schemas.microsoft.com/office/drawing/2014/main" id="{0DA94BC5-0762-F6E2-2F57-D278DFAB1094}"/>
+                  </a:ext>
+                </a:extLst>
+              </p:cNvPr>
+              <p:cNvSpPr txBox="1"/>
+              <p:nvPr/>
+            </p:nvSpPr>
+            <p:spPr>
+              <a:xfrm>
+                <a:off x="4577456" y="2905780"/>
+                <a:ext cx="1348616" cy="523220"/>
+              </a:xfrm>
+              <a:prstGeom prst="rect">
+                <a:avLst/>
+              </a:prstGeom>
+              <a:noFill/>
+            </p:spPr>
+            <p:txBody>
+              <a:bodyPr wrap="square">
+                <a:spAutoFit/>
+              </a:bodyPr>
+              <a:lstStyle/>
+              <a:p>
+                <a:r>
+                  <a:rPr lang="zh-TW" altLang="zh-TW" dirty="0">
+                    <a:latin typeface="Times New Roman" panose="02020603050405020304" pitchFamily="18" charset="0"/>
+                    <a:ea typeface="標楷體" panose="03000509000000000000" pitchFamily="65" charset="-120"/>
+                    <a:cs typeface="Times New Roman" panose="02020603050405020304" pitchFamily="18" charset="0"/>
+                  </a:rPr>
+                  <a:t>x</a:t>
+                </a:r>
+                <a:r>
+                  <a:rPr lang="zh-TW" altLang="zh-TW" baseline="-25000" dirty="0">
+                    <a:latin typeface="Times New Roman" panose="02020603050405020304" pitchFamily="18" charset="0"/>
+                    <a:ea typeface="標楷體" panose="03000509000000000000" pitchFamily="65" charset="-120"/>
+                    <a:cs typeface="Times New Roman" panose="02020603050405020304" pitchFamily="18" charset="0"/>
+                  </a:rPr>
+                  <a:t>W</a:t>
+                </a:r>
+                <a:r>
+                  <a:rPr lang="zh-TW" altLang="zh-TW" dirty="0">
+                    <a:latin typeface="Times New Roman" panose="02020603050405020304" pitchFamily="18" charset="0"/>
+                    <a:ea typeface="標楷體" panose="03000509000000000000" pitchFamily="65" charset="-120"/>
+                    <a:cs typeface="Times New Roman" panose="02020603050405020304" pitchFamily="18" charset="0"/>
+                  </a:rPr>
+                  <a:t>​=0.3127</a:t>
+                </a:r>
+                <a:endParaRPr lang="en-US" altLang="zh-TW" dirty="0">
+                  <a:latin typeface="Times New Roman" panose="02020603050405020304" pitchFamily="18" charset="0"/>
+                  <a:ea typeface="標楷體" panose="03000509000000000000" pitchFamily="65" charset="-120"/>
+                  <a:cs typeface="Times New Roman" panose="02020603050405020304" pitchFamily="18" charset="0"/>
+                </a:endParaRPr>
+              </a:p>
+              <a:p>
+                <a:r>
+                  <a:rPr lang="zh-TW" altLang="zh-TW" dirty="0">
+                    <a:latin typeface="Times New Roman" panose="02020603050405020304" pitchFamily="18" charset="0"/>
+                    <a:ea typeface="標楷體" panose="03000509000000000000" pitchFamily="65" charset="-120"/>
+                    <a:cs typeface="Times New Roman" panose="02020603050405020304" pitchFamily="18" charset="0"/>
+                  </a:rPr>
+                  <a:t>y</a:t>
+                </a:r>
+                <a:r>
+                  <a:rPr lang="zh-TW" altLang="zh-TW" baseline="-25000" dirty="0">
+                    <a:latin typeface="Times New Roman" panose="02020603050405020304" pitchFamily="18" charset="0"/>
+                    <a:ea typeface="標楷體" panose="03000509000000000000" pitchFamily="65" charset="-120"/>
+                    <a:cs typeface="Times New Roman" panose="02020603050405020304" pitchFamily="18" charset="0"/>
+                  </a:rPr>
+                  <a:t>W</a:t>
+                </a:r>
+                <a:r>
+                  <a:rPr lang="zh-TW" altLang="zh-TW" dirty="0">
+                    <a:latin typeface="Times New Roman" panose="02020603050405020304" pitchFamily="18" charset="0"/>
+                    <a:ea typeface="標楷體" panose="03000509000000000000" pitchFamily="65" charset="-120"/>
+                    <a:cs typeface="Times New Roman" panose="02020603050405020304" pitchFamily="18" charset="0"/>
+                  </a:rPr>
+                  <a:t>​=0.3290</a:t>
+                </a:r>
+                <a:endParaRPr lang="zh-TW" altLang="en-US" dirty="0">
+                  <a:latin typeface="Times New Roman" panose="02020603050405020304" pitchFamily="18" charset="0"/>
+                  <a:ea typeface="標楷體" panose="03000509000000000000" pitchFamily="65" charset="-120"/>
+                  <a:cs typeface="Times New Roman" panose="02020603050405020304" pitchFamily="18" charset="0"/>
+                </a:endParaRPr>
+              </a:p>
+            </p:txBody>
+          </p:sp>
+        </p:grpSp>
+        <p:sp>
+          <p:nvSpPr>
+            <p:cNvPr id="12" name="矩形 11">
+              <a:extLst>
+                <a:ext uri="{FF2B5EF4-FFF2-40B4-BE49-F238E27FC236}">
+                  <a16:creationId xmlns:a16="http://schemas.microsoft.com/office/drawing/2014/main" id="{2552E5AB-ED3F-D175-A499-49FB40687585}"/>
+                </a:ext>
+              </a:extLst>
+            </p:cNvPr>
+            <p:cNvSpPr/>
+            <p:nvPr/>
+          </p:nvSpPr>
+          <p:spPr>
+            <a:xfrm>
+              <a:off x="4548850" y="3635026"/>
+              <a:ext cx="1415772" cy="584775"/>
+            </a:xfrm>
+            <a:prstGeom prst="rect">
+              <a:avLst/>
+            </a:prstGeom>
+            <a:noFill/>
+          </p:spPr>
+          <p:txBody>
+            <a:bodyPr wrap="none" lIns="91440" tIns="45720" rIns="91440" bIns="45720">
+              <a:spAutoFit/>
+            </a:bodyPr>
+            <a:lstStyle/>
+            <a:p>
+              <a:pPr algn="ctr"/>
+              <a:r>
+                <a:rPr lang="zh-TW" altLang="en-US" sz="1600" dirty="0">
+                  <a:ln w="0"/>
+                  <a:solidFill>
+                    <a:schemeClr val="tx1"/>
+                  </a:solidFill>
+                  <a:effectLst>
+                    <a:outerShdw blurRad="38100" dist="19050" dir="2700000" algn="tl" rotWithShape="0">
+                      <a:schemeClr val="dk1">
+                        <a:alpha val="40000"/>
+                      </a:schemeClr>
+                    </a:outerShdw>
+                  </a:effectLst>
+                  <a:latin typeface="Times New Roman" panose="02020603050405020304" pitchFamily="18" charset="0"/>
+                  <a:ea typeface="標楷體" panose="03000509000000000000" pitchFamily="65" charset="-120"/>
+                  <a:cs typeface="Times New Roman" panose="02020603050405020304" pitchFamily="18" charset="0"/>
+                </a:rPr>
+                <a:t>目標白點色彩</a:t>
+              </a:r>
+              <a:endParaRPr lang="en-US" altLang="zh-TW" sz="1600" dirty="0">
+                <a:ln w="0"/>
+                <a:solidFill>
+                  <a:schemeClr val="tx1"/>
+                </a:solidFill>
+                <a:effectLst>
+                  <a:outerShdw blurRad="38100" dist="19050" dir="2700000" algn="tl" rotWithShape="0">
+                    <a:schemeClr val="dk1">
+                      <a:alpha val="40000"/>
+                    </a:schemeClr>
+                  </a:outerShdw>
+                </a:effectLst>
+                <a:latin typeface="Times New Roman" panose="02020603050405020304" pitchFamily="18" charset="0"/>
+                <a:ea typeface="標楷體" panose="03000509000000000000" pitchFamily="65" charset="-120"/>
+                <a:cs typeface="Times New Roman" panose="02020603050405020304" pitchFamily="18" charset="0"/>
+              </a:endParaRPr>
+            </a:p>
+            <a:p>
+              <a:pPr algn="ctr"/>
+              <a:r>
+                <a:rPr lang="zh-TW" altLang="en-US" sz="1600" b="0" cap="none" spc="0" dirty="0">
+                  <a:ln w="0"/>
+                  <a:solidFill>
+                    <a:schemeClr val="tx1"/>
+                  </a:solidFill>
+                  <a:effectLst>
+                    <a:outerShdw blurRad="38100" dist="19050" dir="2700000" algn="tl" rotWithShape="0">
+                      <a:schemeClr val="dk1">
+                        <a:alpha val="40000"/>
+                      </a:schemeClr>
+                    </a:outerShdw>
+                  </a:effectLst>
+                  <a:latin typeface="Times New Roman" panose="02020603050405020304" pitchFamily="18" charset="0"/>
+                  <a:ea typeface="標楷體" panose="03000509000000000000" pitchFamily="65" charset="-120"/>
+                  <a:cs typeface="Times New Roman" panose="02020603050405020304" pitchFamily="18" charset="0"/>
+                </a:rPr>
+                <a:t>假設為</a:t>
+              </a:r>
+              <a:r>
+                <a:rPr lang="zh-TW" altLang="zh-TW" sz="1600" dirty="0">
+                  <a:latin typeface="Times New Roman" panose="02020603050405020304" pitchFamily="18" charset="0"/>
+                  <a:ea typeface="標楷體" panose="03000509000000000000" pitchFamily="65" charset="-120"/>
+                  <a:cs typeface="Times New Roman" panose="02020603050405020304" pitchFamily="18" charset="0"/>
+                </a:rPr>
+                <a:t>D65</a:t>
+              </a:r>
+              <a:endParaRPr lang="zh-TW" altLang="en-US" sz="1600" b="0" cap="none" spc="0" dirty="0">
+                <a:ln w="0"/>
+                <a:solidFill>
+                  <a:schemeClr val="tx1"/>
+                </a:solidFill>
+                <a:effectLst>
+                  <a:outerShdw blurRad="38100" dist="19050" dir="2700000" algn="tl" rotWithShape="0">
+                    <a:schemeClr val="dk1">
+                      <a:alpha val="40000"/>
+                    </a:schemeClr>
+                  </a:outerShdw>
+                </a:effectLst>
+                <a:latin typeface="Times New Roman" panose="02020603050405020304" pitchFamily="18" charset="0"/>
+                <a:ea typeface="標楷體" panose="03000509000000000000" pitchFamily="65" charset="-120"/>
+                <a:cs typeface="Times New Roman" panose="02020603050405020304" pitchFamily="18" charset="0"/>
+              </a:endParaRPr>
+            </a:p>
+          </p:txBody>
+        </p:sp>
+      </p:grpSp>
+      <p:sp>
+        <p:nvSpPr>
+          <p:cNvPr id="16" name="箭號: 向右 15">
+            <a:extLst>
+              <a:ext uri="{FF2B5EF4-FFF2-40B4-BE49-F238E27FC236}">
+                <a16:creationId xmlns:a16="http://schemas.microsoft.com/office/drawing/2014/main" id="{C61E94B3-B7AA-6859-F38D-5DC8E5BB42A3}"/>
+              </a:ext>
+            </a:extLst>
+          </p:cNvPr>
+          <p:cNvSpPr/>
+          <p:nvPr/>
+        </p:nvSpPr>
+        <p:spPr>
+          <a:xfrm>
+            <a:off x="4232736" y="3105182"/>
+            <a:ext cx="1070987" cy="1808539"/>
+          </a:xfrm>
+          <a:prstGeom prst="rightArrow">
+            <a:avLst/>
+          </a:prstGeom>
+          <a:solidFill>
+            <a:schemeClr val="bg1"/>
+          </a:solidFill>
+          <a:ln>
+            <a:solidFill>
+              <a:schemeClr val="tx1"/>
+            </a:solidFill>
+          </a:ln>
+        </p:spPr>
+        <p:style>
+          <a:lnRef idx="2">
+            <a:schemeClr val="accent1">
+              <a:shade val="15000"/>
+            </a:schemeClr>
+          </a:lnRef>
+          <a:fillRef idx="1">
+            <a:schemeClr val="accent1"/>
+          </a:fillRef>
+          <a:effectRef idx="0">
+            <a:schemeClr val="accent1"/>
+          </a:effectRef>
+          <a:fontRef idx="minor">
+            <a:schemeClr val="lt1"/>
+          </a:fontRef>
+        </p:style>
+        <p:txBody>
+          <a:bodyPr rtlCol="0" anchor="ctr"/>
+          <a:lstStyle/>
+          <a:p>
+            <a:pPr algn="ctr"/>
+            <a:r>
+              <a:rPr lang="zh-TW" altLang="en-US" dirty="0">
+                <a:solidFill>
+                  <a:schemeClr val="tx1"/>
+                </a:solidFill>
+                <a:latin typeface="Times New Roman" panose="02020603050405020304" pitchFamily="18" charset="0"/>
+                <a:ea typeface="標楷體" panose="03000509000000000000" pitchFamily="65" charset="-120"/>
+                <a:cs typeface="Times New Roman" panose="02020603050405020304" pitchFamily="18" charset="0"/>
+              </a:rPr>
+              <a:t>設</a:t>
+            </a:r>
+            <a:r>
+              <a:rPr lang="en-US" altLang="zh-TW" dirty="0" err="1">
+                <a:solidFill>
+                  <a:schemeClr val="tx1"/>
+                </a:solidFill>
+                <a:latin typeface="Times New Roman" panose="02020603050405020304" pitchFamily="18" charset="0"/>
+                <a:ea typeface="標楷體" panose="03000509000000000000" pitchFamily="65" charset="-120"/>
+                <a:cs typeface="Times New Roman" panose="02020603050405020304" pitchFamily="18" charset="0"/>
+              </a:rPr>
+              <a:t>Y</a:t>
+            </a:r>
+            <a:r>
+              <a:rPr lang="en-US" altLang="zh-TW" baseline="-25000" dirty="0" err="1">
+                <a:solidFill>
+                  <a:schemeClr val="tx1"/>
+                </a:solidFill>
+                <a:latin typeface="Times New Roman" panose="02020603050405020304" pitchFamily="18" charset="0"/>
+                <a:ea typeface="標楷體" panose="03000509000000000000" pitchFamily="65" charset="-120"/>
+                <a:cs typeface="Times New Roman" panose="02020603050405020304" pitchFamily="18" charset="0"/>
+              </a:rPr>
+              <a:t>w</a:t>
+            </a:r>
+            <a:r>
+              <a:rPr lang="en-US" altLang="zh-TW" dirty="0">
+                <a:solidFill>
+                  <a:schemeClr val="tx1"/>
+                </a:solidFill>
+                <a:latin typeface="Times New Roman" panose="02020603050405020304" pitchFamily="18" charset="0"/>
+                <a:ea typeface="標楷體" panose="03000509000000000000" pitchFamily="65" charset="-120"/>
+                <a:cs typeface="Times New Roman" panose="02020603050405020304" pitchFamily="18" charset="0"/>
+              </a:rPr>
+              <a:t>=1</a:t>
+            </a:r>
+            <a:endParaRPr lang="zh-TW" altLang="en-US" dirty="0">
+              <a:solidFill>
+                <a:schemeClr val="tx1"/>
+              </a:solidFill>
+              <a:latin typeface="Times New Roman" panose="02020603050405020304" pitchFamily="18" charset="0"/>
+              <a:ea typeface="標楷體" panose="03000509000000000000" pitchFamily="65" charset="-120"/>
+              <a:cs typeface="Times New Roman" panose="02020603050405020304" pitchFamily="18" charset="0"/>
+            </a:endParaRPr>
+          </a:p>
+        </p:txBody>
+      </p:sp>
+      <p:grpSp>
+        <p:nvGrpSpPr>
+          <p:cNvPr id="26" name="群組 25">
+            <a:extLst>
+              <a:ext uri="{FF2B5EF4-FFF2-40B4-BE49-F238E27FC236}">
+                <a16:creationId xmlns:a16="http://schemas.microsoft.com/office/drawing/2014/main" id="{5C1D1929-1040-C36F-1520-FF917811D29B}"/>
+              </a:ext>
+            </a:extLst>
+          </p:cNvPr>
+          <p:cNvGrpSpPr/>
+          <p:nvPr/>
+        </p:nvGrpSpPr>
+        <p:grpSpPr>
+          <a:xfrm>
+            <a:off x="7304856" y="694648"/>
+            <a:ext cx="2222339" cy="2144316"/>
+            <a:chOff x="5683170" y="1284685"/>
+            <a:chExt cx="2222339" cy="2144316"/>
+          </a:xfrm>
+        </p:grpSpPr>
+        <p:sp>
+          <p:nvSpPr>
+            <p:cNvPr id="24" name="矩形 23">
+              <a:extLst>
+                <a:ext uri="{FF2B5EF4-FFF2-40B4-BE49-F238E27FC236}">
+                  <a16:creationId xmlns:a16="http://schemas.microsoft.com/office/drawing/2014/main" id="{C08775EE-8632-2A77-9314-B11558B9FB1E}"/>
+                </a:ext>
+              </a:extLst>
+            </p:cNvPr>
+            <p:cNvSpPr/>
+            <p:nvPr/>
+          </p:nvSpPr>
+          <p:spPr>
+            <a:xfrm>
+              <a:off x="5683170" y="1284685"/>
+              <a:ext cx="2222339" cy="2144316"/>
+            </a:xfrm>
+            <a:prstGeom prst="rect">
+              <a:avLst/>
+            </a:prstGeom>
+            <a:solidFill>
+              <a:schemeClr val="bg1"/>
+            </a:solidFill>
+            <a:ln>
+              <a:solidFill>
+                <a:schemeClr val="tx1"/>
+              </a:solidFill>
+            </a:ln>
+          </p:spPr>
+          <p:style>
+            <a:lnRef idx="2">
+              <a:schemeClr val="accent1">
+                <a:shade val="15000"/>
+              </a:schemeClr>
+            </a:lnRef>
+            <a:fillRef idx="1">
+              <a:schemeClr val="accent1"/>
+            </a:fillRef>
+            <a:effectRef idx="0">
+              <a:schemeClr val="accent1"/>
+            </a:effectRef>
+            <a:fontRef idx="minor">
+              <a:schemeClr val="lt1"/>
+            </a:fontRef>
+          </p:style>
+          <p:txBody>
+            <a:bodyPr rtlCol="0" anchor="ctr"/>
+            <a:lstStyle/>
+            <a:p>
+              <a:pPr algn="ctr"/>
+              <a:endParaRPr lang="zh-TW" altLang="en-US">
+                <a:latin typeface="Times New Roman" panose="02020603050405020304" pitchFamily="18" charset="0"/>
+                <a:ea typeface="標楷體" panose="03000509000000000000" pitchFamily="65" charset="-120"/>
+                <a:cs typeface="Times New Roman" panose="02020603050405020304" pitchFamily="18" charset="0"/>
+              </a:endParaRPr>
+            </a:p>
+          </p:txBody>
+        </p:sp>
+        <mc:AlternateContent xmlns:mc="http://schemas.openxmlformats.org/markup-compatibility/2006">
+          <mc:Choice xmlns:a14="http://schemas.microsoft.com/office/drawing/2010/main" Requires="a14">
+            <p:sp>
+              <p:nvSpPr>
+                <p:cNvPr id="21" name="文字方塊 20">
+                  <a:extLst>
+                    <a:ext uri="{FF2B5EF4-FFF2-40B4-BE49-F238E27FC236}">
+                      <a16:creationId xmlns:a16="http://schemas.microsoft.com/office/drawing/2014/main" id="{1DFAE7D7-31E8-E25C-5F8F-6DF2B5D3F32A}"/>
+                    </a:ext>
+                  </a:extLst>
+                </p:cNvPr>
+                <p:cNvSpPr txBox="1"/>
+                <p:nvPr/>
+              </p:nvSpPr>
+              <p:spPr>
+                <a:xfrm>
+                  <a:off x="6283125" y="1807132"/>
+                  <a:ext cx="933140" cy="463781"/>
+                </a:xfrm>
+                <a:prstGeom prst="rect">
+                  <a:avLst/>
+                </a:prstGeom>
+                <a:noFill/>
+              </p:spPr>
+              <p:txBody>
+                <a:bodyPr wrap="none" lIns="0" tIns="0" rIns="0" bIns="0" rtlCol="0">
+                  <a:spAutoFit/>
+                </a:bodyPr>
+                <a:lstStyle/>
+                <a:p>
+                  <a14:m>
+                    <m:oMathPara xmlns:m="http://schemas.openxmlformats.org/officeDocument/2006/math">
+                      <m:oMath>
+                        <m:r>
+                          <a:rPr lang="pl-PL" altLang="zh-TW" sz="1600" i="1">
+                            <a:latin typeface="Cambria Math" panose="02040503050406030204" pitchFamily="18" charset="0"/>
+                          </a:rPr>
+                          <m:t>𝑋</m:t>
+                        </m:r>
+                        <m:r>
+                          <a:rPr lang="pl-PL" altLang="zh-TW" sz="1600" i="1" baseline="-25000">
+                            <a:latin typeface="Cambria Math" panose="02040503050406030204" pitchFamily="18" charset="0"/>
+                          </a:rPr>
+                          <m:t>𝑊</m:t>
+                        </m:r>
+                        <m:r>
+                          <a:rPr lang="pl-PL" altLang="zh-TW" sz="1600" i="1">
+                            <a:latin typeface="Cambria Math" panose="02040503050406030204" pitchFamily="18" charset="0"/>
+                          </a:rPr>
+                          <m:t> = </m:t>
+                        </m:r>
+                        <m:f>
+                          <m:fPr>
+                            <m:ctrlPr>
+                              <a:rPr lang="pl-PL" altLang="zh-TW" sz="1600" i="1">
+                                <a:latin typeface="Cambria Math" panose="02040503050406030204" pitchFamily="18" charset="0"/>
+                              </a:rPr>
+                            </m:ctrlPr>
+                          </m:fPr>
+                          <m:num>
+                            <m:r>
+                              <a:rPr lang="pl-PL" altLang="zh-TW" sz="1600" i="1">
+                                <a:latin typeface="Cambria Math" panose="02040503050406030204" pitchFamily="18" charset="0"/>
+                              </a:rPr>
+                              <m:t>𝑥</m:t>
+                            </m:r>
+                            <m:r>
+                              <a:rPr lang="pl-PL" altLang="zh-TW" sz="1600" i="1" baseline="-25000">
+                                <a:latin typeface="Cambria Math" panose="02040503050406030204" pitchFamily="18" charset="0"/>
+                              </a:rPr>
+                              <m:t>𝑊</m:t>
+                            </m:r>
+                          </m:num>
+                          <m:den>
+                            <m:r>
+                              <a:rPr lang="pl-PL" altLang="zh-TW" sz="1600" i="1">
+                                <a:latin typeface="Cambria Math" panose="02040503050406030204" pitchFamily="18" charset="0"/>
+                              </a:rPr>
+                              <m:t>𝑦</m:t>
+                            </m:r>
+                            <m:r>
+                              <a:rPr lang="pl-PL" altLang="zh-TW" sz="1600" i="1" baseline="-25000">
+                                <a:latin typeface="Cambria Math" panose="02040503050406030204" pitchFamily="18" charset="0"/>
+                              </a:rPr>
+                              <m:t>𝑊</m:t>
+                            </m:r>
+                          </m:den>
+                        </m:f>
+                      </m:oMath>
+                    </m:oMathPara>
+                  </a14:m>
+                  <a:endParaRPr lang="zh-TW" altLang="en-US" sz="1600" dirty="0">
+                    <a:latin typeface="Times New Roman" panose="02020603050405020304" pitchFamily="18" charset="0"/>
+                    <a:ea typeface="標楷體" panose="03000509000000000000" pitchFamily="65" charset="-120"/>
+                    <a:cs typeface="Times New Roman" panose="02020603050405020304" pitchFamily="18" charset="0"/>
+                  </a:endParaRPr>
+                </a:p>
+              </p:txBody>
+            </p:sp>
+          </mc:Choice>
+          <mc:Fallback>
+            <p:sp>
+              <p:nvSpPr>
+                <p:cNvPr id="21" name="文字方塊 20">
+                  <a:extLst>
+                    <a:ext uri="{FF2B5EF4-FFF2-40B4-BE49-F238E27FC236}">
+                      <a16:creationId xmlns:a16="http://schemas.microsoft.com/office/drawing/2014/main" id="{1DFAE7D7-31E8-E25C-5F8F-6DF2B5D3F32A}"/>
+                    </a:ext>
+                  </a:extLst>
+                </p:cNvPr>
+                <p:cNvSpPr txBox="1">
+                  <a:spLocks noRot="1" noChangeAspect="1" noMove="1" noResize="1" noEditPoints="1" noAdjustHandles="1" noChangeArrowheads="1" noChangeShapeType="1" noTextEdit="1"/>
+                </p:cNvSpPr>
+                <p:nvPr/>
+              </p:nvSpPr>
+              <p:spPr>
+                <a:xfrm>
+                  <a:off x="6283125" y="1807132"/>
+                  <a:ext cx="933140" cy="463781"/>
+                </a:xfrm>
+                <a:prstGeom prst="rect">
+                  <a:avLst/>
+                </a:prstGeom>
+                <a:blipFill>
+                  <a:blip r:embed="rId3"/>
+                  <a:stretch>
+                    <a:fillRect l="-4575" r="-654" b="-14474"/>
+                  </a:stretch>
+                </a:blipFill>
+              </p:spPr>
+              <p:txBody>
+                <a:bodyPr/>
+                <a:lstStyle/>
+                <a:p>
+                  <a:r>
+                    <a:rPr lang="zh-TW" altLang="en-US">
+                      <a:noFill/>
+                    </a:rPr>
+                    <a:t> </a:t>
+                  </a:r>
+                </a:p>
+              </p:txBody>
+            </p:sp>
+          </mc:Fallback>
+        </mc:AlternateContent>
+        <mc:AlternateContent xmlns:mc="http://schemas.openxmlformats.org/markup-compatibility/2006">
+          <mc:Choice xmlns:a14="http://schemas.microsoft.com/office/drawing/2010/main" Requires="a14">
+            <p:sp>
+              <p:nvSpPr>
+                <p:cNvPr id="22" name="文字方塊 21">
+                  <a:extLst>
+                    <a:ext uri="{FF2B5EF4-FFF2-40B4-BE49-F238E27FC236}">
+                      <a16:creationId xmlns:a16="http://schemas.microsoft.com/office/drawing/2014/main" id="{5B679D5F-03A6-7B84-437A-23900E5537E0}"/>
+                    </a:ext>
+                  </a:extLst>
+                </p:cNvPr>
+                <p:cNvSpPr txBox="1"/>
+                <p:nvPr/>
+              </p:nvSpPr>
+              <p:spPr>
+                <a:xfrm>
+                  <a:off x="6474362" y="2380012"/>
+                  <a:ext cx="649216" cy="246221"/>
+                </a:xfrm>
+                <a:prstGeom prst="rect">
+                  <a:avLst/>
+                </a:prstGeom>
+                <a:noFill/>
+              </p:spPr>
+              <p:txBody>
+                <a:bodyPr wrap="none" lIns="0" tIns="0" rIns="0" bIns="0" rtlCol="0">
+                  <a:spAutoFit/>
+                </a:bodyPr>
+                <a:lstStyle/>
+                <a:p>
+                  <a14:m>
+                    <m:oMathPara xmlns:m="http://schemas.openxmlformats.org/officeDocument/2006/math">
+                      <m:oMath>
+                        <m:r>
+                          <m:rPr>
+                            <m:nor/>
+                          </m:rPr>
+                          <a:rPr lang="en-US" altLang="zh-TW" sz="1600">
+                            <a:latin typeface="Times New Roman" panose="02020603050405020304" pitchFamily="18" charset="0"/>
+                            <a:ea typeface="標楷體" panose="03000509000000000000" pitchFamily="65" charset="-120"/>
+                            <a:cs typeface="Times New Roman" panose="02020603050405020304" pitchFamily="18" charset="0"/>
+                          </a:rPr>
+                          <m:t>Y</m:t>
+                        </m:r>
+                        <m:r>
+                          <m:rPr>
+                            <m:nor/>
+                          </m:rPr>
+                          <a:rPr lang="en-US" altLang="zh-TW" sz="1600" baseline="-25000">
+                            <a:latin typeface="Times New Roman" panose="02020603050405020304" pitchFamily="18" charset="0"/>
+                            <a:ea typeface="標楷體" panose="03000509000000000000" pitchFamily="65" charset="-120"/>
+                            <a:cs typeface="Times New Roman" panose="02020603050405020304" pitchFamily="18" charset="0"/>
+                          </a:rPr>
+                          <m:t>W</m:t>
+                        </m:r>
+                        <m:r>
+                          <m:rPr>
+                            <m:nor/>
+                          </m:rPr>
+                          <a:rPr lang="en-US" altLang="zh-TW" sz="1600">
+                            <a:latin typeface="Times New Roman" panose="02020603050405020304" pitchFamily="18" charset="0"/>
+                            <a:ea typeface="標楷體" panose="03000509000000000000" pitchFamily="65" charset="-120"/>
+                            <a:cs typeface="Times New Roman" panose="02020603050405020304" pitchFamily="18" charset="0"/>
+                          </a:rPr>
+                          <m:t> = 1</m:t>
+                        </m:r>
+                      </m:oMath>
+                    </m:oMathPara>
+                  </a14:m>
+                  <a:endParaRPr lang="zh-TW" altLang="en-US" sz="1600" dirty="0">
+                    <a:latin typeface="Times New Roman" panose="02020603050405020304" pitchFamily="18" charset="0"/>
+                    <a:ea typeface="標楷體" panose="03000509000000000000" pitchFamily="65" charset="-120"/>
+                    <a:cs typeface="Times New Roman" panose="02020603050405020304" pitchFamily="18" charset="0"/>
+                  </a:endParaRPr>
+                </a:p>
+              </p:txBody>
+            </p:sp>
+          </mc:Choice>
+          <mc:Fallback>
+            <p:sp>
+              <p:nvSpPr>
+                <p:cNvPr id="22" name="文字方塊 21">
+                  <a:extLst>
+                    <a:ext uri="{FF2B5EF4-FFF2-40B4-BE49-F238E27FC236}">
+                      <a16:creationId xmlns:a16="http://schemas.microsoft.com/office/drawing/2014/main" id="{5B679D5F-03A6-7B84-437A-23900E5537E0}"/>
+                    </a:ext>
+                  </a:extLst>
+                </p:cNvPr>
+                <p:cNvSpPr txBox="1">
+                  <a:spLocks noRot="1" noChangeAspect="1" noMove="1" noResize="1" noEditPoints="1" noAdjustHandles="1" noChangeArrowheads="1" noChangeShapeType="1" noTextEdit="1"/>
+                </p:cNvSpPr>
+                <p:nvPr/>
+              </p:nvSpPr>
+              <p:spPr>
+                <a:xfrm>
+                  <a:off x="6474362" y="2380012"/>
+                  <a:ext cx="649216" cy="246221"/>
+                </a:xfrm>
+                <a:prstGeom prst="rect">
+                  <a:avLst/>
+                </a:prstGeom>
+                <a:blipFill>
+                  <a:blip r:embed="rId4"/>
+                  <a:stretch>
+                    <a:fillRect l="-5607" r="-6542" b="-17500"/>
+                  </a:stretch>
+                </a:blipFill>
+              </p:spPr>
+              <p:txBody>
+                <a:bodyPr/>
+                <a:lstStyle/>
+                <a:p>
+                  <a:r>
+                    <a:rPr lang="zh-TW" altLang="en-US">
+                      <a:noFill/>
+                    </a:rPr>
+                    <a:t> </a:t>
+                  </a:r>
+                </a:p>
+              </p:txBody>
+            </p:sp>
+          </mc:Fallback>
+        </mc:AlternateContent>
+        <mc:AlternateContent xmlns:mc="http://schemas.openxmlformats.org/markup-compatibility/2006">
+          <mc:Choice xmlns:a14="http://schemas.microsoft.com/office/drawing/2010/main" Requires="a14">
+            <p:sp>
+              <p:nvSpPr>
+                <p:cNvPr id="23" name="文字方塊 22">
+                  <a:extLst>
+                    <a:ext uri="{FF2B5EF4-FFF2-40B4-BE49-F238E27FC236}">
+                      <a16:creationId xmlns:a16="http://schemas.microsoft.com/office/drawing/2014/main" id="{052D775A-A41D-88E5-3A9F-7B55914AD3A4}"/>
+                    </a:ext>
+                  </a:extLst>
+                </p:cNvPr>
+                <p:cNvSpPr txBox="1"/>
+                <p:nvPr/>
+              </p:nvSpPr>
+              <p:spPr>
+                <a:xfrm>
+                  <a:off x="5935497" y="2735332"/>
+                  <a:ext cx="1682064" cy="509435"/>
+                </a:xfrm>
+                <a:prstGeom prst="rect">
+                  <a:avLst/>
+                </a:prstGeom>
+                <a:noFill/>
+              </p:spPr>
+              <p:txBody>
+                <a:bodyPr wrap="none" lIns="0" tIns="0" rIns="0" bIns="0" rtlCol="0">
+                  <a:spAutoFit/>
+                </a:bodyPr>
+                <a:lstStyle/>
+                <a:p>
+                  <a14:m>
+                    <m:oMathPara xmlns:m="http://schemas.openxmlformats.org/officeDocument/2006/math">
+                      <m:oMath>
+                        <m:r>
+                          <m:rPr>
+                            <m:nor/>
+                          </m:rPr>
+                          <a:rPr lang="en-US" altLang="zh-TW" sz="1600">
+                            <a:latin typeface="Times New Roman" panose="02020603050405020304" pitchFamily="18" charset="0"/>
+                            <a:ea typeface="標楷體" panose="03000509000000000000" pitchFamily="65" charset="-120"/>
+                            <a:cs typeface="Times New Roman" panose="02020603050405020304" pitchFamily="18" charset="0"/>
+                          </a:rPr>
+                          <m:t>Z</m:t>
+                        </m:r>
+                        <m:r>
+                          <m:rPr>
+                            <m:nor/>
+                          </m:rPr>
+                          <a:rPr lang="en-US" altLang="zh-TW" sz="1600" baseline="-25000">
+                            <a:latin typeface="Times New Roman" panose="02020603050405020304" pitchFamily="18" charset="0"/>
+                            <a:ea typeface="標楷體" panose="03000509000000000000" pitchFamily="65" charset="-120"/>
+                            <a:cs typeface="Times New Roman" panose="02020603050405020304" pitchFamily="18" charset="0"/>
+                          </a:rPr>
+                          <m:t>W</m:t>
+                        </m:r>
+                        <m:r>
+                          <m:rPr>
+                            <m:nor/>
+                          </m:rPr>
+                          <a:rPr lang="en-US" altLang="zh-TW" sz="1600">
+                            <a:latin typeface="Times New Roman" panose="02020603050405020304" pitchFamily="18" charset="0"/>
+                            <a:ea typeface="標楷體" panose="03000509000000000000" pitchFamily="65" charset="-120"/>
+                            <a:cs typeface="Times New Roman" panose="02020603050405020304" pitchFamily="18" charset="0"/>
+                          </a:rPr>
+                          <m:t> = </m:t>
+                        </m:r>
+                        <m:f>
+                          <m:fPr>
+                            <m:ctrlPr>
+                              <a:rPr lang="en-US" altLang="zh-TW" sz="1600">
+                                <a:latin typeface="Times New Roman" panose="02020603050405020304" pitchFamily="18" charset="0"/>
+                                <a:ea typeface="標楷體" panose="03000509000000000000" pitchFamily="65" charset="-120"/>
+                                <a:cs typeface="Times New Roman" panose="02020603050405020304" pitchFamily="18" charset="0"/>
+                              </a:rPr>
+                            </m:ctrlPr>
+                          </m:fPr>
+                          <m:num>
+                            <m:r>
+                              <m:rPr>
+                                <m:nor/>
+                              </m:rPr>
+                              <a:rPr lang="en-US" altLang="zh-TW" sz="1600">
+                                <a:latin typeface="Times New Roman" panose="02020603050405020304" pitchFamily="18" charset="0"/>
+                                <a:ea typeface="標楷體" panose="03000509000000000000" pitchFamily="65" charset="-120"/>
+                                <a:cs typeface="Times New Roman" panose="02020603050405020304" pitchFamily="18" charset="0"/>
+                              </a:rPr>
+                              <m:t>(1 − x</m:t>
+                            </m:r>
+                            <m:r>
+                              <m:rPr>
+                                <m:nor/>
+                              </m:rPr>
+                              <a:rPr lang="en-US" altLang="zh-TW" sz="1600" baseline="-25000">
+                                <a:latin typeface="Times New Roman" panose="02020603050405020304" pitchFamily="18" charset="0"/>
+                                <a:ea typeface="標楷體" panose="03000509000000000000" pitchFamily="65" charset="-120"/>
+                                <a:cs typeface="Times New Roman" panose="02020603050405020304" pitchFamily="18" charset="0"/>
+                              </a:rPr>
+                              <m:t>W</m:t>
+                            </m:r>
+                            <m:r>
+                              <m:rPr>
+                                <m:nor/>
+                              </m:rPr>
+                              <a:rPr lang="en-US" altLang="zh-TW" sz="1600">
+                                <a:latin typeface="Times New Roman" panose="02020603050405020304" pitchFamily="18" charset="0"/>
+                                <a:ea typeface="標楷體" panose="03000509000000000000" pitchFamily="65" charset="-120"/>
+                                <a:cs typeface="Times New Roman" panose="02020603050405020304" pitchFamily="18" charset="0"/>
+                              </a:rPr>
+                              <m:t> − y</m:t>
+                            </m:r>
+                            <m:r>
+                              <m:rPr>
+                                <m:nor/>
+                              </m:rPr>
+                              <a:rPr lang="en-US" altLang="zh-TW" sz="1600" baseline="-25000">
+                                <a:latin typeface="Times New Roman" panose="02020603050405020304" pitchFamily="18" charset="0"/>
+                                <a:ea typeface="標楷體" panose="03000509000000000000" pitchFamily="65" charset="-120"/>
+                                <a:cs typeface="Times New Roman" panose="02020603050405020304" pitchFamily="18" charset="0"/>
+                              </a:rPr>
+                              <m:t>W</m:t>
+                            </m:r>
+                            <m:r>
+                              <m:rPr>
+                                <m:nor/>
+                              </m:rPr>
+                              <a:rPr lang="en-US" altLang="zh-TW" sz="1600">
+                                <a:latin typeface="Times New Roman" panose="02020603050405020304" pitchFamily="18" charset="0"/>
+                                <a:ea typeface="標楷體" panose="03000509000000000000" pitchFamily="65" charset="-120"/>
+                                <a:cs typeface="Times New Roman" panose="02020603050405020304" pitchFamily="18" charset="0"/>
+                              </a:rPr>
+                              <m:t>)</m:t>
+                            </m:r>
+                          </m:num>
+                          <m:den>
+                            <m:r>
+                              <m:rPr>
+                                <m:nor/>
+                              </m:rPr>
+                              <a:rPr lang="en-US" altLang="zh-TW" sz="1600">
+                                <a:latin typeface="Times New Roman" panose="02020603050405020304" pitchFamily="18" charset="0"/>
+                                <a:ea typeface="標楷體" panose="03000509000000000000" pitchFamily="65" charset="-120"/>
+                                <a:cs typeface="Times New Roman" panose="02020603050405020304" pitchFamily="18" charset="0"/>
+                              </a:rPr>
+                              <m:t>y</m:t>
+                            </m:r>
+                            <m:r>
+                              <m:rPr>
+                                <m:nor/>
+                              </m:rPr>
+                              <a:rPr lang="en-US" altLang="zh-TW" sz="1600" baseline="-25000">
+                                <a:latin typeface="Times New Roman" panose="02020603050405020304" pitchFamily="18" charset="0"/>
+                                <a:ea typeface="標楷體" panose="03000509000000000000" pitchFamily="65" charset="-120"/>
+                                <a:cs typeface="Times New Roman" panose="02020603050405020304" pitchFamily="18" charset="0"/>
+                              </a:rPr>
+                              <m:t>W</m:t>
+                            </m:r>
+                          </m:den>
+                        </m:f>
+                      </m:oMath>
+                    </m:oMathPara>
+                  </a14:m>
+                  <a:endParaRPr lang="zh-TW" altLang="en-US" sz="1600" baseline="-25000" dirty="0">
+                    <a:latin typeface="Times New Roman" panose="02020603050405020304" pitchFamily="18" charset="0"/>
+                    <a:ea typeface="標楷體" panose="03000509000000000000" pitchFamily="65" charset="-120"/>
+                    <a:cs typeface="Times New Roman" panose="02020603050405020304" pitchFamily="18" charset="0"/>
+                  </a:endParaRPr>
+                </a:p>
+              </p:txBody>
+            </p:sp>
+          </mc:Choice>
+          <mc:Fallback>
+            <p:sp>
+              <p:nvSpPr>
+                <p:cNvPr id="23" name="文字方塊 22">
+                  <a:extLst>
+                    <a:ext uri="{FF2B5EF4-FFF2-40B4-BE49-F238E27FC236}">
+                      <a16:creationId xmlns:a16="http://schemas.microsoft.com/office/drawing/2014/main" id="{052D775A-A41D-88E5-3A9F-7B55914AD3A4}"/>
+                    </a:ext>
+                  </a:extLst>
+                </p:cNvPr>
+                <p:cNvSpPr txBox="1">
+                  <a:spLocks noRot="1" noChangeAspect="1" noMove="1" noResize="1" noEditPoints="1" noAdjustHandles="1" noChangeArrowheads="1" noChangeShapeType="1" noTextEdit="1"/>
+                </p:cNvSpPr>
+                <p:nvPr/>
+              </p:nvSpPr>
+              <p:spPr>
+                <a:xfrm>
+                  <a:off x="5935497" y="2735332"/>
+                  <a:ext cx="1682064" cy="509435"/>
+                </a:xfrm>
+                <a:prstGeom prst="rect">
+                  <a:avLst/>
+                </a:prstGeom>
+                <a:blipFill>
+                  <a:blip r:embed="rId5"/>
+                  <a:stretch>
+                    <a:fillRect/>
+                  </a:stretch>
+                </a:blipFill>
+              </p:spPr>
+              <p:txBody>
+                <a:bodyPr/>
+                <a:lstStyle/>
+                <a:p>
+                  <a:r>
+                    <a:rPr lang="zh-TW" altLang="en-US">
+                      <a:noFill/>
+                    </a:rPr>
+                    <a:t> </a:t>
+                  </a:r>
+                </a:p>
+              </p:txBody>
+            </p:sp>
+          </mc:Fallback>
+        </mc:AlternateContent>
+        <p:sp>
+          <p:nvSpPr>
+            <p:cNvPr id="25" name="矩形 24">
+              <a:extLst>
+                <a:ext uri="{FF2B5EF4-FFF2-40B4-BE49-F238E27FC236}">
+                  <a16:creationId xmlns:a16="http://schemas.microsoft.com/office/drawing/2014/main" id="{6BF5A0DF-A9B2-BC29-3795-95D86E8094B0}"/>
+                </a:ext>
+              </a:extLst>
+            </p:cNvPr>
+            <p:cNvSpPr/>
+            <p:nvPr/>
+          </p:nvSpPr>
+          <p:spPr>
+            <a:xfrm>
+              <a:off x="5683170" y="1369257"/>
+              <a:ext cx="2020105" cy="338554"/>
+            </a:xfrm>
+            <a:prstGeom prst="rect">
+              <a:avLst/>
+            </a:prstGeom>
+            <a:noFill/>
+          </p:spPr>
+          <p:txBody>
+            <a:bodyPr wrap="none" lIns="91440" tIns="45720" rIns="91440" bIns="45720">
+              <a:spAutoFit/>
+            </a:bodyPr>
+            <a:lstStyle/>
+            <a:p>
+              <a:pPr algn="ctr"/>
+              <a:r>
+                <a:rPr lang="zh-TW" altLang="zh-TW" sz="1600" dirty="0">
+                  <a:latin typeface="Times New Roman" panose="02020603050405020304" pitchFamily="18" charset="0"/>
+                  <a:ea typeface="標楷體" panose="03000509000000000000" pitchFamily="65" charset="-120"/>
+                  <a:cs typeface="Times New Roman" panose="02020603050405020304" pitchFamily="18" charset="0"/>
+                </a:rPr>
+                <a:t>CIE 定義</a:t>
+              </a:r>
+              <a:r>
+                <a:rPr lang="zh-TW" altLang="en-US" sz="1600" dirty="0">
+                  <a:latin typeface="Times New Roman" panose="02020603050405020304" pitchFamily="18" charset="0"/>
+                  <a:ea typeface="標楷體" panose="03000509000000000000" pitchFamily="65" charset="-120"/>
+                  <a:cs typeface="Times New Roman" panose="02020603050405020304" pitchFamily="18" charset="0"/>
+                </a:rPr>
+                <a:t>推導公式：</a:t>
+              </a:r>
+              <a:endParaRPr lang="zh-TW" altLang="en-US" sz="1600" b="0" cap="none" spc="0" dirty="0">
+                <a:ln w="0"/>
+                <a:solidFill>
+                  <a:schemeClr val="tx1"/>
+                </a:solidFill>
+                <a:effectLst>
+                  <a:outerShdw blurRad="38100" dist="19050" dir="2700000" algn="tl" rotWithShape="0">
+                    <a:schemeClr val="dk1">
+                      <a:alpha val="40000"/>
+                    </a:schemeClr>
+                  </a:outerShdw>
+                </a:effectLst>
+                <a:latin typeface="Times New Roman" panose="02020603050405020304" pitchFamily="18" charset="0"/>
+                <a:ea typeface="標楷體" panose="03000509000000000000" pitchFamily="65" charset="-120"/>
+                <a:cs typeface="Times New Roman" panose="02020603050405020304" pitchFamily="18" charset="0"/>
+              </a:endParaRPr>
+            </a:p>
+          </p:txBody>
+        </p:sp>
+      </p:grpSp>
+      <p:sp>
+        <p:nvSpPr>
+          <p:cNvPr id="10" name="文字版面配置區 6">
+            <a:extLst>
+              <a:ext uri="{FF2B5EF4-FFF2-40B4-BE49-F238E27FC236}">
+                <a16:creationId xmlns:a16="http://schemas.microsoft.com/office/drawing/2014/main" id="{EFA1BA7D-6739-0930-E66B-C7B72485673A}"/>
+              </a:ext>
+            </a:extLst>
+          </p:cNvPr>
+          <p:cNvSpPr txBox="1"/>
+          <p:nvPr/>
+        </p:nvSpPr>
+        <p:spPr>
+          <a:xfrm>
+            <a:off x="497549" y="1284684"/>
+            <a:ext cx="8686796" cy="717631"/>
+          </a:xfrm>
+          <a:prstGeom prst="rect">
+            <a:avLst/>
+          </a:prstGeom>
+          <a:noFill/>
+          <a:ln>
+            <a:noFill/>
+          </a:ln>
+        </p:spPr>
+        <p:txBody>
+          <a:bodyPr spcFirstLastPara="1" wrap="square" lIns="91425" tIns="45700" rIns="91425" bIns="45700" anchor="t" anchorCtr="0">
+            <a:noAutofit/>
+          </a:bodyPr>
+          <a:lstStyle>
+            <a:defPPr marR="0" lvl="0" algn="l" rtl="0">
+              <a:lnSpc>
+                <a:spcPct val="100000"/>
+              </a:lnSpc>
+              <a:spcBef>
+                <a:spcPts val="0"/>
+              </a:spcBef>
+              <a:spcAft>
+                <a:spcPts val="0"/>
+              </a:spcAft>
+            </a:defPPr>
+            <a:lvl1pPr marL="457200" marR="0" lvl="0" indent="-406400" algn="l" rtl="0">
+              <a:lnSpc>
+                <a:spcPct val="100000"/>
+              </a:lnSpc>
+              <a:spcBef>
+                <a:spcPts val="560"/>
+              </a:spcBef>
+              <a:spcAft>
+                <a:spcPts val="0"/>
+              </a:spcAft>
+              <a:buClr>
+                <a:schemeClr val="accent2"/>
+              </a:buClr>
+              <a:buSzPts val="2800"/>
+              <a:buFont typeface="Noto Sans Symbols"/>
+              <a:buChar char="❖"/>
+              <a:defRPr sz="2800" b="0" i="0" u="none" strike="noStrike" cap="none">
+                <a:solidFill>
+                  <a:schemeClr val="dk1"/>
+                </a:solidFill>
+                <a:latin typeface="Times New Roman"/>
+                <a:ea typeface="Times New Roman"/>
+                <a:cs typeface="Times New Roman"/>
+                <a:sym typeface="Times New Roman"/>
+              </a:defRPr>
+            </a:lvl1pPr>
+            <a:lvl2pPr marL="914400" marR="0" lvl="1" indent="-381000" algn="l" rtl="0">
+              <a:lnSpc>
+                <a:spcPct val="100000"/>
+              </a:lnSpc>
+              <a:spcBef>
+                <a:spcPts val="480"/>
+              </a:spcBef>
+              <a:spcAft>
+                <a:spcPts val="0"/>
+              </a:spcAft>
+              <a:buClr>
+                <a:srgbClr val="FF5050"/>
+              </a:buClr>
+              <a:buSzPts val="2400"/>
+              <a:buFont typeface="Noto Sans Symbols"/>
+              <a:buChar char="▪"/>
+              <a:defRPr sz="2400" b="0" i="0" u="none" strike="noStrike" cap="none">
+                <a:solidFill>
+                  <a:schemeClr val="dk1"/>
+                </a:solidFill>
+                <a:latin typeface="Times New Roman"/>
+                <a:ea typeface="Times New Roman"/>
+                <a:cs typeface="Times New Roman"/>
+                <a:sym typeface="Times New Roman"/>
+              </a:defRPr>
+            </a:lvl2pPr>
+            <a:lvl3pPr marL="1371600" marR="0" lvl="2" indent="-355600" algn="l" rtl="0">
+              <a:lnSpc>
+                <a:spcPct val="100000"/>
+              </a:lnSpc>
+              <a:spcBef>
+                <a:spcPts val="400"/>
+              </a:spcBef>
+              <a:spcAft>
+                <a:spcPts val="0"/>
+              </a:spcAft>
+              <a:buClr>
+                <a:srgbClr val="6699FF"/>
+              </a:buClr>
+              <a:buSzPts val="2000"/>
+              <a:buFont typeface="Times New Roman"/>
+              <a:buChar char="•"/>
+              <a:defRPr sz="2000" b="0" i="0" u="none" strike="noStrike" cap="none">
+                <a:solidFill>
+                  <a:schemeClr val="dk1"/>
+                </a:solidFill>
+                <a:latin typeface="Times New Roman"/>
+                <a:ea typeface="Times New Roman"/>
+                <a:cs typeface="Times New Roman"/>
+                <a:sym typeface="Times New Roman"/>
+              </a:defRPr>
+            </a:lvl3pPr>
+            <a:lvl4pPr marL="1828800" marR="0" lvl="3" indent="-355600" algn="l" rtl="0">
+              <a:lnSpc>
+                <a:spcPct val="100000"/>
+              </a:lnSpc>
+              <a:spcBef>
+                <a:spcPts val="400"/>
+              </a:spcBef>
+              <a:spcAft>
+                <a:spcPts val="0"/>
+              </a:spcAft>
+              <a:buClr>
+                <a:srgbClr val="FF5050"/>
+              </a:buClr>
+              <a:buSzPts val="2000"/>
+              <a:buFont typeface="Times New Roman"/>
+              <a:buChar char="o"/>
+              <a:defRPr sz="2000" b="0" i="0" u="none" strike="noStrike" cap="none">
+                <a:solidFill>
+                  <a:schemeClr val="dk1"/>
+                </a:solidFill>
+                <a:latin typeface="Times New Roman"/>
+                <a:ea typeface="Times New Roman"/>
+                <a:cs typeface="Times New Roman"/>
+                <a:sym typeface="Times New Roman"/>
+              </a:defRPr>
+            </a:lvl4pPr>
+            <a:lvl5pPr marL="2286000" marR="0" lvl="4" indent="-355600" algn="l" rtl="0">
+              <a:lnSpc>
+                <a:spcPct val="100000"/>
+              </a:lnSpc>
+              <a:spcBef>
+                <a:spcPts val="400"/>
+              </a:spcBef>
+              <a:spcAft>
+                <a:spcPts val="0"/>
+              </a:spcAft>
+              <a:buClr>
+                <a:srgbClr val="FF5050"/>
+              </a:buClr>
+              <a:buSzPts val="2000"/>
+              <a:buFont typeface="Times New Roman"/>
+              <a:buChar char="o"/>
+              <a:defRPr sz="2000" b="0" i="0" u="none" strike="noStrike" cap="none">
+                <a:solidFill>
+                  <a:schemeClr val="dk1"/>
+                </a:solidFill>
+                <a:latin typeface="Times New Roman"/>
+                <a:ea typeface="Times New Roman"/>
+                <a:cs typeface="Times New Roman"/>
+                <a:sym typeface="Times New Roman"/>
+              </a:defRPr>
+            </a:lvl5pPr>
+            <a:lvl6pPr marL="2743200" marR="0" lvl="5" indent="-355600" algn="l" rtl="0">
+              <a:lnSpc>
+                <a:spcPct val="100000"/>
+              </a:lnSpc>
+              <a:spcBef>
+                <a:spcPts val="400"/>
+              </a:spcBef>
+              <a:spcAft>
+                <a:spcPts val="0"/>
+              </a:spcAft>
+              <a:buClr>
+                <a:srgbClr val="FF5050"/>
+              </a:buClr>
+              <a:buSzPts val="2000"/>
+              <a:buFont typeface="Times New Roman"/>
+              <a:buChar char="o"/>
+              <a:defRPr sz="2000" b="0" i="0" u="none" strike="noStrike" cap="none">
+                <a:solidFill>
+                  <a:schemeClr val="dk1"/>
+                </a:solidFill>
+                <a:latin typeface="Times New Roman"/>
+                <a:ea typeface="Times New Roman"/>
+                <a:cs typeface="Times New Roman"/>
+                <a:sym typeface="Times New Roman"/>
+              </a:defRPr>
+            </a:lvl6pPr>
+            <a:lvl7pPr marL="3200400" marR="0" lvl="6" indent="-355600" algn="l" rtl="0">
+              <a:lnSpc>
+                <a:spcPct val="100000"/>
+              </a:lnSpc>
+              <a:spcBef>
+                <a:spcPts val="400"/>
+              </a:spcBef>
+              <a:spcAft>
+                <a:spcPts val="0"/>
+              </a:spcAft>
+              <a:buClr>
+                <a:srgbClr val="FF5050"/>
+              </a:buClr>
+              <a:buSzPts val="2000"/>
+              <a:buFont typeface="Times New Roman"/>
+              <a:buChar char="o"/>
+              <a:defRPr sz="2000" b="0" i="0" u="none" strike="noStrike" cap="none">
+                <a:solidFill>
+                  <a:schemeClr val="dk1"/>
+                </a:solidFill>
+                <a:latin typeface="Times New Roman"/>
+                <a:ea typeface="Times New Roman"/>
+                <a:cs typeface="Times New Roman"/>
+                <a:sym typeface="Times New Roman"/>
+              </a:defRPr>
+            </a:lvl7pPr>
+            <a:lvl8pPr marL="3657600" marR="0" lvl="7" indent="-355600" algn="l" rtl="0">
+              <a:lnSpc>
+                <a:spcPct val="100000"/>
+              </a:lnSpc>
+              <a:spcBef>
+                <a:spcPts val="400"/>
+              </a:spcBef>
+              <a:spcAft>
+                <a:spcPts val="0"/>
+              </a:spcAft>
+              <a:buClr>
+                <a:srgbClr val="FF5050"/>
+              </a:buClr>
+              <a:buSzPts val="2000"/>
+              <a:buFont typeface="Times New Roman"/>
+              <a:buChar char="o"/>
+              <a:defRPr sz="2000" b="0" i="0" u="none" strike="noStrike" cap="none">
+                <a:solidFill>
+                  <a:schemeClr val="dk1"/>
+                </a:solidFill>
+                <a:latin typeface="Times New Roman"/>
+                <a:ea typeface="Times New Roman"/>
+                <a:cs typeface="Times New Roman"/>
+                <a:sym typeface="Times New Roman"/>
+              </a:defRPr>
+            </a:lvl8pPr>
+            <a:lvl9pPr marL="4114800" marR="0" lvl="8" indent="-355600" algn="l" rtl="0">
+              <a:lnSpc>
+                <a:spcPct val="100000"/>
+              </a:lnSpc>
+              <a:spcBef>
+                <a:spcPts val="400"/>
+              </a:spcBef>
+              <a:spcAft>
+                <a:spcPts val="0"/>
+              </a:spcAft>
+              <a:buClr>
+                <a:srgbClr val="FF5050"/>
+              </a:buClr>
+              <a:buSzPts val="2000"/>
+              <a:buFont typeface="Times New Roman"/>
+              <a:buChar char="o"/>
+              <a:defRPr sz="2000" b="0" i="0" u="none" strike="noStrike" cap="none">
+                <a:solidFill>
+                  <a:schemeClr val="dk1"/>
+                </a:solidFill>
+                <a:latin typeface="Times New Roman"/>
+                <a:ea typeface="Times New Roman"/>
+                <a:cs typeface="Times New Roman"/>
+                <a:sym typeface="Times New Roman"/>
+              </a:defRPr>
+            </a:lvl9pPr>
+          </a:lstStyle>
+          <a:p>
+            <a:pPr marL="457200" lvl="1" indent="-406400">
+              <a:spcBef>
+                <a:spcPts val="560"/>
+              </a:spcBef>
+              <a:buClr>
+                <a:schemeClr val="accent2"/>
+              </a:buClr>
+              <a:buSzPts val="2800"/>
+              <a:buFont typeface="Noto Sans Symbols"/>
+              <a:buChar char="❖"/>
+            </a:pPr>
+            <a:r>
+              <a:rPr lang="zh-TW" altLang="en-US" dirty="0">
+                <a:solidFill>
+                  <a:srgbClr val="333333"/>
+                </a:solidFill>
+                <a:latin typeface="Times New Roman" panose="02020603050405020304" pitchFamily="18" charset="0"/>
+                <a:ea typeface="標楷體" panose="03000509000000000000" pitchFamily="65" charset="-120"/>
+                <a:cs typeface="Times New Roman" panose="02020603050405020304" pitchFamily="18" charset="0"/>
+              </a:rPr>
+              <a:t>舉例：</a:t>
+            </a:r>
+            <a:endParaRPr lang="en-US" altLang="zh-TW" sz="1600" dirty="0">
+              <a:solidFill>
+                <a:srgbClr val="333333"/>
+              </a:solidFill>
+              <a:latin typeface="Times New Roman" panose="02020603050405020304" pitchFamily="18" charset="0"/>
+              <a:ea typeface="標楷體" panose="03000509000000000000" pitchFamily="65" charset="-120"/>
+              <a:cs typeface="Times New Roman" panose="02020603050405020304" pitchFamily="18" charset="0"/>
+            </a:endParaRPr>
+          </a:p>
+          <a:p>
+            <a:pPr marL="50800" indent="0">
+              <a:lnSpc>
+                <a:spcPts val="3000"/>
+              </a:lnSpc>
+              <a:buNone/>
+            </a:pPr>
+            <a:endParaRPr lang="en-US" altLang="zh-TW" sz="2000" dirty="0">
+              <a:latin typeface="Times New Roman" panose="02020603050405020304" pitchFamily="18" charset="0"/>
+              <a:ea typeface="標楷體" panose="03000509000000000000" pitchFamily="65" charset="-120"/>
+              <a:cs typeface="Times New Roman" panose="02020603050405020304" pitchFamily="18" charset="0"/>
+            </a:endParaRPr>
+          </a:p>
+        </p:txBody>
+      </p:sp>
+      <p:grpSp>
+        <p:nvGrpSpPr>
+          <p:cNvPr id="33" name="群組 32">
+            <a:extLst>
+              <a:ext uri="{FF2B5EF4-FFF2-40B4-BE49-F238E27FC236}">
+                <a16:creationId xmlns:a16="http://schemas.microsoft.com/office/drawing/2014/main" id="{4B4C5EF7-A217-7D9B-9BE7-58FAFE1E147F}"/>
+              </a:ext>
+            </a:extLst>
+          </p:cNvPr>
+          <p:cNvGrpSpPr/>
+          <p:nvPr/>
+        </p:nvGrpSpPr>
+        <p:grpSpPr>
+          <a:xfrm>
+            <a:off x="5673267" y="4583479"/>
+            <a:ext cx="3275636" cy="1155308"/>
+            <a:chOff x="4820412" y="3246174"/>
+            <a:chExt cx="3275636" cy="1155308"/>
+          </a:xfrm>
+        </p:grpSpPr>
+        <mc:AlternateContent xmlns:mc="http://schemas.openxmlformats.org/markup-compatibility/2006">
+          <mc:Choice xmlns:a14="http://schemas.microsoft.com/office/drawing/2010/main" Requires="a14">
+            <p:sp>
+              <p:nvSpPr>
+                <p:cNvPr id="28" name="文字方塊 27">
+                  <a:extLst>
+                    <a:ext uri="{FF2B5EF4-FFF2-40B4-BE49-F238E27FC236}">
+                      <a16:creationId xmlns:a16="http://schemas.microsoft.com/office/drawing/2014/main" id="{94A8FAC7-8705-ABAD-F89E-DC9FE4497308}"/>
+                    </a:ext>
+                  </a:extLst>
+                </p:cNvPr>
+                <p:cNvSpPr txBox="1"/>
+                <p:nvPr/>
+              </p:nvSpPr>
+              <p:spPr>
+                <a:xfrm>
+                  <a:off x="4826642" y="3246174"/>
+                  <a:ext cx="2124316" cy="497059"/>
+                </a:xfrm>
+                <a:prstGeom prst="rect">
+                  <a:avLst/>
+                </a:prstGeom>
+                <a:noFill/>
+              </p:spPr>
+              <p:txBody>
+                <a:bodyPr wrap="square">
+                  <a:spAutoFit/>
+                </a:bodyPr>
+                <a:lstStyle/>
+                <a:p>
+                  <a:pPr/>
+                  <a14:m>
+                    <m:oMathPara xmlns:m="http://schemas.openxmlformats.org/officeDocument/2006/math">
+                      <m:oMath>
+                        <m:sSub>
+                          <m:sSubPr>
+                            <m:ctrlPr>
+                              <a:rPr lang="zh-TW" altLang="en-US" i="1">
+                                <a:latin typeface="Cambria Math" panose="02040503050406030204" pitchFamily="18" charset="0"/>
+                              </a:rPr>
+                            </m:ctrlPr>
+                          </m:sSubPr>
+                          <m:e>
+                            <m:r>
+                              <a:rPr lang="zh-TW" altLang="en-US" i="1">
+                                <a:latin typeface="Cambria Math" panose="02040503050406030204" pitchFamily="18" charset="0"/>
+                              </a:rPr>
+                              <m:t>𝑋</m:t>
+                            </m:r>
+                          </m:e>
+                          <m:sub>
+                            <m:r>
+                              <a:rPr lang="zh-TW" altLang="en-US" i="1">
+                                <a:latin typeface="Cambria Math" panose="02040503050406030204" pitchFamily="18" charset="0"/>
+                              </a:rPr>
+                              <m:t>𝑊</m:t>
+                            </m:r>
+                          </m:sub>
+                        </m:sSub>
+                        <m:r>
+                          <a:rPr lang="zh-TW" altLang="en-US" i="0">
+                            <a:latin typeface="Cambria Math" panose="02040503050406030204" pitchFamily="18" charset="0"/>
+                          </a:rPr>
+                          <m:t>=</m:t>
+                        </m:r>
+                        <m:f>
+                          <m:fPr>
+                            <m:ctrlPr>
+                              <a:rPr lang="zh-TW" altLang="en-US" i="0">
+                                <a:latin typeface="Cambria Math" panose="02040503050406030204" pitchFamily="18" charset="0"/>
+                              </a:rPr>
+                            </m:ctrlPr>
+                          </m:fPr>
+                          <m:num>
+                            <m:r>
+                              <a:rPr lang="zh-TW" altLang="en-US" i="0">
+                                <a:latin typeface="Cambria Math" panose="02040503050406030204" pitchFamily="18" charset="0"/>
+                              </a:rPr>
+                              <m:t>0.3127</m:t>
+                            </m:r>
+                          </m:num>
+                          <m:den>
+                            <m:r>
+                              <a:rPr lang="zh-TW" altLang="en-US" i="0">
+                                <a:latin typeface="Cambria Math" panose="02040503050406030204" pitchFamily="18" charset="0"/>
+                              </a:rPr>
+                              <m:t>0.3290</m:t>
+                            </m:r>
+                          </m:den>
+                        </m:f>
+                        <m:r>
+                          <a:rPr lang="zh-TW" altLang="en-US" i="0">
+                            <a:latin typeface="Cambria Math" panose="02040503050406030204" pitchFamily="18" charset="0"/>
+                          </a:rPr>
+                          <m:t>≈0.9505</m:t>
+                        </m:r>
+                      </m:oMath>
+                    </m:oMathPara>
+                  </a14:m>
+                  <a:endParaRPr lang="zh-TW" altLang="en-US" dirty="0">
+                    <a:latin typeface="Times New Roman" panose="02020603050405020304" pitchFamily="18" charset="0"/>
+                    <a:ea typeface="標楷體" panose="03000509000000000000" pitchFamily="65" charset="-120"/>
+                    <a:cs typeface="Times New Roman" panose="02020603050405020304" pitchFamily="18" charset="0"/>
+                  </a:endParaRPr>
+                </a:p>
+              </p:txBody>
+            </p:sp>
+          </mc:Choice>
+          <mc:Fallback>
+            <p:sp>
+              <p:nvSpPr>
+                <p:cNvPr id="28" name="文字方塊 27">
+                  <a:extLst>
+                    <a:ext uri="{FF2B5EF4-FFF2-40B4-BE49-F238E27FC236}">
+                      <a16:creationId xmlns:a16="http://schemas.microsoft.com/office/drawing/2014/main" id="{94A8FAC7-8705-ABAD-F89E-DC9FE4497308}"/>
+                    </a:ext>
+                  </a:extLst>
+                </p:cNvPr>
+                <p:cNvSpPr txBox="1">
+                  <a:spLocks noRot="1" noChangeAspect="1" noMove="1" noResize="1" noEditPoints="1" noAdjustHandles="1" noChangeArrowheads="1" noChangeShapeType="1" noTextEdit="1"/>
+                </p:cNvSpPr>
+                <p:nvPr/>
+              </p:nvSpPr>
+              <p:spPr>
+                <a:xfrm>
+                  <a:off x="4826642" y="3246174"/>
+                  <a:ext cx="2124316" cy="497059"/>
+                </a:xfrm>
+                <a:prstGeom prst="rect">
+                  <a:avLst/>
+                </a:prstGeom>
+                <a:blipFill>
+                  <a:blip r:embed="rId6"/>
+                  <a:stretch>
+                    <a:fillRect b="-1235"/>
+                  </a:stretch>
+                </a:blipFill>
+              </p:spPr>
+              <p:txBody>
+                <a:bodyPr/>
+                <a:lstStyle/>
+                <a:p>
+                  <a:r>
+                    <a:rPr lang="zh-TW" altLang="en-US">
+                      <a:noFill/>
+                    </a:rPr>
+                    <a:t> </a:t>
+                  </a:r>
+                </a:p>
+              </p:txBody>
+            </p:sp>
+          </mc:Fallback>
+        </mc:AlternateContent>
+        <mc:AlternateContent xmlns:mc="http://schemas.openxmlformats.org/markup-compatibility/2006">
+          <mc:Choice xmlns:a14="http://schemas.microsoft.com/office/drawing/2010/main" Requires="a14">
+            <p:sp>
+              <p:nvSpPr>
+                <p:cNvPr id="30" name="文字方塊 29">
+                  <a:extLst>
+                    <a:ext uri="{FF2B5EF4-FFF2-40B4-BE49-F238E27FC236}">
+                      <a16:creationId xmlns:a16="http://schemas.microsoft.com/office/drawing/2014/main" id="{8E214F1A-6A78-67B8-1B7D-9F1E3A4DE70D}"/>
+                    </a:ext>
+                  </a:extLst>
+                </p:cNvPr>
+                <p:cNvSpPr txBox="1"/>
+                <p:nvPr/>
+              </p:nvSpPr>
+              <p:spPr>
+                <a:xfrm>
+                  <a:off x="4820412" y="3904423"/>
+                  <a:ext cx="3275636" cy="497059"/>
+                </a:xfrm>
+                <a:prstGeom prst="rect">
+                  <a:avLst/>
+                </a:prstGeom>
+                <a:noFill/>
+              </p:spPr>
+              <p:txBody>
+                <a:bodyPr wrap="square">
+                  <a:spAutoFit/>
+                </a:bodyPr>
+                <a:lstStyle/>
+                <a:p>
+                  <a:pPr/>
+                  <a14:m>
+                    <m:oMathPara xmlns:m="http://schemas.openxmlformats.org/officeDocument/2006/math">
+                      <m:oMath>
+                        <m:sSub>
+                          <m:sSubPr>
+                            <m:ctrlPr>
+                              <a:rPr lang="zh-TW" altLang="en-US" i="1">
+                                <a:latin typeface="Cambria Math" panose="02040503050406030204" pitchFamily="18" charset="0"/>
+                              </a:rPr>
+                            </m:ctrlPr>
+                          </m:sSubPr>
+                          <m:e>
+                            <m:r>
+                              <a:rPr lang="zh-TW" altLang="en-US" i="1">
+                                <a:latin typeface="Cambria Math" panose="02040503050406030204" pitchFamily="18" charset="0"/>
+                              </a:rPr>
+                              <m:t>𝑍</m:t>
+                            </m:r>
+                          </m:e>
+                          <m:sub>
+                            <m:r>
+                              <a:rPr lang="zh-TW" altLang="en-US" i="1">
+                                <a:latin typeface="Cambria Math" panose="02040503050406030204" pitchFamily="18" charset="0"/>
+                              </a:rPr>
+                              <m:t>𝑊</m:t>
+                            </m:r>
+                          </m:sub>
+                        </m:sSub>
+                        <m:r>
+                          <a:rPr lang="zh-TW" altLang="en-US" i="0">
+                            <a:latin typeface="Cambria Math" panose="02040503050406030204" pitchFamily="18" charset="0"/>
+                          </a:rPr>
+                          <m:t>=</m:t>
+                        </m:r>
+                        <m:f>
+                          <m:fPr>
+                            <m:ctrlPr>
+                              <a:rPr lang="zh-TW" altLang="en-US" i="0">
+                                <a:latin typeface="Cambria Math" panose="02040503050406030204" pitchFamily="18" charset="0"/>
+                              </a:rPr>
+                            </m:ctrlPr>
+                          </m:fPr>
+                          <m:num>
+                            <m:r>
+                              <a:rPr lang="zh-TW" altLang="en-US" i="0">
+                                <a:latin typeface="Cambria Math" panose="02040503050406030204" pitchFamily="18" charset="0"/>
+                              </a:rPr>
+                              <m:t>1−0.3127−0.3290</m:t>
+                            </m:r>
+                          </m:num>
+                          <m:den>
+                            <m:r>
+                              <a:rPr lang="zh-TW" altLang="en-US" i="0">
+                                <a:latin typeface="Cambria Math" panose="02040503050406030204" pitchFamily="18" charset="0"/>
+                              </a:rPr>
+                              <m:t>0.3290</m:t>
+                            </m:r>
+                          </m:den>
+                        </m:f>
+                        <m:r>
+                          <a:rPr lang="zh-TW" altLang="en-US" i="0">
+                            <a:latin typeface="Cambria Math" panose="02040503050406030204" pitchFamily="18" charset="0"/>
+                          </a:rPr>
+                          <m:t>≈1.0891</m:t>
+                        </m:r>
+                      </m:oMath>
+                    </m:oMathPara>
+                  </a14:m>
+                  <a:endParaRPr lang="zh-TW" altLang="en-US" dirty="0">
+                    <a:latin typeface="Times New Roman" panose="02020603050405020304" pitchFamily="18" charset="0"/>
+                    <a:ea typeface="標楷體" panose="03000509000000000000" pitchFamily="65" charset="-120"/>
+                    <a:cs typeface="Times New Roman" panose="02020603050405020304" pitchFamily="18" charset="0"/>
+                  </a:endParaRPr>
+                </a:p>
+              </p:txBody>
+            </p:sp>
+          </mc:Choice>
+          <mc:Fallback>
+            <p:sp>
+              <p:nvSpPr>
+                <p:cNvPr id="30" name="文字方塊 29">
+                  <a:extLst>
+                    <a:ext uri="{FF2B5EF4-FFF2-40B4-BE49-F238E27FC236}">
+                      <a16:creationId xmlns:a16="http://schemas.microsoft.com/office/drawing/2014/main" id="{8E214F1A-6A78-67B8-1B7D-9F1E3A4DE70D}"/>
+                    </a:ext>
+                  </a:extLst>
+                </p:cNvPr>
+                <p:cNvSpPr txBox="1">
+                  <a:spLocks noRot="1" noChangeAspect="1" noMove="1" noResize="1" noEditPoints="1" noAdjustHandles="1" noChangeArrowheads="1" noChangeShapeType="1" noTextEdit="1"/>
+                </p:cNvSpPr>
+                <p:nvPr/>
+              </p:nvSpPr>
+              <p:spPr>
+                <a:xfrm>
+                  <a:off x="4820412" y="3904423"/>
+                  <a:ext cx="3275636" cy="497059"/>
+                </a:xfrm>
+                <a:prstGeom prst="rect">
+                  <a:avLst/>
+                </a:prstGeom>
+                <a:blipFill>
+                  <a:blip r:embed="rId7"/>
+                  <a:stretch>
+                    <a:fillRect b="-1235"/>
+                  </a:stretch>
+                </a:blipFill>
+              </p:spPr>
+              <p:txBody>
+                <a:bodyPr/>
+                <a:lstStyle/>
+                <a:p>
+                  <a:r>
+                    <a:rPr lang="zh-TW" altLang="en-US">
+                      <a:noFill/>
+                    </a:rPr>
+                    <a:t> </a:t>
+                  </a:r>
+                </a:p>
+              </p:txBody>
+            </p:sp>
+          </mc:Fallback>
+        </mc:AlternateContent>
+      </p:grpSp>
+      <p:sp>
+        <p:nvSpPr>
+          <p:cNvPr id="35" name="文字方塊 34">
+            <a:extLst>
+              <a:ext uri="{FF2B5EF4-FFF2-40B4-BE49-F238E27FC236}">
+                <a16:creationId xmlns:a16="http://schemas.microsoft.com/office/drawing/2014/main" id="{E4B264F9-CD99-DE3B-9D34-FBF5DBFB5CFE}"/>
+              </a:ext>
+            </a:extLst>
+          </p:cNvPr>
+          <p:cNvSpPr txBox="1"/>
+          <p:nvPr/>
+        </p:nvSpPr>
+        <p:spPr>
+          <a:xfrm>
+            <a:off x="1203767" y="6396335"/>
+            <a:ext cx="8323428" cy="461665"/>
+          </a:xfrm>
+          <a:prstGeom prst="rect">
+            <a:avLst/>
+          </a:prstGeom>
+          <a:noFill/>
+        </p:spPr>
+        <p:txBody>
+          <a:bodyPr wrap="square">
+            <a:spAutoFit/>
+          </a:bodyPr>
+          <a:lstStyle/>
+          <a:p>
+            <a:r>
+              <a:rPr lang="zh-TW" altLang="zh-TW" sz="1200" b="1" dirty="0">
+                <a:latin typeface="Times New Roman" panose="02020603050405020304" pitchFamily="18" charset="0"/>
+                <a:ea typeface="標楷體" panose="03000509000000000000" pitchFamily="65" charset="-120"/>
+                <a:cs typeface="Times New Roman" panose="02020603050405020304" pitchFamily="18" charset="0"/>
+              </a:rPr>
+              <a:t>[</a:t>
+            </a:r>
+            <a:r>
+              <a:rPr lang="en-US" altLang="zh-TW" sz="1200" b="1" dirty="0">
+                <a:latin typeface="Times New Roman" panose="02020603050405020304" pitchFamily="18" charset="0"/>
+                <a:ea typeface="標楷體" panose="03000509000000000000" pitchFamily="65" charset="-120"/>
+                <a:cs typeface="Times New Roman" panose="02020603050405020304" pitchFamily="18" charset="0"/>
+              </a:rPr>
+              <a:t>4</a:t>
+            </a:r>
+            <a:r>
+              <a:rPr lang="zh-TW" altLang="zh-TW" sz="1200" b="1" dirty="0">
+                <a:latin typeface="Times New Roman" panose="02020603050405020304" pitchFamily="18" charset="0"/>
+                <a:ea typeface="標楷體" panose="03000509000000000000" pitchFamily="65" charset="-120"/>
+                <a:cs typeface="Times New Roman" panose="02020603050405020304" pitchFamily="18" charset="0"/>
+              </a:rPr>
+              <a:t>]</a:t>
+            </a:r>
+            <a:r>
+              <a:rPr lang="zh-TW" altLang="zh-TW" sz="1200" dirty="0">
+                <a:latin typeface="Times New Roman" panose="02020603050405020304" pitchFamily="18" charset="0"/>
+                <a:ea typeface="標楷體" panose="03000509000000000000" pitchFamily="65" charset="-120"/>
+                <a:cs typeface="Times New Roman" panose="02020603050405020304" pitchFamily="18" charset="0"/>
+              </a:rPr>
+              <a:t> International Color Consortium, “Goals for profile assessment,” </a:t>
+            </a:r>
+            <a:r>
+              <a:rPr lang="zh-TW" altLang="zh-TW" sz="1200" i="1" dirty="0">
+                <a:latin typeface="Times New Roman" panose="02020603050405020304" pitchFamily="18" charset="0"/>
+                <a:ea typeface="標楷體" panose="03000509000000000000" pitchFamily="65" charset="-120"/>
+                <a:cs typeface="Times New Roman" panose="02020603050405020304" pitchFamily="18" charset="0"/>
+              </a:rPr>
+              <a:t>International Color Consortium</a:t>
+            </a:r>
+            <a:r>
+              <a:rPr lang="zh-TW" altLang="zh-TW" sz="1200" dirty="0">
+                <a:latin typeface="Times New Roman" panose="02020603050405020304" pitchFamily="18" charset="0"/>
+                <a:ea typeface="標楷體" panose="03000509000000000000" pitchFamily="65" charset="-120"/>
+                <a:cs typeface="Times New Roman" panose="02020603050405020304" pitchFamily="18" charset="0"/>
+              </a:rPr>
+              <a:t>, [Online]. Available: </a:t>
+            </a:r>
+            <a:r>
+              <a:rPr lang="zh-TW" altLang="zh-TW" sz="1200" dirty="0">
+                <a:latin typeface="Times New Roman" panose="02020603050405020304" pitchFamily="18" charset="0"/>
+                <a:ea typeface="標楷體" panose="03000509000000000000" pitchFamily="65" charset="-120"/>
+                <a:cs typeface="Times New Roman" panose="02020603050405020304" pitchFamily="18" charset="0"/>
+                <a:hlinkClick r:id="rId8"/>
+              </a:rPr>
+              <a:t>https://www.color.org/profiles/assessment/</a:t>
+            </a:r>
+            <a:r>
+              <a:rPr lang="zh-TW" altLang="zh-TW" sz="1200" dirty="0">
+                <a:latin typeface="Times New Roman" panose="02020603050405020304" pitchFamily="18" charset="0"/>
+                <a:ea typeface="標楷體" panose="03000509000000000000" pitchFamily="65" charset="-120"/>
+                <a:cs typeface="Times New Roman" panose="02020603050405020304" pitchFamily="18" charset="0"/>
+              </a:rPr>
+              <a:t>. [Accessed: Sep. 19, 2026]. </a:t>
+            </a:r>
+            <a:endParaRPr lang="zh-TW" altLang="en-US" sz="1200" dirty="0">
+              <a:latin typeface="Times New Roman" panose="02020603050405020304" pitchFamily="18" charset="0"/>
+              <a:ea typeface="標楷體" panose="03000509000000000000" pitchFamily="65" charset="-120"/>
+              <a:cs typeface="Times New Roman" panose="02020603050405020304" pitchFamily="18" charset="0"/>
+            </a:endParaRPr>
+          </a:p>
+        </p:txBody>
+      </p:sp>
+      <p:grpSp>
+        <p:nvGrpSpPr>
+          <p:cNvPr id="45" name="群組 44">
+            <a:extLst>
+              <a:ext uri="{FF2B5EF4-FFF2-40B4-BE49-F238E27FC236}">
+                <a16:creationId xmlns:a16="http://schemas.microsoft.com/office/drawing/2014/main" id="{88569DE1-553A-DC5D-D6E1-ABA71C776115}"/>
+              </a:ext>
+            </a:extLst>
+          </p:cNvPr>
+          <p:cNvGrpSpPr/>
+          <p:nvPr/>
+        </p:nvGrpSpPr>
+        <p:grpSpPr>
+          <a:xfrm>
+            <a:off x="5495728" y="3581803"/>
+            <a:ext cx="3829233" cy="891617"/>
+            <a:chOff x="5498155" y="3493800"/>
+            <a:chExt cx="3829233" cy="891617"/>
+          </a:xfrm>
+        </p:grpSpPr>
+        <p:pic>
+          <p:nvPicPr>
+            <p:cNvPr id="40" name="圖片 39">
+              <a:extLst>
+                <a:ext uri="{FF2B5EF4-FFF2-40B4-BE49-F238E27FC236}">
+                  <a16:creationId xmlns:a16="http://schemas.microsoft.com/office/drawing/2014/main" id="{3017A3D9-55B3-9FCF-78A7-8CFF7996C238}"/>
+                </a:ext>
+              </a:extLst>
+            </p:cNvPr>
+            <p:cNvPicPr>
+              <a:picLocks noChangeAspect="1"/>
+            </p:cNvPicPr>
+            <p:nvPr/>
+          </p:nvPicPr>
+          <p:blipFill>
+            <a:blip r:embed="rId9"/>
+            <a:stretch>
+              <a:fillRect/>
+            </a:stretch>
+          </p:blipFill>
+          <p:spPr>
+            <a:xfrm>
+              <a:off x="5498155" y="3493800"/>
+              <a:ext cx="1409822" cy="891617"/>
+            </a:xfrm>
+            <a:prstGeom prst="rect">
+              <a:avLst/>
+            </a:prstGeom>
+          </p:spPr>
+        </p:pic>
+        <p:pic>
+          <p:nvPicPr>
+            <p:cNvPr id="42" name="圖片 41">
+              <a:extLst>
+                <a:ext uri="{FF2B5EF4-FFF2-40B4-BE49-F238E27FC236}">
+                  <a16:creationId xmlns:a16="http://schemas.microsoft.com/office/drawing/2014/main" id="{3523FE1B-0057-E640-2C60-7E3D7A1927EA}"/>
+                </a:ext>
+              </a:extLst>
+            </p:cNvPr>
+            <p:cNvPicPr>
+              <a:picLocks noChangeAspect="1"/>
+            </p:cNvPicPr>
+            <p:nvPr/>
+          </p:nvPicPr>
+          <p:blipFill>
+            <a:blip r:embed="rId10"/>
+            <a:stretch>
+              <a:fillRect/>
+            </a:stretch>
+          </p:blipFill>
+          <p:spPr>
+            <a:xfrm>
+              <a:off x="6759225" y="3534888"/>
+              <a:ext cx="1234547" cy="800169"/>
+            </a:xfrm>
+            <a:prstGeom prst="rect">
+              <a:avLst/>
+            </a:prstGeom>
+          </p:spPr>
+        </p:pic>
+        <p:pic>
+          <p:nvPicPr>
+            <p:cNvPr id="44" name="圖片 43">
+              <a:extLst>
+                <a:ext uri="{FF2B5EF4-FFF2-40B4-BE49-F238E27FC236}">
+                  <a16:creationId xmlns:a16="http://schemas.microsoft.com/office/drawing/2014/main" id="{483ACC88-335C-E8C4-BBD8-7A9AC0907168}"/>
+                </a:ext>
+              </a:extLst>
+            </p:cNvPr>
+            <p:cNvPicPr>
+              <a:picLocks noChangeAspect="1"/>
+            </p:cNvPicPr>
+            <p:nvPr/>
+          </p:nvPicPr>
+          <p:blipFill>
+            <a:blip r:embed="rId11"/>
+            <a:stretch>
+              <a:fillRect/>
+            </a:stretch>
+          </p:blipFill>
+          <p:spPr>
+            <a:xfrm>
+              <a:off x="7993772" y="3534888"/>
+              <a:ext cx="1333616" cy="807790"/>
+            </a:xfrm>
+            <a:prstGeom prst="rect">
+              <a:avLst/>
+            </a:prstGeom>
+          </p:spPr>
+        </p:pic>
+      </p:grpSp>
+    </p:spTree>
+    <p:extLst>
+      <p:ext uri="{BB962C8B-B14F-4D97-AF65-F5344CB8AC3E}">
+        <p14:creationId xmlns:p14="http://schemas.microsoft.com/office/powerpoint/2010/main" val="3699173038"/>
+      </p:ext>
+    </p:extLst>
+  </p:cSld>
+  <p:clrMapOvr>
+    <a:masterClrMapping/>
+  </p:clrMapOvr>
+</p:sld>
+</file>
+
+<file path=ppt/slides/slide12.xml><?xml version="1.0" encoding="utf-8"?>
+<p:sld xmlns:a="http://schemas.openxmlformats.org/drawingml/2006/main" xmlns:r="http://schemas.openxmlformats.org/officeDocument/2006/relationships" xmlns:p="http://schemas.openxmlformats.org/presentationml/2006/main">
+  <p:cSld>
+    <p:spTree>
+      <p:nvGrpSpPr>
+        <p:cNvPr id="1" name="">
+          <a:extLst>
+            <a:ext uri="{FF2B5EF4-FFF2-40B4-BE49-F238E27FC236}">
+              <a16:creationId xmlns:a16="http://schemas.microsoft.com/office/drawing/2014/main" id="{AD04A77E-DAFB-2807-84F7-D70F0859EFFD}"/>
+            </a:ext>
+          </a:extLst>
+        </p:cNvPr>
+        <p:cNvGrpSpPr/>
+        <p:nvPr/>
+      </p:nvGrpSpPr>
+      <p:grpSpPr>
+        <a:xfrm>
+          <a:off x="0" y="0"/>
+          <a:ext cx="0" cy="0"/>
+          <a:chOff x="0" y="0"/>
+          <a:chExt cx="0" cy="0"/>
+        </a:xfrm>
+      </p:grpSpPr>
+      <p:sp>
+        <p:nvSpPr>
+          <p:cNvPr id="5" name="標題 1">
+            <a:extLst>
+              <a:ext uri="{FF2B5EF4-FFF2-40B4-BE49-F238E27FC236}">
+                <a16:creationId xmlns:a16="http://schemas.microsoft.com/office/drawing/2014/main" id="{C4EA0848-8E74-3D45-9380-8E7A88853D27}"/>
+              </a:ext>
+            </a:extLst>
+          </p:cNvPr>
+          <p:cNvSpPr>
+            <a:spLocks noGrp="1"/>
+          </p:cNvSpPr>
+          <p:nvPr>
+            <p:ph type="title"/>
+          </p:nvPr>
+        </p:nvSpPr>
+        <p:spPr>
+          <a:xfrm>
+            <a:off x="609602" y="609600"/>
+            <a:ext cx="8077200" cy="533400"/>
+          </a:xfrm>
+        </p:spPr>
+        <p:txBody>
+          <a:bodyPr/>
+          <a:lstStyle/>
+          <a:p>
+            <a:r>
+              <a:rPr lang="zh-TW" altLang="en-US" dirty="0">
+                <a:latin typeface="Times New Roman" panose="02020603050405020304" pitchFamily="18" charset="0"/>
+                <a:ea typeface="標楷體" panose="03000509000000000000" pitchFamily="65" charset="-120"/>
+                <a:cs typeface="Times New Roman" panose="02020603050405020304" pitchFamily="18" charset="0"/>
+              </a:rPr>
+              <a:t>本次進度</a:t>
+            </a:r>
+            <a:r>
+              <a:rPr lang="en-US" altLang="zh-TW" dirty="0">
+                <a:latin typeface="Times New Roman" panose="02020603050405020304" pitchFamily="18" charset="0"/>
+                <a:ea typeface="標楷體" panose="03000509000000000000" pitchFamily="65" charset="-120"/>
+                <a:cs typeface="Times New Roman" panose="02020603050405020304" pitchFamily="18" charset="0"/>
+              </a:rPr>
+              <a:t>:</a:t>
+            </a:r>
+            <a:r>
+              <a:rPr lang="zh-TW" altLang="zh-TW" dirty="0">
+                <a:latin typeface="Times New Roman" panose="02020603050405020304" pitchFamily="18" charset="0"/>
+                <a:ea typeface="標楷體" panose="03000509000000000000" pitchFamily="65" charset="-120"/>
+                <a:cs typeface="Times New Roman" panose="02020603050405020304" pitchFamily="18" charset="0"/>
+              </a:rPr>
+              <a:t>Matrix-based Display Profile</a:t>
+            </a:r>
+            <a:endParaRPr lang="zh-TW" altLang="en-US" dirty="0">
+              <a:latin typeface="Times New Roman" panose="02020603050405020304" pitchFamily="18" charset="0"/>
+              <a:ea typeface="標楷體" panose="03000509000000000000" pitchFamily="65" charset="-120"/>
+              <a:cs typeface="Times New Roman" panose="02020603050405020304" pitchFamily="18" charset="0"/>
+            </a:endParaRPr>
+          </a:p>
+        </p:txBody>
+      </p:sp>
+      <p:sp>
+        <p:nvSpPr>
+          <p:cNvPr id="10" name="文字版面配置區 6">
+            <a:extLst>
+              <a:ext uri="{FF2B5EF4-FFF2-40B4-BE49-F238E27FC236}">
+                <a16:creationId xmlns:a16="http://schemas.microsoft.com/office/drawing/2014/main" id="{01B3812A-18EF-0958-6E4C-DFB4E9BFB112}"/>
+              </a:ext>
+            </a:extLst>
+          </p:cNvPr>
+          <p:cNvSpPr txBox="1"/>
+          <p:nvPr/>
+        </p:nvSpPr>
+        <p:spPr>
+          <a:xfrm>
+            <a:off x="497549" y="1284684"/>
+            <a:ext cx="8686796" cy="717631"/>
+          </a:xfrm>
+          <a:prstGeom prst="rect">
+            <a:avLst/>
+          </a:prstGeom>
+          <a:noFill/>
+          <a:ln>
+            <a:noFill/>
+          </a:ln>
+        </p:spPr>
+        <p:txBody>
+          <a:bodyPr spcFirstLastPara="1" wrap="square" lIns="91425" tIns="45700" rIns="91425" bIns="45700" anchor="t" anchorCtr="0">
+            <a:noAutofit/>
+          </a:bodyPr>
+          <a:lstStyle>
+            <a:defPPr marR="0" lvl="0" algn="l" rtl="0">
+              <a:lnSpc>
+                <a:spcPct val="100000"/>
+              </a:lnSpc>
+              <a:spcBef>
+                <a:spcPts val="0"/>
+              </a:spcBef>
+              <a:spcAft>
+                <a:spcPts val="0"/>
+              </a:spcAft>
+            </a:defPPr>
+            <a:lvl1pPr marL="457200" marR="0" lvl="0" indent="-406400" algn="l" rtl="0">
+              <a:lnSpc>
+                <a:spcPct val="100000"/>
+              </a:lnSpc>
+              <a:spcBef>
+                <a:spcPts val="560"/>
+              </a:spcBef>
+              <a:spcAft>
+                <a:spcPts val="0"/>
+              </a:spcAft>
+              <a:buClr>
+                <a:schemeClr val="accent2"/>
+              </a:buClr>
+              <a:buSzPts val="2800"/>
+              <a:buFont typeface="Noto Sans Symbols"/>
+              <a:buChar char="❖"/>
+              <a:defRPr sz="2800" b="0" i="0" u="none" strike="noStrike" cap="none">
+                <a:solidFill>
+                  <a:schemeClr val="dk1"/>
+                </a:solidFill>
+                <a:latin typeface="Times New Roman"/>
+                <a:ea typeface="Times New Roman"/>
+                <a:cs typeface="Times New Roman"/>
+                <a:sym typeface="Times New Roman"/>
+              </a:defRPr>
+            </a:lvl1pPr>
+            <a:lvl2pPr marL="914400" marR="0" lvl="1" indent="-381000" algn="l" rtl="0">
+              <a:lnSpc>
+                <a:spcPct val="100000"/>
+              </a:lnSpc>
+              <a:spcBef>
+                <a:spcPts val="480"/>
+              </a:spcBef>
+              <a:spcAft>
+                <a:spcPts val="0"/>
+              </a:spcAft>
+              <a:buClr>
+                <a:srgbClr val="FF5050"/>
+              </a:buClr>
+              <a:buSzPts val="2400"/>
+              <a:buFont typeface="Noto Sans Symbols"/>
+              <a:buChar char="▪"/>
+              <a:defRPr sz="2400" b="0" i="0" u="none" strike="noStrike" cap="none">
+                <a:solidFill>
+                  <a:schemeClr val="dk1"/>
+                </a:solidFill>
+                <a:latin typeface="Times New Roman"/>
+                <a:ea typeface="Times New Roman"/>
+                <a:cs typeface="Times New Roman"/>
+                <a:sym typeface="Times New Roman"/>
+              </a:defRPr>
+            </a:lvl2pPr>
+            <a:lvl3pPr marL="1371600" marR="0" lvl="2" indent="-355600" algn="l" rtl="0">
+              <a:lnSpc>
+                <a:spcPct val="100000"/>
+              </a:lnSpc>
+              <a:spcBef>
+                <a:spcPts val="400"/>
+              </a:spcBef>
+              <a:spcAft>
+                <a:spcPts val="0"/>
+              </a:spcAft>
+              <a:buClr>
+                <a:srgbClr val="6699FF"/>
+              </a:buClr>
+              <a:buSzPts val="2000"/>
+              <a:buFont typeface="Times New Roman"/>
+              <a:buChar char="•"/>
+              <a:defRPr sz="2000" b="0" i="0" u="none" strike="noStrike" cap="none">
+                <a:solidFill>
+                  <a:schemeClr val="dk1"/>
+                </a:solidFill>
+                <a:latin typeface="Times New Roman"/>
+                <a:ea typeface="Times New Roman"/>
+                <a:cs typeface="Times New Roman"/>
+                <a:sym typeface="Times New Roman"/>
+              </a:defRPr>
+            </a:lvl3pPr>
+            <a:lvl4pPr marL="1828800" marR="0" lvl="3" indent="-355600" algn="l" rtl="0">
+              <a:lnSpc>
+                <a:spcPct val="100000"/>
+              </a:lnSpc>
+              <a:spcBef>
+                <a:spcPts val="400"/>
+              </a:spcBef>
+              <a:spcAft>
+                <a:spcPts val="0"/>
+              </a:spcAft>
+              <a:buClr>
+                <a:srgbClr val="FF5050"/>
+              </a:buClr>
+              <a:buSzPts val="2000"/>
+              <a:buFont typeface="Times New Roman"/>
+              <a:buChar char="o"/>
+              <a:defRPr sz="2000" b="0" i="0" u="none" strike="noStrike" cap="none">
+                <a:solidFill>
+                  <a:schemeClr val="dk1"/>
+                </a:solidFill>
+                <a:latin typeface="Times New Roman"/>
+                <a:ea typeface="Times New Roman"/>
+                <a:cs typeface="Times New Roman"/>
+                <a:sym typeface="Times New Roman"/>
+              </a:defRPr>
+            </a:lvl4pPr>
+            <a:lvl5pPr marL="2286000" marR="0" lvl="4" indent="-355600" algn="l" rtl="0">
+              <a:lnSpc>
+                <a:spcPct val="100000"/>
+              </a:lnSpc>
+              <a:spcBef>
+                <a:spcPts val="400"/>
+              </a:spcBef>
+              <a:spcAft>
+                <a:spcPts val="0"/>
+              </a:spcAft>
+              <a:buClr>
+                <a:srgbClr val="FF5050"/>
+              </a:buClr>
+              <a:buSzPts val="2000"/>
+              <a:buFont typeface="Times New Roman"/>
+              <a:buChar char="o"/>
+              <a:defRPr sz="2000" b="0" i="0" u="none" strike="noStrike" cap="none">
+                <a:solidFill>
+                  <a:schemeClr val="dk1"/>
+                </a:solidFill>
+                <a:latin typeface="Times New Roman"/>
+                <a:ea typeface="Times New Roman"/>
+                <a:cs typeface="Times New Roman"/>
+                <a:sym typeface="Times New Roman"/>
+              </a:defRPr>
+            </a:lvl5pPr>
+            <a:lvl6pPr marL="2743200" marR="0" lvl="5" indent="-355600" algn="l" rtl="0">
+              <a:lnSpc>
+                <a:spcPct val="100000"/>
+              </a:lnSpc>
+              <a:spcBef>
+                <a:spcPts val="400"/>
+              </a:spcBef>
+              <a:spcAft>
+                <a:spcPts val="0"/>
+              </a:spcAft>
+              <a:buClr>
+                <a:srgbClr val="FF5050"/>
+              </a:buClr>
+              <a:buSzPts val="2000"/>
+              <a:buFont typeface="Times New Roman"/>
+              <a:buChar char="o"/>
+              <a:defRPr sz="2000" b="0" i="0" u="none" strike="noStrike" cap="none">
+                <a:solidFill>
+                  <a:schemeClr val="dk1"/>
+                </a:solidFill>
+                <a:latin typeface="Times New Roman"/>
+                <a:ea typeface="Times New Roman"/>
+                <a:cs typeface="Times New Roman"/>
+                <a:sym typeface="Times New Roman"/>
+              </a:defRPr>
+            </a:lvl6pPr>
+            <a:lvl7pPr marL="3200400" marR="0" lvl="6" indent="-355600" algn="l" rtl="0">
+              <a:lnSpc>
+                <a:spcPct val="100000"/>
+              </a:lnSpc>
+              <a:spcBef>
+                <a:spcPts val="400"/>
+              </a:spcBef>
+              <a:spcAft>
+                <a:spcPts val="0"/>
+              </a:spcAft>
+              <a:buClr>
+                <a:srgbClr val="FF5050"/>
+              </a:buClr>
+              <a:buSzPts val="2000"/>
+              <a:buFont typeface="Times New Roman"/>
+              <a:buChar char="o"/>
+              <a:defRPr sz="2000" b="0" i="0" u="none" strike="noStrike" cap="none">
+                <a:solidFill>
+                  <a:schemeClr val="dk1"/>
+                </a:solidFill>
+                <a:latin typeface="Times New Roman"/>
+                <a:ea typeface="Times New Roman"/>
+                <a:cs typeface="Times New Roman"/>
+                <a:sym typeface="Times New Roman"/>
+              </a:defRPr>
+            </a:lvl7pPr>
+            <a:lvl8pPr marL="3657600" marR="0" lvl="7" indent="-355600" algn="l" rtl="0">
+              <a:lnSpc>
+                <a:spcPct val="100000"/>
+              </a:lnSpc>
+              <a:spcBef>
+                <a:spcPts val="400"/>
+              </a:spcBef>
+              <a:spcAft>
+                <a:spcPts val="0"/>
+              </a:spcAft>
+              <a:buClr>
+                <a:srgbClr val="FF5050"/>
+              </a:buClr>
+              <a:buSzPts val="2000"/>
+              <a:buFont typeface="Times New Roman"/>
+              <a:buChar char="o"/>
+              <a:defRPr sz="2000" b="0" i="0" u="none" strike="noStrike" cap="none">
+                <a:solidFill>
+                  <a:schemeClr val="dk1"/>
+                </a:solidFill>
+                <a:latin typeface="Times New Roman"/>
+                <a:ea typeface="Times New Roman"/>
+                <a:cs typeface="Times New Roman"/>
+                <a:sym typeface="Times New Roman"/>
+              </a:defRPr>
+            </a:lvl8pPr>
+            <a:lvl9pPr marL="4114800" marR="0" lvl="8" indent="-355600" algn="l" rtl="0">
+              <a:lnSpc>
+                <a:spcPct val="100000"/>
+              </a:lnSpc>
+              <a:spcBef>
+                <a:spcPts val="400"/>
+              </a:spcBef>
+              <a:spcAft>
+                <a:spcPts val="0"/>
+              </a:spcAft>
+              <a:buClr>
+                <a:srgbClr val="FF5050"/>
+              </a:buClr>
+              <a:buSzPts val="2000"/>
+              <a:buFont typeface="Times New Roman"/>
+              <a:buChar char="o"/>
+              <a:defRPr sz="2000" b="0" i="0" u="none" strike="noStrike" cap="none">
+                <a:solidFill>
+                  <a:schemeClr val="dk1"/>
+                </a:solidFill>
+                <a:latin typeface="Times New Roman"/>
+                <a:ea typeface="Times New Roman"/>
+                <a:cs typeface="Times New Roman"/>
+                <a:sym typeface="Times New Roman"/>
+              </a:defRPr>
+            </a:lvl9pPr>
+          </a:lstStyle>
+          <a:p>
+            <a:pPr marL="457200" lvl="1" indent="-406400">
+              <a:spcBef>
+                <a:spcPts val="560"/>
+              </a:spcBef>
+              <a:buClr>
+                <a:schemeClr val="accent2"/>
+              </a:buClr>
+              <a:buSzPts val="2800"/>
+              <a:buFont typeface="Noto Sans Symbols"/>
+              <a:buChar char="❖"/>
+            </a:pPr>
+            <a:r>
+              <a:rPr lang="zh-TW" altLang="en-US" dirty="0">
+                <a:solidFill>
+                  <a:srgbClr val="333333"/>
+                </a:solidFill>
+                <a:latin typeface="Times New Roman" panose="02020603050405020304" pitchFamily="18" charset="0"/>
+                <a:ea typeface="標楷體" panose="03000509000000000000" pitchFamily="65" charset="-120"/>
+                <a:cs typeface="Times New Roman" panose="02020603050405020304" pitchFamily="18" charset="0"/>
+              </a:rPr>
+              <a:t>舉例：</a:t>
+            </a:r>
+            <a:endParaRPr lang="en-US" altLang="zh-TW" sz="1600" dirty="0">
+              <a:solidFill>
+                <a:srgbClr val="333333"/>
+              </a:solidFill>
+              <a:latin typeface="Times New Roman" panose="02020603050405020304" pitchFamily="18" charset="0"/>
+              <a:ea typeface="標楷體" panose="03000509000000000000" pitchFamily="65" charset="-120"/>
+              <a:cs typeface="Times New Roman" panose="02020603050405020304" pitchFamily="18" charset="0"/>
+            </a:endParaRPr>
+          </a:p>
+          <a:p>
+            <a:pPr>
+              <a:lnSpc>
+                <a:spcPts val="3000"/>
+              </a:lnSpc>
+            </a:pPr>
+            <a:endParaRPr lang="en-US" altLang="zh-TW" sz="2000" dirty="0">
+              <a:latin typeface="Times New Roman" panose="02020603050405020304" pitchFamily="18" charset="0"/>
+              <a:ea typeface="標楷體" panose="03000509000000000000" pitchFamily="65" charset="-120"/>
+              <a:cs typeface="Times New Roman" panose="02020603050405020304" pitchFamily="18" charset="0"/>
+            </a:endParaRPr>
+          </a:p>
+          <a:p>
+            <a:pPr marL="533400" lvl="1" indent="0">
+              <a:lnSpc>
+                <a:spcPts val="3000"/>
+              </a:lnSpc>
+              <a:buNone/>
+            </a:pPr>
+            <a:endParaRPr lang="zh-TW" altLang="en-US" sz="1800" dirty="0">
+              <a:solidFill>
+                <a:srgbClr val="333333"/>
+              </a:solidFill>
+              <a:latin typeface="Times New Roman" panose="02020603050405020304" pitchFamily="18" charset="0"/>
+              <a:ea typeface="標楷體" panose="03000509000000000000" pitchFamily="65" charset="-120"/>
+              <a:cs typeface="Times New Roman" panose="02020603050405020304" pitchFamily="18" charset="0"/>
+            </a:endParaRPr>
+          </a:p>
+        </p:txBody>
+      </p:sp>
+      <p:pic>
+        <p:nvPicPr>
+          <p:cNvPr id="4" name="圖片 3">
+            <a:extLst>
+              <a:ext uri="{FF2B5EF4-FFF2-40B4-BE49-F238E27FC236}">
+                <a16:creationId xmlns:a16="http://schemas.microsoft.com/office/drawing/2014/main" id="{2426532A-89CE-A93C-23F1-069160B45F6E}"/>
+              </a:ext>
+            </a:extLst>
+          </p:cNvPr>
+          <p:cNvPicPr>
+            <a:picLocks noChangeAspect="1"/>
+          </p:cNvPicPr>
+          <p:nvPr/>
+        </p:nvPicPr>
+        <p:blipFill>
+          <a:blip r:embed="rId3"/>
+          <a:stretch>
+            <a:fillRect/>
+          </a:stretch>
+        </p:blipFill>
+        <p:spPr>
+          <a:xfrm>
+            <a:off x="609602" y="2961543"/>
+            <a:ext cx="2720576" cy="899238"/>
+          </a:xfrm>
+          <a:prstGeom prst="rect">
+            <a:avLst/>
+          </a:prstGeom>
+        </p:spPr>
+      </p:pic>
+      <p:sp>
+        <p:nvSpPr>
+          <p:cNvPr id="13" name="文字方塊 12">
+            <a:extLst>
+              <a:ext uri="{FF2B5EF4-FFF2-40B4-BE49-F238E27FC236}">
+                <a16:creationId xmlns:a16="http://schemas.microsoft.com/office/drawing/2014/main" id="{51CBBFAF-92DB-DF98-4354-28C9673A2D67}"/>
+              </a:ext>
+            </a:extLst>
+          </p:cNvPr>
+          <p:cNvSpPr txBox="1"/>
+          <p:nvPr/>
+        </p:nvSpPr>
+        <p:spPr>
+          <a:xfrm>
+            <a:off x="1585731" y="6119336"/>
+            <a:ext cx="8044406" cy="738664"/>
+          </a:xfrm>
+          <a:prstGeom prst="rect">
+            <a:avLst/>
+          </a:prstGeom>
+          <a:noFill/>
+        </p:spPr>
+        <p:txBody>
+          <a:bodyPr wrap="square">
+            <a:spAutoFit/>
+          </a:bodyPr>
+          <a:lstStyle/>
+          <a:p>
+            <a:r>
+              <a:rPr lang="zh-TW" altLang="zh-TW" b="1" dirty="0">
+                <a:latin typeface="Times New Roman" panose="02020603050405020304" pitchFamily="18" charset="0"/>
+                <a:ea typeface="標楷體" panose="03000509000000000000" pitchFamily="65" charset="-120"/>
+                <a:cs typeface="Times New Roman" panose="02020603050405020304" pitchFamily="18" charset="0"/>
+              </a:rPr>
+              <a:t>[</a:t>
+            </a:r>
+            <a:r>
+              <a:rPr lang="en-US" altLang="zh-TW" b="1" dirty="0">
+                <a:latin typeface="Times New Roman" panose="02020603050405020304" pitchFamily="18" charset="0"/>
+                <a:ea typeface="標楷體" panose="03000509000000000000" pitchFamily="65" charset="-120"/>
+                <a:cs typeface="Times New Roman" panose="02020603050405020304" pitchFamily="18" charset="0"/>
+              </a:rPr>
+              <a:t>5</a:t>
+            </a:r>
+            <a:r>
+              <a:rPr lang="zh-TW" altLang="zh-TW" b="1" dirty="0">
+                <a:latin typeface="Times New Roman" panose="02020603050405020304" pitchFamily="18" charset="0"/>
+                <a:ea typeface="標楷體" panose="03000509000000000000" pitchFamily="65" charset="-120"/>
+                <a:cs typeface="Times New Roman" panose="02020603050405020304" pitchFamily="18" charset="0"/>
+              </a:rPr>
+              <a:t>]</a:t>
+            </a:r>
+            <a:r>
+              <a:rPr lang="zh-TW" altLang="zh-TW" dirty="0">
+                <a:latin typeface="Times New Roman" panose="02020603050405020304" pitchFamily="18" charset="0"/>
+                <a:ea typeface="標楷體" panose="03000509000000000000" pitchFamily="65" charset="-120"/>
+                <a:cs typeface="Times New Roman" panose="02020603050405020304" pitchFamily="18" charset="0"/>
+              </a:rPr>
+              <a:t> B. Kovalskyi, N. Zanko, N. Pysanchyn, and T. Holubnyk, “Analysis of the principles of color parameters matching in information systems,” in </a:t>
+            </a:r>
+            <a:r>
+              <a:rPr lang="zh-TW" altLang="zh-TW" i="1" dirty="0">
+                <a:latin typeface="Times New Roman" panose="02020603050405020304" pitchFamily="18" charset="0"/>
+                <a:ea typeface="標楷體" panose="03000509000000000000" pitchFamily="65" charset="-120"/>
+                <a:cs typeface="Times New Roman" panose="02020603050405020304" pitchFamily="18" charset="0"/>
+              </a:rPr>
+              <a:t>Modern Aspects of Science, vol. XXX</a:t>
+            </a:r>
+            <a:r>
+              <a:rPr lang="zh-TW" altLang="zh-TW" dirty="0">
+                <a:latin typeface="Times New Roman" panose="02020603050405020304" pitchFamily="18" charset="0"/>
+                <a:ea typeface="標楷體" panose="03000509000000000000" pitchFamily="65" charset="-120"/>
+                <a:cs typeface="Times New Roman" panose="02020603050405020304" pitchFamily="18" charset="0"/>
+              </a:rPr>
+              <a:t>, 2023, pp. 122–144. [Online]. Available: </a:t>
+            </a:r>
+            <a:r>
+              <a:rPr lang="zh-TW" altLang="zh-TW" dirty="0">
+                <a:latin typeface="Times New Roman" panose="02020603050405020304" pitchFamily="18" charset="0"/>
+                <a:ea typeface="標楷體" panose="03000509000000000000" pitchFamily="65" charset="-120"/>
+                <a:cs typeface="Times New Roman" panose="02020603050405020304" pitchFamily="18" charset="0"/>
+                <a:hlinkClick r:id="rId4"/>
+              </a:rPr>
+              <a:t>https://perspectives.pp.ua/public/site/mono/mono-30.pdf</a:t>
+            </a:r>
+            <a:endParaRPr lang="zh-TW" altLang="en-US" dirty="0">
+              <a:latin typeface="Times New Roman" panose="02020603050405020304" pitchFamily="18" charset="0"/>
+              <a:ea typeface="標楷體" panose="03000509000000000000" pitchFamily="65" charset="-120"/>
+              <a:cs typeface="Times New Roman" panose="02020603050405020304" pitchFamily="18" charset="0"/>
+            </a:endParaRPr>
+          </a:p>
+        </p:txBody>
+      </p:sp>
+      <p:pic>
+        <p:nvPicPr>
+          <p:cNvPr id="19" name="圖片 18">
+            <a:extLst>
+              <a:ext uri="{FF2B5EF4-FFF2-40B4-BE49-F238E27FC236}">
+                <a16:creationId xmlns:a16="http://schemas.microsoft.com/office/drawing/2014/main" id="{53457DF2-5D87-EFF2-CAC2-FF570835AACC}"/>
+              </a:ext>
+            </a:extLst>
+          </p:cNvPr>
+          <p:cNvPicPr>
+            <a:picLocks noChangeAspect="1"/>
+          </p:cNvPicPr>
+          <p:nvPr/>
+        </p:nvPicPr>
+        <p:blipFill>
+          <a:blip r:embed="rId5"/>
+          <a:stretch>
+            <a:fillRect/>
+          </a:stretch>
+        </p:blipFill>
+        <p:spPr>
+          <a:xfrm>
+            <a:off x="139807" y="4433734"/>
+            <a:ext cx="3972901" cy="1086606"/>
+          </a:xfrm>
+          <a:prstGeom prst="rect">
+            <a:avLst/>
+          </a:prstGeom>
+        </p:spPr>
+      </p:pic>
+      <p:grpSp>
+        <p:nvGrpSpPr>
+          <p:cNvPr id="32" name="群組 31">
+            <a:extLst>
+              <a:ext uri="{FF2B5EF4-FFF2-40B4-BE49-F238E27FC236}">
+                <a16:creationId xmlns:a16="http://schemas.microsoft.com/office/drawing/2014/main" id="{F927EF4A-6F4D-F3E8-5B09-F22CB7E5C27B}"/>
+              </a:ext>
+            </a:extLst>
+          </p:cNvPr>
+          <p:cNvGrpSpPr/>
+          <p:nvPr/>
+        </p:nvGrpSpPr>
+        <p:grpSpPr>
+          <a:xfrm>
+            <a:off x="6792573" y="876300"/>
+            <a:ext cx="2615878" cy="2013090"/>
+            <a:chOff x="6481823" y="1030147"/>
+            <a:chExt cx="2615878" cy="2013090"/>
+          </a:xfrm>
+        </p:grpSpPr>
+        <p:sp>
+          <p:nvSpPr>
+            <p:cNvPr id="31" name="矩形 30">
+              <a:extLst>
+                <a:ext uri="{FF2B5EF4-FFF2-40B4-BE49-F238E27FC236}">
+                  <a16:creationId xmlns:a16="http://schemas.microsoft.com/office/drawing/2014/main" id="{842E2599-7117-6097-3D20-FAF97CB0624D}"/>
+                </a:ext>
+              </a:extLst>
+            </p:cNvPr>
+            <p:cNvSpPr/>
+            <p:nvPr/>
+          </p:nvSpPr>
+          <p:spPr>
+            <a:xfrm>
+              <a:off x="6481823" y="1030147"/>
+              <a:ext cx="2615878" cy="2013090"/>
+            </a:xfrm>
+            <a:prstGeom prst="rect">
+              <a:avLst/>
+            </a:prstGeom>
+            <a:solidFill>
+              <a:schemeClr val="bg1"/>
+            </a:solidFill>
+            <a:ln>
+              <a:solidFill>
+                <a:schemeClr val="tx1"/>
+              </a:solidFill>
+            </a:ln>
+          </p:spPr>
+          <p:style>
+            <a:lnRef idx="2">
+              <a:schemeClr val="accent1">
+                <a:shade val="15000"/>
+              </a:schemeClr>
+            </a:lnRef>
+            <a:fillRef idx="1">
+              <a:schemeClr val="accent1"/>
+            </a:fillRef>
+            <a:effectRef idx="0">
+              <a:schemeClr val="accent1"/>
+            </a:effectRef>
+            <a:fontRef idx="minor">
+              <a:schemeClr val="lt1"/>
+            </a:fontRef>
+          </p:style>
+          <p:txBody>
+            <a:bodyPr rtlCol="0" anchor="ctr"/>
+            <a:lstStyle/>
+            <a:p>
+              <a:pPr algn="ctr"/>
+              <a:endParaRPr lang="zh-TW" altLang="en-US">
+                <a:latin typeface="Times New Roman" panose="02020603050405020304" pitchFamily="18" charset="0"/>
+                <a:ea typeface="標楷體" panose="03000509000000000000" pitchFamily="65" charset="-120"/>
+                <a:cs typeface="Times New Roman" panose="02020603050405020304" pitchFamily="18" charset="0"/>
+              </a:endParaRPr>
+            </a:p>
+          </p:txBody>
+        </p:sp>
+        <p:pic>
+          <p:nvPicPr>
+            <p:cNvPr id="17" name="圖片 16">
+              <a:extLst>
+                <a:ext uri="{FF2B5EF4-FFF2-40B4-BE49-F238E27FC236}">
+                  <a16:creationId xmlns:a16="http://schemas.microsoft.com/office/drawing/2014/main" id="{761FC988-00F4-E730-3BAA-BD8AB2AF8736}"/>
+                </a:ext>
+              </a:extLst>
+            </p:cNvPr>
+            <p:cNvPicPr>
+              <a:picLocks noChangeAspect="1"/>
+            </p:cNvPicPr>
+            <p:nvPr/>
+          </p:nvPicPr>
+          <p:blipFill>
+            <a:blip r:embed="rId6"/>
+            <a:stretch>
+              <a:fillRect/>
+            </a:stretch>
+          </p:blipFill>
+          <p:spPr>
+            <a:xfrm>
+              <a:off x="6755758" y="1143000"/>
+              <a:ext cx="2214621" cy="907910"/>
+            </a:xfrm>
+            <a:prstGeom prst="rect">
+              <a:avLst/>
+            </a:prstGeom>
+          </p:spPr>
+        </p:pic>
+        <p:pic>
+          <p:nvPicPr>
+            <p:cNvPr id="27" name="圖片 26">
+              <a:extLst>
+                <a:ext uri="{FF2B5EF4-FFF2-40B4-BE49-F238E27FC236}">
+                  <a16:creationId xmlns:a16="http://schemas.microsoft.com/office/drawing/2014/main" id="{3EDD9625-B064-7565-0FCA-7776D5E05438}"/>
+                </a:ext>
+              </a:extLst>
+            </p:cNvPr>
+            <p:cNvPicPr>
+              <a:picLocks noChangeAspect="1"/>
+            </p:cNvPicPr>
+            <p:nvPr/>
+          </p:nvPicPr>
+          <p:blipFill>
+            <a:blip r:embed="rId7"/>
+            <a:stretch>
+              <a:fillRect/>
+            </a:stretch>
+          </p:blipFill>
+          <p:spPr>
+            <a:xfrm>
+              <a:off x="6871182" y="2050909"/>
+              <a:ext cx="1470787" cy="891617"/>
+            </a:xfrm>
+            <a:prstGeom prst="rect">
+              <a:avLst/>
+            </a:prstGeom>
+          </p:spPr>
+        </p:pic>
+        <p:sp>
+          <p:nvSpPr>
+            <p:cNvPr id="29" name="矩形 28">
+              <a:extLst>
+                <a:ext uri="{FF2B5EF4-FFF2-40B4-BE49-F238E27FC236}">
+                  <a16:creationId xmlns:a16="http://schemas.microsoft.com/office/drawing/2014/main" id="{8BD80D6C-1FF3-8AFD-5D78-6B1FDB097256}"/>
+                </a:ext>
+              </a:extLst>
+            </p:cNvPr>
+            <p:cNvSpPr/>
+            <p:nvPr/>
+          </p:nvSpPr>
+          <p:spPr>
+            <a:xfrm>
+              <a:off x="6615185" y="1111723"/>
+              <a:ext cx="319318" cy="1384995"/>
+            </a:xfrm>
+            <a:prstGeom prst="rect">
+              <a:avLst/>
+            </a:prstGeom>
+            <a:noFill/>
+          </p:spPr>
+          <p:txBody>
+            <a:bodyPr wrap="none" lIns="91440" tIns="45720" rIns="91440" bIns="45720">
+              <a:spAutoFit/>
+            </a:bodyPr>
+            <a:lstStyle/>
+            <a:p>
+              <a:pPr algn="ctr"/>
+              <a:r>
+                <a:rPr lang="en-US" altLang="zh-TW" b="0" cap="none" spc="0" dirty="0">
+                  <a:ln w="0"/>
+                  <a:solidFill>
+                    <a:schemeClr val="tx1"/>
+                  </a:solidFill>
+                  <a:effectLst>
+                    <a:outerShdw blurRad="38100" dist="19050" dir="2700000" algn="tl" rotWithShape="0">
+                      <a:schemeClr val="dk1">
+                        <a:alpha val="40000"/>
+                      </a:schemeClr>
+                    </a:outerShdw>
+                  </a:effectLst>
+                  <a:latin typeface="Times New Roman" panose="02020603050405020304" pitchFamily="18" charset="0"/>
+                  <a:ea typeface="標楷體" panose="03000509000000000000" pitchFamily="65" charset="-120"/>
+                  <a:cs typeface="Times New Roman" panose="02020603050405020304" pitchFamily="18" charset="0"/>
+                </a:rPr>
+                <a:t>1.</a:t>
+              </a:r>
+            </a:p>
+            <a:p>
+              <a:pPr algn="ctr"/>
+              <a:endParaRPr lang="en-US" altLang="zh-TW" dirty="0">
+                <a:ln w="0"/>
+                <a:solidFill>
+                  <a:schemeClr val="tx1"/>
+                </a:solidFill>
+                <a:effectLst>
+                  <a:outerShdw blurRad="38100" dist="19050" dir="2700000" algn="tl" rotWithShape="0">
+                    <a:schemeClr val="dk1">
+                      <a:alpha val="40000"/>
+                    </a:schemeClr>
+                  </a:outerShdw>
+                </a:effectLst>
+                <a:latin typeface="Times New Roman" panose="02020603050405020304" pitchFamily="18" charset="0"/>
+                <a:ea typeface="標楷體" panose="03000509000000000000" pitchFamily="65" charset="-120"/>
+                <a:cs typeface="Times New Roman" panose="02020603050405020304" pitchFamily="18" charset="0"/>
+              </a:endParaRPr>
+            </a:p>
+            <a:p>
+              <a:pPr algn="ctr"/>
+              <a:endParaRPr lang="en-US" altLang="zh-TW" dirty="0">
+                <a:ln w="0"/>
+                <a:solidFill>
+                  <a:schemeClr val="tx1"/>
+                </a:solidFill>
+                <a:effectLst>
+                  <a:outerShdw blurRad="38100" dist="19050" dir="2700000" algn="tl" rotWithShape="0">
+                    <a:schemeClr val="dk1">
+                      <a:alpha val="40000"/>
+                    </a:schemeClr>
+                  </a:outerShdw>
+                </a:effectLst>
+                <a:latin typeface="Times New Roman" panose="02020603050405020304" pitchFamily="18" charset="0"/>
+                <a:ea typeface="標楷體" panose="03000509000000000000" pitchFamily="65" charset="-120"/>
+                <a:cs typeface="Times New Roman" panose="02020603050405020304" pitchFamily="18" charset="0"/>
+              </a:endParaRPr>
+            </a:p>
+            <a:p>
+              <a:pPr algn="ctr"/>
+              <a:endParaRPr lang="en-US" altLang="zh-TW" dirty="0">
+                <a:ln w="0"/>
+                <a:solidFill>
+                  <a:schemeClr val="tx1"/>
+                </a:solidFill>
+                <a:effectLst>
+                  <a:outerShdw blurRad="38100" dist="19050" dir="2700000" algn="tl" rotWithShape="0">
+                    <a:schemeClr val="dk1">
+                      <a:alpha val="40000"/>
+                    </a:schemeClr>
+                  </a:outerShdw>
+                </a:effectLst>
+                <a:latin typeface="Times New Roman" panose="02020603050405020304" pitchFamily="18" charset="0"/>
+                <a:ea typeface="標楷體" panose="03000509000000000000" pitchFamily="65" charset="-120"/>
+                <a:cs typeface="Times New Roman" panose="02020603050405020304" pitchFamily="18" charset="0"/>
+              </a:endParaRPr>
+            </a:p>
+            <a:p>
+              <a:pPr algn="ctr"/>
+              <a:endParaRPr lang="en-US" altLang="zh-TW" dirty="0">
+                <a:ln w="0"/>
+                <a:solidFill>
+                  <a:schemeClr val="tx1"/>
+                </a:solidFill>
+                <a:effectLst>
+                  <a:outerShdw blurRad="38100" dist="19050" dir="2700000" algn="tl" rotWithShape="0">
+                    <a:schemeClr val="dk1">
+                      <a:alpha val="40000"/>
+                    </a:schemeClr>
+                  </a:outerShdw>
+                </a:effectLst>
+                <a:latin typeface="Times New Roman" panose="02020603050405020304" pitchFamily="18" charset="0"/>
+                <a:ea typeface="標楷體" panose="03000509000000000000" pitchFamily="65" charset="-120"/>
+                <a:cs typeface="Times New Roman" panose="02020603050405020304" pitchFamily="18" charset="0"/>
+              </a:endParaRPr>
+            </a:p>
+            <a:p>
+              <a:pPr algn="ctr"/>
+              <a:r>
+                <a:rPr lang="en-US" altLang="zh-TW" dirty="0">
+                  <a:ln w="0"/>
+                  <a:solidFill>
+                    <a:schemeClr val="tx1"/>
+                  </a:solidFill>
+                  <a:effectLst>
+                    <a:outerShdw blurRad="38100" dist="19050" dir="2700000" algn="tl" rotWithShape="0">
+                      <a:schemeClr val="dk1">
+                        <a:alpha val="40000"/>
+                      </a:schemeClr>
+                    </a:outerShdw>
+                  </a:effectLst>
+                  <a:latin typeface="Times New Roman" panose="02020603050405020304" pitchFamily="18" charset="0"/>
+                  <a:ea typeface="標楷體" panose="03000509000000000000" pitchFamily="65" charset="-120"/>
+                  <a:cs typeface="Times New Roman" panose="02020603050405020304" pitchFamily="18" charset="0"/>
+                </a:rPr>
+                <a:t>2.</a:t>
+              </a:r>
+              <a:endParaRPr lang="zh-TW" altLang="en-US" b="0" cap="none" spc="0" dirty="0">
+                <a:ln w="0"/>
+                <a:solidFill>
+                  <a:schemeClr val="tx1"/>
+                </a:solidFill>
+                <a:effectLst>
+                  <a:outerShdw blurRad="38100" dist="19050" dir="2700000" algn="tl" rotWithShape="0">
+                    <a:schemeClr val="dk1">
+                      <a:alpha val="40000"/>
+                    </a:schemeClr>
+                  </a:outerShdw>
+                </a:effectLst>
+                <a:latin typeface="Times New Roman" panose="02020603050405020304" pitchFamily="18" charset="0"/>
+                <a:ea typeface="標楷體" panose="03000509000000000000" pitchFamily="65" charset="-120"/>
+                <a:cs typeface="Times New Roman" panose="02020603050405020304" pitchFamily="18" charset="0"/>
+              </a:endParaRPr>
+            </a:p>
+          </p:txBody>
+        </p:sp>
+      </p:grpSp>
+      <p:sp>
+        <p:nvSpPr>
+          <p:cNvPr id="35" name="文字方塊 34">
+            <a:extLst>
+              <a:ext uri="{FF2B5EF4-FFF2-40B4-BE49-F238E27FC236}">
+                <a16:creationId xmlns:a16="http://schemas.microsoft.com/office/drawing/2014/main" id="{2C26A80C-805D-F6B4-C754-E490F3965AE5}"/>
+              </a:ext>
+            </a:extLst>
+          </p:cNvPr>
+          <p:cNvSpPr txBox="1"/>
+          <p:nvPr/>
+        </p:nvSpPr>
+        <p:spPr>
+          <a:xfrm>
+            <a:off x="8959603" y="2612890"/>
+            <a:ext cx="449484" cy="307777"/>
+          </a:xfrm>
+          <a:prstGeom prst="rect">
+            <a:avLst/>
+          </a:prstGeom>
+          <a:noFill/>
+        </p:spPr>
+        <p:txBody>
+          <a:bodyPr wrap="square">
+            <a:spAutoFit/>
+          </a:bodyPr>
+          <a:lstStyle/>
+          <a:p>
+            <a:r>
+              <a:rPr lang="zh-TW" altLang="zh-TW" b="1" dirty="0">
+                <a:latin typeface="Times New Roman" panose="02020603050405020304" pitchFamily="18" charset="0"/>
+                <a:ea typeface="標楷體" panose="03000509000000000000" pitchFamily="65" charset="-120"/>
+                <a:cs typeface="Times New Roman" panose="02020603050405020304" pitchFamily="18" charset="0"/>
+              </a:rPr>
+              <a:t>[</a:t>
+            </a:r>
+            <a:r>
+              <a:rPr lang="en-US" altLang="zh-TW" b="1" dirty="0">
+                <a:latin typeface="Times New Roman" panose="02020603050405020304" pitchFamily="18" charset="0"/>
+                <a:ea typeface="標楷體" panose="03000509000000000000" pitchFamily="65" charset="-120"/>
+                <a:cs typeface="Times New Roman" panose="02020603050405020304" pitchFamily="18" charset="0"/>
+              </a:rPr>
+              <a:t>5</a:t>
+            </a:r>
+            <a:r>
+              <a:rPr lang="zh-TW" altLang="zh-TW" b="1" dirty="0">
+                <a:latin typeface="Times New Roman" panose="02020603050405020304" pitchFamily="18" charset="0"/>
+                <a:ea typeface="標楷體" panose="03000509000000000000" pitchFamily="65" charset="-120"/>
+                <a:cs typeface="Times New Roman" panose="02020603050405020304" pitchFamily="18" charset="0"/>
+              </a:rPr>
+              <a:t>]</a:t>
+            </a:r>
+            <a:endParaRPr lang="zh-TW" altLang="en-US" dirty="0">
+              <a:latin typeface="Times New Roman" panose="02020603050405020304" pitchFamily="18" charset="0"/>
+              <a:ea typeface="標楷體" panose="03000509000000000000" pitchFamily="65" charset="-120"/>
+              <a:cs typeface="Times New Roman" panose="02020603050405020304" pitchFamily="18" charset="0"/>
+            </a:endParaRPr>
+          </a:p>
+        </p:txBody>
+      </p:sp>
+      <p:sp>
+        <p:nvSpPr>
+          <p:cNvPr id="37" name="箭號: 向右 36">
+            <a:extLst>
+              <a:ext uri="{FF2B5EF4-FFF2-40B4-BE49-F238E27FC236}">
+                <a16:creationId xmlns:a16="http://schemas.microsoft.com/office/drawing/2014/main" id="{FBFAB6F3-B4CD-9EFE-0CF6-B1B75CD89E10}"/>
+              </a:ext>
+            </a:extLst>
+          </p:cNvPr>
+          <p:cNvSpPr/>
+          <p:nvPr/>
+        </p:nvSpPr>
+        <p:spPr>
+          <a:xfrm>
+            <a:off x="4314883" y="3687917"/>
+            <a:ext cx="945429" cy="1808539"/>
+          </a:xfrm>
+          <a:prstGeom prst="rightArrow">
+            <a:avLst/>
+          </a:prstGeom>
+          <a:solidFill>
+            <a:schemeClr val="bg1"/>
+          </a:solidFill>
+          <a:ln>
+            <a:solidFill>
+              <a:schemeClr val="tx1"/>
+            </a:solidFill>
+          </a:ln>
+        </p:spPr>
+        <p:style>
+          <a:lnRef idx="2">
+            <a:schemeClr val="accent1">
+              <a:shade val="15000"/>
+            </a:schemeClr>
+          </a:lnRef>
+          <a:fillRef idx="1">
+            <a:schemeClr val="accent1"/>
+          </a:fillRef>
+          <a:effectRef idx="0">
+            <a:schemeClr val="accent1"/>
+          </a:effectRef>
+          <a:fontRef idx="minor">
+            <a:schemeClr val="lt1"/>
+          </a:fontRef>
+        </p:style>
+        <p:txBody>
+          <a:bodyPr rtlCol="0" anchor="ctr"/>
+          <a:lstStyle/>
+          <a:p>
+            <a:pPr algn="ctr"/>
+            <a:endParaRPr lang="zh-TW" altLang="en-US" dirty="0">
+              <a:solidFill>
+                <a:schemeClr val="tx1"/>
+              </a:solidFill>
+              <a:latin typeface="Times New Roman" panose="02020603050405020304" pitchFamily="18" charset="0"/>
+              <a:ea typeface="標楷體" panose="03000509000000000000" pitchFamily="65" charset="-120"/>
+              <a:cs typeface="Times New Roman" panose="02020603050405020304" pitchFamily="18" charset="0"/>
+            </a:endParaRPr>
+          </a:p>
+        </p:txBody>
+      </p:sp>
+      <p:sp>
+        <p:nvSpPr>
+          <p:cNvPr id="38" name="矩形 37">
+            <a:extLst>
+              <a:ext uri="{FF2B5EF4-FFF2-40B4-BE49-F238E27FC236}">
+                <a16:creationId xmlns:a16="http://schemas.microsoft.com/office/drawing/2014/main" id="{4D96EEAC-BDC2-1338-2C43-7781683DD0B3}"/>
+              </a:ext>
+            </a:extLst>
+          </p:cNvPr>
+          <p:cNvSpPr/>
+          <p:nvPr/>
+        </p:nvSpPr>
+        <p:spPr>
+          <a:xfrm>
+            <a:off x="3639992" y="3042727"/>
+            <a:ext cx="2295210" cy="584775"/>
+          </a:xfrm>
+          <a:prstGeom prst="rect">
+            <a:avLst/>
+          </a:prstGeom>
+          <a:noFill/>
+        </p:spPr>
+        <p:txBody>
+          <a:bodyPr wrap="square" lIns="91440" tIns="45720" rIns="91440" bIns="45720">
+            <a:spAutoFit/>
+          </a:bodyPr>
+          <a:lstStyle/>
+          <a:p>
+            <a:pPr algn="ctr"/>
+            <a:r>
+              <a:rPr lang="zh-TW" altLang="en-US" sz="1600" b="0" cap="none" spc="0" dirty="0">
+                <a:ln w="0"/>
+                <a:solidFill>
+                  <a:schemeClr val="tx1"/>
+                </a:solidFill>
+                <a:latin typeface="Times New Roman" panose="02020603050405020304" pitchFamily="18" charset="0"/>
+                <a:ea typeface="標楷體" panose="03000509000000000000" pitchFamily="65" charset="-120"/>
+                <a:cs typeface="Times New Roman" panose="02020603050405020304" pitchFamily="18" charset="0"/>
+              </a:rPr>
+              <a:t>在</a:t>
+            </a:r>
+            <a:r>
+              <a:rPr lang="en-US" altLang="zh-TW" sz="1600" b="0" cap="none" spc="0" dirty="0">
+                <a:ln w="0"/>
+                <a:solidFill>
+                  <a:schemeClr val="tx1"/>
+                </a:solidFill>
+                <a:latin typeface="Times New Roman" panose="02020603050405020304" pitchFamily="18" charset="0"/>
+                <a:ea typeface="標楷體" panose="03000509000000000000" pitchFamily="65" charset="-120"/>
+                <a:cs typeface="Times New Roman" panose="02020603050405020304" pitchFamily="18" charset="0"/>
+              </a:rPr>
+              <a:t>(255,255,255)</a:t>
+            </a:r>
+            <a:r>
+              <a:rPr lang="zh-TW" altLang="en-US" sz="1600" b="0" cap="none" spc="0" dirty="0">
+                <a:ln w="0"/>
+                <a:solidFill>
+                  <a:schemeClr val="tx1"/>
+                </a:solidFill>
+                <a:latin typeface="Times New Roman" panose="02020603050405020304" pitchFamily="18" charset="0"/>
+                <a:ea typeface="標楷體" panose="03000509000000000000" pitchFamily="65" charset="-120"/>
+                <a:cs typeface="Times New Roman" panose="02020603050405020304" pitchFamily="18" charset="0"/>
+              </a:rPr>
+              <a:t>中</a:t>
+            </a:r>
+            <a:r>
+              <a:rPr lang="en-US" altLang="zh-TW" sz="1600" b="0" cap="none" spc="0" dirty="0">
+                <a:ln w="0"/>
+                <a:solidFill>
+                  <a:schemeClr val="tx1"/>
+                </a:solidFill>
+                <a:latin typeface="Times New Roman" panose="02020603050405020304" pitchFamily="18" charset="0"/>
+                <a:ea typeface="標楷體" panose="03000509000000000000" pitchFamily="65" charset="-120"/>
+                <a:cs typeface="Times New Roman" panose="02020603050405020304" pitchFamily="18" charset="0"/>
+              </a:rPr>
+              <a:t>RGB</a:t>
+            </a:r>
+            <a:r>
+              <a:rPr lang="en-US" altLang="zh-TW" sz="1600" baseline="-25000" dirty="0">
+                <a:ln w="0"/>
+                <a:solidFill>
+                  <a:schemeClr val="tx1"/>
+                </a:solidFill>
+                <a:latin typeface="Times New Roman" panose="02020603050405020304" pitchFamily="18" charset="0"/>
+                <a:ea typeface="標楷體" panose="03000509000000000000" pitchFamily="65" charset="-120"/>
+                <a:cs typeface="Times New Roman" panose="02020603050405020304" pitchFamily="18" charset="0"/>
+              </a:rPr>
+              <a:t>L</a:t>
+            </a:r>
+            <a:r>
+              <a:rPr lang="en-US" altLang="zh-TW" sz="1600" b="0" cap="none" spc="0" dirty="0">
+                <a:ln w="0"/>
+                <a:solidFill>
+                  <a:schemeClr val="tx1"/>
+                </a:solidFill>
+                <a:latin typeface="Times New Roman" panose="02020603050405020304" pitchFamily="18" charset="0"/>
+                <a:ea typeface="標楷體" panose="03000509000000000000" pitchFamily="65" charset="-120"/>
+                <a:cs typeface="Times New Roman" panose="02020603050405020304" pitchFamily="18" charset="0"/>
+              </a:rPr>
+              <a:t>=(1,1,1)</a:t>
+            </a:r>
+            <a:endParaRPr lang="zh-TW" altLang="en-US" sz="1600" b="0" cap="none" spc="0" baseline="-25000" dirty="0">
+              <a:ln w="0"/>
+              <a:solidFill>
+                <a:schemeClr val="tx1"/>
+              </a:solidFill>
+              <a:latin typeface="Times New Roman" panose="02020603050405020304" pitchFamily="18" charset="0"/>
+              <a:ea typeface="標楷體" panose="03000509000000000000" pitchFamily="65" charset="-120"/>
+              <a:cs typeface="Times New Roman" panose="02020603050405020304" pitchFamily="18" charset="0"/>
+            </a:endParaRPr>
+          </a:p>
+        </p:txBody>
+      </p:sp>
+      <p:pic>
+        <p:nvPicPr>
+          <p:cNvPr id="40" name="圖片 39">
+            <a:extLst>
+              <a:ext uri="{FF2B5EF4-FFF2-40B4-BE49-F238E27FC236}">
+                <a16:creationId xmlns:a16="http://schemas.microsoft.com/office/drawing/2014/main" id="{C5EA7A6F-A098-9803-7296-8B08DDAF0328}"/>
+              </a:ext>
+            </a:extLst>
+          </p:cNvPr>
+          <p:cNvPicPr>
+            <a:picLocks noChangeAspect="1"/>
+          </p:cNvPicPr>
+          <p:nvPr/>
+        </p:nvPicPr>
+        <p:blipFill>
+          <a:blip r:embed="rId8"/>
+          <a:stretch>
+            <a:fillRect/>
+          </a:stretch>
+        </p:blipFill>
+        <p:spPr>
+          <a:xfrm>
+            <a:off x="6393022" y="3525961"/>
+            <a:ext cx="1994507" cy="1015385"/>
+          </a:xfrm>
+          <a:prstGeom prst="rect">
+            <a:avLst/>
+          </a:prstGeom>
+        </p:spPr>
+      </p:pic>
+      <p:pic>
+        <p:nvPicPr>
+          <p:cNvPr id="42" name="圖片 41">
+            <a:extLst>
+              <a:ext uri="{FF2B5EF4-FFF2-40B4-BE49-F238E27FC236}">
+                <a16:creationId xmlns:a16="http://schemas.microsoft.com/office/drawing/2014/main" id="{F43B0717-E53C-A39B-A94E-7E1581B1010F}"/>
+              </a:ext>
+            </a:extLst>
+          </p:cNvPr>
+          <p:cNvPicPr>
+            <a:picLocks noChangeAspect="1"/>
+          </p:cNvPicPr>
+          <p:nvPr/>
+        </p:nvPicPr>
+        <p:blipFill>
+          <a:blip r:embed="rId9"/>
+          <a:stretch>
+            <a:fillRect/>
+          </a:stretch>
+        </p:blipFill>
+        <p:spPr>
+          <a:xfrm>
+            <a:off x="5277620" y="4840844"/>
+            <a:ext cx="4488573" cy="1115503"/>
+          </a:xfrm>
+          <a:prstGeom prst="rect">
+            <a:avLst/>
+          </a:prstGeom>
+        </p:spPr>
+      </p:pic>
+    </p:spTree>
+    <p:extLst>
+      <p:ext uri="{BB962C8B-B14F-4D97-AF65-F5344CB8AC3E}">
+        <p14:creationId xmlns:p14="http://schemas.microsoft.com/office/powerpoint/2010/main" val="135954599"/>
+      </p:ext>
+    </p:extLst>
+  </p:cSld>
+  <p:clrMapOvr>
+    <a:masterClrMapping/>
+  </p:clrMapOvr>
+</p:sld>
+</file>
+
+<file path=ppt/slides/slide13.xml><?xml version="1.0" encoding="utf-8"?>
+<p:sld xmlns:a="http://schemas.openxmlformats.org/drawingml/2006/main" xmlns:r="http://schemas.openxmlformats.org/officeDocument/2006/relationships" xmlns:p="http://schemas.openxmlformats.org/presentationml/2006/main">
+  <p:cSld>
+    <p:spTree>
+      <p:nvGrpSpPr>
+        <p:cNvPr id="1" name="">
+          <a:extLst>
+            <a:ext uri="{FF2B5EF4-FFF2-40B4-BE49-F238E27FC236}">
+              <a16:creationId xmlns:a16="http://schemas.microsoft.com/office/drawing/2014/main" id="{818B4C8B-F5C5-5CEC-943D-9D2F2D9B601F}"/>
+            </a:ext>
+          </a:extLst>
+        </p:cNvPr>
+        <p:cNvGrpSpPr/>
+        <p:nvPr/>
+      </p:nvGrpSpPr>
+      <p:grpSpPr>
+        <a:xfrm>
+          <a:off x="0" y="0"/>
+          <a:ext cx="0" cy="0"/>
+          <a:chOff x="0" y="0"/>
+          <a:chExt cx="0" cy="0"/>
+        </a:xfrm>
+      </p:grpSpPr>
+      <p:sp>
+        <p:nvSpPr>
+          <p:cNvPr id="5" name="標題 1">
+            <a:extLst>
+              <a:ext uri="{FF2B5EF4-FFF2-40B4-BE49-F238E27FC236}">
+                <a16:creationId xmlns:a16="http://schemas.microsoft.com/office/drawing/2014/main" id="{AB6A1EF1-530D-13DA-3A32-D805CBBDBE9F}"/>
+              </a:ext>
+            </a:extLst>
+          </p:cNvPr>
+          <p:cNvSpPr>
+            <a:spLocks noGrp="1"/>
+          </p:cNvSpPr>
+          <p:nvPr>
+            <p:ph type="title"/>
+          </p:nvPr>
+        </p:nvSpPr>
+        <p:spPr>
+          <a:xfrm>
+            <a:off x="609602" y="609600"/>
+            <a:ext cx="8077200" cy="533400"/>
+          </a:xfrm>
+        </p:spPr>
+        <p:txBody>
+          <a:bodyPr/>
+          <a:lstStyle/>
+          <a:p>
+            <a:r>
+              <a:rPr lang="zh-TW" altLang="en-US" dirty="0">
+                <a:latin typeface="Times New Roman" panose="02020603050405020304" pitchFamily="18" charset="0"/>
+                <a:ea typeface="標楷體" panose="03000509000000000000" pitchFamily="65" charset="-120"/>
+                <a:cs typeface="Times New Roman" panose="02020603050405020304" pitchFamily="18" charset="0"/>
+              </a:rPr>
+              <a:t>本次進度</a:t>
+            </a:r>
+            <a:r>
+              <a:rPr lang="en-US" altLang="zh-TW" dirty="0">
+                <a:latin typeface="Times New Roman" panose="02020603050405020304" pitchFamily="18" charset="0"/>
+                <a:ea typeface="標楷體" panose="03000509000000000000" pitchFamily="65" charset="-120"/>
+                <a:cs typeface="Times New Roman" panose="02020603050405020304" pitchFamily="18" charset="0"/>
+              </a:rPr>
+              <a:t>:</a:t>
+            </a:r>
+            <a:r>
+              <a:rPr lang="zh-TW" altLang="zh-TW" dirty="0"/>
+              <a:t>Matrix-based Display Profile</a:t>
+            </a:r>
+            <a:endParaRPr lang="zh-TW" altLang="en-US" dirty="0">
+              <a:latin typeface="Times New Roman" panose="02020603050405020304" pitchFamily="18" charset="0"/>
+              <a:ea typeface="標楷體" panose="03000509000000000000" pitchFamily="65" charset="-120"/>
+              <a:cs typeface="Times New Roman" panose="02020603050405020304" pitchFamily="18" charset="0"/>
+            </a:endParaRPr>
+          </a:p>
+        </p:txBody>
+      </p:sp>
+      <p:sp>
+        <p:nvSpPr>
+          <p:cNvPr id="10" name="文字版面配置區 6">
+            <a:extLst>
+              <a:ext uri="{FF2B5EF4-FFF2-40B4-BE49-F238E27FC236}">
+                <a16:creationId xmlns:a16="http://schemas.microsoft.com/office/drawing/2014/main" id="{E0D12B35-8850-5C02-7382-426F584C7533}"/>
+              </a:ext>
+            </a:extLst>
+          </p:cNvPr>
+          <p:cNvSpPr txBox="1"/>
+          <p:nvPr/>
+        </p:nvSpPr>
+        <p:spPr>
+          <a:xfrm>
+            <a:off x="497549" y="1284684"/>
+            <a:ext cx="8686796" cy="717631"/>
+          </a:xfrm>
+          <a:prstGeom prst="rect">
+            <a:avLst/>
+          </a:prstGeom>
+          <a:noFill/>
+          <a:ln>
+            <a:noFill/>
+          </a:ln>
+        </p:spPr>
+        <p:txBody>
+          <a:bodyPr spcFirstLastPara="1" wrap="square" lIns="91425" tIns="45700" rIns="91425" bIns="45700" anchor="t" anchorCtr="0">
+            <a:noAutofit/>
+          </a:bodyPr>
+          <a:lstStyle>
+            <a:defPPr marR="0" lvl="0" algn="l" rtl="0">
+              <a:lnSpc>
+                <a:spcPct val="100000"/>
+              </a:lnSpc>
+              <a:spcBef>
+                <a:spcPts val="0"/>
+              </a:spcBef>
+              <a:spcAft>
+                <a:spcPts val="0"/>
+              </a:spcAft>
+            </a:defPPr>
+            <a:lvl1pPr marL="457200" marR="0" lvl="0" indent="-406400" algn="l" rtl="0">
+              <a:lnSpc>
+                <a:spcPct val="100000"/>
+              </a:lnSpc>
+              <a:spcBef>
+                <a:spcPts val="560"/>
+              </a:spcBef>
+              <a:spcAft>
+                <a:spcPts val="0"/>
+              </a:spcAft>
+              <a:buClr>
+                <a:schemeClr val="accent2"/>
+              </a:buClr>
+              <a:buSzPts val="2800"/>
+              <a:buFont typeface="Noto Sans Symbols"/>
+              <a:buChar char="❖"/>
+              <a:defRPr sz="2800" b="0" i="0" u="none" strike="noStrike" cap="none">
+                <a:solidFill>
+                  <a:schemeClr val="dk1"/>
+                </a:solidFill>
+                <a:latin typeface="Times New Roman"/>
+                <a:ea typeface="Times New Roman"/>
+                <a:cs typeface="Times New Roman"/>
+                <a:sym typeface="Times New Roman"/>
+              </a:defRPr>
+            </a:lvl1pPr>
+            <a:lvl2pPr marL="914400" marR="0" lvl="1" indent="-381000" algn="l" rtl="0">
+              <a:lnSpc>
+                <a:spcPct val="100000"/>
+              </a:lnSpc>
+              <a:spcBef>
+                <a:spcPts val="480"/>
+              </a:spcBef>
+              <a:spcAft>
+                <a:spcPts val="0"/>
+              </a:spcAft>
+              <a:buClr>
+                <a:srgbClr val="FF5050"/>
+              </a:buClr>
+              <a:buSzPts val="2400"/>
+              <a:buFont typeface="Noto Sans Symbols"/>
+              <a:buChar char="▪"/>
+              <a:defRPr sz="2400" b="0" i="0" u="none" strike="noStrike" cap="none">
+                <a:solidFill>
+                  <a:schemeClr val="dk1"/>
+                </a:solidFill>
+                <a:latin typeface="Times New Roman"/>
+                <a:ea typeface="Times New Roman"/>
+                <a:cs typeface="Times New Roman"/>
+                <a:sym typeface="Times New Roman"/>
+              </a:defRPr>
+            </a:lvl2pPr>
+            <a:lvl3pPr marL="1371600" marR="0" lvl="2" indent="-355600" algn="l" rtl="0">
+              <a:lnSpc>
+                <a:spcPct val="100000"/>
+              </a:lnSpc>
+              <a:spcBef>
+                <a:spcPts val="400"/>
+              </a:spcBef>
+              <a:spcAft>
+                <a:spcPts val="0"/>
+              </a:spcAft>
+              <a:buClr>
+                <a:srgbClr val="6699FF"/>
+              </a:buClr>
+              <a:buSzPts val="2000"/>
+              <a:buFont typeface="Times New Roman"/>
+              <a:buChar char="•"/>
+              <a:defRPr sz="2000" b="0" i="0" u="none" strike="noStrike" cap="none">
+                <a:solidFill>
+                  <a:schemeClr val="dk1"/>
+                </a:solidFill>
+                <a:latin typeface="Times New Roman"/>
+                <a:ea typeface="Times New Roman"/>
+                <a:cs typeface="Times New Roman"/>
+                <a:sym typeface="Times New Roman"/>
+              </a:defRPr>
+            </a:lvl3pPr>
+            <a:lvl4pPr marL="1828800" marR="0" lvl="3" indent="-355600" algn="l" rtl="0">
+              <a:lnSpc>
+                <a:spcPct val="100000"/>
+              </a:lnSpc>
+              <a:spcBef>
+                <a:spcPts val="400"/>
+              </a:spcBef>
+              <a:spcAft>
+                <a:spcPts val="0"/>
+              </a:spcAft>
+              <a:buClr>
+                <a:srgbClr val="FF5050"/>
+              </a:buClr>
+              <a:buSzPts val="2000"/>
+              <a:buFont typeface="Times New Roman"/>
+              <a:buChar char="o"/>
+              <a:defRPr sz="2000" b="0" i="0" u="none" strike="noStrike" cap="none">
+                <a:solidFill>
+                  <a:schemeClr val="dk1"/>
+                </a:solidFill>
+                <a:latin typeface="Times New Roman"/>
+                <a:ea typeface="Times New Roman"/>
+                <a:cs typeface="Times New Roman"/>
+                <a:sym typeface="Times New Roman"/>
+              </a:defRPr>
+            </a:lvl4pPr>
+            <a:lvl5pPr marL="2286000" marR="0" lvl="4" indent="-355600" algn="l" rtl="0">
+              <a:lnSpc>
+                <a:spcPct val="100000"/>
+              </a:lnSpc>
+              <a:spcBef>
+                <a:spcPts val="400"/>
+              </a:spcBef>
+              <a:spcAft>
+                <a:spcPts val="0"/>
+              </a:spcAft>
+              <a:buClr>
+                <a:srgbClr val="FF5050"/>
+              </a:buClr>
+              <a:buSzPts val="2000"/>
+              <a:buFont typeface="Times New Roman"/>
+              <a:buChar char="o"/>
+              <a:defRPr sz="2000" b="0" i="0" u="none" strike="noStrike" cap="none">
+                <a:solidFill>
+                  <a:schemeClr val="dk1"/>
+                </a:solidFill>
+                <a:latin typeface="Times New Roman"/>
+                <a:ea typeface="Times New Roman"/>
+                <a:cs typeface="Times New Roman"/>
+                <a:sym typeface="Times New Roman"/>
+              </a:defRPr>
+            </a:lvl5pPr>
+            <a:lvl6pPr marL="2743200" marR="0" lvl="5" indent="-355600" algn="l" rtl="0">
+              <a:lnSpc>
+                <a:spcPct val="100000"/>
+              </a:lnSpc>
+              <a:spcBef>
+                <a:spcPts val="400"/>
+              </a:spcBef>
+              <a:spcAft>
+                <a:spcPts val="0"/>
+              </a:spcAft>
+              <a:buClr>
+                <a:srgbClr val="FF5050"/>
+              </a:buClr>
+              <a:buSzPts val="2000"/>
+              <a:buFont typeface="Times New Roman"/>
+              <a:buChar char="o"/>
+              <a:defRPr sz="2000" b="0" i="0" u="none" strike="noStrike" cap="none">
+                <a:solidFill>
+                  <a:schemeClr val="dk1"/>
+                </a:solidFill>
+                <a:latin typeface="Times New Roman"/>
+                <a:ea typeface="Times New Roman"/>
+                <a:cs typeface="Times New Roman"/>
+                <a:sym typeface="Times New Roman"/>
+              </a:defRPr>
+            </a:lvl6pPr>
+            <a:lvl7pPr marL="3200400" marR="0" lvl="6" indent="-355600" algn="l" rtl="0">
+              <a:lnSpc>
+                <a:spcPct val="100000"/>
+              </a:lnSpc>
+              <a:spcBef>
+                <a:spcPts val="400"/>
+              </a:spcBef>
+              <a:spcAft>
+                <a:spcPts val="0"/>
+              </a:spcAft>
+              <a:buClr>
+                <a:srgbClr val="FF5050"/>
+              </a:buClr>
+              <a:buSzPts val="2000"/>
+              <a:buFont typeface="Times New Roman"/>
+              <a:buChar char="o"/>
+              <a:defRPr sz="2000" b="0" i="0" u="none" strike="noStrike" cap="none">
+                <a:solidFill>
+                  <a:schemeClr val="dk1"/>
+                </a:solidFill>
+                <a:latin typeface="Times New Roman"/>
+                <a:ea typeface="Times New Roman"/>
+                <a:cs typeface="Times New Roman"/>
+                <a:sym typeface="Times New Roman"/>
+              </a:defRPr>
+            </a:lvl7pPr>
+            <a:lvl8pPr marL="3657600" marR="0" lvl="7" indent="-355600" algn="l" rtl="0">
+              <a:lnSpc>
+                <a:spcPct val="100000"/>
+              </a:lnSpc>
+              <a:spcBef>
+                <a:spcPts val="400"/>
+              </a:spcBef>
+              <a:spcAft>
+                <a:spcPts val="0"/>
+              </a:spcAft>
+              <a:buClr>
+                <a:srgbClr val="FF5050"/>
+              </a:buClr>
+              <a:buSzPts val="2000"/>
+              <a:buFont typeface="Times New Roman"/>
+              <a:buChar char="o"/>
+              <a:defRPr sz="2000" b="0" i="0" u="none" strike="noStrike" cap="none">
+                <a:solidFill>
+                  <a:schemeClr val="dk1"/>
+                </a:solidFill>
+                <a:latin typeface="Times New Roman"/>
+                <a:ea typeface="Times New Roman"/>
+                <a:cs typeface="Times New Roman"/>
+                <a:sym typeface="Times New Roman"/>
+              </a:defRPr>
+            </a:lvl8pPr>
+            <a:lvl9pPr marL="4114800" marR="0" lvl="8" indent="-355600" algn="l" rtl="0">
+              <a:lnSpc>
+                <a:spcPct val="100000"/>
+              </a:lnSpc>
+              <a:spcBef>
+                <a:spcPts val="400"/>
+              </a:spcBef>
+              <a:spcAft>
+                <a:spcPts val="0"/>
+              </a:spcAft>
+              <a:buClr>
+                <a:srgbClr val="FF5050"/>
+              </a:buClr>
+              <a:buSzPts val="2000"/>
+              <a:buFont typeface="Times New Roman"/>
+              <a:buChar char="o"/>
+              <a:defRPr sz="2000" b="0" i="0" u="none" strike="noStrike" cap="none">
+                <a:solidFill>
+                  <a:schemeClr val="dk1"/>
+                </a:solidFill>
+                <a:latin typeface="Times New Roman"/>
+                <a:ea typeface="Times New Roman"/>
+                <a:cs typeface="Times New Roman"/>
+                <a:sym typeface="Times New Roman"/>
+              </a:defRPr>
+            </a:lvl9pPr>
+          </a:lstStyle>
+          <a:p>
+            <a:pPr marL="457200" lvl="1" indent="-406400">
+              <a:spcBef>
+                <a:spcPts val="560"/>
+              </a:spcBef>
+              <a:buClr>
+                <a:schemeClr val="accent2"/>
+              </a:buClr>
+              <a:buSzPts val="2800"/>
+              <a:buFont typeface="Noto Sans Symbols"/>
+              <a:buChar char="❖"/>
+            </a:pPr>
+            <a:r>
+              <a:rPr lang="zh-TW" altLang="en-US" dirty="0">
+                <a:solidFill>
+                  <a:srgbClr val="333333"/>
+                </a:solidFill>
+                <a:latin typeface="Times New Roman" panose="02020603050405020304" pitchFamily="18" charset="0"/>
+                <a:ea typeface="標楷體" panose="03000509000000000000" pitchFamily="65" charset="-120"/>
+                <a:cs typeface="Times New Roman" panose="02020603050405020304" pitchFamily="18" charset="0"/>
+              </a:rPr>
+              <a:t>舉例：</a:t>
+            </a:r>
+            <a:endParaRPr lang="en-US" altLang="zh-TW" sz="1600" dirty="0">
+              <a:solidFill>
+                <a:srgbClr val="333333"/>
+              </a:solidFill>
+              <a:latin typeface="Times New Roman" panose="02020603050405020304" pitchFamily="18" charset="0"/>
+              <a:ea typeface="標楷體" panose="03000509000000000000" pitchFamily="65" charset="-120"/>
+              <a:cs typeface="Times New Roman" panose="02020603050405020304" pitchFamily="18" charset="0"/>
+            </a:endParaRPr>
+          </a:p>
+          <a:p>
+            <a:pPr>
+              <a:lnSpc>
+                <a:spcPts val="3000"/>
+              </a:lnSpc>
+            </a:pPr>
+            <a:endParaRPr lang="en-US" altLang="zh-TW" sz="2000" dirty="0">
+              <a:latin typeface="Times New Roman" panose="02020603050405020304" pitchFamily="18" charset="0"/>
+              <a:ea typeface="標楷體" panose="03000509000000000000" pitchFamily="65" charset="-120"/>
+            </a:endParaRPr>
+          </a:p>
+          <a:p>
+            <a:pPr marL="533400" lvl="1" indent="0">
+              <a:lnSpc>
+                <a:spcPts val="3000"/>
+              </a:lnSpc>
+              <a:buNone/>
+            </a:pPr>
+            <a:endParaRPr lang="zh-TW" altLang="en-US" sz="1800" dirty="0">
+              <a:solidFill>
+                <a:srgbClr val="333333"/>
+              </a:solidFill>
+              <a:latin typeface="Times New Roman" panose="02020603050405020304" pitchFamily="18" charset="0"/>
+              <a:ea typeface="標楷體" panose="03000509000000000000" pitchFamily="65" charset="-120"/>
+              <a:cs typeface="Times New Roman" panose="02020603050405020304" pitchFamily="18" charset="0"/>
+            </a:endParaRPr>
+          </a:p>
+        </p:txBody>
+      </p:sp>
+      <p:pic>
+        <p:nvPicPr>
+          <p:cNvPr id="4" name="圖片 3">
+            <a:extLst>
+              <a:ext uri="{FF2B5EF4-FFF2-40B4-BE49-F238E27FC236}">
+                <a16:creationId xmlns:a16="http://schemas.microsoft.com/office/drawing/2014/main" id="{96A9D86D-B0E3-DDB0-9AAB-1EDB677233C3}"/>
+              </a:ext>
+            </a:extLst>
+          </p:cNvPr>
+          <p:cNvPicPr>
+            <a:picLocks noChangeAspect="1"/>
+          </p:cNvPicPr>
+          <p:nvPr/>
+        </p:nvPicPr>
+        <p:blipFill>
+          <a:blip r:embed="rId3"/>
+          <a:stretch>
+            <a:fillRect/>
+          </a:stretch>
+        </p:blipFill>
+        <p:spPr>
+          <a:xfrm>
+            <a:off x="3943770" y="2002315"/>
+            <a:ext cx="2018460" cy="1901107"/>
+          </a:xfrm>
+          <a:prstGeom prst="rect">
+            <a:avLst/>
+          </a:prstGeom>
+        </p:spPr>
+      </p:pic>
+      <p:pic>
+        <p:nvPicPr>
+          <p:cNvPr id="20" name="圖片 19">
+            <a:extLst>
+              <a:ext uri="{FF2B5EF4-FFF2-40B4-BE49-F238E27FC236}">
+                <a16:creationId xmlns:a16="http://schemas.microsoft.com/office/drawing/2014/main" id="{D9106978-8618-368B-C714-E843DE9BBF2D}"/>
+              </a:ext>
+            </a:extLst>
+          </p:cNvPr>
+          <p:cNvPicPr>
+            <a:picLocks noChangeAspect="1"/>
+          </p:cNvPicPr>
+          <p:nvPr/>
+        </p:nvPicPr>
+        <p:blipFill>
+          <a:blip r:embed="rId4"/>
+          <a:stretch>
+            <a:fillRect/>
+          </a:stretch>
+        </p:blipFill>
+        <p:spPr>
+          <a:xfrm>
+            <a:off x="2834217" y="4093208"/>
+            <a:ext cx="4406427" cy="1480108"/>
+          </a:xfrm>
+          <a:prstGeom prst="rect">
+            <a:avLst/>
+          </a:prstGeom>
+        </p:spPr>
+      </p:pic>
+    </p:spTree>
+    <p:extLst>
+      <p:ext uri="{BB962C8B-B14F-4D97-AF65-F5344CB8AC3E}">
+        <p14:creationId xmlns:p14="http://schemas.microsoft.com/office/powerpoint/2010/main" val="1208291030"/>
+      </p:ext>
+    </p:extLst>
+  </p:cSld>
+  <p:clrMapOvr>
+    <a:masterClrMapping/>
+  </p:clrMapOvr>
+</p:sld>
+</file>
+
+<file path=ppt/slides/slide14.xml><?xml version="1.0" encoding="utf-8"?>
+<p:sld xmlns:a="http://schemas.openxmlformats.org/drawingml/2006/main" xmlns:r="http://schemas.openxmlformats.org/officeDocument/2006/relationships" xmlns:p="http://schemas.openxmlformats.org/presentationml/2006/main">
+  <p:cSld>
+    <p:spTree>
+      <p:nvGrpSpPr>
+        <p:cNvPr id="1" name="">
+          <a:extLst>
+            <a:ext uri="{FF2B5EF4-FFF2-40B4-BE49-F238E27FC236}">
+              <a16:creationId xmlns:a16="http://schemas.microsoft.com/office/drawing/2014/main" id="{DB55E878-4E26-12D7-EE94-7C8FB06533CC}"/>
+            </a:ext>
+          </a:extLst>
+        </p:cNvPr>
+        <p:cNvGrpSpPr/>
+        <p:nvPr/>
+      </p:nvGrpSpPr>
+      <p:grpSpPr>
+        <a:xfrm>
+          <a:off x="0" y="0"/>
+          <a:ext cx="0" cy="0"/>
+          <a:chOff x="0" y="0"/>
+          <a:chExt cx="0" cy="0"/>
+        </a:xfrm>
+      </p:grpSpPr>
+      <p:sp>
+        <p:nvSpPr>
+          <p:cNvPr id="5" name="標題 1">
+            <a:extLst>
+              <a:ext uri="{FF2B5EF4-FFF2-40B4-BE49-F238E27FC236}">
+                <a16:creationId xmlns:a16="http://schemas.microsoft.com/office/drawing/2014/main" id="{EDA0264E-FAAC-7F32-85AD-9B494638827F}"/>
+              </a:ext>
+            </a:extLst>
+          </p:cNvPr>
+          <p:cNvSpPr>
+            <a:spLocks noGrp="1"/>
+          </p:cNvSpPr>
+          <p:nvPr>
+            <p:ph type="title"/>
+          </p:nvPr>
+        </p:nvSpPr>
+        <p:spPr>
+          <a:xfrm>
+            <a:off x="609602" y="609600"/>
+            <a:ext cx="8077200" cy="533400"/>
+          </a:xfrm>
+        </p:spPr>
+        <p:txBody>
+          <a:bodyPr/>
+          <a:lstStyle/>
+          <a:p>
+            <a:r>
+              <a:rPr lang="zh-TW" altLang="en-US" dirty="0">
+                <a:latin typeface="Times New Roman" panose="02020603050405020304" pitchFamily="18" charset="0"/>
+                <a:ea typeface="標楷體" panose="03000509000000000000" pitchFamily="65" charset="-120"/>
+                <a:cs typeface="Times New Roman" panose="02020603050405020304" pitchFamily="18" charset="0"/>
+              </a:rPr>
+              <a:t>本次進度</a:t>
+            </a:r>
+            <a:r>
+              <a:rPr lang="en-US" altLang="zh-TW" dirty="0">
+                <a:latin typeface="Times New Roman" panose="02020603050405020304" pitchFamily="18" charset="0"/>
+                <a:ea typeface="標楷體" panose="03000509000000000000" pitchFamily="65" charset="-120"/>
+                <a:cs typeface="Times New Roman" panose="02020603050405020304" pitchFamily="18" charset="0"/>
+              </a:rPr>
+              <a:t>:</a:t>
+            </a:r>
+            <a:r>
+              <a:rPr lang="zh-TW" altLang="zh-TW" dirty="0"/>
+              <a:t>Matrix-based Display Profile</a:t>
+            </a:r>
+            <a:endParaRPr lang="zh-TW" altLang="en-US" dirty="0">
+              <a:latin typeface="Times New Roman" panose="02020603050405020304" pitchFamily="18" charset="0"/>
+              <a:ea typeface="標楷體" panose="03000509000000000000" pitchFamily="65" charset="-120"/>
+              <a:cs typeface="Times New Roman" panose="02020603050405020304" pitchFamily="18" charset="0"/>
+            </a:endParaRPr>
+          </a:p>
+        </p:txBody>
+      </p:sp>
+      <p:sp>
+        <p:nvSpPr>
+          <p:cNvPr id="8" name="文字版面配置區 6">
+            <a:extLst>
+              <a:ext uri="{FF2B5EF4-FFF2-40B4-BE49-F238E27FC236}">
+                <a16:creationId xmlns:a16="http://schemas.microsoft.com/office/drawing/2014/main" id="{2DAC1A8A-F13A-5508-510D-5274EB3BC2A2}"/>
+              </a:ext>
+            </a:extLst>
+          </p:cNvPr>
+          <p:cNvSpPr txBox="1"/>
+          <p:nvPr/>
+        </p:nvSpPr>
+        <p:spPr>
+          <a:xfrm>
+            <a:off x="609602" y="1223724"/>
+            <a:ext cx="8686796" cy="4700685"/>
+          </a:xfrm>
+          <a:prstGeom prst="rect">
+            <a:avLst/>
+          </a:prstGeom>
+          <a:noFill/>
+          <a:ln>
+            <a:noFill/>
+          </a:ln>
+        </p:spPr>
+        <p:txBody>
+          <a:bodyPr spcFirstLastPara="1" wrap="square" lIns="91425" tIns="45700" rIns="91425" bIns="45700" anchor="t" anchorCtr="0">
+            <a:noAutofit/>
+          </a:bodyPr>
+          <a:lstStyle>
+            <a:defPPr marR="0" lvl="0" algn="l" rtl="0">
+              <a:lnSpc>
+                <a:spcPct val="100000"/>
+              </a:lnSpc>
+              <a:spcBef>
+                <a:spcPts val="0"/>
+              </a:spcBef>
+              <a:spcAft>
+                <a:spcPts val="0"/>
+              </a:spcAft>
+            </a:defPPr>
+            <a:lvl1pPr marL="457200" marR="0" lvl="0" indent="-406400" algn="l" rtl="0">
+              <a:lnSpc>
+                <a:spcPct val="100000"/>
+              </a:lnSpc>
+              <a:spcBef>
+                <a:spcPts val="560"/>
+              </a:spcBef>
+              <a:spcAft>
+                <a:spcPts val="0"/>
+              </a:spcAft>
+              <a:buClr>
+                <a:schemeClr val="accent2"/>
+              </a:buClr>
+              <a:buSzPts val="2800"/>
+              <a:buFont typeface="Noto Sans Symbols"/>
+              <a:buChar char="❖"/>
+              <a:defRPr sz="2800" b="0" i="0" u="none" strike="noStrike" cap="none">
+                <a:solidFill>
+                  <a:schemeClr val="dk1"/>
+                </a:solidFill>
+                <a:latin typeface="Times New Roman"/>
+                <a:ea typeface="Times New Roman"/>
+                <a:cs typeface="Times New Roman"/>
+                <a:sym typeface="Times New Roman"/>
+              </a:defRPr>
+            </a:lvl1pPr>
+            <a:lvl2pPr marL="914400" marR="0" lvl="1" indent="-381000" algn="l" rtl="0">
+              <a:lnSpc>
+                <a:spcPct val="100000"/>
+              </a:lnSpc>
+              <a:spcBef>
+                <a:spcPts val="480"/>
+              </a:spcBef>
+              <a:spcAft>
+                <a:spcPts val="0"/>
+              </a:spcAft>
+              <a:buClr>
+                <a:srgbClr val="FF5050"/>
+              </a:buClr>
+              <a:buSzPts val="2400"/>
+              <a:buFont typeface="Noto Sans Symbols"/>
+              <a:buChar char="▪"/>
+              <a:defRPr sz="2400" b="0" i="0" u="none" strike="noStrike" cap="none">
+                <a:solidFill>
+                  <a:schemeClr val="dk1"/>
+                </a:solidFill>
+                <a:latin typeface="Times New Roman"/>
+                <a:ea typeface="Times New Roman"/>
+                <a:cs typeface="Times New Roman"/>
+                <a:sym typeface="Times New Roman"/>
+              </a:defRPr>
+            </a:lvl2pPr>
+            <a:lvl3pPr marL="1371600" marR="0" lvl="2" indent="-355600" algn="l" rtl="0">
+              <a:lnSpc>
+                <a:spcPct val="100000"/>
+              </a:lnSpc>
+              <a:spcBef>
+                <a:spcPts val="400"/>
+              </a:spcBef>
+              <a:spcAft>
+                <a:spcPts val="0"/>
+              </a:spcAft>
+              <a:buClr>
+                <a:srgbClr val="6699FF"/>
+              </a:buClr>
+              <a:buSzPts val="2000"/>
+              <a:buFont typeface="Times New Roman"/>
+              <a:buChar char="•"/>
+              <a:defRPr sz="2000" b="0" i="0" u="none" strike="noStrike" cap="none">
+                <a:solidFill>
+                  <a:schemeClr val="dk1"/>
+                </a:solidFill>
+                <a:latin typeface="Times New Roman"/>
+                <a:ea typeface="Times New Roman"/>
+                <a:cs typeface="Times New Roman"/>
+                <a:sym typeface="Times New Roman"/>
+              </a:defRPr>
+            </a:lvl3pPr>
+            <a:lvl4pPr marL="1828800" marR="0" lvl="3" indent="-355600" algn="l" rtl="0">
+              <a:lnSpc>
+                <a:spcPct val="100000"/>
+              </a:lnSpc>
+              <a:spcBef>
+                <a:spcPts val="400"/>
+              </a:spcBef>
+              <a:spcAft>
+                <a:spcPts val="0"/>
+              </a:spcAft>
+              <a:buClr>
+                <a:srgbClr val="FF5050"/>
+              </a:buClr>
+              <a:buSzPts val="2000"/>
+              <a:buFont typeface="Times New Roman"/>
+              <a:buChar char="o"/>
+              <a:defRPr sz="2000" b="0" i="0" u="none" strike="noStrike" cap="none">
+                <a:solidFill>
+                  <a:schemeClr val="dk1"/>
+                </a:solidFill>
+                <a:latin typeface="Times New Roman"/>
+                <a:ea typeface="Times New Roman"/>
+                <a:cs typeface="Times New Roman"/>
+                <a:sym typeface="Times New Roman"/>
+              </a:defRPr>
+            </a:lvl4pPr>
+            <a:lvl5pPr marL="2286000" marR="0" lvl="4" indent="-355600" algn="l" rtl="0">
+              <a:lnSpc>
+                <a:spcPct val="100000"/>
+              </a:lnSpc>
+              <a:spcBef>
+                <a:spcPts val="400"/>
+              </a:spcBef>
+              <a:spcAft>
+                <a:spcPts val="0"/>
+              </a:spcAft>
+              <a:buClr>
+                <a:srgbClr val="FF5050"/>
+              </a:buClr>
+              <a:buSzPts val="2000"/>
+              <a:buFont typeface="Times New Roman"/>
+              <a:buChar char="o"/>
+              <a:defRPr sz="2000" b="0" i="0" u="none" strike="noStrike" cap="none">
+                <a:solidFill>
+                  <a:schemeClr val="dk1"/>
+                </a:solidFill>
+                <a:latin typeface="Times New Roman"/>
+                <a:ea typeface="Times New Roman"/>
+                <a:cs typeface="Times New Roman"/>
+                <a:sym typeface="Times New Roman"/>
+              </a:defRPr>
+            </a:lvl5pPr>
+            <a:lvl6pPr marL="2743200" marR="0" lvl="5" indent="-355600" algn="l" rtl="0">
+              <a:lnSpc>
+                <a:spcPct val="100000"/>
+              </a:lnSpc>
+              <a:spcBef>
+                <a:spcPts val="400"/>
+              </a:spcBef>
+              <a:spcAft>
+                <a:spcPts val="0"/>
+              </a:spcAft>
+              <a:buClr>
+                <a:srgbClr val="FF5050"/>
+              </a:buClr>
+              <a:buSzPts val="2000"/>
+              <a:buFont typeface="Times New Roman"/>
+              <a:buChar char="o"/>
+              <a:defRPr sz="2000" b="0" i="0" u="none" strike="noStrike" cap="none">
+                <a:solidFill>
+                  <a:schemeClr val="dk1"/>
+                </a:solidFill>
+                <a:latin typeface="Times New Roman"/>
+                <a:ea typeface="Times New Roman"/>
+                <a:cs typeface="Times New Roman"/>
+                <a:sym typeface="Times New Roman"/>
+              </a:defRPr>
+            </a:lvl6pPr>
+            <a:lvl7pPr marL="3200400" marR="0" lvl="6" indent="-355600" algn="l" rtl="0">
+              <a:lnSpc>
+                <a:spcPct val="100000"/>
+              </a:lnSpc>
+              <a:spcBef>
+                <a:spcPts val="400"/>
+              </a:spcBef>
+              <a:spcAft>
+                <a:spcPts val="0"/>
+              </a:spcAft>
+              <a:buClr>
+                <a:srgbClr val="FF5050"/>
+              </a:buClr>
+              <a:buSzPts val="2000"/>
+              <a:buFont typeface="Times New Roman"/>
+              <a:buChar char="o"/>
+              <a:defRPr sz="2000" b="0" i="0" u="none" strike="noStrike" cap="none">
+                <a:solidFill>
+                  <a:schemeClr val="dk1"/>
+                </a:solidFill>
+                <a:latin typeface="Times New Roman"/>
+                <a:ea typeface="Times New Roman"/>
+                <a:cs typeface="Times New Roman"/>
+                <a:sym typeface="Times New Roman"/>
+              </a:defRPr>
+            </a:lvl7pPr>
+            <a:lvl8pPr marL="3657600" marR="0" lvl="7" indent="-355600" algn="l" rtl="0">
+              <a:lnSpc>
+                <a:spcPct val="100000"/>
+              </a:lnSpc>
+              <a:spcBef>
+                <a:spcPts val="400"/>
+              </a:spcBef>
+              <a:spcAft>
+                <a:spcPts val="0"/>
+              </a:spcAft>
+              <a:buClr>
+                <a:srgbClr val="FF5050"/>
+              </a:buClr>
+              <a:buSzPts val="2000"/>
+              <a:buFont typeface="Times New Roman"/>
+              <a:buChar char="o"/>
+              <a:defRPr sz="2000" b="0" i="0" u="none" strike="noStrike" cap="none">
+                <a:solidFill>
+                  <a:schemeClr val="dk1"/>
+                </a:solidFill>
+                <a:latin typeface="Times New Roman"/>
+                <a:ea typeface="Times New Roman"/>
+                <a:cs typeface="Times New Roman"/>
+                <a:sym typeface="Times New Roman"/>
+              </a:defRPr>
+            </a:lvl8pPr>
+            <a:lvl9pPr marL="4114800" marR="0" lvl="8" indent="-355600" algn="l" rtl="0">
+              <a:lnSpc>
+                <a:spcPct val="100000"/>
+              </a:lnSpc>
+              <a:spcBef>
+                <a:spcPts val="400"/>
+              </a:spcBef>
+              <a:spcAft>
+                <a:spcPts val="0"/>
+              </a:spcAft>
+              <a:buClr>
+                <a:srgbClr val="FF5050"/>
+              </a:buClr>
+              <a:buSzPts val="2000"/>
+              <a:buFont typeface="Times New Roman"/>
+              <a:buChar char="o"/>
+              <a:defRPr sz="2000" b="0" i="0" u="none" strike="noStrike" cap="none">
+                <a:solidFill>
+                  <a:schemeClr val="dk1"/>
+                </a:solidFill>
+                <a:latin typeface="Times New Roman"/>
+                <a:ea typeface="Times New Roman"/>
+                <a:cs typeface="Times New Roman"/>
+                <a:sym typeface="Times New Roman"/>
+              </a:defRPr>
+            </a:lvl9pPr>
+          </a:lstStyle>
+          <a:p>
+            <a:pPr marL="457200" lvl="1" indent="-406400">
+              <a:lnSpc>
+                <a:spcPct val="150000"/>
+              </a:lnSpc>
+              <a:spcBef>
+                <a:spcPts val="560"/>
+              </a:spcBef>
+              <a:buClr>
+                <a:schemeClr val="accent2"/>
+              </a:buClr>
+              <a:buSzPts val="2800"/>
+              <a:buFont typeface="Noto Sans Symbols"/>
+              <a:buChar char="❖"/>
+            </a:pPr>
+            <a:r>
+              <a:rPr lang="en-US" altLang="zh-TW" sz="2000" dirty="0">
+                <a:solidFill>
+                  <a:srgbClr val="333333"/>
+                </a:solidFill>
+                <a:latin typeface="Times New Roman" panose="02020603050405020304" pitchFamily="18" charset="0"/>
+                <a:ea typeface="標楷體" panose="03000509000000000000" pitchFamily="65" charset="-120"/>
+                <a:cs typeface="Times New Roman" panose="02020603050405020304" pitchFamily="18" charset="0"/>
+              </a:rPr>
+              <a:t>Lumi(</a:t>
+            </a:r>
+            <a:r>
+              <a:rPr lang="zh-TW" altLang="zh-TW" sz="2000" dirty="0">
+                <a:latin typeface="Times New Roman" panose="02020603050405020304" pitchFamily="18" charset="0"/>
+                <a:ea typeface="標楷體" panose="03000509000000000000" pitchFamily="65" charset="-120"/>
+                <a:cs typeface="Times New Roman" panose="02020603050405020304" pitchFamily="18" charset="0"/>
+              </a:rPr>
+              <a:t>luminance</a:t>
+            </a:r>
+            <a:r>
+              <a:rPr lang="en-US" altLang="zh-TW" sz="2000" dirty="0">
+                <a:solidFill>
+                  <a:srgbClr val="333333"/>
+                </a:solidFill>
+                <a:latin typeface="Times New Roman" panose="02020603050405020304" pitchFamily="18" charset="0"/>
+                <a:ea typeface="標楷體" panose="03000509000000000000" pitchFamily="65" charset="-120"/>
+                <a:cs typeface="Times New Roman" panose="02020603050405020304" pitchFamily="18" charset="0"/>
+              </a:rPr>
+              <a:t>) </a:t>
+            </a:r>
+            <a:endParaRPr lang="en-US" altLang="zh-TW" dirty="0">
+              <a:solidFill>
+                <a:schemeClr val="tx1"/>
+              </a:solidFill>
+              <a:latin typeface="Times New Roman" panose="02020603050405020304" pitchFamily="18" charset="0"/>
+              <a:ea typeface="標楷體" panose="03000509000000000000" pitchFamily="65" charset="-120"/>
+              <a:cs typeface="Times New Roman" panose="02020603050405020304" pitchFamily="18" charset="0"/>
+            </a:endParaRPr>
+          </a:p>
+          <a:p>
+            <a:pPr lvl="1">
+              <a:lnSpc>
+                <a:spcPct val="150000"/>
+              </a:lnSpc>
+            </a:pPr>
+            <a:r>
+              <a:rPr lang="zh-TW" altLang="zh-TW" sz="1600" dirty="0">
+                <a:latin typeface="Times New Roman" panose="02020603050405020304" pitchFamily="18" charset="0"/>
+                <a:ea typeface="標楷體" panose="03000509000000000000" pitchFamily="65" charset="-120"/>
+                <a:cs typeface="Times New Roman" panose="02020603050405020304" pitchFamily="18" charset="0"/>
+              </a:rPr>
+              <a:t>這台螢幕量測到顯示白的亮度</a:t>
+            </a:r>
+            <a:endParaRPr lang="en-US" altLang="zh-TW" sz="1600" dirty="0">
+              <a:latin typeface="Times New Roman" panose="02020603050405020304" pitchFamily="18" charset="0"/>
+              <a:ea typeface="標楷體" panose="03000509000000000000" pitchFamily="65" charset="-120"/>
+              <a:cs typeface="Times New Roman" panose="02020603050405020304" pitchFamily="18" charset="0"/>
+            </a:endParaRPr>
+          </a:p>
+          <a:p>
+            <a:r>
+              <a:rPr lang="en-US" altLang="zh-TW" sz="2000" dirty="0">
+                <a:latin typeface="Times New Roman" panose="02020603050405020304" pitchFamily="18" charset="0"/>
+                <a:ea typeface="標楷體" panose="03000509000000000000" pitchFamily="65" charset="-120"/>
+                <a:cs typeface="Times New Roman" panose="02020603050405020304" pitchFamily="18" charset="0"/>
+              </a:rPr>
+              <a:t>D</a:t>
+            </a:r>
+            <a:r>
+              <a:rPr lang="zh-TW" altLang="zh-TW" sz="2000" dirty="0">
+                <a:latin typeface="Times New Roman" panose="02020603050405020304" pitchFamily="18" charset="0"/>
+                <a:ea typeface="標楷體" panose="03000509000000000000" pitchFamily="65" charset="-120"/>
+                <a:cs typeface="Times New Roman" panose="02020603050405020304" pitchFamily="18" charset="0"/>
+              </a:rPr>
+              <a:t>esc</a:t>
+            </a:r>
+            <a:r>
+              <a:rPr lang="en-US" altLang="zh-TW" sz="2000" dirty="0">
+                <a:latin typeface="Times New Roman" panose="02020603050405020304" pitchFamily="18" charset="0"/>
+                <a:ea typeface="標楷體" panose="03000509000000000000" pitchFamily="65" charset="-120"/>
+                <a:cs typeface="Times New Roman" panose="02020603050405020304" pitchFamily="18" charset="0"/>
+              </a:rPr>
+              <a:t>(</a:t>
+            </a:r>
+            <a:r>
+              <a:rPr lang="zh-TW" altLang="zh-TW" sz="2000" dirty="0"/>
+              <a:t>Profile Description</a:t>
+            </a:r>
+            <a:r>
+              <a:rPr lang="en-US" altLang="zh-TW" sz="2000" dirty="0">
+                <a:latin typeface="Times New Roman" panose="02020603050405020304" pitchFamily="18" charset="0"/>
+                <a:ea typeface="標楷體" panose="03000509000000000000" pitchFamily="65" charset="-120"/>
+                <a:cs typeface="Times New Roman" panose="02020603050405020304" pitchFamily="18" charset="0"/>
+              </a:rPr>
+              <a:t>)</a:t>
+            </a:r>
+          </a:p>
+          <a:p>
+            <a:pPr lvl="1">
+              <a:lnSpc>
+                <a:spcPct val="150000"/>
+              </a:lnSpc>
+            </a:pPr>
+            <a:r>
+              <a:rPr lang="zh-TW" altLang="zh-TW" sz="1600" dirty="0">
+                <a:latin typeface="Times New Roman" panose="02020603050405020304" pitchFamily="18" charset="0"/>
+                <a:ea typeface="標楷體" panose="03000509000000000000" pitchFamily="65" charset="-120"/>
+                <a:cs typeface="Times New Roman" panose="02020603050405020304" pitchFamily="18" charset="0"/>
+              </a:rPr>
+              <a:t>描述這個 ICC Profile 的名稱或識別資訊</a:t>
+            </a:r>
+            <a:endParaRPr lang="en-US" altLang="zh-TW" sz="1600" dirty="0">
+              <a:latin typeface="Times New Roman" panose="02020603050405020304" pitchFamily="18" charset="0"/>
+              <a:ea typeface="標楷體" panose="03000509000000000000" pitchFamily="65" charset="-120"/>
+              <a:cs typeface="Times New Roman" panose="02020603050405020304" pitchFamily="18" charset="0"/>
+            </a:endParaRPr>
+          </a:p>
+          <a:p>
+            <a:r>
+              <a:rPr lang="en-US" altLang="zh-TW" sz="2000" dirty="0">
+                <a:latin typeface="Times New Roman" panose="02020603050405020304" pitchFamily="18" charset="0"/>
+                <a:ea typeface="標楷體" panose="03000509000000000000" pitchFamily="65" charset="-120"/>
+                <a:cs typeface="Times New Roman" panose="02020603050405020304" pitchFamily="18" charset="0"/>
+              </a:rPr>
+              <a:t>C</a:t>
+            </a:r>
+            <a:r>
+              <a:rPr lang="zh-TW" altLang="zh-TW" sz="2000" dirty="0">
+                <a:latin typeface="Times New Roman" panose="02020603050405020304" pitchFamily="18" charset="0"/>
+                <a:ea typeface="標楷體" panose="03000509000000000000" pitchFamily="65" charset="-120"/>
+                <a:cs typeface="Times New Roman" panose="02020603050405020304" pitchFamily="18" charset="0"/>
+              </a:rPr>
+              <a:t>prt</a:t>
+            </a:r>
+            <a:r>
+              <a:rPr lang="en-US" altLang="zh-TW" sz="2000" dirty="0">
+                <a:latin typeface="Times New Roman" panose="02020603050405020304" pitchFamily="18" charset="0"/>
+                <a:ea typeface="標楷體" panose="03000509000000000000" pitchFamily="65" charset="-120"/>
+                <a:cs typeface="Times New Roman" panose="02020603050405020304" pitchFamily="18" charset="0"/>
+              </a:rPr>
+              <a:t>(</a:t>
+            </a:r>
+            <a:r>
+              <a:rPr lang="zh-TW" altLang="zh-TW" sz="2000" dirty="0"/>
+              <a:t>Copyright</a:t>
+            </a:r>
+            <a:r>
+              <a:rPr lang="en-US" altLang="zh-TW" sz="2000" dirty="0">
+                <a:latin typeface="Times New Roman" panose="02020603050405020304" pitchFamily="18" charset="0"/>
+                <a:ea typeface="標楷體" panose="03000509000000000000" pitchFamily="65" charset="-120"/>
+                <a:cs typeface="Times New Roman" panose="02020603050405020304" pitchFamily="18" charset="0"/>
+              </a:rPr>
+              <a:t>)</a:t>
+            </a:r>
+          </a:p>
+          <a:p>
+            <a:pPr lvl="1">
+              <a:lnSpc>
+                <a:spcPct val="150000"/>
+              </a:lnSpc>
+            </a:pPr>
+            <a:r>
+              <a:rPr lang="zh-TW" altLang="zh-TW" sz="1600" dirty="0">
+                <a:latin typeface="Times New Roman" panose="02020603050405020304" pitchFamily="18" charset="0"/>
+                <a:ea typeface="標楷體" panose="03000509000000000000" pitchFamily="65" charset="-120"/>
+                <a:cs typeface="Times New Roman" panose="02020603050405020304" pitchFamily="18" charset="0"/>
+              </a:rPr>
+              <a:t>記錄這個 ICC Profile 的版權資訊</a:t>
+            </a:r>
+            <a:endParaRPr lang="zh-TW" altLang="en-US" sz="1600" dirty="0">
+              <a:solidFill>
+                <a:schemeClr val="tx1"/>
+              </a:solidFill>
+              <a:latin typeface="Times New Roman" panose="02020603050405020304" pitchFamily="18" charset="0"/>
+              <a:ea typeface="標楷體" panose="03000509000000000000" pitchFamily="65" charset="-120"/>
+              <a:cs typeface="Times New Roman" panose="02020603050405020304" pitchFamily="18" charset="0"/>
+            </a:endParaRPr>
+          </a:p>
+        </p:txBody>
+      </p:sp>
+      <p:pic>
+        <p:nvPicPr>
+          <p:cNvPr id="11" name="圖片 10">
+            <a:extLst>
+              <a:ext uri="{FF2B5EF4-FFF2-40B4-BE49-F238E27FC236}">
+                <a16:creationId xmlns:a16="http://schemas.microsoft.com/office/drawing/2014/main" id="{AC18273A-6EC9-764F-CB84-A81D1E6A5E4B}"/>
+              </a:ext>
+            </a:extLst>
+          </p:cNvPr>
+          <p:cNvPicPr>
+            <a:picLocks noChangeAspect="1"/>
+          </p:cNvPicPr>
+          <p:nvPr/>
+        </p:nvPicPr>
+        <p:blipFill>
+          <a:blip r:embed="rId3"/>
+          <a:stretch>
+            <a:fillRect/>
+          </a:stretch>
+        </p:blipFill>
+        <p:spPr>
+          <a:xfrm>
+            <a:off x="5151121" y="1373861"/>
+            <a:ext cx="4419334" cy="4400409"/>
+          </a:xfrm>
+          <a:prstGeom prst="rect">
+            <a:avLst/>
+          </a:prstGeom>
+        </p:spPr>
+      </p:pic>
+    </p:spTree>
+    <p:extLst>
+      <p:ext uri="{BB962C8B-B14F-4D97-AF65-F5344CB8AC3E}">
+        <p14:creationId xmlns:p14="http://schemas.microsoft.com/office/powerpoint/2010/main" val="3746105528"/>
+      </p:ext>
+    </p:extLst>
+  </p:cSld>
+  <p:clrMapOvr>
+    <a:masterClrMapping/>
+  </p:clrMapOvr>
+</p:sld>
+</file>
+
+<file path=ppt/slides/slide15.xml><?xml version="1.0" encoding="utf-8"?>
+<p:sld xmlns:a="http://schemas.openxmlformats.org/drawingml/2006/main" xmlns:r="http://schemas.openxmlformats.org/officeDocument/2006/relationships" xmlns:p="http://schemas.openxmlformats.org/presentationml/2006/main">
+  <p:cSld>
+    <p:spTree>
+      <p:nvGrpSpPr>
+        <p:cNvPr id="1" name="">
+          <a:extLst>
+            <a:ext uri="{FF2B5EF4-FFF2-40B4-BE49-F238E27FC236}">
+              <a16:creationId xmlns:a16="http://schemas.microsoft.com/office/drawing/2014/main" id="{00E3FA89-4E74-50B1-9E1F-3455B72FC7C8}"/>
+            </a:ext>
+          </a:extLst>
+        </p:cNvPr>
+        <p:cNvGrpSpPr/>
+        <p:nvPr/>
+      </p:nvGrpSpPr>
+      <p:grpSpPr>
+        <a:xfrm>
+          <a:off x="0" y="0"/>
+          <a:ext cx="0" cy="0"/>
+          <a:chOff x="0" y="0"/>
+          <a:chExt cx="0" cy="0"/>
+        </a:xfrm>
+      </p:grpSpPr>
+      <p:sp>
+        <p:nvSpPr>
+          <p:cNvPr id="5" name="標題 1">
+            <a:extLst>
+              <a:ext uri="{FF2B5EF4-FFF2-40B4-BE49-F238E27FC236}">
+                <a16:creationId xmlns:a16="http://schemas.microsoft.com/office/drawing/2014/main" id="{5A496009-97E3-5EBF-303F-885B565890A2}"/>
+              </a:ext>
+            </a:extLst>
+          </p:cNvPr>
+          <p:cNvSpPr>
+            <a:spLocks noGrp="1"/>
+          </p:cNvSpPr>
+          <p:nvPr>
+            <p:ph type="title"/>
+          </p:nvPr>
+        </p:nvSpPr>
+        <p:spPr>
+          <a:xfrm>
+            <a:off x="609602" y="609600"/>
+            <a:ext cx="8077200" cy="533400"/>
+          </a:xfrm>
+        </p:spPr>
+        <p:txBody>
+          <a:bodyPr/>
+          <a:lstStyle/>
+          <a:p>
+            <a:r>
+              <a:rPr lang="zh-TW" altLang="en-US" dirty="0">
+                <a:latin typeface="Times New Roman" panose="02020603050405020304" pitchFamily="18" charset="0"/>
+                <a:ea typeface="標楷體" panose="03000509000000000000" pitchFamily="65" charset="-120"/>
+                <a:cs typeface="Times New Roman" panose="02020603050405020304" pitchFamily="18" charset="0"/>
+              </a:rPr>
+              <a:t>本次進度</a:t>
+            </a:r>
+            <a:r>
+              <a:rPr lang="en-US" altLang="zh-TW" dirty="0">
+                <a:latin typeface="Times New Roman" panose="02020603050405020304" pitchFamily="18" charset="0"/>
+                <a:ea typeface="標楷體" panose="03000509000000000000" pitchFamily="65" charset="-120"/>
+                <a:cs typeface="Times New Roman" panose="02020603050405020304" pitchFamily="18" charset="0"/>
+              </a:rPr>
+              <a:t>:</a:t>
+            </a:r>
+            <a:r>
+              <a:rPr lang="zh-TW" altLang="zh-TW" dirty="0">
+                <a:latin typeface="Times New Roman" panose="02020603050405020304" pitchFamily="18" charset="0"/>
+                <a:ea typeface="標楷體" panose="03000509000000000000" pitchFamily="65" charset="-120"/>
+                <a:cs typeface="Times New Roman" panose="02020603050405020304" pitchFamily="18" charset="0"/>
+              </a:rPr>
+              <a:t>Matrix-based Display Profile</a:t>
+            </a:r>
+            <a:endParaRPr lang="zh-TW" altLang="en-US" dirty="0">
+              <a:latin typeface="Times New Roman" panose="02020603050405020304" pitchFamily="18" charset="0"/>
+              <a:ea typeface="標楷體" panose="03000509000000000000" pitchFamily="65" charset="-120"/>
+              <a:cs typeface="Times New Roman" panose="02020603050405020304" pitchFamily="18" charset="0"/>
+            </a:endParaRPr>
+          </a:p>
+        </p:txBody>
+      </p:sp>
+      <p:sp>
+        <p:nvSpPr>
+          <p:cNvPr id="8" name="文字版面配置區 6">
+            <a:extLst>
+              <a:ext uri="{FF2B5EF4-FFF2-40B4-BE49-F238E27FC236}">
+                <a16:creationId xmlns:a16="http://schemas.microsoft.com/office/drawing/2014/main" id="{195C21E2-F9E7-4DB1-C25F-84B88D0BB972}"/>
+              </a:ext>
+            </a:extLst>
+          </p:cNvPr>
+          <p:cNvSpPr txBox="1"/>
+          <p:nvPr/>
+        </p:nvSpPr>
+        <p:spPr>
+          <a:xfrm>
+            <a:off x="609602" y="1223724"/>
+            <a:ext cx="8686796" cy="4700685"/>
+          </a:xfrm>
+          <a:prstGeom prst="rect">
+            <a:avLst/>
+          </a:prstGeom>
+          <a:noFill/>
+          <a:ln>
+            <a:noFill/>
+          </a:ln>
+        </p:spPr>
+        <p:txBody>
+          <a:bodyPr spcFirstLastPara="1" wrap="square" lIns="91425" tIns="45700" rIns="91425" bIns="45700" anchor="t" anchorCtr="0">
+            <a:noAutofit/>
+          </a:bodyPr>
+          <a:lstStyle>
+            <a:defPPr marR="0" lvl="0" algn="l" rtl="0">
+              <a:lnSpc>
+                <a:spcPct val="100000"/>
+              </a:lnSpc>
+              <a:spcBef>
+                <a:spcPts val="0"/>
+              </a:spcBef>
+              <a:spcAft>
+                <a:spcPts val="0"/>
+              </a:spcAft>
+            </a:defPPr>
+            <a:lvl1pPr marL="457200" marR="0" lvl="0" indent="-406400" algn="l" rtl="0">
+              <a:lnSpc>
+                <a:spcPct val="100000"/>
+              </a:lnSpc>
+              <a:spcBef>
+                <a:spcPts val="560"/>
+              </a:spcBef>
+              <a:spcAft>
+                <a:spcPts val="0"/>
+              </a:spcAft>
+              <a:buClr>
+                <a:schemeClr val="accent2"/>
+              </a:buClr>
+              <a:buSzPts val="2800"/>
+              <a:buFont typeface="Noto Sans Symbols"/>
+              <a:buChar char="❖"/>
+              <a:defRPr sz="2800" b="0" i="0" u="none" strike="noStrike" cap="none">
+                <a:solidFill>
+                  <a:schemeClr val="dk1"/>
+                </a:solidFill>
+                <a:latin typeface="Times New Roman"/>
+                <a:ea typeface="Times New Roman"/>
+                <a:cs typeface="Times New Roman"/>
+                <a:sym typeface="Times New Roman"/>
+              </a:defRPr>
+            </a:lvl1pPr>
+            <a:lvl2pPr marL="914400" marR="0" lvl="1" indent="-381000" algn="l" rtl="0">
+              <a:lnSpc>
+                <a:spcPct val="100000"/>
+              </a:lnSpc>
+              <a:spcBef>
+                <a:spcPts val="480"/>
+              </a:spcBef>
+              <a:spcAft>
+                <a:spcPts val="0"/>
+              </a:spcAft>
+              <a:buClr>
+                <a:srgbClr val="FF5050"/>
+              </a:buClr>
+              <a:buSzPts val="2400"/>
+              <a:buFont typeface="Noto Sans Symbols"/>
+              <a:buChar char="▪"/>
+              <a:defRPr sz="2400" b="0" i="0" u="none" strike="noStrike" cap="none">
+                <a:solidFill>
+                  <a:schemeClr val="dk1"/>
+                </a:solidFill>
+                <a:latin typeface="Times New Roman"/>
+                <a:ea typeface="Times New Roman"/>
+                <a:cs typeface="Times New Roman"/>
+                <a:sym typeface="Times New Roman"/>
+              </a:defRPr>
+            </a:lvl2pPr>
+            <a:lvl3pPr marL="1371600" marR="0" lvl="2" indent="-355600" algn="l" rtl="0">
+              <a:lnSpc>
+                <a:spcPct val="100000"/>
+              </a:lnSpc>
+              <a:spcBef>
+                <a:spcPts val="400"/>
+              </a:spcBef>
+              <a:spcAft>
+                <a:spcPts val="0"/>
+              </a:spcAft>
+              <a:buClr>
+                <a:srgbClr val="6699FF"/>
+              </a:buClr>
+              <a:buSzPts val="2000"/>
+              <a:buFont typeface="Times New Roman"/>
+              <a:buChar char="•"/>
+              <a:defRPr sz="2000" b="0" i="0" u="none" strike="noStrike" cap="none">
+                <a:solidFill>
+                  <a:schemeClr val="dk1"/>
+                </a:solidFill>
+                <a:latin typeface="Times New Roman"/>
+                <a:ea typeface="Times New Roman"/>
+                <a:cs typeface="Times New Roman"/>
+                <a:sym typeface="Times New Roman"/>
+              </a:defRPr>
+            </a:lvl3pPr>
+            <a:lvl4pPr marL="1828800" marR="0" lvl="3" indent="-355600" algn="l" rtl="0">
+              <a:lnSpc>
+                <a:spcPct val="100000"/>
+              </a:lnSpc>
+              <a:spcBef>
+                <a:spcPts val="400"/>
+              </a:spcBef>
+              <a:spcAft>
+                <a:spcPts val="0"/>
+              </a:spcAft>
+              <a:buClr>
+                <a:srgbClr val="FF5050"/>
+              </a:buClr>
+              <a:buSzPts val="2000"/>
+              <a:buFont typeface="Times New Roman"/>
+              <a:buChar char="o"/>
+              <a:defRPr sz="2000" b="0" i="0" u="none" strike="noStrike" cap="none">
+                <a:solidFill>
+                  <a:schemeClr val="dk1"/>
+                </a:solidFill>
+                <a:latin typeface="Times New Roman"/>
+                <a:ea typeface="Times New Roman"/>
+                <a:cs typeface="Times New Roman"/>
+                <a:sym typeface="Times New Roman"/>
+              </a:defRPr>
+            </a:lvl4pPr>
+            <a:lvl5pPr marL="2286000" marR="0" lvl="4" indent="-355600" algn="l" rtl="0">
+              <a:lnSpc>
+                <a:spcPct val="100000"/>
+              </a:lnSpc>
+              <a:spcBef>
+                <a:spcPts val="400"/>
+              </a:spcBef>
+              <a:spcAft>
+                <a:spcPts val="0"/>
+              </a:spcAft>
+              <a:buClr>
+                <a:srgbClr val="FF5050"/>
+              </a:buClr>
+              <a:buSzPts val="2000"/>
+              <a:buFont typeface="Times New Roman"/>
+              <a:buChar char="o"/>
+              <a:defRPr sz="2000" b="0" i="0" u="none" strike="noStrike" cap="none">
+                <a:solidFill>
+                  <a:schemeClr val="dk1"/>
+                </a:solidFill>
+                <a:latin typeface="Times New Roman"/>
+                <a:ea typeface="Times New Roman"/>
+                <a:cs typeface="Times New Roman"/>
+                <a:sym typeface="Times New Roman"/>
+              </a:defRPr>
+            </a:lvl5pPr>
+            <a:lvl6pPr marL="2743200" marR="0" lvl="5" indent="-355600" algn="l" rtl="0">
+              <a:lnSpc>
+                <a:spcPct val="100000"/>
+              </a:lnSpc>
+              <a:spcBef>
+                <a:spcPts val="400"/>
+              </a:spcBef>
+              <a:spcAft>
+                <a:spcPts val="0"/>
+              </a:spcAft>
+              <a:buClr>
+                <a:srgbClr val="FF5050"/>
+              </a:buClr>
+              <a:buSzPts val="2000"/>
+              <a:buFont typeface="Times New Roman"/>
+              <a:buChar char="o"/>
+              <a:defRPr sz="2000" b="0" i="0" u="none" strike="noStrike" cap="none">
+                <a:solidFill>
+                  <a:schemeClr val="dk1"/>
+                </a:solidFill>
+                <a:latin typeface="Times New Roman"/>
+                <a:ea typeface="Times New Roman"/>
+                <a:cs typeface="Times New Roman"/>
+                <a:sym typeface="Times New Roman"/>
+              </a:defRPr>
+            </a:lvl6pPr>
+            <a:lvl7pPr marL="3200400" marR="0" lvl="6" indent="-355600" algn="l" rtl="0">
+              <a:lnSpc>
+                <a:spcPct val="100000"/>
+              </a:lnSpc>
+              <a:spcBef>
+                <a:spcPts val="400"/>
+              </a:spcBef>
+              <a:spcAft>
+                <a:spcPts val="0"/>
+              </a:spcAft>
+              <a:buClr>
+                <a:srgbClr val="FF5050"/>
+              </a:buClr>
+              <a:buSzPts val="2000"/>
+              <a:buFont typeface="Times New Roman"/>
+              <a:buChar char="o"/>
+              <a:defRPr sz="2000" b="0" i="0" u="none" strike="noStrike" cap="none">
+                <a:solidFill>
+                  <a:schemeClr val="dk1"/>
+                </a:solidFill>
+                <a:latin typeface="Times New Roman"/>
+                <a:ea typeface="Times New Roman"/>
+                <a:cs typeface="Times New Roman"/>
+                <a:sym typeface="Times New Roman"/>
+              </a:defRPr>
+            </a:lvl7pPr>
+            <a:lvl8pPr marL="3657600" marR="0" lvl="7" indent="-355600" algn="l" rtl="0">
+              <a:lnSpc>
+                <a:spcPct val="100000"/>
+              </a:lnSpc>
+              <a:spcBef>
+                <a:spcPts val="400"/>
+              </a:spcBef>
+              <a:spcAft>
+                <a:spcPts val="0"/>
+              </a:spcAft>
+              <a:buClr>
+                <a:srgbClr val="FF5050"/>
+              </a:buClr>
+              <a:buSzPts val="2000"/>
+              <a:buFont typeface="Times New Roman"/>
+              <a:buChar char="o"/>
+              <a:defRPr sz="2000" b="0" i="0" u="none" strike="noStrike" cap="none">
+                <a:solidFill>
+                  <a:schemeClr val="dk1"/>
+                </a:solidFill>
+                <a:latin typeface="Times New Roman"/>
+                <a:ea typeface="Times New Roman"/>
+                <a:cs typeface="Times New Roman"/>
+                <a:sym typeface="Times New Roman"/>
+              </a:defRPr>
+            </a:lvl8pPr>
+            <a:lvl9pPr marL="4114800" marR="0" lvl="8" indent="-355600" algn="l" rtl="0">
+              <a:lnSpc>
+                <a:spcPct val="100000"/>
+              </a:lnSpc>
+              <a:spcBef>
+                <a:spcPts val="400"/>
+              </a:spcBef>
+              <a:spcAft>
+                <a:spcPts val="0"/>
+              </a:spcAft>
+              <a:buClr>
+                <a:srgbClr val="FF5050"/>
+              </a:buClr>
+              <a:buSzPts val="2000"/>
+              <a:buFont typeface="Times New Roman"/>
+              <a:buChar char="o"/>
+              <a:defRPr sz="2000" b="0" i="0" u="none" strike="noStrike" cap="none">
+                <a:solidFill>
+                  <a:schemeClr val="dk1"/>
+                </a:solidFill>
+                <a:latin typeface="Times New Roman"/>
+                <a:ea typeface="Times New Roman"/>
+                <a:cs typeface="Times New Roman"/>
+                <a:sym typeface="Times New Roman"/>
+              </a:defRPr>
+            </a:lvl9pPr>
+          </a:lstStyle>
+          <a:p>
+            <a:pPr marL="457200" lvl="1" indent="-406400">
+              <a:spcBef>
+                <a:spcPts val="560"/>
+              </a:spcBef>
+              <a:buClr>
+                <a:schemeClr val="accent2"/>
+              </a:buClr>
+              <a:buSzPts val="2800"/>
+              <a:buFont typeface="Noto Sans Symbols"/>
+              <a:buChar char="❖"/>
+            </a:pPr>
+            <a:r>
+              <a:rPr lang="en-US" altLang="zh-TW" sz="2000" dirty="0">
+                <a:solidFill>
+                  <a:srgbClr val="333333"/>
+                </a:solidFill>
+                <a:latin typeface="Times New Roman" panose="02020603050405020304" pitchFamily="18" charset="0"/>
+                <a:ea typeface="標楷體" panose="03000509000000000000" pitchFamily="65" charset="-120"/>
+                <a:cs typeface="Times New Roman" panose="02020603050405020304" pitchFamily="18" charset="0"/>
+              </a:rPr>
+              <a:t>VCGT</a:t>
+            </a:r>
+            <a:r>
+              <a:rPr lang="zh-TW" altLang="zh-TW" sz="2000" dirty="0">
+                <a:latin typeface="Times New Roman" panose="02020603050405020304" pitchFamily="18" charset="0"/>
+                <a:ea typeface="標楷體" panose="03000509000000000000" pitchFamily="65" charset="-120"/>
+                <a:cs typeface="Times New Roman" panose="02020603050405020304" pitchFamily="18" charset="0"/>
+              </a:rPr>
+              <a:t> （Video Card Gamma Tag）</a:t>
+            </a:r>
+            <a:r>
+              <a:rPr lang="en-US" altLang="zh-TW" sz="2000" dirty="0">
+                <a:solidFill>
+                  <a:srgbClr val="333333"/>
+                </a:solidFill>
+                <a:latin typeface="Times New Roman" panose="02020603050405020304" pitchFamily="18" charset="0"/>
+                <a:ea typeface="標楷體" panose="03000509000000000000" pitchFamily="65" charset="-120"/>
+                <a:cs typeface="Times New Roman" panose="02020603050405020304" pitchFamily="18" charset="0"/>
+              </a:rPr>
+              <a:t> </a:t>
+            </a:r>
+            <a:endParaRPr lang="en-US" altLang="zh-TW" dirty="0">
+              <a:solidFill>
+                <a:schemeClr val="tx1"/>
+              </a:solidFill>
+              <a:latin typeface="Times New Roman" panose="02020603050405020304" pitchFamily="18" charset="0"/>
+              <a:ea typeface="標楷體" panose="03000509000000000000" pitchFamily="65" charset="-120"/>
+              <a:cs typeface="Times New Roman" panose="02020603050405020304" pitchFamily="18" charset="0"/>
+            </a:endParaRPr>
+          </a:p>
+          <a:p>
+            <a:pPr lvl="1"/>
+            <a:r>
+              <a:rPr lang="zh-TW" altLang="zh-TW" sz="1600" dirty="0">
+                <a:latin typeface="Times New Roman" panose="02020603050405020304" pitchFamily="18" charset="0"/>
+                <a:ea typeface="標楷體" panose="03000509000000000000" pitchFamily="65" charset="-120"/>
+                <a:cs typeface="Times New Roman" panose="02020603050405020304" pitchFamily="18" charset="0"/>
+              </a:rPr>
+              <a:t>是一種 ICC Profile 中用來描述</a:t>
+            </a:r>
+            <a:r>
+              <a:rPr lang="en-US" altLang="zh-TW" sz="1600">
+                <a:latin typeface="Times New Roman" panose="02020603050405020304" pitchFamily="18" charset="0"/>
+                <a:ea typeface="標楷體" panose="03000509000000000000" pitchFamily="65" charset="-120"/>
+                <a:cs typeface="Times New Roman" panose="02020603050405020304" pitchFamily="18" charset="0"/>
+              </a:rPr>
+              <a:t>GPU</a:t>
+            </a:r>
+            <a:r>
+              <a:rPr lang="zh-TW" altLang="zh-TW" sz="1600">
+                <a:latin typeface="Times New Roman" panose="02020603050405020304" pitchFamily="18" charset="0"/>
+                <a:ea typeface="標楷體" panose="03000509000000000000" pitchFamily="65" charset="-120"/>
+                <a:cs typeface="Times New Roman" panose="02020603050405020304" pitchFamily="18" charset="0"/>
+              </a:rPr>
+              <a:t>／</a:t>
+            </a:r>
+            <a:r>
+              <a:rPr lang="zh-TW" altLang="zh-TW" sz="1600" dirty="0">
+                <a:latin typeface="Times New Roman" panose="02020603050405020304" pitchFamily="18" charset="0"/>
+                <a:ea typeface="標楷體" panose="03000509000000000000" pitchFamily="65" charset="-120"/>
+                <a:cs typeface="Times New Roman" panose="02020603050405020304" pitchFamily="18" charset="0"/>
+              </a:rPr>
+              <a:t>影像輸出端的色調校正曲線資料的 tag</a:t>
+            </a:r>
+            <a:endParaRPr lang="en-US" altLang="zh-TW" sz="1600" dirty="0">
+              <a:latin typeface="Times New Roman" panose="02020603050405020304" pitchFamily="18" charset="0"/>
+              <a:ea typeface="標楷體" panose="03000509000000000000" pitchFamily="65" charset="-120"/>
+              <a:cs typeface="Times New Roman" panose="02020603050405020304" pitchFamily="18" charset="0"/>
+            </a:endParaRPr>
+          </a:p>
+        </p:txBody>
+      </p:sp>
+    </p:spTree>
+    <p:extLst>
+      <p:ext uri="{BB962C8B-B14F-4D97-AF65-F5344CB8AC3E}">
+        <p14:creationId xmlns:p14="http://schemas.microsoft.com/office/powerpoint/2010/main" val="2297188540"/>
+      </p:ext>
+    </p:extLst>
+  </p:cSld>
+  <p:clrMapOvr>
+    <a:masterClrMapping/>
+  </p:clrMapOvr>
+</p:sld>
+</file>
+
+<file path=ppt/slides/slide16.xml><?xml version="1.0" encoding="utf-8"?>
 <p:sld xmlns:a="http://schemas.openxmlformats.org/drawingml/2006/main" xmlns:r="http://schemas.openxmlformats.org/officeDocument/2006/relationships" xmlns:p="http://schemas.openxmlformats.org/presentationml/2006/main">
   <p:cSld>
     <p:spTree>
@@ -10417,8 +16536,8 @@
         </p:blipFill>
         <p:spPr>
           <a:xfrm>
-            <a:off x="609602" y="1461470"/>
-            <a:ext cx="6274122" cy="4578585"/>
+            <a:off x="208364" y="1307939"/>
+            <a:ext cx="6744810" cy="4922073"/>
           </a:xfrm>
           <a:prstGeom prst="rect">
             <a:avLst/>
@@ -10440,14 +16559,14 @@
           <p:nvPr>
             <p:extLst>
               <p:ext uri="{D42A27DB-BD31-4B8C-83A1-F6EECF244321}">
-                <p14:modId xmlns:p14="http://schemas.microsoft.com/office/powerpoint/2010/main" val="4108931637"/>
+                <p14:modId xmlns:p14="http://schemas.microsoft.com/office/powerpoint/2010/main" val="1438902325"/>
               </p:ext>
             </p:extLst>
           </p:nvPr>
         </p:nvGraphicFramePr>
         <p:xfrm>
-          <a:off x="7072132" y="1544421"/>
-          <a:ext cx="2224266" cy="4592769"/>
+          <a:off x="7072132" y="1307939"/>
+          <a:ext cx="2338794" cy="4842674"/>
         </p:xfrm>
         <a:graphic>
           <a:graphicData uri="http://schemas.openxmlformats.org/drawingml/2006/table">
@@ -10456,7 +16575,7 @@
                 <a:tableStyleId>{616DA210-FB5B-4158-B5E0-FEB733F419BA}</a:tableStyleId>
               </a:tblPr>
               <a:tblGrid>
-                <a:gridCol w="2224266">
+                <a:gridCol w="2338794">
                   <a:extLst>
                     <a:ext uri="{9D8B030D-6E8A-4147-A177-3AD203B41FA5}">
                       <a16:colId xmlns:a16="http://schemas.microsoft.com/office/drawing/2014/main" val="3358617967"/>
@@ -10464,7 +16583,7 @@
                   </a:extLst>
                 </a:gridCol>
               </a:tblGrid>
-              <a:tr h="805521">
+              <a:tr h="846997">
                 <a:tc>
                   <a:txBody>
                     <a:bodyPr/>
@@ -10472,14 +16591,14 @@
                     <a:p>
                       <a:pPr algn="ctr"/>
                       <a:r>
-                        <a:rPr lang="zh-TW" altLang="zh-TW" sz="1600" dirty="0">
+                        <a:rPr lang="zh-TW" altLang="zh-TW" sz="1700" dirty="0">
                           <a:latin typeface="Times New Roman" panose="02020603050405020304" pitchFamily="18" charset="0"/>
                           <a:ea typeface="標楷體" panose="03000509000000000000" pitchFamily="65" charset="-120"/>
                           <a:cs typeface="Times New Roman" panose="02020603050405020304" pitchFamily="18" charset="0"/>
                         </a:rPr>
                         <a:t>Profile Header </a:t>
                       </a:r>
-                      <a:endParaRPr lang="en-US" altLang="zh-TW" sz="1600" dirty="0">
+                      <a:endParaRPr lang="en-US" altLang="zh-TW" sz="1700" dirty="0">
                         <a:latin typeface="Times New Roman" panose="02020603050405020304" pitchFamily="18" charset="0"/>
                         <a:ea typeface="標楷體" panose="03000509000000000000" pitchFamily="65" charset="-120"/>
                         <a:cs typeface="Times New Roman" panose="02020603050405020304" pitchFamily="18" charset="0"/>
@@ -10488,21 +16607,21 @@
                     <a:p>
                       <a:pPr algn="ctr"/>
                       <a:r>
-                        <a:rPr lang="zh-TW" altLang="zh-TW" sz="1600" dirty="0">
+                        <a:rPr lang="zh-TW" altLang="zh-TW" sz="1700" dirty="0">
                           <a:latin typeface="Times New Roman" panose="02020603050405020304" pitchFamily="18" charset="0"/>
                           <a:ea typeface="標楷體" panose="03000509000000000000" pitchFamily="65" charset="-120"/>
                           <a:cs typeface="Times New Roman" panose="02020603050405020304" pitchFamily="18" charset="0"/>
                         </a:rPr>
                         <a:t>128 bytes</a:t>
                       </a:r>
-                      <a:endParaRPr lang="zh-TW" altLang="en-US" sz="1600" dirty="0">
+                      <a:endParaRPr lang="zh-TW" altLang="en-US" sz="1700" dirty="0">
                         <a:latin typeface="Times New Roman" panose="02020603050405020304" pitchFamily="18" charset="0"/>
                         <a:ea typeface="標楷體" panose="03000509000000000000" pitchFamily="65" charset="-120"/>
                         <a:cs typeface="Times New Roman" panose="02020603050405020304" pitchFamily="18" charset="0"/>
                       </a:endParaRPr>
                     </a:p>
                   </a:txBody>
-                  <a:tcPr/>
+                  <a:tcPr marL="96148" marR="96148" marT="48074" marB="48074"/>
                 </a:tc>
                 <a:extLst>
                   <a:ext uri="{0D108BD9-81ED-4DB2-BD59-A6C34878D82A}">
@@ -10510,7 +16629,7 @@
                   </a:ext>
                 </a:extLst>
               </a:tr>
-              <a:tr h="1213505">
+              <a:tr h="1378125">
                 <a:tc>
                   <a:txBody>
                     <a:bodyPr/>
@@ -10518,14 +16637,14 @@
                     <a:p>
                       <a:pPr algn="ctr"/>
                       <a:r>
-                        <a:rPr lang="zh-TW" altLang="zh-TW" sz="1600" dirty="0">
+                        <a:rPr lang="zh-TW" altLang="zh-TW" sz="1700" dirty="0">
                           <a:latin typeface="Times New Roman" panose="02020603050405020304" pitchFamily="18" charset="0"/>
                           <a:ea typeface="標楷體" panose="03000509000000000000" pitchFamily="65" charset="-120"/>
                           <a:cs typeface="Times New Roman" panose="02020603050405020304" pitchFamily="18" charset="0"/>
                         </a:rPr>
                         <a:t>Tag Table</a:t>
                       </a:r>
-                      <a:endParaRPr lang="en-US" altLang="zh-TW" sz="1600" dirty="0">
+                      <a:endParaRPr lang="en-US" altLang="zh-TW" sz="1700" dirty="0">
                         <a:latin typeface="Times New Roman" panose="02020603050405020304" pitchFamily="18" charset="0"/>
                         <a:ea typeface="標楷體" panose="03000509000000000000" pitchFamily="65" charset="-120"/>
                         <a:cs typeface="Times New Roman" panose="02020603050405020304" pitchFamily="18" charset="0"/>
@@ -10534,14 +16653,14 @@
                     <a:p>
                       <a:pPr algn="ctr"/>
                       <a:r>
-                        <a:rPr lang="zh-TW" altLang="zh-TW" sz="1600" dirty="0">
+                        <a:rPr lang="zh-TW" altLang="zh-TW" sz="1700" dirty="0">
                           <a:latin typeface="Times New Roman" panose="02020603050405020304" pitchFamily="18" charset="0"/>
                           <a:ea typeface="標楷體" panose="03000509000000000000" pitchFamily="65" charset="-120"/>
                           <a:cs typeface="Times New Roman" panose="02020603050405020304" pitchFamily="18" charset="0"/>
                         </a:rPr>
                         <a:t>wtpt → offset / size </a:t>
                       </a:r>
-                      <a:endParaRPr lang="en-US" altLang="zh-TW" sz="1600" dirty="0">
+                      <a:endParaRPr lang="en-US" altLang="zh-TW" sz="1700" dirty="0">
                         <a:latin typeface="Times New Roman" panose="02020603050405020304" pitchFamily="18" charset="0"/>
                         <a:ea typeface="標楷體" panose="03000509000000000000" pitchFamily="65" charset="-120"/>
                         <a:cs typeface="Times New Roman" panose="02020603050405020304" pitchFamily="18" charset="0"/>
@@ -10550,14 +16669,14 @@
                     <a:p>
                       <a:pPr algn="ctr"/>
                       <a:r>
-                        <a:rPr lang="zh-TW" altLang="zh-TW" sz="1600" dirty="0">
+                        <a:rPr lang="zh-TW" altLang="zh-TW" sz="1700" dirty="0">
                           <a:latin typeface="Times New Roman" panose="02020603050405020304" pitchFamily="18" charset="0"/>
                           <a:ea typeface="標楷體" panose="03000509000000000000" pitchFamily="65" charset="-120"/>
                           <a:cs typeface="Times New Roman" panose="02020603050405020304" pitchFamily="18" charset="0"/>
                         </a:rPr>
                         <a:t>rXYZ → offset / size</a:t>
                       </a:r>
-                      <a:endParaRPr lang="en-US" altLang="zh-TW" sz="1600" dirty="0">
+                      <a:endParaRPr lang="en-US" altLang="zh-TW" sz="1700" dirty="0">
                         <a:latin typeface="Times New Roman" panose="02020603050405020304" pitchFamily="18" charset="0"/>
                         <a:ea typeface="標楷體" panose="03000509000000000000" pitchFamily="65" charset="-120"/>
                         <a:cs typeface="Times New Roman" panose="02020603050405020304" pitchFamily="18" charset="0"/>
@@ -10566,14 +16685,14 @@
                     <a:p>
                       <a:pPr algn="ctr"/>
                       <a:r>
-                        <a:rPr lang="zh-TW" altLang="zh-TW" sz="1600" dirty="0">
+                        <a:rPr lang="zh-TW" altLang="zh-TW" sz="1700" dirty="0">
                           <a:latin typeface="Times New Roman" panose="02020603050405020304" pitchFamily="18" charset="0"/>
                           <a:ea typeface="標楷體" panose="03000509000000000000" pitchFamily="65" charset="-120"/>
                           <a:cs typeface="Times New Roman" panose="02020603050405020304" pitchFamily="18" charset="0"/>
                         </a:rPr>
                         <a:t>rTRC → offset / size</a:t>
                       </a:r>
-                      <a:endParaRPr lang="en-US" altLang="zh-TW" sz="1600" dirty="0">
+                      <a:endParaRPr lang="en-US" altLang="zh-TW" sz="1700" dirty="0">
                         <a:latin typeface="Times New Roman" panose="02020603050405020304" pitchFamily="18" charset="0"/>
                         <a:ea typeface="標楷體" panose="03000509000000000000" pitchFamily="65" charset="-120"/>
                         <a:cs typeface="Times New Roman" panose="02020603050405020304" pitchFamily="18" charset="0"/>
@@ -10600,7 +16719,7 @@
                         <a:defRPr/>
                       </a:pPr>
                       <a:r>
-                        <a:rPr lang="en-US" altLang="zh-TW" sz="1600" dirty="0">
+                        <a:rPr lang="en-US" altLang="zh-TW" sz="1700" dirty="0">
                           <a:latin typeface="Times New Roman" panose="02020603050405020304" pitchFamily="18" charset="0"/>
                           <a:ea typeface="標楷體" panose="03000509000000000000" pitchFamily="65" charset="-120"/>
                           <a:cs typeface="Times New Roman" panose="02020603050405020304" pitchFamily="18" charset="0"/>
@@ -10609,7 +16728,7 @@
                       </a:r>
                     </a:p>
                   </a:txBody>
-                  <a:tcPr/>
+                  <a:tcPr marL="96148" marR="96148" marT="48074" marB="48074"/>
                 </a:tc>
                 <a:extLst>
                   <a:ext uri="{0D108BD9-81ED-4DB2-BD59-A6C34878D82A}">
@@ -10617,7 +16736,7 @@
                   </a:ext>
                 </a:extLst>
               </a:tr>
-              <a:tr h="2476608">
+              <a:tr h="2604129">
                 <a:tc>
                   <a:txBody>
                     <a:bodyPr/>
@@ -10625,14 +16744,14 @@
                     <a:p>
                       <a:pPr algn="ctr"/>
                       <a:r>
-                        <a:rPr lang="zh-TW" altLang="zh-TW" sz="1600" dirty="0">
+                        <a:rPr lang="zh-TW" altLang="zh-TW" sz="1700" dirty="0">
                           <a:latin typeface="Times New Roman" panose="02020603050405020304" pitchFamily="18" charset="0"/>
                           <a:ea typeface="標楷體" panose="03000509000000000000" pitchFamily="65" charset="-120"/>
                           <a:cs typeface="Times New Roman" panose="02020603050405020304" pitchFamily="18" charset="0"/>
                         </a:rPr>
                         <a:t>Tagged Element Data</a:t>
                       </a:r>
-                      <a:endParaRPr lang="en-US" altLang="zh-TW" sz="1600" dirty="0">
+                      <a:endParaRPr lang="en-US" altLang="zh-TW" sz="1700" dirty="0">
                         <a:latin typeface="Times New Roman" panose="02020603050405020304" pitchFamily="18" charset="0"/>
                         <a:ea typeface="標楷體" panose="03000509000000000000" pitchFamily="65" charset="-120"/>
                         <a:cs typeface="Times New Roman" panose="02020603050405020304" pitchFamily="18" charset="0"/>
@@ -10641,7 +16760,7 @@
                     <a:p>
                       <a:pPr algn="ctr"/>
                       <a:r>
-                        <a:rPr lang="en-US" altLang="zh-TW" sz="1600" dirty="0">
+                        <a:rPr lang="en-US" altLang="zh-TW" sz="1700" dirty="0">
                           <a:latin typeface="Times New Roman" panose="02020603050405020304" pitchFamily="18" charset="0"/>
                           <a:ea typeface="標楷體" panose="03000509000000000000" pitchFamily="65" charset="-120"/>
                           <a:cs typeface="Times New Roman" panose="02020603050405020304" pitchFamily="18" charset="0"/>
@@ -10650,7 +16769,7 @@
                       </a:r>
                     </a:p>
                   </a:txBody>
-                  <a:tcPr/>
+                  <a:tcPr marL="96148" marR="96148" marT="48074" marB="48074"/>
                 </a:tc>
                 <a:extLst>
                   <a:ext uri="{0D108BD9-81ED-4DB2-BD59-A6C34878D82A}">
@@ -13046,7 +19165,7 @@
         <p:cNvPr id="1" name="">
           <a:extLst>
             <a:ext uri="{FF2B5EF4-FFF2-40B4-BE49-F238E27FC236}">
-              <a16:creationId xmlns:a16="http://schemas.microsoft.com/office/drawing/2014/main" id="{D91FE357-957A-3182-12E7-90F219E152EF}"/>
+              <a16:creationId xmlns:a16="http://schemas.microsoft.com/office/drawing/2014/main" id="{6AB74F71-98CD-4695-E569-253470682D4F}"/>
             </a:ext>
           </a:extLst>
         </p:cNvPr>
@@ -13063,64 +19182,10 @@
       </p:grpSpPr>
       <p:sp>
         <p:nvSpPr>
-          <p:cNvPr id="5" name="標題 1">
-            <a:extLst>
-              <a:ext uri="{FF2B5EF4-FFF2-40B4-BE49-F238E27FC236}">
-                <a16:creationId xmlns:a16="http://schemas.microsoft.com/office/drawing/2014/main" id="{61298DEC-0097-A431-0637-9C6765567C9F}"/>
-              </a:ext>
-            </a:extLst>
-          </p:cNvPr>
-          <p:cNvSpPr>
-            <a:spLocks noGrp="1"/>
-          </p:cNvSpPr>
-          <p:nvPr>
-            <p:ph type="title"/>
-          </p:nvPr>
-        </p:nvSpPr>
-        <p:spPr>
-          <a:xfrm>
-            <a:off x="609602" y="609600"/>
-            <a:ext cx="8077200" cy="533400"/>
-          </a:xfrm>
-        </p:spPr>
-        <p:txBody>
-          <a:bodyPr/>
-          <a:lstStyle/>
-          <a:p>
-            <a:r>
-              <a:rPr lang="zh-TW" altLang="en-US" dirty="0">
-                <a:latin typeface="Times New Roman" panose="02020603050405020304" pitchFamily="18" charset="0"/>
-                <a:ea typeface="標楷體" panose="03000509000000000000" pitchFamily="65" charset="-120"/>
-                <a:cs typeface="Times New Roman" panose="02020603050405020304" pitchFamily="18" charset="0"/>
-              </a:rPr>
-              <a:t>本次進度</a:t>
-            </a:r>
-            <a:r>
-              <a:rPr lang="en-US" altLang="zh-TW" dirty="0">
-                <a:latin typeface="Times New Roman" panose="02020603050405020304" pitchFamily="18" charset="0"/>
-                <a:ea typeface="標楷體" panose="03000509000000000000" pitchFamily="65" charset="-120"/>
-                <a:cs typeface="Times New Roman" panose="02020603050405020304" pitchFamily="18" charset="0"/>
-              </a:rPr>
-              <a:t>:</a:t>
-            </a:r>
-            <a:r>
-              <a:rPr lang="zh-TW" altLang="zh-TW" dirty="0"/>
-              <a:t>Matrix-based Display Profile</a:t>
-            </a:r>
-            <a:endParaRPr lang="zh-TW" altLang="en-US" dirty="0">
-              <a:latin typeface="Times New Roman" panose="02020603050405020304" pitchFamily="18" charset="0"/>
-              <a:ea typeface="標楷體" panose="03000509000000000000" pitchFamily="65" charset="-120"/>
-              <a:cs typeface="Times New Roman" panose="02020603050405020304" pitchFamily="18" charset="0"/>
-            </a:endParaRPr>
-          </a:p>
-        </p:txBody>
-      </p:sp>
-      <p:sp>
-        <p:nvSpPr>
           <p:cNvPr id="10" name="文字版面配置區 6">
             <a:extLst>
               <a:ext uri="{FF2B5EF4-FFF2-40B4-BE49-F238E27FC236}">
-                <a16:creationId xmlns:a16="http://schemas.microsoft.com/office/drawing/2014/main" id="{EFA1BA7D-6739-0930-E66B-C7B72485673A}"/>
+                <a16:creationId xmlns:a16="http://schemas.microsoft.com/office/drawing/2014/main" id="{A2A399BF-B1A2-6A55-9010-CCB434627E3E}"/>
               </a:ext>
             </a:extLst>
           </p:cNvPr>
@@ -13392,7 +19457,10 @@
             </a:lvl9pPr>
           </a:lstStyle>
           <a:p>
-            <a:pPr marL="457200" lvl="1" indent="-406400">
+            <a:pPr marL="457200" lvl="1" indent="-406400" algn="just">
+              <a:lnSpc>
+                <a:spcPct val="150000"/>
+              </a:lnSpc>
               <a:spcBef>
                 <a:spcPts val="560"/>
               </a:spcBef>
@@ -13404,7 +19472,7 @@
               <a:buChar char="❖"/>
             </a:pPr>
             <a:r>
-              <a:rPr lang="en-US" altLang="zh-TW" dirty="0">
+              <a:rPr lang="en-US" altLang="zh-TW" sz="2000" dirty="0" err="1">
                 <a:solidFill>
                   <a:schemeClr val="tx1"/>
                 </a:solidFill>
@@ -13412,31 +19480,161 @@
                 <a:ea typeface="標楷體" panose="03000509000000000000" pitchFamily="65" charset="-120"/>
                 <a:cs typeface="Times New Roman" panose="02020603050405020304" pitchFamily="18" charset="0"/>
               </a:rPr>
-              <a:t>TRC(Tone Response Curve)</a:t>
-            </a:r>
-            <a:endParaRPr lang="en-US" altLang="zh-TW" dirty="0"/>
+              <a:t>Wtpt</a:t>
+            </a:r>
+            <a:r>
+              <a:rPr lang="en-US" altLang="zh-TW" sz="2000" dirty="0">
+                <a:solidFill>
+                  <a:schemeClr val="tx1"/>
+                </a:solidFill>
+                <a:latin typeface="Times New Roman" panose="02020603050405020304" pitchFamily="18" charset="0"/>
+                <a:ea typeface="標楷體" panose="03000509000000000000" pitchFamily="65" charset="-120"/>
+                <a:cs typeface="Times New Roman" panose="02020603050405020304" pitchFamily="18" charset="0"/>
+              </a:rPr>
+              <a:t>(M</a:t>
+            </a:r>
+            <a:r>
+              <a:rPr lang="zh-TW" altLang="zh-TW" sz="2000" dirty="0">
+                <a:latin typeface="Times New Roman" panose="02020603050405020304" pitchFamily="18" charset="0"/>
+                <a:ea typeface="標楷體" panose="03000509000000000000" pitchFamily="65" charset="-120"/>
+                <a:cs typeface="Times New Roman" panose="02020603050405020304" pitchFamily="18" charset="0"/>
+              </a:rPr>
+              <a:t>edia WhitePoint</a:t>
+            </a:r>
+            <a:r>
+              <a:rPr lang="en-US" altLang="zh-TW" sz="2000" dirty="0">
+                <a:solidFill>
+                  <a:schemeClr val="tx1"/>
+                </a:solidFill>
+                <a:latin typeface="Times New Roman" panose="02020603050405020304" pitchFamily="18" charset="0"/>
+                <a:ea typeface="標楷體" panose="03000509000000000000" pitchFamily="65" charset="-120"/>
+                <a:cs typeface="Times New Roman" panose="02020603050405020304" pitchFamily="18" charset="0"/>
+              </a:rPr>
+              <a:t>)</a:t>
+            </a:r>
+            <a:endParaRPr lang="en-US" altLang="zh-TW" dirty="0">
+              <a:solidFill>
+                <a:schemeClr val="tx1"/>
+              </a:solidFill>
+              <a:latin typeface="Times New Roman" panose="02020603050405020304" pitchFamily="18" charset="0"/>
+              <a:ea typeface="標楷體" panose="03000509000000000000" pitchFamily="65" charset="-120"/>
+              <a:cs typeface="Times New Roman" panose="02020603050405020304" pitchFamily="18" charset="0"/>
+            </a:endParaRPr>
           </a:p>
           <a:p>
             <a:pPr lvl="1">
               <a:lnSpc>
-                <a:spcPts val="3000"/>
+                <a:spcPct val="150000"/>
               </a:lnSpc>
             </a:pPr>
             <a:r>
-              <a:rPr lang="zh-TW" altLang="en-US" sz="1600" dirty="0">
-                <a:solidFill>
-                  <a:srgbClr val="333333"/>
-                </a:solidFill>
+              <a:rPr lang="zh-TW" altLang="zh-TW" sz="1600" dirty="0">
                 <a:latin typeface="Times New Roman" panose="02020603050405020304" pitchFamily="18" charset="0"/>
                 <a:ea typeface="標楷體" panose="03000509000000000000" pitchFamily="65" charset="-120"/>
                 <a:cs typeface="Times New Roman" panose="02020603050405020304" pitchFamily="18" charset="0"/>
               </a:rPr>
-              <a:t>舉例：</a:t>
+              <a:t>ICC 官方說</a:t>
+            </a:r>
+            <a:r>
+              <a:rPr lang="zh-TW" altLang="en-US" sz="1600" dirty="0">
+                <a:latin typeface="Times New Roman" panose="02020603050405020304" pitchFamily="18" charset="0"/>
+                <a:ea typeface="標楷體" panose="03000509000000000000" pitchFamily="65" charset="-120"/>
+                <a:cs typeface="Times New Roman" panose="02020603050405020304" pitchFamily="18" charset="0"/>
+              </a:rPr>
+              <a:t>：</a:t>
+            </a:r>
+            <a:br>
+              <a:rPr lang="en-US" altLang="zh-TW" sz="1600" dirty="0">
+                <a:latin typeface="Times New Roman" panose="02020603050405020304" pitchFamily="18" charset="0"/>
+                <a:ea typeface="標楷體" panose="03000509000000000000" pitchFamily="65" charset="-120"/>
+                <a:cs typeface="Times New Roman" panose="02020603050405020304" pitchFamily="18" charset="0"/>
+              </a:rPr>
+            </a:br>
+            <a:r>
+              <a:rPr lang="zh-TW" altLang="zh-TW" sz="1600" dirty="0">
+                <a:latin typeface="Times New Roman" panose="02020603050405020304" pitchFamily="18" charset="0"/>
+                <a:ea typeface="標楷體" panose="03000509000000000000" pitchFamily="65" charset="-120"/>
+                <a:cs typeface="Times New Roman" panose="02020603050405020304" pitchFamily="18" charset="0"/>
+              </a:rPr>
+              <a:t>the ICC.1 architecture is based on a D50 profile connection space (PCS)</a:t>
+            </a:r>
+            <a:r>
+              <a:rPr lang="en-US" altLang="zh-TW" sz="1600" baseline="-25000" dirty="0">
+                <a:latin typeface="Times New Roman" panose="02020603050405020304" pitchFamily="18" charset="0"/>
+                <a:ea typeface="標楷體" panose="03000509000000000000" pitchFamily="65" charset="-120"/>
+                <a:cs typeface="Times New Roman" panose="02020603050405020304" pitchFamily="18" charset="0"/>
+              </a:rPr>
+              <a:t>[3]</a:t>
+            </a:r>
+            <a:endParaRPr lang="en-US" altLang="zh-TW" sz="1600" baseline="-25000" dirty="0">
+              <a:solidFill>
+                <a:schemeClr val="tx1"/>
+              </a:solidFill>
+              <a:latin typeface="Times New Roman" panose="02020603050405020304" pitchFamily="18" charset="0"/>
+              <a:ea typeface="標楷體" panose="03000509000000000000" pitchFamily="65" charset="-120"/>
+              <a:cs typeface="Times New Roman" panose="02020603050405020304" pitchFamily="18" charset="0"/>
+            </a:endParaRPr>
+          </a:p>
+          <a:p>
+            <a:pPr lvl="1">
+              <a:lnSpc>
+                <a:spcPct val="150000"/>
+              </a:lnSpc>
+            </a:pPr>
+            <a:r>
+              <a:rPr lang="en-US" altLang="zh-TW" sz="1600" dirty="0" err="1">
+                <a:solidFill>
+                  <a:schemeClr val="tx1"/>
+                </a:solidFill>
+                <a:latin typeface="Times New Roman" panose="02020603050405020304" pitchFamily="18" charset="0"/>
+                <a:ea typeface="標楷體" panose="03000509000000000000" pitchFamily="65" charset="-120"/>
+                <a:cs typeface="Times New Roman" panose="02020603050405020304" pitchFamily="18" charset="0"/>
+              </a:rPr>
+              <a:t>wtpt</a:t>
+            </a:r>
+            <a:r>
+              <a:rPr lang="zh-TW" altLang="en-US" sz="1600" dirty="0">
+                <a:solidFill>
+                  <a:schemeClr val="tx1"/>
+                </a:solidFill>
+                <a:latin typeface="Times New Roman" panose="02020603050405020304" pitchFamily="18" charset="0"/>
+                <a:ea typeface="標楷體" panose="03000509000000000000" pitchFamily="65" charset="-120"/>
+                <a:cs typeface="Times New Roman" panose="02020603050405020304" pitchFamily="18" charset="0"/>
+              </a:rPr>
+              <a:t>在</a:t>
+            </a:r>
+            <a:r>
+              <a:rPr lang="zh-TW" altLang="zh-TW" sz="1600" dirty="0">
+                <a:latin typeface="Times New Roman" panose="02020603050405020304" pitchFamily="18" charset="0"/>
+                <a:ea typeface="標楷體" panose="03000509000000000000" pitchFamily="65" charset="-120"/>
+                <a:cs typeface="Times New Roman" panose="02020603050405020304" pitchFamily="18" charset="0"/>
+              </a:rPr>
+              <a:t>ICC Profile </a:t>
+            </a:r>
+            <a:r>
+              <a:rPr lang="zh-TW" altLang="en-US" sz="1600" dirty="0">
+                <a:latin typeface="Times New Roman" panose="02020603050405020304" pitchFamily="18" charset="0"/>
+                <a:ea typeface="標楷體" panose="03000509000000000000" pitchFamily="65" charset="-120"/>
+                <a:cs typeface="Times New Roman" panose="02020603050405020304" pitchFamily="18" charset="0"/>
+              </a:rPr>
+              <a:t>功能：</a:t>
+            </a:r>
+            <a:br>
+              <a:rPr lang="en-US" altLang="zh-TW" sz="1600" dirty="0">
+                <a:latin typeface="Times New Roman" panose="02020603050405020304" pitchFamily="18" charset="0"/>
+                <a:ea typeface="標楷體" panose="03000509000000000000" pitchFamily="65" charset="-120"/>
+                <a:cs typeface="Times New Roman" panose="02020603050405020304" pitchFamily="18" charset="0"/>
+              </a:rPr>
+            </a:br>
+            <a:r>
+              <a:rPr lang="zh-TW" altLang="zh-TW" sz="1600" dirty="0">
+                <a:latin typeface="Times New Roman" panose="02020603050405020304" pitchFamily="18" charset="0"/>
+                <a:ea typeface="標楷體" panose="03000509000000000000" pitchFamily="65" charset="-120"/>
+                <a:cs typeface="Times New Roman" panose="02020603050405020304" pitchFamily="18" charset="0"/>
+              </a:rPr>
+              <a:t>描述該 Profile 所代表媒體白點的 XYZ 色度基準。</a:t>
             </a:r>
             <a:endParaRPr lang="en-US" altLang="zh-TW" sz="1600" dirty="0">
-              <a:solidFill>
-                <a:srgbClr val="333333"/>
-              </a:solidFill>
               <a:latin typeface="Times New Roman" panose="02020603050405020304" pitchFamily="18" charset="0"/>
               <a:ea typeface="標楷體" panose="03000509000000000000" pitchFamily="65" charset="-120"/>
               <a:cs typeface="Times New Roman" panose="02020603050405020304" pitchFamily="18" charset="0"/>
@@ -13445,24 +19643,83 @@
           <a:p>
             <a:pPr>
               <a:lnSpc>
-                <a:spcPts val="3000"/>
+                <a:spcPct val="150000"/>
               </a:lnSpc>
             </a:pPr>
-            <a:endParaRPr lang="en-US" altLang="zh-TW" sz="2000" dirty="0">
-              <a:latin typeface="Times New Roman" panose="02020603050405020304" pitchFamily="18" charset="0"/>
-              <a:ea typeface="標楷體" panose="03000509000000000000" pitchFamily="65" charset="-120"/>
-            </a:endParaRPr>
+            <a:r>
+              <a:rPr lang="en-US" altLang="zh-TW" sz="2000" dirty="0">
+                <a:latin typeface="Times New Roman" panose="02020603050405020304" pitchFamily="18" charset="0"/>
+                <a:ea typeface="標楷體" panose="03000509000000000000" pitchFamily="65" charset="-120"/>
+                <a:cs typeface="Times New Roman" panose="02020603050405020304" pitchFamily="18" charset="0"/>
+              </a:rPr>
+              <a:t>C</a:t>
+            </a:r>
+            <a:r>
+              <a:rPr lang="zh-TW" altLang="zh-TW" sz="2000" dirty="0">
+                <a:latin typeface="Times New Roman" panose="02020603050405020304" pitchFamily="18" charset="0"/>
+                <a:ea typeface="標楷體" panose="03000509000000000000" pitchFamily="65" charset="-120"/>
+                <a:cs typeface="Times New Roman" panose="02020603050405020304" pitchFamily="18" charset="0"/>
+              </a:rPr>
+              <a:t>had</a:t>
+            </a:r>
+            <a:r>
+              <a:rPr lang="en-US" altLang="zh-TW" sz="2000" dirty="0">
+                <a:latin typeface="Times New Roman" panose="02020603050405020304" pitchFamily="18" charset="0"/>
+                <a:ea typeface="標楷體" panose="03000509000000000000" pitchFamily="65" charset="-120"/>
+                <a:cs typeface="Times New Roman" panose="02020603050405020304" pitchFamily="18" charset="0"/>
+              </a:rPr>
+              <a:t>(</a:t>
+            </a:r>
+            <a:r>
+              <a:rPr lang="zh-TW" altLang="zh-TW" sz="2000" dirty="0">
+                <a:latin typeface="Times New Roman" panose="02020603050405020304" pitchFamily="18" charset="0"/>
+                <a:ea typeface="標楷體" panose="03000509000000000000" pitchFamily="65" charset="-120"/>
+                <a:cs typeface="Times New Roman" panose="02020603050405020304" pitchFamily="18" charset="0"/>
+              </a:rPr>
+              <a:t>Chromatic Adaptation</a:t>
+            </a:r>
+            <a:r>
+              <a:rPr lang="en-US" altLang="zh-TW" sz="2000" dirty="0">
+                <a:latin typeface="Times New Roman" panose="02020603050405020304" pitchFamily="18" charset="0"/>
+                <a:ea typeface="標楷體" panose="03000509000000000000" pitchFamily="65" charset="-120"/>
+                <a:cs typeface="Times New Roman" panose="02020603050405020304" pitchFamily="18" charset="0"/>
+              </a:rPr>
+              <a:t>)</a:t>
+            </a:r>
           </a:p>
           <a:p>
-            <a:pPr marL="533400" lvl="1" indent="0">
+            <a:pPr lvl="1">
               <a:lnSpc>
-                <a:spcPts val="3000"/>
+                <a:spcPct val="150000"/>
               </a:lnSpc>
-              <a:buNone/>
             </a:pPr>
-            <a:endParaRPr lang="zh-TW" altLang="en-US" sz="1800" dirty="0">
+            <a:r>
+              <a:rPr lang="zh-TW" altLang="zh-TW" sz="1600" dirty="0">
+                <a:latin typeface="Times New Roman" panose="02020603050405020304" pitchFamily="18" charset="0"/>
+                <a:ea typeface="標楷體" panose="03000509000000000000" pitchFamily="65" charset="-120"/>
+                <a:cs typeface="Times New Roman" panose="02020603050405020304" pitchFamily="18" charset="0"/>
+              </a:rPr>
+              <a:t>實際測得的白點如果不是 D50，就需要做</a:t>
+            </a:r>
+            <a:r>
+              <a:rPr lang="zh-TW" altLang="en-US" sz="1600" dirty="0">
+                <a:latin typeface="Times New Roman" panose="02020603050405020304" pitchFamily="18" charset="0"/>
+                <a:ea typeface="標楷體" panose="03000509000000000000" pitchFamily="65" charset="-120"/>
+                <a:cs typeface="Times New Roman" panose="02020603050405020304" pitchFamily="18" charset="0"/>
+              </a:rPr>
+              <a:t>色度適配</a:t>
+            </a:r>
+            <a:r>
+              <a:rPr lang="zh-TW" altLang="zh-TW" sz="1600" dirty="0">
+                <a:latin typeface="Times New Roman" panose="02020603050405020304" pitchFamily="18" charset="0"/>
+                <a:ea typeface="標楷體" panose="03000509000000000000" pitchFamily="65" charset="-120"/>
+                <a:cs typeface="Times New Roman" panose="02020603050405020304" pitchFamily="18" charset="0"/>
+              </a:rPr>
+              <a:t>，而這個轉換矩陣會放在 chad</a:t>
+            </a:r>
+            <a:endParaRPr lang="zh-TW" altLang="en-US" sz="1600" dirty="0">
               <a:solidFill>
-                <a:srgbClr val="333333"/>
+                <a:schemeClr val="tx1"/>
               </a:solidFill>
               <a:latin typeface="Times New Roman" panose="02020603050405020304" pitchFamily="18" charset="0"/>
               <a:ea typeface="標楷體" panose="03000509000000000000" pitchFamily="65" charset="-120"/>
@@ -13471,433 +19728,80 @@
           </a:p>
         </p:txBody>
       </p:sp>
-      <p:graphicFrame>
-        <p:nvGraphicFramePr>
-          <p:cNvPr id="2" name="表格 1">
+      <p:sp>
+        <p:nvSpPr>
+          <p:cNvPr id="33" name="標題 1">
             <a:extLst>
               <a:ext uri="{FF2B5EF4-FFF2-40B4-BE49-F238E27FC236}">
-                <a16:creationId xmlns:a16="http://schemas.microsoft.com/office/drawing/2014/main" id="{CE5B8F78-8A22-D5AF-CA79-EE55EA23B193}"/>
+                <a16:creationId xmlns:a16="http://schemas.microsoft.com/office/drawing/2014/main" id="{64AF667D-B436-7533-C280-0615418F49FE}"/>
               </a:ext>
             </a:extLst>
           </p:cNvPr>
-          <p:cNvGraphicFramePr>
-            <a:graphicFrameLocks noGrp="1"/>
-          </p:cNvGraphicFramePr>
+          <p:cNvSpPr>
+            <a:spLocks noGrp="1"/>
+          </p:cNvSpPr>
           <p:nvPr>
-            <p:extLst>
-              <p:ext uri="{D42A27DB-BD31-4B8C-83A1-F6EECF244321}">
-                <p14:modId xmlns:p14="http://schemas.microsoft.com/office/powerpoint/2010/main" val="1328249219"/>
-              </p:ext>
-            </p:extLst>
+            <p:ph type="title"/>
           </p:nvPr>
-        </p:nvGraphicFramePr>
-        <p:xfrm>
-          <a:off x="1114543" y="2567167"/>
-          <a:ext cx="2901873" cy="1219200"/>
-        </p:xfrm>
-        <a:graphic>
-          <a:graphicData uri="http://schemas.openxmlformats.org/drawingml/2006/table">
-            <a:tbl>
-              <a:tblPr>
-                <a:tableStyleId>{5940675A-B579-460E-94D1-54222C63F5DA}</a:tableStyleId>
-              </a:tblPr>
-              <a:tblGrid>
-                <a:gridCol w="967291">
-                  <a:extLst>
-                    <a:ext uri="{9D8B030D-6E8A-4147-A177-3AD203B41FA5}">
-                      <a16:colId xmlns:a16="http://schemas.microsoft.com/office/drawing/2014/main" val="3590102437"/>
-                    </a:ext>
-                  </a:extLst>
-                </a:gridCol>
-                <a:gridCol w="967291">
-                  <a:extLst>
-                    <a:ext uri="{9D8B030D-6E8A-4147-A177-3AD203B41FA5}">
-                      <a16:colId xmlns:a16="http://schemas.microsoft.com/office/drawing/2014/main" val="3666544339"/>
-                    </a:ext>
-                  </a:extLst>
-                </a:gridCol>
-                <a:gridCol w="967291">
-                  <a:extLst>
-                    <a:ext uri="{9D8B030D-6E8A-4147-A177-3AD203B41FA5}">
-                      <a16:colId xmlns:a16="http://schemas.microsoft.com/office/drawing/2014/main" val="455476819"/>
-                    </a:ext>
-                  </a:extLst>
-                </a:gridCol>
-              </a:tblGrid>
-              <a:tr h="298410">
-                <a:tc>
-                  <a:txBody>
-                    <a:bodyPr/>
-                    <a:lstStyle/>
-                    <a:p>
-                      <a:pPr>
-                        <a:buNone/>
-                      </a:pPr>
-                      <a:r>
-                        <a:rPr lang="zh-TW"/>
-                        <a:t>原色</a:t>
-                      </a:r>
-                    </a:p>
-                  </a:txBody>
-                  <a:tcPr anchor="ctr"/>
-                </a:tc>
-                <a:tc>
-                  <a:txBody>
-                    <a:bodyPr/>
-                    <a:lstStyle/>
-                    <a:p>
-                      <a:pPr algn="r">
-                        <a:buNone/>
-                      </a:pPr>
-                      <a:r>
-                        <a:rPr lang="zh-TW"/>
-                        <a:t>x</a:t>
-                      </a:r>
-                    </a:p>
-                  </a:txBody>
-                  <a:tcPr anchor="ctr"/>
-                </a:tc>
-                <a:tc>
-                  <a:txBody>
-                    <a:bodyPr/>
-                    <a:lstStyle/>
-                    <a:p>
-                      <a:pPr algn="r">
-                        <a:buNone/>
-                      </a:pPr>
-                      <a:r>
-                        <a:rPr lang="zh-TW"/>
-                        <a:t>y</a:t>
-                      </a:r>
-                    </a:p>
-                  </a:txBody>
-                  <a:tcPr anchor="ctr"/>
-                </a:tc>
-                <a:extLst>
-                  <a:ext uri="{0D108BD9-81ED-4DB2-BD59-A6C34878D82A}">
-                    <a16:rowId xmlns:a16="http://schemas.microsoft.com/office/drawing/2014/main" val="4117724251"/>
-                  </a:ext>
-                </a:extLst>
-              </a:tr>
-              <a:tr h="298410">
-                <a:tc>
-                  <a:txBody>
-                    <a:bodyPr/>
-                    <a:lstStyle/>
-                    <a:p>
-                      <a:pPr>
-                        <a:buNone/>
-                      </a:pPr>
-                      <a:r>
-                        <a:rPr lang="zh-TW"/>
-                        <a:t>R</a:t>
-                      </a:r>
-                    </a:p>
-                  </a:txBody>
-                  <a:tcPr anchor="ctr"/>
-                </a:tc>
-                <a:tc>
-                  <a:txBody>
-                    <a:bodyPr/>
-                    <a:lstStyle/>
-                    <a:p>
-                      <a:pPr algn="r">
-                        <a:buNone/>
-                      </a:pPr>
-                      <a:r>
-                        <a:rPr lang="zh-TW"/>
-                        <a:t>0.6400</a:t>
-                      </a:r>
-                    </a:p>
-                  </a:txBody>
-                  <a:tcPr anchor="ctr"/>
-                </a:tc>
-                <a:tc>
-                  <a:txBody>
-                    <a:bodyPr/>
-                    <a:lstStyle/>
-                    <a:p>
-                      <a:pPr algn="r">
-                        <a:buNone/>
-                      </a:pPr>
-                      <a:r>
-                        <a:rPr lang="zh-TW"/>
-                        <a:t>0.3300</a:t>
-                      </a:r>
-                    </a:p>
-                  </a:txBody>
-                  <a:tcPr anchor="ctr"/>
-                </a:tc>
-                <a:extLst>
-                  <a:ext uri="{0D108BD9-81ED-4DB2-BD59-A6C34878D82A}">
-                    <a16:rowId xmlns:a16="http://schemas.microsoft.com/office/drawing/2014/main" val="2141619666"/>
-                  </a:ext>
-                </a:extLst>
-              </a:tr>
-              <a:tr h="298410">
-                <a:tc>
-                  <a:txBody>
-                    <a:bodyPr/>
-                    <a:lstStyle/>
-                    <a:p>
-                      <a:pPr>
-                        <a:buNone/>
-                      </a:pPr>
-                      <a:r>
-                        <a:rPr lang="zh-TW"/>
-                        <a:t>G</a:t>
-                      </a:r>
-                    </a:p>
-                  </a:txBody>
-                  <a:tcPr anchor="ctr"/>
-                </a:tc>
-                <a:tc>
-                  <a:txBody>
-                    <a:bodyPr/>
-                    <a:lstStyle/>
-                    <a:p>
-                      <a:pPr algn="r">
-                        <a:buNone/>
-                      </a:pPr>
-                      <a:r>
-                        <a:rPr lang="zh-TW"/>
-                        <a:t>0.3000</a:t>
-                      </a:r>
-                    </a:p>
-                  </a:txBody>
-                  <a:tcPr anchor="ctr"/>
-                </a:tc>
-                <a:tc>
-                  <a:txBody>
-                    <a:bodyPr/>
-                    <a:lstStyle/>
-                    <a:p>
-                      <a:pPr algn="r">
-                        <a:buNone/>
-                      </a:pPr>
-                      <a:r>
-                        <a:rPr lang="zh-TW"/>
-                        <a:t>0.6000</a:t>
-                      </a:r>
-                    </a:p>
-                  </a:txBody>
-                  <a:tcPr anchor="ctr"/>
-                </a:tc>
-                <a:extLst>
-                  <a:ext uri="{0D108BD9-81ED-4DB2-BD59-A6C34878D82A}">
-                    <a16:rowId xmlns:a16="http://schemas.microsoft.com/office/drawing/2014/main" val="3809134920"/>
-                  </a:ext>
-                </a:extLst>
-              </a:tr>
-              <a:tr h="298410">
-                <a:tc>
-                  <a:txBody>
-                    <a:bodyPr/>
-                    <a:lstStyle/>
-                    <a:p>
-                      <a:pPr>
-                        <a:buNone/>
-                      </a:pPr>
-                      <a:r>
-                        <a:rPr lang="zh-TW"/>
-                        <a:t>B</a:t>
-                      </a:r>
-                    </a:p>
-                  </a:txBody>
-                  <a:tcPr anchor="ctr"/>
-                </a:tc>
-                <a:tc>
-                  <a:txBody>
-                    <a:bodyPr/>
-                    <a:lstStyle/>
-                    <a:p>
-                      <a:pPr algn="r">
-                        <a:buNone/>
-                      </a:pPr>
-                      <a:r>
-                        <a:rPr lang="zh-TW"/>
-                        <a:t>0.1500</a:t>
-                      </a:r>
-                    </a:p>
-                  </a:txBody>
-                  <a:tcPr anchor="ctr"/>
-                </a:tc>
-                <a:tc>
-                  <a:txBody>
-                    <a:bodyPr/>
-                    <a:lstStyle/>
-                    <a:p>
-                      <a:pPr algn="r">
-                        <a:buNone/>
-                      </a:pPr>
-                      <a:r>
-                        <a:rPr lang="zh-TW" dirty="0"/>
-                        <a:t>0.0600</a:t>
-                      </a:r>
-                    </a:p>
-                  </a:txBody>
-                  <a:tcPr anchor="ctr"/>
-                </a:tc>
-                <a:extLst>
-                  <a:ext uri="{0D108BD9-81ED-4DB2-BD59-A6C34878D82A}">
-                    <a16:rowId xmlns:a16="http://schemas.microsoft.com/office/drawing/2014/main" val="1932515259"/>
-                  </a:ext>
-                </a:extLst>
-              </a:tr>
-            </a:tbl>
-          </a:graphicData>
-        </a:graphic>
-      </p:graphicFrame>
-      <p:grpSp>
-        <p:nvGrpSpPr>
-          <p:cNvPr id="8" name="群組 7">
+        </p:nvSpPr>
+        <p:spPr>
+          <a:xfrm>
+            <a:off x="609602" y="609600"/>
+            <a:ext cx="8077200" cy="533400"/>
+          </a:xfrm>
+        </p:spPr>
+        <p:txBody>
+          <a:bodyPr/>
+          <a:lstStyle/>
+          <a:p>
+            <a:r>
+              <a:rPr lang="zh-TW" altLang="en-US" dirty="0">
+                <a:latin typeface="Times New Roman" panose="02020603050405020304" pitchFamily="18" charset="0"/>
+                <a:ea typeface="標楷體" panose="03000509000000000000" pitchFamily="65" charset="-120"/>
+                <a:cs typeface="Times New Roman" panose="02020603050405020304" pitchFamily="18" charset="0"/>
+              </a:rPr>
+              <a:t>本次進度</a:t>
+            </a:r>
+            <a:r>
+              <a:rPr lang="en-US" altLang="zh-TW" dirty="0">
+                <a:latin typeface="Times New Roman" panose="02020603050405020304" pitchFamily="18" charset="0"/>
+                <a:ea typeface="標楷體" panose="03000509000000000000" pitchFamily="65" charset="-120"/>
+                <a:cs typeface="Times New Roman" panose="02020603050405020304" pitchFamily="18" charset="0"/>
+              </a:rPr>
+              <a:t>:</a:t>
+            </a:r>
+            <a:r>
+              <a:rPr lang="zh-TW" altLang="zh-TW" dirty="0">
+                <a:latin typeface="Times New Roman" panose="02020603050405020304" pitchFamily="18" charset="0"/>
+                <a:ea typeface="標楷體" panose="03000509000000000000" pitchFamily="65" charset="-120"/>
+                <a:cs typeface="Times New Roman" panose="02020603050405020304" pitchFamily="18" charset="0"/>
+              </a:rPr>
+              <a:t>Matrix-based Display Profile</a:t>
+            </a:r>
+            <a:endParaRPr lang="zh-TW" altLang="en-US" dirty="0">
+              <a:latin typeface="Times New Roman" panose="02020603050405020304" pitchFamily="18" charset="0"/>
+              <a:ea typeface="標楷體" panose="03000509000000000000" pitchFamily="65" charset="-120"/>
+              <a:cs typeface="Times New Roman" panose="02020603050405020304" pitchFamily="18" charset="0"/>
+            </a:endParaRPr>
+          </a:p>
+        </p:txBody>
+      </p:sp>
+      <p:sp>
+        <p:nvSpPr>
+          <p:cNvPr id="3" name="文字方塊 2">
             <a:extLst>
               <a:ext uri="{FF2B5EF4-FFF2-40B4-BE49-F238E27FC236}">
-                <a16:creationId xmlns:a16="http://schemas.microsoft.com/office/drawing/2014/main" id="{786F443D-0782-D5C7-CFA3-08A5D4B6BFEC}"/>
+                <a16:creationId xmlns:a16="http://schemas.microsoft.com/office/drawing/2014/main" id="{C4C95DD7-AFB6-B3EF-D40E-B298684A6275}"/>
               </a:ext>
             </a:extLst>
           </p:cNvPr>
-          <p:cNvGrpSpPr/>
-          <p:nvPr/>
-        </p:nvGrpSpPr>
-        <p:grpSpPr>
-          <a:xfrm>
-            <a:off x="4548850" y="2882096"/>
-            <a:ext cx="1481394" cy="717630"/>
-            <a:chOff x="4444678" y="2812648"/>
-            <a:chExt cx="1481394" cy="717630"/>
-          </a:xfrm>
-        </p:grpSpPr>
-        <p:sp>
-          <p:nvSpPr>
-            <p:cNvPr id="7" name="矩形 6">
-              <a:extLst>
-                <a:ext uri="{FF2B5EF4-FFF2-40B4-BE49-F238E27FC236}">
-                  <a16:creationId xmlns:a16="http://schemas.microsoft.com/office/drawing/2014/main" id="{BB4D6CD5-7B46-9599-FFCA-74970E1E73B5}"/>
-                </a:ext>
-              </a:extLst>
-            </p:cNvPr>
-            <p:cNvSpPr/>
-            <p:nvPr/>
-          </p:nvSpPr>
-          <p:spPr>
-            <a:xfrm>
-              <a:off x="4444678" y="2812648"/>
-              <a:ext cx="1348616" cy="717630"/>
-            </a:xfrm>
-            <a:prstGeom prst="rect">
-              <a:avLst/>
-            </a:prstGeom>
-            <a:solidFill>
-              <a:schemeClr val="bg1"/>
-            </a:solidFill>
-            <a:ln>
-              <a:solidFill>
-                <a:schemeClr val="tx1"/>
-              </a:solidFill>
-            </a:ln>
-          </p:spPr>
-          <p:style>
-            <a:lnRef idx="2">
-              <a:schemeClr val="accent1">
-                <a:shade val="15000"/>
-              </a:schemeClr>
-            </a:lnRef>
-            <a:fillRef idx="1">
-              <a:schemeClr val="accent1"/>
-            </a:fillRef>
-            <a:effectRef idx="0">
-              <a:schemeClr val="accent1"/>
-            </a:effectRef>
-            <a:fontRef idx="minor">
-              <a:schemeClr val="lt1"/>
-            </a:fontRef>
-          </p:style>
-          <p:txBody>
-            <a:bodyPr rtlCol="0" anchor="ctr"/>
-            <a:lstStyle/>
-            <a:p>
-              <a:pPr algn="ctr"/>
-              <a:endParaRPr lang="zh-TW" altLang="en-US"/>
-            </a:p>
-          </p:txBody>
-        </p:sp>
-        <p:sp>
-          <p:nvSpPr>
-            <p:cNvPr id="6" name="文字方塊 5">
-              <a:extLst>
-                <a:ext uri="{FF2B5EF4-FFF2-40B4-BE49-F238E27FC236}">
-                  <a16:creationId xmlns:a16="http://schemas.microsoft.com/office/drawing/2014/main" id="{0DA94BC5-0762-F6E2-2F57-D278DFAB1094}"/>
-                </a:ext>
-              </a:extLst>
-            </p:cNvPr>
-            <p:cNvSpPr txBox="1"/>
-            <p:nvPr/>
-          </p:nvSpPr>
-          <p:spPr>
-            <a:xfrm>
-              <a:off x="4577456" y="2905780"/>
-              <a:ext cx="1348616" cy="523220"/>
-            </a:xfrm>
-            <a:prstGeom prst="rect">
-              <a:avLst/>
-            </a:prstGeom>
-            <a:noFill/>
-          </p:spPr>
-          <p:txBody>
-            <a:bodyPr wrap="square">
-              <a:spAutoFit/>
-            </a:bodyPr>
-            <a:lstStyle/>
-            <a:p>
-              <a:r>
-                <a:rPr lang="zh-TW" altLang="zh-TW" dirty="0"/>
-                <a:t>x</a:t>
-              </a:r>
-              <a:r>
-                <a:rPr lang="zh-TW" altLang="zh-TW" baseline="-25000" dirty="0"/>
-                <a:t>W</a:t>
-              </a:r>
-              <a:r>
-                <a:rPr lang="zh-TW" altLang="zh-TW" dirty="0"/>
-                <a:t>​=0.3127</a:t>
-              </a:r>
-              <a:endParaRPr lang="en-US" altLang="zh-TW" dirty="0"/>
-            </a:p>
-            <a:p>
-              <a:r>
-                <a:rPr lang="zh-TW" altLang="zh-TW" dirty="0"/>
-                <a:t>y</a:t>
-              </a:r>
-              <a:r>
-                <a:rPr lang="zh-TW" altLang="zh-TW" baseline="-25000" dirty="0"/>
-                <a:t>W</a:t>
-              </a:r>
-              <a:r>
-                <a:rPr lang="zh-TW" altLang="zh-TW" dirty="0"/>
-                <a:t>​=0.3290</a:t>
-              </a:r>
-              <a:endParaRPr lang="zh-TW" altLang="en-US" dirty="0"/>
-            </a:p>
-          </p:txBody>
-        </p:sp>
-      </p:grpSp>
-      <p:sp>
-        <p:nvSpPr>
-          <p:cNvPr id="9" name="矩形 8">
-            <a:extLst>
-              <a:ext uri="{FF2B5EF4-FFF2-40B4-BE49-F238E27FC236}">
-                <a16:creationId xmlns:a16="http://schemas.microsoft.com/office/drawing/2014/main" id="{8BDB7050-E618-11BA-974C-7035CB7FA24D}"/>
-              </a:ext>
-            </a:extLst>
-          </p:cNvPr>
-          <p:cNvSpPr/>
+          <p:cNvSpPr txBox="1"/>
           <p:nvPr/>
         </p:nvSpPr>
         <p:spPr>
           <a:xfrm>
-            <a:off x="1960185" y="3786367"/>
-            <a:ext cx="1210588" cy="338554"/>
+            <a:off x="1693764" y="6334780"/>
+            <a:ext cx="8171727" cy="523220"/>
           </a:xfrm>
           <a:prstGeom prst="rect">
             <a:avLst/>
@@ -13905,88 +19809,80 @@
           <a:noFill/>
         </p:spPr>
         <p:txBody>
-          <a:bodyPr wrap="none" lIns="91440" tIns="45720" rIns="91440" bIns="45720">
+          <a:bodyPr wrap="square">
             <a:spAutoFit/>
           </a:bodyPr>
           <a:lstStyle/>
           <a:p>
-            <a:pPr algn="ctr"/>
-            <a:r>
-              <a:rPr lang="zh-TW" altLang="en-US" sz="1600" b="0" cap="none" spc="0" dirty="0">
-                <a:ln w="0"/>
-                <a:solidFill>
-                  <a:schemeClr val="tx1"/>
-                </a:solidFill>
-                <a:effectLst>
-                  <a:outerShdw blurRad="38100" dist="19050" dir="2700000" algn="tl" rotWithShape="0">
-                    <a:schemeClr val="dk1">
-                      <a:alpha val="40000"/>
-                    </a:schemeClr>
-                  </a:outerShdw>
-                </a:effectLst>
+            <a:r>
+              <a:rPr lang="zh-TW" altLang="zh-TW" b="1" dirty="0">
+                <a:latin typeface="Times New Roman" panose="02020603050405020304" pitchFamily="18" charset="0"/>
+                <a:ea typeface="標楷體" panose="03000509000000000000" pitchFamily="65" charset="-120"/>
+                <a:cs typeface="Times New Roman" panose="02020603050405020304" pitchFamily="18" charset="0"/>
               </a:rPr>
-              <a:t>量測到的值</a:t>
-            </a:r>
-          </a:p>
-        </p:txBody>
-      </p:sp>
-      <p:sp>
-        <p:nvSpPr>
-          <p:cNvPr id="12" name="矩形 11">
-            <a:extLst>
-              <a:ext uri="{FF2B5EF4-FFF2-40B4-BE49-F238E27FC236}">
-                <a16:creationId xmlns:a16="http://schemas.microsoft.com/office/drawing/2014/main" id="{2552E5AB-ED3F-D175-A499-49FB40687585}"/>
-              </a:ext>
-            </a:extLst>
-          </p:cNvPr>
-          <p:cNvSpPr/>
-          <p:nvPr/>
-        </p:nvSpPr>
-        <p:spPr>
-          <a:xfrm>
-            <a:off x="4651442" y="3635026"/>
-            <a:ext cx="1005403" cy="338554"/>
-          </a:xfrm>
-          <a:prstGeom prst="rect">
-            <a:avLst/>
-          </a:prstGeom>
-          <a:noFill/>
-        </p:spPr>
-        <p:txBody>
-          <a:bodyPr wrap="none" lIns="91440" tIns="45720" rIns="91440" bIns="45720">
-            <a:spAutoFit/>
-          </a:bodyPr>
-          <a:lstStyle/>
-          <a:p>
-            <a:pPr algn="ctr"/>
-            <a:r>
-              <a:rPr lang="zh-TW" altLang="en-US" sz="1600" dirty="0">
-                <a:ln w="0"/>
-                <a:solidFill>
-                  <a:schemeClr val="tx1"/>
-                </a:solidFill>
-                <a:effectLst>
-                  <a:outerShdw blurRad="38100" dist="19050" dir="2700000" algn="tl" rotWithShape="0">
-                    <a:schemeClr val="dk1">
-                      <a:alpha val="40000"/>
-                    </a:schemeClr>
-                  </a:outerShdw>
-                </a:effectLst>
+              <a:t>[</a:t>
+            </a:r>
+            <a:r>
+              <a:rPr lang="en-US" altLang="zh-TW" b="1" dirty="0">
+                <a:latin typeface="Times New Roman" panose="02020603050405020304" pitchFamily="18" charset="0"/>
+                <a:ea typeface="標楷體" panose="03000509000000000000" pitchFamily="65" charset="-120"/>
+                <a:cs typeface="Times New Roman" panose="02020603050405020304" pitchFamily="18" charset="0"/>
               </a:rPr>
-              <a:t>目標色彩</a:t>
-            </a:r>
-            <a:endParaRPr lang="zh-TW" altLang="en-US" sz="1600" b="0" cap="none" spc="0" dirty="0">
-              <a:ln w="0"/>
-              <a:solidFill>
-                <a:schemeClr val="tx1"/>
-              </a:solidFill>
-              <a:effectLst>
-                <a:outerShdw blurRad="38100" dist="19050" dir="2700000" algn="tl" rotWithShape="0">
-                  <a:schemeClr val="dk1">
-                    <a:alpha val="40000"/>
-                  </a:schemeClr>
-                </a:outerShdw>
-              </a:effectLst>
+              <a:t>3</a:t>
+            </a:r>
+            <a:r>
+              <a:rPr lang="zh-TW" altLang="zh-TW" b="1" dirty="0">
+                <a:latin typeface="Times New Roman" panose="02020603050405020304" pitchFamily="18" charset="0"/>
+                <a:ea typeface="標楷體" panose="03000509000000000000" pitchFamily="65" charset="-120"/>
+                <a:cs typeface="Times New Roman" panose="02020603050405020304" pitchFamily="18" charset="0"/>
+              </a:rPr>
+              <a:t>]</a:t>
+            </a:r>
+            <a:r>
+              <a:rPr lang="zh-TW" altLang="zh-TW" dirty="0">
+                <a:latin typeface="Times New Roman" panose="02020603050405020304" pitchFamily="18" charset="0"/>
+                <a:ea typeface="標楷體" panose="03000509000000000000" pitchFamily="65" charset="-120"/>
+                <a:cs typeface="Times New Roman" panose="02020603050405020304" pitchFamily="18" charset="0"/>
+              </a:rPr>
+              <a:t> International Color Consortium, “Goals for profile assessment,” </a:t>
+            </a:r>
+            <a:r>
+              <a:rPr lang="zh-TW" altLang="zh-TW" i="1" dirty="0">
+                <a:latin typeface="Times New Roman" panose="02020603050405020304" pitchFamily="18" charset="0"/>
+                <a:ea typeface="標楷體" panose="03000509000000000000" pitchFamily="65" charset="-120"/>
+                <a:cs typeface="Times New Roman" panose="02020603050405020304" pitchFamily="18" charset="0"/>
+              </a:rPr>
+              <a:t>International Color Consortium</a:t>
+            </a:r>
+            <a:r>
+              <a:rPr lang="zh-TW" altLang="zh-TW" dirty="0">
+                <a:latin typeface="Times New Roman" panose="02020603050405020304" pitchFamily="18" charset="0"/>
+                <a:ea typeface="標楷體" panose="03000509000000000000" pitchFamily="65" charset="-120"/>
+                <a:cs typeface="Times New Roman" panose="02020603050405020304" pitchFamily="18" charset="0"/>
+              </a:rPr>
+              <a:t>, [Online]. Available: </a:t>
+            </a:r>
+            <a:r>
+              <a:rPr lang="zh-TW" altLang="zh-TW" dirty="0">
+                <a:latin typeface="Times New Roman" panose="02020603050405020304" pitchFamily="18" charset="0"/>
+                <a:ea typeface="標楷體" panose="03000509000000000000" pitchFamily="65" charset="-120"/>
+                <a:cs typeface="Times New Roman" panose="02020603050405020304" pitchFamily="18" charset="0"/>
+                <a:hlinkClick r:id="rId3"/>
+              </a:rPr>
+              <a:t>https://www.color.org/profiles/assessment/</a:t>
+            </a:r>
+            <a:r>
+              <a:rPr lang="zh-TW" altLang="zh-TW" dirty="0">
+                <a:latin typeface="Times New Roman" panose="02020603050405020304" pitchFamily="18" charset="0"/>
+                <a:ea typeface="標楷體" panose="03000509000000000000" pitchFamily="65" charset="-120"/>
+                <a:cs typeface="Times New Roman" panose="02020603050405020304" pitchFamily="18" charset="0"/>
+              </a:rPr>
+              <a:t>. [Accessed: Sep. 19, 2026].</a:t>
+            </a:r>
+            <a:endParaRPr lang="zh-TW" altLang="en-US" dirty="0">
+              <a:latin typeface="Times New Roman" panose="02020603050405020304" pitchFamily="18" charset="0"/>
+              <a:ea typeface="標楷體" panose="03000509000000000000" pitchFamily="65" charset="-120"/>
+              <a:cs typeface="Times New Roman" panose="02020603050405020304" pitchFamily="18" charset="0"/>
             </a:endParaRPr>
           </a:p>
         </p:txBody>
@@ -13994,7 +19890,7 @@
     </p:spTree>
     <p:extLst>
       <p:ext uri="{BB962C8B-B14F-4D97-AF65-F5344CB8AC3E}">
-        <p14:creationId xmlns:p14="http://schemas.microsoft.com/office/powerpoint/2010/main" val="3699173038"/>
+        <p14:creationId xmlns:p14="http://schemas.microsoft.com/office/powerpoint/2010/main" val="2310167338"/>
       </p:ext>
     </p:extLst>
   </p:cSld>
